--- a/pci_poster/poster_template.pptx
+++ b/pci_poster/poster_template.pptx
@@ -115,7 +115,7 @@
 <file path=ppt/revisionInfo.xml><?xml version="1.0" encoding="utf-8"?>
 <p1510:revInfo xmlns:a="http://schemas.openxmlformats.org/drawingml/2006/main" xmlns:r="http://schemas.openxmlformats.org/officeDocument/2006/relationships" xmlns:p1510="http://schemas.microsoft.com/office/powerpoint/2015/10/main">
   <p1510:revLst>
-    <p1510:client id="{A5BB3A64-C60C-45E9-BAE7-11B96E1E2D18}" v="103" dt="2026-01-20T23:56:46.186"/>
+    <p1510:client id="{63D0502C-E45B-42C2-8995-A2AEF517A4FA}" v="57" dt="2026-03-04T04:53:56.357"/>
   </p1510:revLst>
 </p1510:revInfo>
 </file>
@@ -125,7 +125,7 @@
   <pc:docChgLst>
     <pc:chgData name="Gillett, Richard" userId="f751afb3-89ee-4adb-bf46-b352b62550b4" providerId="ADAL" clId="{A5BB3A64-C60C-45E9-BAE7-11B96E1E2D18}"/>
     <pc:docChg chg="undo custSel modSld modMainMaster">
-      <pc:chgData name="Gillett, Richard" userId="f751afb3-89ee-4adb-bf46-b352b62550b4" providerId="ADAL" clId="{A5BB3A64-C60C-45E9-BAE7-11B96E1E2D18}" dt="2026-01-20T23:56:46.184" v="545" actId="962"/>
+      <pc:chgData name="Gillett, Richard" userId="f751afb3-89ee-4adb-bf46-b352b62550b4" providerId="ADAL" clId="{A5BB3A64-C60C-45E9-BAE7-11B96E1E2D18}" dt="2026-02-05T07:26:13.627" v="547" actId="20577"/>
       <pc:docMkLst>
         <pc:docMk/>
       </pc:docMkLst>
@@ -177,7 +177,7 @@
         </pc:spChg>
       </pc:sldChg>
       <pc:sldMasterChg chg="addSp delSp modSp mod modSldLayout">
-        <pc:chgData name="Gillett, Richard" userId="f751afb3-89ee-4adb-bf46-b352b62550b4" providerId="ADAL" clId="{A5BB3A64-C60C-45E9-BAE7-11B96E1E2D18}" dt="2026-01-20T23:56:46.184" v="545" actId="962"/>
+        <pc:chgData name="Gillett, Richard" userId="f751afb3-89ee-4adb-bf46-b352b62550b4" providerId="ADAL" clId="{A5BB3A64-C60C-45E9-BAE7-11B96E1E2D18}" dt="2026-02-05T07:26:13.627" v="547" actId="20577"/>
         <pc:sldMasterMkLst>
           <pc:docMk/>
           <pc:sldMasterMk cId="2640799190" sldId="2147483660"/>
@@ -247,7 +247,7 @@
           </ac:spMkLst>
         </pc:spChg>
         <pc:spChg chg="add mod">
-          <ac:chgData name="Gillett, Richard" userId="f751afb3-89ee-4adb-bf46-b352b62550b4" providerId="ADAL" clId="{A5BB3A64-C60C-45E9-BAE7-11B96E1E2D18}" dt="2026-01-14T12:51:09.020" v="291" actId="1038"/>
+          <ac:chgData name="Gillett, Richard" userId="f751afb3-89ee-4adb-bf46-b352b62550b4" providerId="ADAL" clId="{A5BB3A64-C60C-45E9-BAE7-11B96E1E2D18}" dt="2026-02-05T07:26:13.627" v="547" actId="20577"/>
           <ac:spMkLst>
             <pc:docMk/>
             <pc:sldMasterMk cId="2640799190" sldId="2147483660"/>
@@ -479,15 +479,6 @@
               <pc:sldMasterMk cId="2640799190" sldId="2147483660"/>
               <pc:sldLayoutMk cId="1363397331" sldId="2147483661"/>
               <ac:picMk id="6" creationId="{5F294ACB-2AAB-53EB-3D12-B7F8668F3ED8}"/>
-            </ac:picMkLst>
-          </pc:picChg>
-          <pc:picChg chg="mod">
-            <ac:chgData name="Gillett, Richard" userId="f751afb3-89ee-4adb-bf46-b352b62550b4" providerId="ADAL" clId="{A5BB3A64-C60C-45E9-BAE7-11B96E1E2D18}" dt="2026-01-14T04:45:07.872" v="47" actId="1076"/>
-            <ac:picMkLst>
-              <pc:docMk/>
-              <pc:sldMasterMk cId="2640799190" sldId="2147483660"/>
-              <pc:sldLayoutMk cId="1363397331" sldId="2147483661"/>
-              <ac:picMk id="94" creationId="{6C1D9F35-E879-69FC-7F97-6A6DA195BB72}"/>
             </ac:picMkLst>
           </pc:picChg>
           <pc:picChg chg="mod">
@@ -1048,24 +1039,6 @@
               <ac:spMk id="51" creationId="{BD10F3DD-814C-87B1-F3BC-B6770621C718}"/>
             </ac:spMkLst>
           </pc:spChg>
-          <pc:spChg chg="add">
-            <ac:chgData name="Gillett, Richard" userId="f751afb3-89ee-4adb-bf46-b352b62550b4" providerId="ADAL" clId="{E1DC7D8A-5337-4AAE-9935-D0A80B248513}" dt="2026-01-08T00:51:27.486" v="319"/>
-            <ac:spMkLst>
-              <pc:docMk/>
-              <pc:sldMasterMk cId="2640799190" sldId="2147483660"/>
-              <pc:sldLayoutMk cId="1363397331" sldId="2147483661"/>
-              <ac:spMk id="54" creationId="{72162AC7-06C3-FF5B-97D1-CAC55BA97C08}"/>
-            </ac:spMkLst>
-          </pc:spChg>
-          <pc:spChg chg="add">
-            <ac:chgData name="Gillett, Richard" userId="f751afb3-89ee-4adb-bf46-b352b62550b4" providerId="ADAL" clId="{E1DC7D8A-5337-4AAE-9935-D0A80B248513}" dt="2026-01-08T00:51:27.486" v="319"/>
-            <ac:spMkLst>
-              <pc:docMk/>
-              <pc:sldMasterMk cId="2640799190" sldId="2147483660"/>
-              <pc:sldLayoutMk cId="1363397331" sldId="2147483661"/>
-              <ac:spMk id="70" creationId="{80E4E7D2-CED9-89CE-285F-E8D7729CB3D0}"/>
-            </ac:spMkLst>
-          </pc:spChg>
           <pc:picChg chg="add mod ord">
             <ac:chgData name="Gillett, Richard" userId="f751afb3-89ee-4adb-bf46-b352b62550b4" providerId="ADAL" clId="{E1DC7D8A-5337-4AAE-9935-D0A80B248513}" dt="2026-01-10T14:21:10.907" v="892" actId="1076"/>
             <ac:picMkLst>
@@ -1076,30 +1049,12 @@
             </ac:picMkLst>
           </pc:picChg>
           <pc:picChg chg="mod">
-            <ac:chgData name="Gillett, Richard" userId="f751afb3-89ee-4adb-bf46-b352b62550b4" providerId="ADAL" clId="{E1DC7D8A-5337-4AAE-9935-D0A80B248513}" dt="2026-01-11T11:56:31.392" v="896" actId="1076"/>
-            <ac:picMkLst>
-              <pc:docMk/>
-              <pc:sldMasterMk cId="2640799190" sldId="2147483660"/>
-              <pc:sldLayoutMk cId="1363397331" sldId="2147483661"/>
-              <ac:picMk id="23" creationId="{86633DA3-0DB3-C6C5-5A10-0975EDA3FCAF}"/>
-            </ac:picMkLst>
-          </pc:picChg>
-          <pc:picChg chg="mod">
             <ac:chgData name="Gillett, Richard" userId="f751afb3-89ee-4adb-bf46-b352b62550b4" providerId="ADAL" clId="{E1DC7D8A-5337-4AAE-9935-D0A80B248513}" dt="2026-01-10T11:49:48.696" v="648" actId="1038"/>
             <ac:picMkLst>
               <pc:docMk/>
               <pc:sldMasterMk cId="2640799190" sldId="2147483660"/>
               <pc:sldLayoutMk cId="1363397331" sldId="2147483661"/>
               <ac:picMk id="30" creationId="{11D4B853-1ADD-0145-DAD2-521BC0A43308}"/>
-            </ac:picMkLst>
-          </pc:picChg>
-          <pc:picChg chg="mod">
-            <ac:chgData name="Gillett, Richard" userId="f751afb3-89ee-4adb-bf46-b352b62550b4" providerId="ADAL" clId="{E1DC7D8A-5337-4AAE-9935-D0A80B248513}" dt="2026-01-11T11:57:10.271" v="901" actId="1076"/>
-            <ac:picMkLst>
-              <pc:docMk/>
-              <pc:sldMasterMk cId="2640799190" sldId="2147483660"/>
-              <pc:sldLayoutMk cId="1363397331" sldId="2147483661"/>
-              <ac:picMk id="94" creationId="{6C1D9F35-E879-69FC-7F97-6A6DA195BB72}"/>
             </ac:picMkLst>
           </pc:picChg>
           <pc:picChg chg="add mod ord modCrop">
@@ -1237,6 +1192,222 @@
     </pc:docChg>
   </pc:docChgLst>
   <pc:docChgLst>
+    <pc:chgData name="Gillett, Richard" userId="f751afb3-89ee-4adb-bf46-b352b62550b4" providerId="ADAL" clId="{63D0502C-E45B-42C2-8995-A2AEF517A4FA}"/>
+    <pc:docChg chg="undo custSel modMainMaster">
+      <pc:chgData name="Gillett, Richard" userId="f751afb3-89ee-4adb-bf46-b352b62550b4" providerId="ADAL" clId="{63D0502C-E45B-42C2-8995-A2AEF517A4FA}" dt="2026-03-04T04:53:56.357" v="273" actId="962"/>
+      <pc:docMkLst>
+        <pc:docMk/>
+      </pc:docMkLst>
+      <pc:sldMasterChg chg="modSp mod modSldLayout">
+        <pc:chgData name="Gillett, Richard" userId="f751afb3-89ee-4adb-bf46-b352b62550b4" providerId="ADAL" clId="{63D0502C-E45B-42C2-8995-A2AEF517A4FA}" dt="2026-03-04T04:53:56.357" v="273" actId="962"/>
+        <pc:sldMasterMkLst>
+          <pc:docMk/>
+          <pc:sldMasterMk cId="2640799190" sldId="2147483660"/>
+        </pc:sldMasterMkLst>
+        <pc:spChg chg="mod">
+          <ac:chgData name="Gillett, Richard" userId="f751afb3-89ee-4adb-bf46-b352b62550b4" providerId="ADAL" clId="{63D0502C-E45B-42C2-8995-A2AEF517A4FA}" dt="2026-03-04T03:20:57.542" v="121" actId="962"/>
+          <ac:spMkLst>
+            <pc:docMk/>
+            <pc:sldMasterMk cId="2640799190" sldId="2147483660"/>
+            <ac:spMk id="2" creationId="{90655420-6EA9-5F63-7C35-D9F4AC476BF3}"/>
+          </ac:spMkLst>
+        </pc:spChg>
+        <pc:spChg chg="mod">
+          <ac:chgData name="Gillett, Richard" userId="f751afb3-89ee-4adb-bf46-b352b62550b4" providerId="ADAL" clId="{63D0502C-E45B-42C2-8995-A2AEF517A4FA}" dt="2026-03-04T03:21:42.268" v="250" actId="1036"/>
+          <ac:spMkLst>
+            <pc:docMk/>
+            <pc:sldMasterMk cId="2640799190" sldId="2147483660"/>
+            <ac:spMk id="10" creationId="{095A6460-B1AA-2316-FDA5-EA70CFCA2BCE}"/>
+          </ac:spMkLst>
+        </pc:spChg>
+        <pc:spChg chg="mod ord">
+          <ac:chgData name="Gillett, Richard" userId="f751afb3-89ee-4adb-bf46-b352b62550b4" providerId="ADAL" clId="{63D0502C-E45B-42C2-8995-A2AEF517A4FA}" dt="2026-03-04T03:20:27.390" v="119" actId="13244"/>
+          <ac:spMkLst>
+            <pc:docMk/>
+            <pc:sldMasterMk cId="2640799190" sldId="2147483660"/>
+            <ac:spMk id="15" creationId="{0A8B2BEF-EC4A-AACD-7AC0-27A940353D18}"/>
+          </ac:spMkLst>
+        </pc:spChg>
+        <pc:spChg chg="mod">
+          <ac:chgData name="Gillett, Richard" userId="f751afb3-89ee-4adb-bf46-b352b62550b4" providerId="ADAL" clId="{63D0502C-E45B-42C2-8995-A2AEF517A4FA}" dt="2026-03-04T03:20:25.021" v="118" actId="962"/>
+          <ac:spMkLst>
+            <pc:docMk/>
+            <pc:sldMasterMk cId="2640799190" sldId="2147483660"/>
+            <ac:spMk id="16" creationId="{2AB87B99-53BD-A3E1-EC73-2148133BEA33}"/>
+          </ac:spMkLst>
+        </pc:spChg>
+        <pc:grpChg chg="mod">
+          <ac:chgData name="Gillett, Richard" userId="f751afb3-89ee-4adb-bf46-b352b62550b4" providerId="ADAL" clId="{63D0502C-E45B-42C2-8995-A2AEF517A4FA}" dt="2026-03-04T03:21:07.524" v="122" actId="962"/>
+          <ac:grpSpMkLst>
+            <pc:docMk/>
+            <pc:sldMasterMk cId="2640799190" sldId="2147483660"/>
+            <ac:grpSpMk id="3" creationId="{8DD6D3AA-4BA7-8A63-733C-C14EAA9FDEB7}"/>
+          </ac:grpSpMkLst>
+        </pc:grpChg>
+        <pc:picChg chg="mod">
+          <ac:chgData name="Gillett, Richard" userId="f751afb3-89ee-4adb-bf46-b352b62550b4" providerId="ADAL" clId="{63D0502C-E45B-42C2-8995-A2AEF517A4FA}" dt="2026-03-04T03:19:52.360" v="115" actId="962"/>
+          <ac:picMkLst>
+            <pc:docMk/>
+            <pc:sldMasterMk cId="2640799190" sldId="2147483660"/>
+            <ac:picMk id="18" creationId="{CA3877DB-6975-A75F-DBFC-236D4FEC401C}"/>
+          </ac:picMkLst>
+        </pc:picChg>
+        <pc:sldLayoutChg chg="addSp delSp modSp mod">
+          <pc:chgData name="Gillett, Richard" userId="f751afb3-89ee-4adb-bf46-b352b62550b4" providerId="ADAL" clId="{63D0502C-E45B-42C2-8995-A2AEF517A4FA}" dt="2026-03-04T04:53:56.357" v="273" actId="962"/>
+          <pc:sldLayoutMkLst>
+            <pc:docMk/>
+            <pc:sldMasterMk cId="2640799190" sldId="2147483660"/>
+            <pc:sldLayoutMk cId="1363397331" sldId="2147483661"/>
+          </pc:sldLayoutMkLst>
+          <pc:spChg chg="mod">
+            <ac:chgData name="Gillett, Richard" userId="f751afb3-89ee-4adb-bf46-b352b62550b4" providerId="ADAL" clId="{63D0502C-E45B-42C2-8995-A2AEF517A4FA}" dt="2026-03-04T03:19:16.793" v="113" actId="962"/>
+            <ac:spMkLst>
+              <pc:docMk/>
+              <pc:sldMasterMk cId="2640799190" sldId="2147483660"/>
+              <pc:sldLayoutMk cId="1363397331" sldId="2147483661"/>
+              <ac:spMk id="2" creationId="{4EA715C1-D099-5522-9B8D-6FE225FA3DB4}"/>
+            </ac:spMkLst>
+          </pc:spChg>
+          <pc:spChg chg="mod">
+            <ac:chgData name="Gillett, Richard" userId="f751afb3-89ee-4adb-bf46-b352b62550b4" providerId="ADAL" clId="{63D0502C-E45B-42C2-8995-A2AEF517A4FA}" dt="2026-03-04T03:09:32.219" v="97" actId="962"/>
+            <ac:spMkLst>
+              <pc:docMk/>
+              <pc:sldMasterMk cId="2640799190" sldId="2147483660"/>
+              <pc:sldLayoutMk cId="1363397331" sldId="2147483661"/>
+              <ac:spMk id="37" creationId="{814A0012-CF31-67AE-4E97-AA42CBE2A6AE}"/>
+            </ac:spMkLst>
+          </pc:spChg>
+          <pc:spChg chg="mod">
+            <ac:chgData name="Gillett, Richard" userId="f751afb3-89ee-4adb-bf46-b352b62550b4" providerId="ADAL" clId="{63D0502C-E45B-42C2-8995-A2AEF517A4FA}" dt="2026-03-04T03:52:28.904" v="255" actId="962"/>
+            <ac:spMkLst>
+              <pc:docMk/>
+              <pc:sldMasterMk cId="2640799190" sldId="2147483660"/>
+              <pc:sldLayoutMk cId="1363397331" sldId="2147483661"/>
+              <ac:spMk id="41" creationId="{D4F00C51-9060-7169-179B-F541DAFC0C7E}"/>
+            </ac:spMkLst>
+          </pc:spChg>
+          <pc:spChg chg="mod">
+            <ac:chgData name="Gillett, Richard" userId="f751afb3-89ee-4adb-bf46-b352b62550b4" providerId="ADAL" clId="{63D0502C-E45B-42C2-8995-A2AEF517A4FA}" dt="2026-03-04T03:52:21.319" v="254" actId="962"/>
+            <ac:spMkLst>
+              <pc:docMk/>
+              <pc:sldMasterMk cId="2640799190" sldId="2147483660"/>
+              <pc:sldLayoutMk cId="1363397331" sldId="2147483661"/>
+              <ac:spMk id="47" creationId="{B1F62D07-2195-698B-2714-154E4501E4EB}"/>
+            </ac:spMkLst>
+          </pc:spChg>
+          <pc:spChg chg="mod">
+            <ac:chgData name="Gillett, Richard" userId="f751afb3-89ee-4adb-bf46-b352b62550b4" providerId="ADAL" clId="{63D0502C-E45B-42C2-8995-A2AEF517A4FA}" dt="2026-03-04T03:09:22.840" v="96" actId="962"/>
+            <ac:spMkLst>
+              <pc:docMk/>
+              <pc:sldMasterMk cId="2640799190" sldId="2147483660"/>
+              <pc:sldLayoutMk cId="1363397331" sldId="2147483661"/>
+              <ac:spMk id="48" creationId="{7BD5F46B-2231-6D01-C514-F696C7DDE546}"/>
+            </ac:spMkLst>
+          </pc:spChg>
+          <pc:spChg chg="del">
+            <ac:chgData name="Gillett, Richard" userId="f751afb3-89ee-4adb-bf46-b352b62550b4" providerId="ADAL" clId="{63D0502C-E45B-42C2-8995-A2AEF517A4FA}" dt="2026-03-04T04:53:43.033" v="272" actId="478"/>
+            <ac:spMkLst>
+              <pc:docMk/>
+              <pc:sldMasterMk cId="2640799190" sldId="2147483660"/>
+              <pc:sldLayoutMk cId="1363397331" sldId="2147483661"/>
+              <ac:spMk id="54" creationId="{72162AC7-06C3-FF5B-97D1-CAC55BA97C08}"/>
+            </ac:spMkLst>
+          </pc:spChg>
+          <pc:spChg chg="del">
+            <ac:chgData name="Gillett, Richard" userId="f751afb3-89ee-4adb-bf46-b352b62550b4" providerId="ADAL" clId="{63D0502C-E45B-42C2-8995-A2AEF517A4FA}" dt="2026-03-04T04:53:40.646" v="271" actId="478"/>
+            <ac:spMkLst>
+              <pc:docMk/>
+              <pc:sldMasterMk cId="2640799190" sldId="2147483660"/>
+              <pc:sldLayoutMk cId="1363397331" sldId="2147483661"/>
+              <ac:spMk id="70" creationId="{80E4E7D2-CED9-89CE-285F-E8D7729CB3D0}"/>
+            </ac:spMkLst>
+          </pc:spChg>
+          <pc:picChg chg="mod">
+            <ac:chgData name="Gillett, Richard" userId="f751afb3-89ee-4adb-bf46-b352b62550b4" providerId="ADAL" clId="{63D0502C-E45B-42C2-8995-A2AEF517A4FA}" dt="2026-03-04T03:19:03.923" v="112" actId="962"/>
+            <ac:picMkLst>
+              <pc:docMk/>
+              <pc:sldMasterMk cId="2640799190" sldId="2147483660"/>
+              <pc:sldLayoutMk cId="1363397331" sldId="2147483661"/>
+              <ac:picMk id="3" creationId="{9498E89D-FFFB-BD02-CB4A-C6AF63419FA9}"/>
+            </ac:picMkLst>
+          </pc:picChg>
+          <pc:picChg chg="mod">
+            <ac:chgData name="Gillett, Richard" userId="f751afb3-89ee-4adb-bf46-b352b62550b4" providerId="ADAL" clId="{63D0502C-E45B-42C2-8995-A2AEF517A4FA}" dt="2026-03-04T03:23:09.982" v="252" actId="962"/>
+            <ac:picMkLst>
+              <pc:docMk/>
+              <pc:sldMasterMk cId="2640799190" sldId="2147483660"/>
+              <pc:sldLayoutMk cId="1363397331" sldId="2147483661"/>
+              <ac:picMk id="6" creationId="{5F294ACB-2AAB-53EB-3D12-B7F8668F3ED8}"/>
+            </ac:picMkLst>
+          </pc:picChg>
+          <pc:picChg chg="add del mod">
+            <ac:chgData name="Gillett, Richard" userId="f751afb3-89ee-4adb-bf46-b352b62550b4" providerId="ADAL" clId="{63D0502C-E45B-42C2-8995-A2AEF517A4FA}" dt="2026-03-04T02:21:29.476" v="14" actId="478"/>
+            <ac:picMkLst>
+              <pc:docMk/>
+              <pc:sldMasterMk cId="2640799190" sldId="2147483660"/>
+              <pc:sldLayoutMk cId="1363397331" sldId="2147483661"/>
+              <ac:picMk id="8" creationId="{592DBDCA-0729-9238-8961-07C5B705BEC2}"/>
+            </ac:picMkLst>
+          </pc:picChg>
+          <pc:picChg chg="add del mod modCrop">
+            <ac:chgData name="Gillett, Richard" userId="f751afb3-89ee-4adb-bf46-b352b62550b4" providerId="ADAL" clId="{63D0502C-E45B-42C2-8995-A2AEF517A4FA}" dt="2026-03-04T02:30:50.208" v="81" actId="478"/>
+            <ac:picMkLst>
+              <pc:docMk/>
+              <pc:sldMasterMk cId="2640799190" sldId="2147483660"/>
+              <pc:sldLayoutMk cId="1363397331" sldId="2147483661"/>
+              <ac:picMk id="10" creationId="{2C6CCDBB-E1C2-F740-E4F1-B2732535C087}"/>
+            </ac:picMkLst>
+          </pc:picChg>
+          <pc:picChg chg="add mod modCrop">
+            <ac:chgData name="Gillett, Richard" userId="f751afb3-89ee-4adb-bf46-b352b62550b4" providerId="ADAL" clId="{63D0502C-E45B-42C2-8995-A2AEF517A4FA}" dt="2026-03-04T03:10:20.087" v="111" actId="1037"/>
+            <ac:picMkLst>
+              <pc:docMk/>
+              <pc:sldMasterMk cId="2640799190" sldId="2147483660"/>
+              <pc:sldLayoutMk cId="1363397331" sldId="2147483661"/>
+              <ac:picMk id="12" creationId="{4A335C9F-C929-90C4-EE54-C3B0862F27AB}"/>
+            </ac:picMkLst>
+          </pc:picChg>
+          <pc:picChg chg="add del mod">
+            <ac:chgData name="Gillett, Richard" userId="f751afb3-89ee-4adb-bf46-b352b62550b4" providerId="ADAL" clId="{63D0502C-E45B-42C2-8995-A2AEF517A4FA}" dt="2026-03-04T04:07:16.859" v="267" actId="478"/>
+            <ac:picMkLst>
+              <pc:docMk/>
+              <pc:sldMasterMk cId="2640799190" sldId="2147483660"/>
+              <pc:sldLayoutMk cId="1363397331" sldId="2147483661"/>
+              <ac:picMk id="16" creationId="{B17E2BAD-47C6-B58F-7C8E-FC9836A8BC8B}"/>
+            </ac:picMkLst>
+          </pc:picChg>
+          <pc:picChg chg="del mod">
+            <ac:chgData name="Gillett, Richard" userId="f751afb3-89ee-4adb-bf46-b352b62550b4" providerId="ADAL" clId="{63D0502C-E45B-42C2-8995-A2AEF517A4FA}" dt="2026-03-04T03:09:45.426" v="98" actId="478"/>
+            <ac:picMkLst>
+              <pc:docMk/>
+              <pc:sldMasterMk cId="2640799190" sldId="2147483660"/>
+              <pc:sldLayoutMk cId="1363397331" sldId="2147483661"/>
+              <ac:picMk id="23" creationId="{86633DA3-0DB3-C6C5-5A10-0975EDA3FCAF}"/>
+            </ac:picMkLst>
+          </pc:picChg>
+          <pc:picChg chg="add mod">
+            <ac:chgData name="Gillett, Richard" userId="f751afb3-89ee-4adb-bf46-b352b62550b4" providerId="ADAL" clId="{63D0502C-E45B-42C2-8995-A2AEF517A4FA}" dt="2026-03-04T04:53:56.357" v="273" actId="962"/>
+            <ac:picMkLst>
+              <pc:docMk/>
+              <pc:sldMasterMk cId="2640799190" sldId="2147483660"/>
+              <pc:sldLayoutMk cId="1363397331" sldId="2147483661"/>
+              <ac:picMk id="24" creationId="{C4803C3E-DE7F-2182-D796-F9D9BADE5615}"/>
+            </ac:picMkLst>
+          </pc:picChg>
+          <pc:picChg chg="del mod">
+            <ac:chgData name="Gillett, Richard" userId="f751afb3-89ee-4adb-bf46-b352b62550b4" providerId="ADAL" clId="{63D0502C-E45B-42C2-8995-A2AEF517A4FA}" dt="2026-03-04T03:52:05.641" v="253" actId="478"/>
+            <ac:picMkLst>
+              <pc:docMk/>
+              <pc:sldMasterMk cId="2640799190" sldId="2147483660"/>
+              <pc:sldLayoutMk cId="1363397331" sldId="2147483661"/>
+              <ac:picMk id="94" creationId="{6C1D9F35-E879-69FC-7F97-6A6DA195BB72}"/>
+            </ac:picMkLst>
+          </pc:picChg>
+        </pc:sldLayoutChg>
+      </pc:sldMasterChg>
+    </pc:docChg>
+  </pc:docChgLst>
+  <pc:docChgLst>
     <pc:chgData name="Gillett, Richard" userId="f751afb3-89ee-4adb-bf46-b352b62550b4" providerId="ADAL" clId="{947C8103-4DC6-4827-8B43-5C2E904880F7}"/>
     <pc:docChg chg="undo custSel modMainMaster">
       <pc:chgData name="Gillett, Richard" userId="f751afb3-89ee-4adb-bf46-b352b62550b4" providerId="ADAL" clId="{947C8103-4DC6-4827-8B43-5C2E904880F7}" dt="2026-01-06T08:14:35.035" v="119" actId="1035"/>
@@ -1290,7 +1461,7 @@
       </p:grpSpPr>
       <p:pic>
         <p:nvPicPr>
-          <p:cNvPr id="6" name="Picture 5" descr="A human heart with veins and arteries&#10;&#10;AI-generated content may be incorrect.">
+          <p:cNvPr id="6" name="pic_heart" descr="A human heart with veins and arteries&#10;&#10;AI-generated content may be incorrect.">
             <a:extLst>
               <a:ext uri="{FF2B5EF4-FFF2-40B4-BE49-F238E27FC236}">
                 <a16:creationId xmlns:a16="http://schemas.microsoft.com/office/drawing/2014/main" id="{5F294ACB-2AAB-53EB-3D12-B7F8668F3ED8}"/>
@@ -1411,7 +1582,7 @@
           <a:lstStyle/>
           <a:p>
             <a:pPr algn="ctr"/>
-            <a:endParaRPr lang="en-AU" sz="1801">
+            <a:endParaRPr lang="en-AU" sz="1801" dirty="0">
               <a:solidFill>
                 <a:schemeClr val="accent1"/>
               </a:solidFill>
@@ -1467,7 +1638,7 @@
           <a:lstStyle/>
           <a:p>
             <a:pPr algn="ctr"/>
-            <a:endParaRPr lang="en-AU" sz="1801">
+            <a:endParaRPr lang="en-AU" sz="1801" dirty="0">
               <a:solidFill>
                 <a:schemeClr val="accent1"/>
               </a:solidFill>
@@ -1526,7 +1697,7 @@
           <a:lstStyle/>
           <a:p>
             <a:pPr algn="ctr"/>
-            <a:endParaRPr lang="en-AU" sz="1801">
+            <a:endParaRPr lang="en-AU" sz="1801" dirty="0">
               <a:solidFill>
                 <a:schemeClr val="accent1"/>
               </a:solidFill>
@@ -1582,7 +1753,7 @@
           <a:lstStyle/>
           <a:p>
             <a:pPr algn="ctr"/>
-            <a:endParaRPr lang="en-AU" sz="1801">
+            <a:endParaRPr lang="en-AU" sz="1801" dirty="0">
               <a:solidFill>
                 <a:schemeClr val="accent1"/>
               </a:solidFill>
@@ -1638,7 +1809,7 @@
           <a:lstStyle/>
           <a:p>
             <a:pPr algn="ctr"/>
-            <a:endParaRPr lang="en-AU" sz="1801">
+            <a:endParaRPr lang="en-AU" sz="1801" dirty="0">
               <a:solidFill>
                 <a:schemeClr val="accent1"/>
               </a:solidFill>
@@ -1704,36 +1875,6 @@
       </p:sp>
       <p:pic>
         <p:nvPicPr>
-          <p:cNvPr id="23" name="pic_mort">
-            <a:extLst>
-              <a:ext uri="{FF2B5EF4-FFF2-40B4-BE49-F238E27FC236}">
-                <a16:creationId xmlns:a16="http://schemas.microsoft.com/office/drawing/2014/main" id="{86633DA3-0DB3-C6C5-5A10-0975EDA3FCAF}"/>
-              </a:ext>
-            </a:extLst>
-          </p:cNvPr>
-          <p:cNvPicPr>
-            <a:picLocks noChangeAspect="1"/>
-          </p:cNvPicPr>
-          <p:nvPr userDrawn="1"/>
-        </p:nvPicPr>
-        <p:blipFill>
-          <a:blip r:embed="rId3"/>
-          <a:stretch>
-            <a:fillRect/>
-          </a:stretch>
-        </p:blipFill>
-        <p:spPr>
-          <a:xfrm>
-            <a:off x="4936234" y="5043276"/>
-            <a:ext cx="587295" cy="769077"/>
-          </a:xfrm>
-          <a:prstGeom prst="rect">
-            <a:avLst/>
-          </a:prstGeom>
-        </p:spPr>
-      </p:pic>
-      <p:pic>
-        <p:nvPicPr>
           <p:cNvPr id="14" name="pic_pci">
             <a:extLst>
               <a:ext uri="{FF2B5EF4-FFF2-40B4-BE49-F238E27FC236}">
@@ -1747,11 +1888,11 @@
           <p:nvPr userDrawn="1"/>
         </p:nvPicPr>
         <p:blipFill>
-          <a:blip r:embed="rId4" cstate="screen">
+          <a:blip r:embed="rId3" cstate="screen">
             <a:extLst>
               <a:ext uri="{BEBA8EAE-BF5A-486C-A8C5-ECC9F3942E4B}">
                 <a14:imgProps xmlns:a14="http://schemas.microsoft.com/office/drawing/2010/main">
-                  <a14:imgLayer r:embed="rId5">
+                  <a14:imgLayer r:embed="rId4">
                     <a14:imgEffect>
                       <a14:backgroundRemoval t="10000" b="90000" l="10000" r="90000"/>
                     </a14:imgEffect>
@@ -1792,7 +1933,7 @@
           <p:nvPr userDrawn="1"/>
         </p:nvPicPr>
         <p:blipFill>
-          <a:blip r:embed="rId6" cstate="screen">
+          <a:blip r:embed="rId5" cstate="screen">
             <a:extLst>
               <a:ext uri="{28A0092B-C50C-407E-A947-70E740481C1C}">
                 <a14:useLocalDpi xmlns:a14="http://schemas.microsoft.com/office/drawing/2010/main"/>
@@ -1828,7 +1969,7 @@
           <p:nvPr userDrawn="1"/>
         </p:nvPicPr>
         <p:blipFill>
-          <a:blip r:embed="rId7" cstate="screen">
+          <a:blip r:embed="rId6" cstate="screen">
             <a:extLst>
               <a:ext uri="{28A0092B-C50C-407E-A947-70E740481C1C}">
                 <a14:useLocalDpi xmlns:a14="http://schemas.microsoft.com/office/drawing/2010/main"/>
@@ -1875,11 +2016,11 @@
           <p:nvPr userDrawn="1"/>
         </p:nvPicPr>
         <p:blipFill>
-          <a:blip r:embed="rId8" cstate="screen">
+          <a:blip r:embed="rId7" cstate="screen">
             <a:extLst>
               <a:ext uri="{BEBA8EAE-BF5A-486C-A8C5-ECC9F3942E4B}">
                 <a14:imgProps xmlns:a14="http://schemas.microsoft.com/office/drawing/2010/main">
-                  <a14:imgLayer r:embed="rId9">
+                  <a14:imgLayer r:embed="rId8">
                     <a14:imgEffect>
                       <a14:backgroundRemoval t="9020" b="95686" l="10000" r="89767">
                         <a14:foregroundMark x1="28837" y1="9804" x2="44651" y2="9804"/>
@@ -1915,7 +2056,7 @@
       </p:pic>
       <p:sp>
         <p:nvSpPr>
-          <p:cNvPr id="37" name="ph_mort30r">
+          <p:cNvPr id="37" name="ph_radial">
             <a:extLst>
               <a:ext uri="{FF2B5EF4-FFF2-40B4-BE49-F238E27FC236}">
                 <a16:creationId xmlns:a16="http://schemas.microsoft.com/office/drawing/2014/main" id="{814A0012-CF31-67AE-4E97-AA42CBE2A6AE}"/>
@@ -2083,7 +2224,7 @@
       </p:sp>
       <p:sp>
         <p:nvSpPr>
-          <p:cNvPr id="41" name="ph_ihbl">
+          <p:cNvPr id="41" name="ph_stemi">
             <a:extLst>
               <a:ext uri="{FF2B5EF4-FFF2-40B4-BE49-F238E27FC236}">
                 <a16:creationId xmlns:a16="http://schemas.microsoft.com/office/drawing/2014/main" id="{D4F00C51-9060-7169-179B-F541DAFC0C7E}"/>
@@ -2374,7 +2515,7 @@
       </p:sp>
       <p:sp>
         <p:nvSpPr>
-          <p:cNvPr id="47" name="ph_ihbl_pct">
+          <p:cNvPr id="47" name="ph_stemi_pct">
             <a:extLst>
               <a:ext uri="{FF2B5EF4-FFF2-40B4-BE49-F238E27FC236}">
                 <a16:creationId xmlns:a16="http://schemas.microsoft.com/office/drawing/2014/main" id="{B1F62D07-2195-698B-2714-154E4501E4EB}"/>
@@ -2449,7 +2590,7 @@
       </p:sp>
       <p:sp>
         <p:nvSpPr>
-          <p:cNvPr id="48" name="ph_mort30r_pct">
+          <p:cNvPr id="48" name="ph_radial_pct">
             <a:extLst>
               <a:ext uri="{FF2B5EF4-FFF2-40B4-BE49-F238E27FC236}">
                 <a16:creationId xmlns:a16="http://schemas.microsoft.com/office/drawing/2014/main" id="{7BD5F46B-2231-6D01-C514-F696C7DDE546}"/>
@@ -2746,292 +2887,9 @@
           </a:p>
         </p:txBody>
       </p:sp>
-      <p:sp>
-        <p:nvSpPr>
-          <p:cNvPr id="54" name="Rectangle 16">
-            <a:extLst>
-              <a:ext uri="{FF2B5EF4-FFF2-40B4-BE49-F238E27FC236}">
-                <a16:creationId xmlns:a16="http://schemas.microsoft.com/office/drawing/2014/main" id="{72162AC7-06C3-FF5B-97D1-CAC55BA97C08}"/>
-              </a:ext>
-            </a:extLst>
-          </p:cNvPr>
-          <p:cNvSpPr>
-            <a:spLocks noChangeArrowheads="1"/>
-          </p:cNvSpPr>
-          <p:nvPr userDrawn="1"/>
-        </p:nvSpPr>
-        <p:spPr bwMode="auto">
-          <a:xfrm>
-            <a:off x="6660432" y="-2360140"/>
-            <a:ext cx="6858000" cy="457200"/>
-          </a:xfrm>
-          <a:prstGeom prst="rect">
-            <a:avLst/>
-          </a:prstGeom>
-          <a:noFill/>
-          <a:ln>
-            <a:noFill/>
-          </a:ln>
-          <a:effectLst/>
-          <a:extLst>
-            <a:ext uri="{909E8E84-426E-40DD-AFC4-6F175D3DCCD1}">
-              <a14:hiddenFill xmlns:a14="http://schemas.microsoft.com/office/drawing/2010/main">
-                <a:solidFill>
-                  <a:schemeClr val="accent1"/>
-                </a:solidFill>
-              </a14:hiddenFill>
-            </a:ext>
-            <a:ext uri="{91240B29-F687-4F45-9708-019B960494DF}">
-              <a14:hiddenLine xmlns:a14="http://schemas.microsoft.com/office/drawing/2010/main" w="9525">
-                <a:solidFill>
-                  <a:schemeClr val="tx1"/>
-                </a:solidFill>
-                <a:miter lim="800000"/>
-                <a:headEnd/>
-                <a:tailEnd/>
-              </a14:hiddenLine>
-            </a:ext>
-            <a:ext uri="{AF507438-7753-43E0-B8FC-AC1667EBCBE1}">
-              <a14:hiddenEffects xmlns:a14="http://schemas.microsoft.com/office/drawing/2010/main">
-                <a:effectLst>
-                  <a:outerShdw dist="35921" dir="2700000" algn="ctr" rotWithShape="0">
-                    <a:schemeClr val="bg2"/>
-                  </a:outerShdw>
-                </a:effectLst>
-              </a14:hiddenEffects>
-            </a:ext>
-          </a:extLst>
-        </p:spPr>
-        <p:txBody>
-          <a:bodyPr vert="horz" wrap="none" lIns="698280" tIns="698280" rIns="91440" bIns="177744" numCol="1" anchor="ctr" anchorCtr="0" compatLnSpc="1">
-            <a:prstTxWarp prst="textNoShape">
-              <a:avLst/>
-            </a:prstTxWarp>
-            <a:spAutoFit/>
-          </a:bodyPr>
-          <a:lstStyle/>
-          <a:p>
-            <a:endParaRPr lang="en-AU"/>
-          </a:p>
-        </p:txBody>
-      </p:sp>
-      <p:sp>
-        <p:nvSpPr>
-          <p:cNvPr id="70" name="Rectangle 23">
-            <a:extLst>
-              <a:ext uri="{FF2B5EF4-FFF2-40B4-BE49-F238E27FC236}">
-                <a16:creationId xmlns:a16="http://schemas.microsoft.com/office/drawing/2014/main" id="{80E4E7D2-CED9-89CE-285F-E8D7729CB3D0}"/>
-              </a:ext>
-            </a:extLst>
-          </p:cNvPr>
-          <p:cNvSpPr>
-            <a:spLocks noChangeArrowheads="1"/>
-          </p:cNvSpPr>
-          <p:nvPr userDrawn="1"/>
-        </p:nvSpPr>
-        <p:spPr bwMode="auto">
-          <a:xfrm>
-            <a:off x="6660432" y="-1902940"/>
-            <a:ext cx="6858000" cy="0"/>
-          </a:xfrm>
-          <a:prstGeom prst="rect">
-            <a:avLst/>
-          </a:prstGeom>
-          <a:noFill/>
-          <a:ln>
-            <a:noFill/>
-          </a:ln>
-          <a:effectLst/>
-          <a:extLst>
-            <a:ext uri="{909E8E84-426E-40DD-AFC4-6F175D3DCCD1}">
-              <a14:hiddenFill xmlns:a14="http://schemas.microsoft.com/office/drawing/2010/main">
-                <a:solidFill>
-                  <a:schemeClr val="accent1"/>
-                </a:solidFill>
-              </a14:hiddenFill>
-            </a:ext>
-            <a:ext uri="{91240B29-F687-4F45-9708-019B960494DF}">
-              <a14:hiddenLine xmlns:a14="http://schemas.microsoft.com/office/drawing/2010/main" w="9525">
-                <a:solidFill>
-                  <a:schemeClr val="tx1"/>
-                </a:solidFill>
-                <a:miter lim="800000"/>
-                <a:headEnd/>
-                <a:tailEnd/>
-              </a14:hiddenLine>
-            </a:ext>
-            <a:ext uri="{AF507438-7753-43E0-B8FC-AC1667EBCBE1}">
-              <a14:hiddenEffects xmlns:a14="http://schemas.microsoft.com/office/drawing/2010/main">
-                <a:effectLst>
-                  <a:outerShdw dist="35921" dir="2700000" algn="ctr" rotWithShape="0">
-                    <a:schemeClr val="bg2"/>
-                  </a:outerShdw>
-                </a:effectLst>
-              </a14:hiddenEffects>
-            </a:ext>
-          </a:extLst>
-        </p:spPr>
-        <p:txBody>
-          <a:bodyPr vert="horz" wrap="none" lIns="91440" tIns="45720" rIns="91440" bIns="45720" numCol="1" anchor="ctr" anchorCtr="0" compatLnSpc="1">
-            <a:prstTxWarp prst="textNoShape">
-              <a:avLst/>
-            </a:prstTxWarp>
-            <a:spAutoFit/>
-          </a:bodyPr>
-          <a:lstStyle/>
-          <a:p>
-            <a:pPr marL="0" marR="0" lvl="0" indent="0" algn="l" defTabSz="914400" rtl="0" eaLnBrk="0" fontAlgn="base" latinLnBrk="0" hangingPunct="0">
-              <a:lnSpc>
-                <a:spcPct val="100000"/>
-              </a:lnSpc>
-              <a:spcBef>
-                <a:spcPct val="0"/>
-              </a:spcBef>
-              <a:spcAft>
-                <a:spcPct val="0"/>
-              </a:spcAft>
-              <a:buClrTx/>
-              <a:buSzTx/>
-              <a:buFontTx/>
-              <a:buNone/>
-              <a:tabLst/>
-            </a:pPr>
-            <a:endParaRPr kumimoji="0" lang="en-US" altLang="en-US" sz="900" b="0" i="0" u="none" strike="noStrike" cap="none" normalizeH="0" baseline="0">
-              <a:ln>
-                <a:noFill/>
-              </a:ln>
-              <a:solidFill>
-                <a:schemeClr val="tx1"/>
-              </a:solidFill>
-              <a:effectLst/>
-              <a:latin typeface="Arial" panose="020B0604020202020204" pitchFamily="34" charset="0"/>
-              <a:ea typeface="Tahoma" panose="020B0604030504040204" pitchFamily="34" charset="0"/>
-            </a:endParaRPr>
-          </a:p>
-          <a:p>
-            <a:pPr marL="0" marR="0" lvl="0" indent="0" algn="l" defTabSz="914400" rtl="0" eaLnBrk="0" fontAlgn="base" latinLnBrk="0" hangingPunct="0">
-              <a:lnSpc>
-                <a:spcPct val="100000"/>
-              </a:lnSpc>
-              <a:spcBef>
-                <a:spcPct val="0"/>
-              </a:spcBef>
-              <a:spcAft>
-                <a:spcPct val="0"/>
-              </a:spcAft>
-              <a:buClrTx/>
-              <a:buSzTx/>
-              <a:buFontTx/>
-              <a:buNone/>
-              <a:tabLst/>
-            </a:pPr>
-            <a:br>
-              <a:rPr kumimoji="0" lang="en-US" altLang="en-US" sz="900" b="0" i="0" u="none" strike="noStrike" cap="none" normalizeH="0" baseline="0">
-                <a:ln>
-                  <a:noFill/>
-                </a:ln>
-                <a:solidFill>
-                  <a:schemeClr val="tx1"/>
-                </a:solidFill>
-                <a:effectLst/>
-                <a:latin typeface="Arial" panose="020B0604020202020204" pitchFamily="34" charset="0"/>
-                <a:ea typeface="Tahoma" panose="020B0604030504040204" pitchFamily="34" charset="0"/>
-              </a:rPr>
-            </a:br>
-            <a:endParaRPr kumimoji="0" lang="en-US" altLang="en-US" sz="1000" b="0" i="0" u="none" strike="noStrike" cap="none" normalizeH="0" baseline="0">
-              <a:ln>
-                <a:noFill/>
-              </a:ln>
-              <a:solidFill>
-                <a:schemeClr val="tx1"/>
-              </a:solidFill>
-              <a:effectLst/>
-              <a:latin typeface="Arial" panose="020B0604020202020204" pitchFamily="34" charset="0"/>
-              <a:ea typeface="Tahoma" panose="020B0604030504040204" pitchFamily="34" charset="0"/>
-            </a:endParaRPr>
-          </a:p>
-          <a:p>
-            <a:pPr marL="0" marR="0" lvl="0" indent="0" algn="l" defTabSz="914400" rtl="0" eaLnBrk="0" fontAlgn="base" latinLnBrk="0" hangingPunct="0">
-              <a:lnSpc>
-                <a:spcPct val="100000"/>
-              </a:lnSpc>
-              <a:spcBef>
-                <a:spcPct val="0"/>
-              </a:spcBef>
-              <a:spcAft>
-                <a:spcPct val="0"/>
-              </a:spcAft>
-              <a:buClrTx/>
-              <a:buSzTx/>
-              <a:buFontTx/>
-              <a:buNone/>
-              <a:tabLst/>
-            </a:pPr>
-            <a:br>
-              <a:rPr kumimoji="0" lang="en-US" altLang="en-US" sz="1000" b="0" i="0" u="none" strike="noStrike" cap="none" normalizeH="0" baseline="0">
-                <a:ln>
-                  <a:noFill/>
-                </a:ln>
-                <a:solidFill>
-                  <a:schemeClr val="tx1"/>
-                </a:solidFill>
-                <a:effectLst/>
-                <a:latin typeface="Arial" panose="020B0604020202020204" pitchFamily="34" charset="0"/>
-                <a:ea typeface="Tahoma" panose="020B0604030504040204" pitchFamily="34" charset="0"/>
-              </a:rPr>
-            </a:br>
-            <a:endParaRPr kumimoji="0" lang="en-US" altLang="en-US" sz="1800" b="0" i="0" u="none" strike="noStrike" cap="none" normalizeH="0" baseline="0">
-              <a:ln>
-                <a:noFill/>
-              </a:ln>
-              <a:solidFill>
-                <a:schemeClr val="tx1"/>
-              </a:solidFill>
-              <a:effectLst/>
-              <a:latin typeface="Arial" panose="020B0604020202020204" pitchFamily="34" charset="0"/>
-            </a:endParaRPr>
-          </a:p>
-        </p:txBody>
-      </p:sp>
       <p:pic>
         <p:nvPicPr>
-          <p:cNvPr id="94" name="Picture 93">
-            <a:extLst>
-              <a:ext uri="{FF2B5EF4-FFF2-40B4-BE49-F238E27FC236}">
-                <a16:creationId xmlns:a16="http://schemas.microsoft.com/office/drawing/2014/main" id="{6C1D9F35-E879-69FC-7F97-6A6DA195BB72}"/>
-              </a:ext>
-            </a:extLst>
-          </p:cNvPr>
-          <p:cNvPicPr>
-            <a:picLocks noChangeAspect="1"/>
-          </p:cNvPicPr>
-          <p:nvPr userDrawn="1"/>
-        </p:nvPicPr>
-        <p:blipFill>
-          <a:blip r:embed="rId10" cstate="screen">
-            <a:extLst>
-              <a:ext uri="{28A0092B-C50C-407E-A947-70E740481C1C}">
-                <a14:useLocalDpi xmlns:a14="http://schemas.microsoft.com/office/drawing/2010/main"/>
-              </a:ext>
-            </a:extLst>
-          </a:blip>
-          <a:stretch>
-            <a:fillRect/>
-          </a:stretch>
-        </p:blipFill>
-        <p:spPr>
-          <a:xfrm>
-            <a:off x="4164763" y="2856820"/>
-            <a:ext cx="406626" cy="664426"/>
-          </a:xfrm>
-          <a:prstGeom prst="rect">
-            <a:avLst/>
-          </a:prstGeom>
-        </p:spPr>
-      </p:pic>
-      <p:pic>
-        <p:nvPicPr>
-          <p:cNvPr id="3" name="Picture 2" descr="A red stamp with text&#10;&#10;AI-generated content may be incorrect.">
+          <p:cNvPr id="3" name="sample" descr="A red stamp with text&#10;&#10;AI-generated content may be incorrect.">
             <a:extLst>
               <a:ext uri="{FF2B5EF4-FFF2-40B4-BE49-F238E27FC236}">
                 <a16:creationId xmlns:a16="http://schemas.microsoft.com/office/drawing/2014/main" id="{9498E89D-FFFB-BD02-CB4A-C6AF63419FA9}"/>
@@ -3044,7 +2902,7 @@
           <p:nvPr userDrawn="1"/>
         </p:nvPicPr>
         <p:blipFill>
-          <a:blip r:embed="rId11" cstate="screen">
+          <a:blip r:embed="rId9" cstate="screen">
             <a:clrChange>
               <a:clrFrom>
                 <a:srgbClr val="FFFFFF"/>
@@ -3060,7 +2918,7 @@
                 <a14:useLocalDpi xmlns:a14="http://schemas.microsoft.com/office/drawing/2010/main"/>
               </a:ext>
               <a:ext uri="{837473B0-CC2E-450A-ABE3-18F120FF3D39}">
-                <a1611:picAttrSrcUrl xmlns:a1611="http://schemas.microsoft.com/office/drawing/2016/11/main" r:id="rId12"/>
+                <a1611:picAttrSrcUrl xmlns:a1611="http://schemas.microsoft.com/office/drawing/2016/11/main" r:id="rId10"/>
               </a:ext>
             </a:extLst>
           </a:blip>
@@ -3079,7 +2937,7 @@
       </p:pic>
       <p:sp>
         <p:nvSpPr>
-          <p:cNvPr id="2" name="Rectangle 1">
+          <p:cNvPr id="2" name="fake_data">
             <a:extLst>
               <a:ext uri="{FF2B5EF4-FFF2-40B4-BE49-F238E27FC236}">
                 <a16:creationId xmlns:a16="http://schemas.microsoft.com/office/drawing/2014/main" id="{4EA715C1-D099-5522-9B8D-6FE225FA3DB4}"/>
@@ -3207,6 +3065,105 @@
           </a:p>
         </p:txBody>
       </p:sp>
+      <p:pic>
+        <p:nvPicPr>
+          <p:cNvPr id="12" name="icon_radial">
+            <a:extLst>
+              <a:ext uri="{FF2B5EF4-FFF2-40B4-BE49-F238E27FC236}">
+                <a16:creationId xmlns:a16="http://schemas.microsoft.com/office/drawing/2014/main" id="{4A335C9F-C929-90C4-EE54-C3B0862F27AB}"/>
+              </a:ext>
+            </a:extLst>
+          </p:cNvPr>
+          <p:cNvPicPr>
+            <a:picLocks noChangeAspect="1"/>
+          </p:cNvPicPr>
+          <p:nvPr userDrawn="1"/>
+        </p:nvPicPr>
+        <p:blipFill>
+          <a:blip r:embed="rId11">
+            <a:clrChange>
+              <a:clrFrom>
+                <a:srgbClr val="000000"/>
+              </a:clrFrom>
+              <a:clrTo>
+                <a:srgbClr val="000000">
+                  <a:alpha val="0"/>
+                </a:srgbClr>
+              </a:clrTo>
+            </a:clrChange>
+            <a:extLst>
+              <a:ext uri="{BEBA8EAE-BF5A-486C-A8C5-ECC9F3942E4B}">
+                <a14:imgProps xmlns:a14="http://schemas.microsoft.com/office/drawing/2010/main">
+                  <a14:imgLayer r:embed="rId12">
+                    <a14:imgEffect>
+                      <a14:backgroundRemoval t="10000" b="90000" l="10000" r="90000">
+                        <a14:foregroundMark x1="42383" y1="45117" x2="42383" y2="45117"/>
+                        <a14:foregroundMark x1="44141" y1="45605" x2="44141" y2="45605"/>
+                        <a14:foregroundMark x1="46777" y1="45703" x2="46777" y2="45703"/>
+                        <a14:foregroundMark x1="52734" y1="45996" x2="52734" y2="45996"/>
+                        <a14:foregroundMark x1="54492" y1="45996" x2="54492" y2="45996"/>
+                        <a14:foregroundMark x1="49805" y1="49121" x2="49805" y2="49121"/>
+                        <a14:foregroundMark x1="56738" y1="45605" x2="56738" y2="45605"/>
+                        <a14:foregroundMark x1="58887" y1="45996" x2="58887" y2="45996"/>
+                        <a14:foregroundMark x1="60547" y1="45801" x2="60547" y2="45801"/>
+                        <a14:foregroundMark x1="62988" y1="45996" x2="62988" y2="45996"/>
+                        <a14:foregroundMark x1="65723" y1="46191" x2="65723" y2="46191"/>
+                        <a14:foregroundMark x1="67188" y1="46191" x2="67188" y2="46191"/>
+                        <a14:foregroundMark x1="69336" y1="46094" x2="69336" y2="46094"/>
+                        <a14:foregroundMark x1="71875" y1="45996" x2="71875" y2="45996"/>
+                        <a14:foregroundMark x1="73730" y1="46582" x2="73730" y2="46582"/>
+                        <a14:foregroundMark x1="75684" y1="46777" x2="75684" y2="46777"/>
+                        <a14:foregroundMark x1="77637" y1="47656" x2="77637" y2="47656"/>
+                      </a14:backgroundRemoval>
+                    </a14:imgEffect>
+                  </a14:imgLayer>
+                </a14:imgProps>
+              </a:ext>
+            </a:extLst>
+          </a:blip>
+          <a:srcRect l="9320" t="28301" r="45829" b="33282"/>
+          <a:stretch/>
+        </p:blipFill>
+        <p:spPr>
+          <a:xfrm rot="1623292">
+            <a:off x="4873079" y="5011030"/>
+            <a:ext cx="848642" cy="726915"/>
+          </a:xfrm>
+          <a:prstGeom prst="rect">
+            <a:avLst/>
+          </a:prstGeom>
+        </p:spPr>
+      </p:pic>
+      <p:pic>
+        <p:nvPicPr>
+          <p:cNvPr id="24" name="pic_stemi">
+            <a:extLst>
+              <a:ext uri="{FF2B5EF4-FFF2-40B4-BE49-F238E27FC236}">
+                <a16:creationId xmlns:a16="http://schemas.microsoft.com/office/drawing/2014/main" id="{C4803C3E-DE7F-2182-D796-F9D9BADE5615}"/>
+              </a:ext>
+            </a:extLst>
+          </p:cNvPr>
+          <p:cNvPicPr>
+            <a:picLocks noChangeAspect="1"/>
+          </p:cNvPicPr>
+          <p:nvPr userDrawn="1"/>
+        </p:nvPicPr>
+        <p:blipFill>
+          <a:blip r:embed="rId13"/>
+          <a:stretch>
+            <a:fillRect/>
+          </a:stretch>
+        </p:blipFill>
+        <p:spPr>
+          <a:xfrm>
+            <a:off x="3804989" y="2621587"/>
+            <a:ext cx="1138003" cy="1138003"/>
+          </a:xfrm>
+          <a:prstGeom prst="rect">
+            <a:avLst/>
+          </a:prstGeom>
+        </p:spPr>
+      </p:pic>
     </p:spTree>
     <p:extLst>
       <p:ext uri="{BB962C8B-B14F-4D97-AF65-F5344CB8AC3E}">
@@ -3453,7 +3410,7 @@
       </p:sp>
       <p:sp>
         <p:nvSpPr>
-          <p:cNvPr id="2" name="Graphic 4926">
+          <p:cNvPr id="2" name="logo_ncr_title">
             <a:extLst>
               <a:ext uri="{FF2B5EF4-FFF2-40B4-BE49-F238E27FC236}">
                 <a16:creationId xmlns:a16="http://schemas.microsoft.com/office/drawing/2014/main" id="{90655420-6EA9-5F63-7C35-D9F4AC476BF3}"/>
@@ -5026,7 +4983,7 @@
       </p:sp>
       <p:grpSp>
         <p:nvGrpSpPr>
-          <p:cNvPr id="3" name="Group 2">
+          <p:cNvPr id="3" name="logo_ncr">
             <a:extLst>
               <a:ext uri="{FF2B5EF4-FFF2-40B4-BE49-F238E27FC236}">
                 <a16:creationId xmlns:a16="http://schemas.microsoft.com/office/drawing/2014/main" id="{8DD6D3AA-4BA7-8A63-733C-C14EAA9FDEB7}"/>
@@ -5040,10 +4997,10 @@
         </p:nvGrpSpPr>
         <p:grpSpPr>
           <a:xfrm>
-            <a:off x="2388348" y="200582"/>
-            <a:ext cx="974356" cy="1148737"/>
-            <a:chOff x="0" y="0"/>
-            <a:chExt cx="852169" cy="1004569"/>
+            <a:off x="2388348" y="196248"/>
+            <a:ext cx="974356" cy="1153071"/>
+            <a:chOff x="0" y="-3791"/>
+            <a:chExt cx="852169" cy="1008360"/>
           </a:xfrm>
         </p:grpSpPr>
         <p:sp>
@@ -5467,7 +5424,7 @@
             <a:lstStyle/>
             <a:p>
               <a:pPr algn="ctr"/>
-              <a:endParaRPr lang="en-AU"/>
+              <a:endParaRPr lang="en-AU" dirty="0"/>
             </a:p>
           </p:txBody>
         </p:sp>
@@ -5601,7 +5558,7 @@
             <a:lstStyle/>
             <a:p>
               <a:pPr algn="ctr"/>
-              <a:endParaRPr lang="en-AU"/>
+              <a:endParaRPr lang="en-AU" dirty="0"/>
             </a:p>
           </p:txBody>
         </p:sp>
@@ -5672,7 +5629,7 @@
             <a:lstStyle/>
             <a:p>
               <a:pPr algn="ctr"/>
-              <a:endParaRPr lang="en-AU"/>
+              <a:endParaRPr lang="en-AU" dirty="0"/>
             </a:p>
           </p:txBody>
         </p:sp>
@@ -5915,7 +5872,7 @@
             <a:lstStyle/>
             <a:p>
               <a:pPr algn="ctr"/>
-              <a:endParaRPr lang="en-AU"/>
+              <a:endParaRPr lang="en-AU" dirty="0"/>
             </a:p>
           </p:txBody>
         </p:sp>
@@ -5933,7 +5890,7 @@
           </p:nvSpPr>
           <p:spPr>
             <a:xfrm>
-              <a:off x="0" y="0"/>
+              <a:off x="0" y="-3791"/>
               <a:ext cx="838200" cy="447675"/>
             </a:xfrm>
             <a:custGeom>
@@ -6226,7 +6183,7 @@
             <a:lstStyle/>
             <a:p>
               <a:pPr algn="ctr"/>
-              <a:endParaRPr lang="en-AU"/>
+              <a:endParaRPr lang="en-AU" dirty="0"/>
             </a:p>
           </p:txBody>
         </p:sp>
@@ -6487,7 +6444,7 @@
             <a:lstStyle/>
             <a:p>
               <a:pPr algn="ctr"/>
-              <a:endParaRPr lang="en-AU"/>
+              <a:endParaRPr lang="en-AU" dirty="0"/>
             </a:p>
           </p:txBody>
         </p:sp>
@@ -6666,62 +6623,14 @@
             <a:lstStyle/>
             <a:p>
               <a:pPr algn="ctr"/>
-              <a:endParaRPr lang="en-AU"/>
+              <a:endParaRPr lang="en-AU" dirty="0"/>
             </a:p>
           </p:txBody>
         </p:sp>
       </p:grpSp>
       <p:sp>
         <p:nvSpPr>
-          <p:cNvPr id="15" name="TextBox 14">
-            <a:extLst>
-              <a:ext uri="{FF2B5EF4-FFF2-40B4-BE49-F238E27FC236}">
-                <a16:creationId xmlns:a16="http://schemas.microsoft.com/office/drawing/2014/main" id="{0A8B2BEF-EC4A-AACD-7AC0-27A940353D18}"/>
-              </a:ext>
-            </a:extLst>
-          </p:cNvPr>
-          <p:cNvSpPr txBox="1"/>
-          <p:nvPr userDrawn="1"/>
-        </p:nvSpPr>
-        <p:spPr>
-          <a:xfrm>
-            <a:off x="231102" y="819698"/>
-            <a:ext cx="1891476" cy="677108"/>
-          </a:xfrm>
-          <a:prstGeom prst="rect">
-            <a:avLst/>
-          </a:prstGeom>
-          <a:noFill/>
-        </p:spPr>
-        <p:txBody>
-          <a:bodyPr wrap="square" rtlCol="0">
-            <a:spAutoFit/>
-          </a:bodyPr>
-          <a:lstStyle/>
-          <a:p>
-            <a:r>
-              <a:rPr lang="en-AU" sz="3800" b="1" dirty="0" err="1">
-                <a:solidFill>
-                  <a:srgbClr val="19456A"/>
-                </a:solidFill>
-                <a:latin typeface="Segoe UI" panose="020B0502040204020203" pitchFamily="34" charset="0"/>
-                <a:cs typeface="Segoe UI" panose="020B0502040204020203" pitchFamily="34" charset="0"/>
-              </a:rPr>
-              <a:t>CRoWA</a:t>
-            </a:r>
-            <a:endParaRPr lang="en-AU" sz="3800" b="1" dirty="0">
-              <a:solidFill>
-                <a:srgbClr val="19456A"/>
-              </a:solidFill>
-              <a:latin typeface="Segoe UI" panose="020B0502040204020203" pitchFamily="34" charset="0"/>
-              <a:cs typeface="Segoe UI" panose="020B0502040204020203" pitchFamily="34" charset="0"/>
-            </a:endParaRPr>
-          </a:p>
-        </p:txBody>
-      </p:sp>
-      <p:sp>
-        <p:nvSpPr>
-          <p:cNvPr id="16" name="TextBox 15">
+          <p:cNvPr id="16" name="logo_crowa_subtitle">
             <a:extLst>
               <a:ext uri="{FF2B5EF4-FFF2-40B4-BE49-F238E27FC236}">
                 <a16:creationId xmlns:a16="http://schemas.microsoft.com/office/drawing/2014/main" id="{2AB87B99-53BD-A3E1-EC73-2148133BEA33}"/>
@@ -6760,9 +6669,50 @@
           </a:p>
         </p:txBody>
       </p:sp>
+      <p:sp>
+        <p:nvSpPr>
+          <p:cNvPr id="15" name="logo_crowa_title">
+            <a:extLst>
+              <a:ext uri="{FF2B5EF4-FFF2-40B4-BE49-F238E27FC236}">
+                <a16:creationId xmlns:a16="http://schemas.microsoft.com/office/drawing/2014/main" id="{0A8B2BEF-EC4A-AACD-7AC0-27A940353D18}"/>
+              </a:ext>
+            </a:extLst>
+          </p:cNvPr>
+          <p:cNvSpPr txBox="1"/>
+          <p:nvPr userDrawn="1"/>
+        </p:nvSpPr>
+        <p:spPr>
+          <a:xfrm>
+            <a:off x="231102" y="819698"/>
+            <a:ext cx="1891476" cy="677108"/>
+          </a:xfrm>
+          <a:prstGeom prst="rect">
+            <a:avLst/>
+          </a:prstGeom>
+          <a:noFill/>
+        </p:spPr>
+        <p:txBody>
+          <a:bodyPr wrap="square" rtlCol="0">
+            <a:spAutoFit/>
+          </a:bodyPr>
+          <a:lstStyle/>
+          <a:p>
+            <a:r>
+              <a:rPr lang="en-AU" sz="3800" b="1" dirty="0">
+                <a:solidFill>
+                  <a:srgbClr val="19456A"/>
+                </a:solidFill>
+                <a:latin typeface="Segoe UI" panose="020B0502040204020203" pitchFamily="34" charset="0"/>
+                <a:cs typeface="Segoe UI" panose="020B0502040204020203" pitchFamily="34" charset="0"/>
+              </a:rPr>
+              <a:t>CRoWA</a:t>
+            </a:r>
+          </a:p>
+        </p:txBody>
+      </p:sp>
       <p:pic>
         <p:nvPicPr>
-          <p:cNvPr id="18" name="Picture 17" descr="A heart with a pulse line&#10;&#10;AI-generated content may be incorrect.">
+          <p:cNvPr id="18" name="logo_crowa" descr="A heart with a pulse line&#10;&#10;AI-generated content may be incorrect.">
             <a:extLst>
               <a:ext uri="{FF2B5EF4-FFF2-40B4-BE49-F238E27FC236}">
                 <a16:creationId xmlns:a16="http://schemas.microsoft.com/office/drawing/2014/main" id="{CA3877DB-6975-A75F-DBFC-236D4FEC401C}"/>
@@ -7129,7 +7079,7 @@
           <a:bodyPr/>
           <a:lstStyle/>
           <a:p>
-            <a:endParaRPr lang="en-AU"/>
+            <a:endParaRPr lang="en-AU" dirty="0"/>
           </a:p>
         </p:txBody>
       </p:sp>
@@ -7162,7 +7112,7 @@
           <a:bodyPr/>
           <a:lstStyle/>
           <a:p>
-            <a:endParaRPr lang="en-AU"/>
+            <a:endParaRPr lang="en-AU" dirty="0"/>
           </a:p>
         </p:txBody>
       </p:sp>
@@ -7228,7 +7178,7 @@
           <a:bodyPr/>
           <a:lstStyle/>
           <a:p>
-            <a:endParaRPr lang="en-AU"/>
+            <a:endParaRPr lang="en-AU" dirty="0"/>
           </a:p>
         </p:txBody>
       </p:sp>
@@ -7261,7 +7211,7 @@
           <a:bodyPr/>
           <a:lstStyle/>
           <a:p>
-            <a:endParaRPr lang="en-AU"/>
+            <a:endParaRPr lang="en-AU" dirty="0"/>
           </a:p>
         </p:txBody>
       </p:sp>
@@ -7294,7 +7244,7 @@
           <a:bodyPr/>
           <a:lstStyle/>
           <a:p>
-            <a:endParaRPr lang="en-AU"/>
+            <a:endParaRPr lang="en-AU" dirty="0"/>
           </a:p>
         </p:txBody>
       </p:sp>

--- a/pci_poster/poster_template.pptx
+++ b/pci_poster/poster_template.pptx
@@ -112,16 +112,223 @@
 </p:presentation>
 </file>
 
-<file path=ppt/revisionInfo.xml><?xml version="1.0" encoding="utf-8"?>
-<p1510:revInfo xmlns:a="http://schemas.openxmlformats.org/drawingml/2006/main" xmlns:r="http://schemas.openxmlformats.org/officeDocument/2006/relationships" xmlns:p1510="http://schemas.microsoft.com/office/powerpoint/2015/10/main">
-  <p1510:revLst>
-    <p1510:client id="{63D0502C-E45B-42C2-8995-A2AEF517A4FA}" v="57" dt="2026-03-04T04:53:56.357"/>
-  </p1510:revLst>
-</p1510:revInfo>
-</file>
-
 <file path=ppt/changesInfos/changesInfo1.xml><?xml version="1.0" encoding="utf-8"?>
 <pc:chgInfo xmlns:a="http://schemas.openxmlformats.org/drawingml/2006/main" xmlns:r="http://schemas.openxmlformats.org/officeDocument/2006/relationships" xmlns:ac="http://schemas.microsoft.com/office/drawing/2013/main/command" xmlns:pc="http://schemas.microsoft.com/office/powerpoint/2013/main/command">
+  <pc:docChgLst>
+    <pc:chgData name="Gillett, Richard" userId="f751afb3-89ee-4adb-bf46-b352b62550b4" providerId="ADAL" clId="{E1DC7D8A-5337-4AAE-9935-D0A80B248513}"/>
+    <pc:docChg chg="undo redo custSel modSld addMainMaster delMainMaster modMainMaster">
+      <pc:chgData name="Gillett, Richard" userId="f751afb3-89ee-4adb-bf46-b352b62550b4" providerId="ADAL" clId="{E1DC7D8A-5337-4AAE-9935-D0A80B248513}" dt="2026-01-13T09:39:19.990" v="1024" actId="14100"/>
+      <pc:docMkLst>
+        <pc:docMk/>
+      </pc:docMkLst>
+      <pc:sldChg chg="modSp mod">
+        <pc:chgData name="Gillett, Richard" userId="f751afb3-89ee-4adb-bf46-b352b62550b4" providerId="ADAL" clId="{E1DC7D8A-5337-4AAE-9935-D0A80B248513}" dt="2026-01-13T09:39:19.990" v="1024" actId="14100"/>
+        <pc:sldMkLst>
+          <pc:docMk/>
+          <pc:sldMk cId="4050248657" sldId="258"/>
+        </pc:sldMkLst>
+      </pc:sldChg>
+      <pc:sldMasterChg chg="addSp delSp modSp mod modSldLayout">
+        <pc:chgData name="Gillett, Richard" userId="f751afb3-89ee-4adb-bf46-b352b62550b4" providerId="ADAL" clId="{E1DC7D8A-5337-4AAE-9935-D0A80B248513}" dt="2026-01-13T09:38:14.758" v="1023" actId="1036"/>
+        <pc:sldMasterMkLst>
+          <pc:docMk/>
+          <pc:sldMasterMk cId="2640799190" sldId="2147483660"/>
+        </pc:sldMasterMkLst>
+        <pc:sldLayoutChg chg="addSp delSp modSp mod">
+          <pc:chgData name="Gillett, Richard" userId="f751afb3-89ee-4adb-bf46-b352b62550b4" providerId="ADAL" clId="{E1DC7D8A-5337-4AAE-9935-D0A80B248513}" dt="2026-01-13T09:37:49.877" v="1013" actId="1035"/>
+          <pc:sldLayoutMkLst>
+            <pc:docMk/>
+            <pc:sldMasterMk cId="2640799190" sldId="2147483660"/>
+            <pc:sldLayoutMk cId="1363397331" sldId="2147483661"/>
+          </pc:sldLayoutMkLst>
+        </pc:sldLayoutChg>
+        <pc:sldLayoutChg chg="addSp delSp modSp mod">
+          <pc:chgData name="Gillett, Richard" userId="f751afb3-89ee-4adb-bf46-b352b62550b4" providerId="ADAL" clId="{E1DC7D8A-5337-4AAE-9935-D0A80B248513}" dt="2026-01-08T00:11:34.439" v="311" actId="21"/>
+          <pc:sldLayoutMkLst>
+            <pc:docMk/>
+            <pc:sldMasterMk cId="2640799190" sldId="2147483660"/>
+            <pc:sldLayoutMk cId="413489094" sldId="2147483662"/>
+          </pc:sldLayoutMkLst>
+        </pc:sldLayoutChg>
+      </pc:sldMasterChg>
+      <pc:sldMasterChg chg="new del mod addSldLayout delSldLayout">
+        <pc:chgData name="Gillett, Richard" userId="f751afb3-89ee-4adb-bf46-b352b62550b4" providerId="ADAL" clId="{E1DC7D8A-5337-4AAE-9935-D0A80B248513}" dt="2026-01-08T00:07:10.675" v="277" actId="6938"/>
+        <pc:sldMasterMkLst>
+          <pc:docMk/>
+          <pc:sldMasterMk cId="3088122613" sldId="2147483662"/>
+        </pc:sldMasterMkLst>
+        <pc:sldLayoutChg chg="new del replId">
+          <pc:chgData name="Gillett, Richard" userId="f751afb3-89ee-4adb-bf46-b352b62550b4" providerId="ADAL" clId="{E1DC7D8A-5337-4AAE-9935-D0A80B248513}" dt="2026-01-08T00:07:10.675" v="277" actId="6938"/>
+          <pc:sldLayoutMkLst>
+            <pc:docMk/>
+            <pc:sldMasterMk cId="3088122613" sldId="2147483662"/>
+            <pc:sldLayoutMk cId="1635335690" sldId="2147483663"/>
+          </pc:sldLayoutMkLst>
+        </pc:sldLayoutChg>
+        <pc:sldLayoutChg chg="new del replId">
+          <pc:chgData name="Gillett, Richard" userId="f751afb3-89ee-4adb-bf46-b352b62550b4" providerId="ADAL" clId="{E1DC7D8A-5337-4AAE-9935-D0A80B248513}" dt="2026-01-08T00:07:10.675" v="277" actId="6938"/>
+          <pc:sldLayoutMkLst>
+            <pc:docMk/>
+            <pc:sldMasterMk cId="3088122613" sldId="2147483662"/>
+            <pc:sldLayoutMk cId="2302690302" sldId="2147483664"/>
+          </pc:sldLayoutMkLst>
+        </pc:sldLayoutChg>
+        <pc:sldLayoutChg chg="new del replId">
+          <pc:chgData name="Gillett, Richard" userId="f751afb3-89ee-4adb-bf46-b352b62550b4" providerId="ADAL" clId="{E1DC7D8A-5337-4AAE-9935-D0A80B248513}" dt="2026-01-08T00:07:10.675" v="277" actId="6938"/>
+          <pc:sldLayoutMkLst>
+            <pc:docMk/>
+            <pc:sldMasterMk cId="3088122613" sldId="2147483662"/>
+            <pc:sldLayoutMk cId="992193309" sldId="2147483665"/>
+          </pc:sldLayoutMkLst>
+        </pc:sldLayoutChg>
+        <pc:sldLayoutChg chg="new del replId">
+          <pc:chgData name="Gillett, Richard" userId="f751afb3-89ee-4adb-bf46-b352b62550b4" providerId="ADAL" clId="{E1DC7D8A-5337-4AAE-9935-D0A80B248513}" dt="2026-01-08T00:07:10.675" v="277" actId="6938"/>
+          <pc:sldLayoutMkLst>
+            <pc:docMk/>
+            <pc:sldMasterMk cId="3088122613" sldId="2147483662"/>
+            <pc:sldLayoutMk cId="2016394156" sldId="2147483666"/>
+          </pc:sldLayoutMkLst>
+        </pc:sldLayoutChg>
+        <pc:sldLayoutChg chg="new del replId">
+          <pc:chgData name="Gillett, Richard" userId="f751afb3-89ee-4adb-bf46-b352b62550b4" providerId="ADAL" clId="{E1DC7D8A-5337-4AAE-9935-D0A80B248513}" dt="2026-01-08T00:07:10.675" v="277" actId="6938"/>
+          <pc:sldLayoutMkLst>
+            <pc:docMk/>
+            <pc:sldMasterMk cId="3088122613" sldId="2147483662"/>
+            <pc:sldLayoutMk cId="1766713548" sldId="2147483667"/>
+          </pc:sldLayoutMkLst>
+        </pc:sldLayoutChg>
+        <pc:sldLayoutChg chg="new del replId">
+          <pc:chgData name="Gillett, Richard" userId="f751afb3-89ee-4adb-bf46-b352b62550b4" providerId="ADAL" clId="{E1DC7D8A-5337-4AAE-9935-D0A80B248513}" dt="2026-01-08T00:07:10.675" v="277" actId="6938"/>
+          <pc:sldLayoutMkLst>
+            <pc:docMk/>
+            <pc:sldMasterMk cId="3088122613" sldId="2147483662"/>
+            <pc:sldLayoutMk cId="4074602279" sldId="2147483668"/>
+          </pc:sldLayoutMkLst>
+        </pc:sldLayoutChg>
+        <pc:sldLayoutChg chg="new del replId">
+          <pc:chgData name="Gillett, Richard" userId="f751afb3-89ee-4adb-bf46-b352b62550b4" providerId="ADAL" clId="{E1DC7D8A-5337-4AAE-9935-D0A80B248513}" dt="2026-01-08T00:07:10.675" v="277" actId="6938"/>
+          <pc:sldLayoutMkLst>
+            <pc:docMk/>
+            <pc:sldMasterMk cId="3088122613" sldId="2147483662"/>
+            <pc:sldLayoutMk cId="3305373079" sldId="2147483669"/>
+          </pc:sldLayoutMkLst>
+        </pc:sldLayoutChg>
+        <pc:sldLayoutChg chg="new del replId">
+          <pc:chgData name="Gillett, Richard" userId="f751afb3-89ee-4adb-bf46-b352b62550b4" providerId="ADAL" clId="{E1DC7D8A-5337-4AAE-9935-D0A80B248513}" dt="2026-01-08T00:07:10.675" v="277" actId="6938"/>
+          <pc:sldLayoutMkLst>
+            <pc:docMk/>
+            <pc:sldMasterMk cId="3088122613" sldId="2147483662"/>
+            <pc:sldLayoutMk cId="1089218544" sldId="2147483670"/>
+          </pc:sldLayoutMkLst>
+        </pc:sldLayoutChg>
+        <pc:sldLayoutChg chg="new del replId">
+          <pc:chgData name="Gillett, Richard" userId="f751afb3-89ee-4adb-bf46-b352b62550b4" providerId="ADAL" clId="{E1DC7D8A-5337-4AAE-9935-D0A80B248513}" dt="2026-01-08T00:07:10.675" v="277" actId="6938"/>
+          <pc:sldLayoutMkLst>
+            <pc:docMk/>
+            <pc:sldMasterMk cId="3088122613" sldId="2147483662"/>
+            <pc:sldLayoutMk cId="1346707861" sldId="2147483671"/>
+          </pc:sldLayoutMkLst>
+        </pc:sldLayoutChg>
+        <pc:sldLayoutChg chg="new del replId">
+          <pc:chgData name="Gillett, Richard" userId="f751afb3-89ee-4adb-bf46-b352b62550b4" providerId="ADAL" clId="{E1DC7D8A-5337-4AAE-9935-D0A80B248513}" dt="2026-01-08T00:07:10.675" v="277" actId="6938"/>
+          <pc:sldLayoutMkLst>
+            <pc:docMk/>
+            <pc:sldMasterMk cId="3088122613" sldId="2147483662"/>
+            <pc:sldLayoutMk cId="2010221458" sldId="2147483672"/>
+          </pc:sldLayoutMkLst>
+        </pc:sldLayoutChg>
+        <pc:sldLayoutChg chg="new del replId">
+          <pc:chgData name="Gillett, Richard" userId="f751afb3-89ee-4adb-bf46-b352b62550b4" providerId="ADAL" clId="{E1DC7D8A-5337-4AAE-9935-D0A80B248513}" dt="2026-01-08T00:07:10.675" v="277" actId="6938"/>
+          <pc:sldLayoutMkLst>
+            <pc:docMk/>
+            <pc:sldMasterMk cId="3088122613" sldId="2147483662"/>
+            <pc:sldLayoutMk cId="1232889983" sldId="2147483673"/>
+          </pc:sldLayoutMkLst>
+        </pc:sldLayoutChg>
+      </pc:sldMasterChg>
+    </pc:docChg>
+  </pc:docChgLst>
+  <pc:docChgLst>
+    <pc:chgData name="Gillett, Richard" userId="f751afb3-89ee-4adb-bf46-b352b62550b4" providerId="ADAL" clId="{4E0FD693-728A-4417-BDB5-6E29955B45D4}"/>
+    <pc:docChg chg="modMainMaster">
+      <pc:chgData name="Gillett, Richard" userId="f751afb3-89ee-4adb-bf46-b352b62550b4" providerId="ADAL" clId="{4E0FD693-728A-4417-BDB5-6E29955B45D4}" dt="2026-06-10T05:52:21.966" v="1" actId="20577"/>
+      <pc:docMkLst>
+        <pc:docMk/>
+      </pc:docMkLst>
+      <pc:sldMasterChg chg="modSldLayout">
+        <pc:chgData name="Gillett, Richard" userId="f751afb3-89ee-4adb-bf46-b352b62550b4" providerId="ADAL" clId="{4E0FD693-728A-4417-BDB5-6E29955B45D4}" dt="2026-06-10T05:52:21.966" v="1" actId="20577"/>
+        <pc:sldMasterMkLst>
+          <pc:docMk/>
+          <pc:sldMasterMk cId="2640799190" sldId="2147483660"/>
+        </pc:sldMasterMkLst>
+        <pc:sldLayoutChg chg="modSp mod">
+          <pc:chgData name="Gillett, Richard" userId="f751afb3-89ee-4adb-bf46-b352b62550b4" providerId="ADAL" clId="{4E0FD693-728A-4417-BDB5-6E29955B45D4}" dt="2026-06-10T05:52:21.966" v="1" actId="20577"/>
+          <pc:sldLayoutMkLst>
+            <pc:docMk/>
+            <pc:sldMasterMk cId="2640799190" sldId="2147483660"/>
+            <pc:sldLayoutMk cId="1363397331" sldId="2147483661"/>
+          </pc:sldLayoutMkLst>
+          <pc:spChg chg="mod">
+            <ac:chgData name="Gillett, Richard" userId="f751afb3-89ee-4adb-bf46-b352b62550b4" providerId="ADAL" clId="{4E0FD693-728A-4417-BDB5-6E29955B45D4}" dt="2026-06-10T05:52:21.966" v="1" actId="20577"/>
+            <ac:spMkLst>
+              <pc:docMk/>
+              <pc:sldMasterMk cId="2640799190" sldId="2147483660"/>
+              <pc:sldLayoutMk cId="1363397331" sldId="2147483661"/>
+              <ac:spMk id="43" creationId="{CDBAF79C-1ECD-4077-B693-FAA616F38BB3}"/>
+            </ac:spMkLst>
+          </pc:spChg>
+        </pc:sldLayoutChg>
+      </pc:sldMasterChg>
+    </pc:docChg>
+  </pc:docChgLst>
+  <pc:docChgLst>
+    <pc:chgData name="Gillett, Richard" userId="f751afb3-89ee-4adb-bf46-b352b62550b4" providerId="ADAL" clId="{947C8103-4DC6-4827-8B43-5C2E904880F7}"/>
+    <pc:docChg chg="undo custSel modMainMaster">
+      <pc:chgData name="Gillett, Richard" userId="f751afb3-89ee-4adb-bf46-b352b62550b4" providerId="ADAL" clId="{947C8103-4DC6-4827-8B43-5C2E904880F7}" dt="2026-01-06T08:14:35.035" v="119" actId="1035"/>
+      <pc:docMkLst>
+        <pc:docMk/>
+      </pc:docMkLst>
+      <pc:sldMasterChg chg="modSp mod modSldLayout">
+        <pc:chgData name="Gillett, Richard" userId="f751afb3-89ee-4adb-bf46-b352b62550b4" providerId="ADAL" clId="{947C8103-4DC6-4827-8B43-5C2E904880F7}" dt="2026-01-06T08:14:35.035" v="119" actId="1035"/>
+        <pc:sldMasterMkLst>
+          <pc:docMk/>
+          <pc:sldMasterMk cId="2640799190" sldId="2147483660"/>
+        </pc:sldMasterMkLst>
+        <pc:sldLayoutChg chg="modSp mod">
+          <pc:chgData name="Gillett, Richard" userId="f751afb3-89ee-4adb-bf46-b352b62550b4" providerId="ADAL" clId="{947C8103-4DC6-4827-8B43-5C2E904880F7}" dt="2026-01-06T08:14:35.035" v="119" actId="1035"/>
+          <pc:sldLayoutMkLst>
+            <pc:docMk/>
+            <pc:sldMasterMk cId="2640799190" sldId="2147483660"/>
+            <pc:sldLayoutMk cId="1363397331" sldId="2147483661"/>
+          </pc:sldLayoutMkLst>
+        </pc:sldLayoutChg>
+      </pc:sldMasterChg>
+    </pc:docChg>
+  </pc:docChgLst>
+  <pc:docChgLst>
+    <pc:chgData name="Gillett, Richard" userId="f751afb3-89ee-4adb-bf46-b352b62550b4" providerId="ADAL" clId="{63D0502C-E45B-42C2-8995-A2AEF517A4FA}"/>
+    <pc:docChg chg="undo custSel modMainMaster">
+      <pc:chgData name="Gillett, Richard" userId="f751afb3-89ee-4adb-bf46-b352b62550b4" providerId="ADAL" clId="{63D0502C-E45B-42C2-8995-A2AEF517A4FA}" dt="2026-03-04T04:53:56.357" v="273" actId="962"/>
+      <pc:docMkLst>
+        <pc:docMk/>
+      </pc:docMkLst>
+      <pc:sldMasterChg chg="modSp mod modSldLayout">
+        <pc:chgData name="Gillett, Richard" userId="f751afb3-89ee-4adb-bf46-b352b62550b4" providerId="ADAL" clId="{63D0502C-E45B-42C2-8995-A2AEF517A4FA}" dt="2026-03-04T04:53:56.357" v="273" actId="962"/>
+        <pc:sldMasterMkLst>
+          <pc:docMk/>
+          <pc:sldMasterMk cId="2640799190" sldId="2147483660"/>
+        </pc:sldMasterMkLst>
+        <pc:sldLayoutChg chg="addSp delSp modSp mod">
+          <pc:chgData name="Gillett, Richard" userId="f751afb3-89ee-4adb-bf46-b352b62550b4" providerId="ADAL" clId="{63D0502C-E45B-42C2-8995-A2AEF517A4FA}" dt="2026-03-04T04:53:56.357" v="273" actId="962"/>
+          <pc:sldLayoutMkLst>
+            <pc:docMk/>
+            <pc:sldMasterMk cId="2640799190" sldId="2147483660"/>
+            <pc:sldLayoutMk cId="1363397331" sldId="2147483661"/>
+          </pc:sldLayoutMkLst>
+        </pc:sldLayoutChg>
+      </pc:sldMasterChg>
+    </pc:docChg>
+  </pc:docChgLst>
   <pc:docChgLst>
     <pc:chgData name="Gillett, Richard" userId="f751afb3-89ee-4adb-bf46-b352b62550b4" providerId="ADAL" clId="{A5BB3A64-C60C-45E9-BAE7-11B96E1E2D18}"/>
     <pc:docChg chg="undo custSel modSld modMainMaster">
@@ -135,46 +342,6 @@
           <pc:docMk/>
           <pc:sldMk cId="4050248657" sldId="258"/>
         </pc:sldMkLst>
-        <pc:spChg chg="mod">
-          <ac:chgData name="Gillett, Richard" userId="f751afb3-89ee-4adb-bf46-b352b62550b4" providerId="ADAL" clId="{A5BB3A64-C60C-45E9-BAE7-11B96E1E2D18}" dt="2026-01-14T09:55:37.491" v="248" actId="14100"/>
-          <ac:spMkLst>
-            <pc:docMk/>
-            <pc:sldMk cId="4050248657" sldId="258"/>
-            <ac:spMk id="2" creationId="{F4F36A85-40C1-99E5-A3BA-3666774AE73E}"/>
-          </ac:spMkLst>
-        </pc:spChg>
-        <pc:spChg chg="mod">
-          <ac:chgData name="Gillett, Richard" userId="f751afb3-89ee-4adb-bf46-b352b62550b4" providerId="ADAL" clId="{A5BB3A64-C60C-45E9-BAE7-11B96E1E2D18}" dt="2026-01-14T09:55:55.459" v="251" actId="14100"/>
-          <ac:spMkLst>
-            <pc:docMk/>
-            <pc:sldMk cId="4050248657" sldId="258"/>
-            <ac:spMk id="3" creationId="{376C39B9-C8C6-2B76-BE87-956DBD5F86B7}"/>
-          </ac:spMkLst>
-        </pc:spChg>
-        <pc:spChg chg="mod">
-          <ac:chgData name="Gillett, Richard" userId="f751afb3-89ee-4adb-bf46-b352b62550b4" providerId="ADAL" clId="{A5BB3A64-C60C-45E9-BAE7-11B96E1E2D18}" dt="2026-01-14T09:55:45.683" v="250" actId="1076"/>
-          <ac:spMkLst>
-            <pc:docMk/>
-            <pc:sldMk cId="4050248657" sldId="258"/>
-            <ac:spMk id="5" creationId="{6CF5C07D-A98D-DF62-0C9B-BAA4238D66ED}"/>
-          </ac:spMkLst>
-        </pc:spChg>
-        <pc:spChg chg="mod">
-          <ac:chgData name="Gillett, Richard" userId="f751afb3-89ee-4adb-bf46-b352b62550b4" providerId="ADAL" clId="{A5BB3A64-C60C-45E9-BAE7-11B96E1E2D18}" dt="2026-01-14T09:55:42.353" v="249" actId="1076"/>
-          <ac:spMkLst>
-            <pc:docMk/>
-            <pc:sldMk cId="4050248657" sldId="258"/>
-            <ac:spMk id="6" creationId="{4D0EF5F5-7D75-0122-641F-0ACF5C0197B5}"/>
-          </ac:spMkLst>
-        </pc:spChg>
-        <pc:spChg chg="mod">
-          <ac:chgData name="Gillett, Richard" userId="f751afb3-89ee-4adb-bf46-b352b62550b4" providerId="ADAL" clId="{A5BB3A64-C60C-45E9-BAE7-11B96E1E2D18}" dt="2026-01-14T09:55:24.531" v="247" actId="14100"/>
-          <ac:spMkLst>
-            <pc:docMk/>
-            <pc:sldMk cId="4050248657" sldId="258"/>
-            <ac:spMk id="9" creationId="{F98833C7-4F68-7FFA-40F5-A320C257F350}"/>
-          </ac:spMkLst>
-        </pc:spChg>
       </pc:sldChg>
       <pc:sldMasterChg chg="addSp delSp modSp mod modSldLayout">
         <pc:chgData name="Gillett, Richard" userId="f751afb3-89ee-4adb-bf46-b352b62550b4" providerId="ADAL" clId="{A5BB3A64-C60C-45E9-BAE7-11B96E1E2D18}" dt="2026-02-05T07:26:13.627" v="547" actId="20577"/>
@@ -182,118 +349,6 @@
           <pc:docMk/>
           <pc:sldMasterMk cId="2640799190" sldId="2147483660"/>
         </pc:sldMasterMkLst>
-        <pc:spChg chg="add mod">
-          <ac:chgData name="Gillett, Richard" userId="f751afb3-89ee-4adb-bf46-b352b62550b4" providerId="ADAL" clId="{A5BB3A64-C60C-45E9-BAE7-11B96E1E2D18}" dt="2026-01-20T23:46:41.004" v="450" actId="1037"/>
-          <ac:spMkLst>
-            <pc:docMk/>
-            <pc:sldMasterMk cId="2640799190" sldId="2147483660"/>
-            <ac:spMk id="2" creationId="{90655420-6EA9-5F63-7C35-D9F4AC476BF3}"/>
-          </ac:spMkLst>
-        </pc:spChg>
-        <pc:spChg chg="add mod">
-          <ac:chgData name="Gillett, Richard" userId="f751afb3-89ee-4adb-bf46-b352b62550b4" providerId="ADAL" clId="{A5BB3A64-C60C-45E9-BAE7-11B96E1E2D18}" dt="2026-01-14T04:51:40.863" v="101" actId="122"/>
-          <ac:spMkLst>
-            <pc:docMk/>
-            <pc:sldMasterMk cId="2640799190" sldId="2147483660"/>
-            <ac:spMk id="5" creationId="{DDED3903-CAB7-41CA-89B1-D9EA830E52B1}"/>
-          </ac:spMkLst>
-        </pc:spChg>
-        <pc:spChg chg="add mod">
-          <ac:chgData name="Gillett, Richard" userId="f751afb3-89ee-4adb-bf46-b352b62550b4" providerId="ADAL" clId="{A5BB3A64-C60C-45E9-BAE7-11B96E1E2D18}" dt="2026-01-14T04:51:40.863" v="101" actId="122"/>
-          <ac:spMkLst>
-            <pc:docMk/>
-            <pc:sldMasterMk cId="2640799190" sldId="2147483660"/>
-            <ac:spMk id="6" creationId="{73264F93-7C4A-0409-C092-4FC84D07FF50}"/>
-          </ac:spMkLst>
-        </pc:spChg>
-        <pc:spChg chg="add mod">
-          <ac:chgData name="Gillett, Richard" userId="f751afb3-89ee-4adb-bf46-b352b62550b4" providerId="ADAL" clId="{A5BB3A64-C60C-45E9-BAE7-11B96E1E2D18}" dt="2026-01-14T04:51:40.863" v="101" actId="122"/>
-          <ac:spMkLst>
-            <pc:docMk/>
-            <pc:sldMasterMk cId="2640799190" sldId="2147483660"/>
-            <ac:spMk id="7" creationId="{02659D08-A492-6C14-CC11-C5E5353DC8EE}"/>
-          </ac:spMkLst>
-        </pc:spChg>
-        <pc:spChg chg="add mod">
-          <ac:chgData name="Gillett, Richard" userId="f751afb3-89ee-4adb-bf46-b352b62550b4" providerId="ADAL" clId="{A5BB3A64-C60C-45E9-BAE7-11B96E1E2D18}" dt="2026-01-14T04:51:40.863" v="101" actId="122"/>
-          <ac:spMkLst>
-            <pc:docMk/>
-            <pc:sldMasterMk cId="2640799190" sldId="2147483660"/>
-            <ac:spMk id="9" creationId="{51BB66DC-A71C-7993-D837-20988916AC0E}"/>
-          </ac:spMkLst>
-        </pc:spChg>
-        <pc:spChg chg="add mod">
-          <ac:chgData name="Gillett, Richard" userId="f751afb3-89ee-4adb-bf46-b352b62550b4" providerId="ADAL" clId="{A5BB3A64-C60C-45E9-BAE7-11B96E1E2D18}" dt="2026-01-14T04:51:40.863" v="101" actId="122"/>
-          <ac:spMkLst>
-            <pc:docMk/>
-            <pc:sldMasterMk cId="2640799190" sldId="2147483660"/>
-            <ac:spMk id="10" creationId="{095A6460-B1AA-2316-FDA5-EA70CFCA2BCE}"/>
-          </ac:spMkLst>
-        </pc:spChg>
-        <pc:spChg chg="add mod">
-          <ac:chgData name="Gillett, Richard" userId="f751afb3-89ee-4adb-bf46-b352b62550b4" providerId="ADAL" clId="{A5BB3A64-C60C-45E9-BAE7-11B96E1E2D18}" dt="2026-01-14T04:51:40.863" v="101" actId="122"/>
-          <ac:spMkLst>
-            <pc:docMk/>
-            <pc:sldMasterMk cId="2640799190" sldId="2147483660"/>
-            <ac:spMk id="12" creationId="{5C3F94B2-845B-8C14-618C-0011EF5ACAFC}"/>
-          </ac:spMkLst>
-        </pc:spChg>
-        <pc:spChg chg="add mod">
-          <ac:chgData name="Gillett, Richard" userId="f751afb3-89ee-4adb-bf46-b352b62550b4" providerId="ADAL" clId="{A5BB3A64-C60C-45E9-BAE7-11B96E1E2D18}" dt="2026-01-14T04:51:40.863" v="101" actId="122"/>
-          <ac:spMkLst>
-            <pc:docMk/>
-            <pc:sldMasterMk cId="2640799190" sldId="2147483660"/>
-            <ac:spMk id="13" creationId="{68726AF4-FDF9-481F-5FAC-5D44970F8F1A}"/>
-          </ac:spMkLst>
-        </pc:spChg>
-        <pc:spChg chg="add mod">
-          <ac:chgData name="Gillett, Richard" userId="f751afb3-89ee-4adb-bf46-b352b62550b4" providerId="ADAL" clId="{A5BB3A64-C60C-45E9-BAE7-11B96E1E2D18}" dt="2026-02-05T07:26:13.627" v="547" actId="20577"/>
-          <ac:spMkLst>
-            <pc:docMk/>
-            <pc:sldMasterMk cId="2640799190" sldId="2147483660"/>
-            <ac:spMk id="15" creationId="{0A8B2BEF-EC4A-AACD-7AC0-27A940353D18}"/>
-          </ac:spMkLst>
-        </pc:spChg>
-        <pc:spChg chg="add mod">
-          <ac:chgData name="Gillett, Richard" userId="f751afb3-89ee-4adb-bf46-b352b62550b4" providerId="ADAL" clId="{A5BB3A64-C60C-45E9-BAE7-11B96E1E2D18}" dt="2026-01-14T12:51:35.569" v="348" actId="1038"/>
-          <ac:spMkLst>
-            <pc:docMk/>
-            <pc:sldMasterMk cId="2640799190" sldId="2147483660"/>
-            <ac:spMk id="16" creationId="{2AB87B99-53BD-A3E1-EC73-2148133BEA33}"/>
-          </ac:spMkLst>
-        </pc:spChg>
-        <pc:grpChg chg="mod">
-          <ac:chgData name="Gillett, Richard" userId="f751afb3-89ee-4adb-bf46-b352b62550b4" providerId="ADAL" clId="{A5BB3A64-C60C-45E9-BAE7-11B96E1E2D18}" dt="2026-01-20T23:46:41.004" v="450" actId="1037"/>
-          <ac:grpSpMkLst>
-            <pc:docMk/>
-            <pc:sldMasterMk cId="2640799190" sldId="2147483660"/>
-            <ac:grpSpMk id="3" creationId="{8DD6D3AA-4BA7-8A63-733C-C14EAA9FDEB7}"/>
-          </ac:grpSpMkLst>
-        </pc:grpChg>
-        <pc:picChg chg="add mod">
-          <ac:chgData name="Gillett, Richard" userId="f751afb3-89ee-4adb-bf46-b352b62550b4" providerId="ADAL" clId="{A5BB3A64-C60C-45E9-BAE7-11B96E1E2D18}" dt="2026-01-14T04:49:02.755" v="62"/>
-          <ac:picMkLst>
-            <pc:docMk/>
-            <pc:sldMasterMk cId="2640799190" sldId="2147483660"/>
-            <ac:picMk id="8" creationId="{FC50643C-7F7A-970E-D291-1F4400B91FB4}"/>
-          </ac:picMkLst>
-        </pc:picChg>
-        <pc:picChg chg="add mod">
-          <ac:chgData name="Gillett, Richard" userId="f751afb3-89ee-4adb-bf46-b352b62550b4" providerId="ADAL" clId="{A5BB3A64-C60C-45E9-BAE7-11B96E1E2D18}" dt="2026-01-14T04:49:02.755" v="62"/>
-          <ac:picMkLst>
-            <pc:docMk/>
-            <pc:sldMasterMk cId="2640799190" sldId="2147483660"/>
-            <ac:picMk id="11" creationId="{5431439A-A48B-90A9-75ED-DBECEC227C72}"/>
-          </ac:picMkLst>
-        </pc:picChg>
-        <pc:picChg chg="add mod modCrop">
-          <ac:chgData name="Gillett, Richard" userId="f751afb3-89ee-4adb-bf46-b352b62550b4" providerId="ADAL" clId="{A5BB3A64-C60C-45E9-BAE7-11B96E1E2D18}" dt="2026-01-14T12:53:03.702" v="362" actId="1037"/>
-          <ac:picMkLst>
-            <pc:docMk/>
-            <pc:sldMasterMk cId="2640799190" sldId="2147483660"/>
-            <ac:picMk id="18" creationId="{CA3877DB-6975-A75F-DBFC-236D4FEC401C}"/>
-          </ac:picMkLst>
-        </pc:picChg>
         <pc:sldLayoutChg chg="addSp delSp modSp mod">
           <pc:chgData name="Gillett, Richard" userId="f751afb3-89ee-4adb-bf46-b352b62550b4" providerId="ADAL" clId="{A5BB3A64-C60C-45E9-BAE7-11B96E1E2D18}" dt="2026-01-20T23:56:46.184" v="545" actId="962"/>
           <pc:sldLayoutMkLst>
@@ -301,204 +356,6 @@
             <pc:sldMasterMk cId="2640799190" sldId="2147483660"/>
             <pc:sldLayoutMk cId="1363397331" sldId="2147483661"/>
           </pc:sldLayoutMkLst>
-          <pc:spChg chg="add mod">
-            <ac:chgData name="Gillett, Richard" userId="f751afb3-89ee-4adb-bf46-b352b62550b4" providerId="ADAL" clId="{A5BB3A64-C60C-45E9-BAE7-11B96E1E2D18}" dt="2026-01-14T09:54:56.492" v="245" actId="122"/>
-            <ac:spMkLst>
-              <pc:docMk/>
-              <pc:sldMasterMk cId="2640799190" sldId="2147483660"/>
-              <pc:sldLayoutMk cId="1363397331" sldId="2147483661"/>
-              <ac:spMk id="2" creationId="{4EA715C1-D099-5522-9B8D-6FE225FA3DB4}"/>
-            </ac:spMkLst>
-          </pc:spChg>
-          <pc:spChg chg="add mod">
-            <ac:chgData name="Gillett, Richard" userId="f751afb3-89ee-4adb-bf46-b352b62550b4" providerId="ADAL" clId="{A5BB3A64-C60C-45E9-BAE7-11B96E1E2D18}" dt="2026-01-20T23:56:46.184" v="545" actId="962"/>
-            <ac:spMkLst>
-              <pc:docMk/>
-              <pc:sldMasterMk cId="2640799190" sldId="2147483660"/>
-              <pc:sldLayoutMk cId="1363397331" sldId="2147483661"/>
-              <ac:spMk id="5" creationId="{C71ECDB7-514B-3457-61EC-0EDD81FFB2F9}"/>
-            </ac:spMkLst>
-          </pc:spChg>
-          <pc:spChg chg="mod">
-            <ac:chgData name="Gillett, Richard" userId="f751afb3-89ee-4adb-bf46-b352b62550b4" providerId="ADAL" clId="{A5BB3A64-C60C-45E9-BAE7-11B96E1E2D18}" dt="2026-01-20T23:50:54.556" v="524" actId="1038"/>
-            <ac:spMkLst>
-              <pc:docMk/>
-              <pc:sldMasterMk cId="2640799190" sldId="2147483660"/>
-              <pc:sldLayoutMk cId="1363397331" sldId="2147483661"/>
-              <ac:spMk id="15" creationId="{0CFD3C25-6057-A68F-D7E4-8752A2F67E93}"/>
-            </ac:spMkLst>
-          </pc:spChg>
-          <pc:spChg chg="mod">
-            <ac:chgData name="Gillett, Richard" userId="f751afb3-89ee-4adb-bf46-b352b62550b4" providerId="ADAL" clId="{A5BB3A64-C60C-45E9-BAE7-11B96E1E2D18}" dt="2026-01-20T23:50:49.283" v="512" actId="1037"/>
-            <ac:spMkLst>
-              <pc:docMk/>
-              <pc:sldMasterMk cId="2640799190" sldId="2147483660"/>
-              <pc:sldLayoutMk cId="1363397331" sldId="2147483661"/>
-              <ac:spMk id="21" creationId="{8E7B100D-340E-CDEA-8F6B-7FDE741C252A}"/>
-            </ac:spMkLst>
-          </pc:spChg>
-          <pc:spChg chg="mod">
-            <ac:chgData name="Gillett, Richard" userId="f751afb3-89ee-4adb-bf46-b352b62550b4" providerId="ADAL" clId="{A5BB3A64-C60C-45E9-BAE7-11B96E1E2D18}" dt="2026-01-14T04:45:07.872" v="47" actId="1076"/>
-            <ac:spMkLst>
-              <pc:docMk/>
-              <pc:sldMasterMk cId="2640799190" sldId="2147483660"/>
-              <pc:sldLayoutMk cId="1363397331" sldId="2147483661"/>
-              <ac:spMk id="22" creationId="{A79E2BBB-6172-9A7B-B7D2-88173061667A}"/>
-            </ac:spMkLst>
-          </pc:spChg>
-          <pc:spChg chg="mod">
-            <ac:chgData name="Gillett, Richard" userId="f751afb3-89ee-4adb-bf46-b352b62550b4" providerId="ADAL" clId="{A5BB3A64-C60C-45E9-BAE7-11B96E1E2D18}" dt="2026-01-20T23:51:06.490" v="544" actId="1038"/>
-            <ac:spMkLst>
-              <pc:docMk/>
-              <pc:sldMasterMk cId="2640799190" sldId="2147483660"/>
-              <pc:sldLayoutMk cId="1363397331" sldId="2147483661"/>
-              <ac:spMk id="37" creationId="{814A0012-CF31-67AE-4E97-AA42CBE2A6AE}"/>
-            </ac:spMkLst>
-          </pc:spChg>
-          <pc:spChg chg="mod">
-            <ac:chgData name="Gillett, Richard" userId="f751afb3-89ee-4adb-bf46-b352b62550b4" providerId="ADAL" clId="{A5BB3A64-C60C-45E9-BAE7-11B96E1E2D18}" dt="2026-01-20T23:50:49.283" v="512" actId="1037"/>
-            <ac:spMkLst>
-              <pc:docMk/>
-              <pc:sldMasterMk cId="2640799190" sldId="2147483660"/>
-              <pc:sldLayoutMk cId="1363397331" sldId="2147483661"/>
-              <ac:spMk id="38" creationId="{D56FA25C-826C-AEF5-957C-F09DBE615CC2}"/>
-            </ac:spMkLst>
-          </pc:spChg>
-          <pc:spChg chg="mod">
-            <ac:chgData name="Gillett, Richard" userId="f751afb3-89ee-4adb-bf46-b352b62550b4" providerId="ADAL" clId="{A5BB3A64-C60C-45E9-BAE7-11B96E1E2D18}" dt="2026-01-20T23:51:03.260" v="541" actId="1037"/>
-            <ac:spMkLst>
-              <pc:docMk/>
-              <pc:sldMasterMk cId="2640799190" sldId="2147483660"/>
-              <pc:sldLayoutMk cId="1363397331" sldId="2147483661"/>
-              <ac:spMk id="39" creationId="{2BD6D79E-3784-39A1-5BE0-598EDD61CF3D}"/>
-            </ac:spMkLst>
-          </pc:spChg>
-          <pc:spChg chg="mod">
-            <ac:chgData name="Gillett, Richard" userId="f751afb3-89ee-4adb-bf46-b352b62550b4" providerId="ADAL" clId="{A5BB3A64-C60C-45E9-BAE7-11B96E1E2D18}" dt="2026-01-20T23:47:26.475" v="451" actId="255"/>
-            <ac:spMkLst>
-              <pc:docMk/>
-              <pc:sldMasterMk cId="2640799190" sldId="2147483660"/>
-              <pc:sldLayoutMk cId="1363397331" sldId="2147483661"/>
-              <ac:spMk id="40" creationId="{3AAC2047-1448-EBFC-6433-602F17048C37}"/>
-            </ac:spMkLst>
-          </pc:spChg>
-          <pc:spChg chg="mod">
-            <ac:chgData name="Gillett, Richard" userId="f751afb3-89ee-4adb-bf46-b352b62550b4" providerId="ADAL" clId="{A5BB3A64-C60C-45E9-BAE7-11B96E1E2D18}" dt="2026-01-20T23:47:26.475" v="451" actId="255"/>
-            <ac:spMkLst>
-              <pc:docMk/>
-              <pc:sldMasterMk cId="2640799190" sldId="2147483660"/>
-              <pc:sldLayoutMk cId="1363397331" sldId="2147483661"/>
-              <ac:spMk id="41" creationId="{D4F00C51-9060-7169-179B-F541DAFC0C7E}"/>
-            </ac:spMkLst>
-          </pc:spChg>
-          <pc:spChg chg="mod">
-            <ac:chgData name="Gillett, Richard" userId="f751afb3-89ee-4adb-bf46-b352b62550b4" providerId="ADAL" clId="{A5BB3A64-C60C-45E9-BAE7-11B96E1E2D18}" dt="2026-01-20T23:50:54.556" v="524" actId="1038"/>
-            <ac:spMkLst>
-              <pc:docMk/>
-              <pc:sldMasterMk cId="2640799190" sldId="2147483660"/>
-              <pc:sldLayoutMk cId="1363397331" sldId="2147483661"/>
-              <ac:spMk id="42" creationId="{EF9CBF36-A38B-ED1E-AFAF-CEAD51735C04}"/>
-            </ac:spMkLst>
-          </pc:spChg>
-          <pc:spChg chg="mod">
-            <ac:chgData name="Gillett, Richard" userId="f751afb3-89ee-4adb-bf46-b352b62550b4" providerId="ADAL" clId="{A5BB3A64-C60C-45E9-BAE7-11B96E1E2D18}" dt="2026-01-14T12:54:25.126" v="369" actId="242"/>
-            <ac:spMkLst>
-              <pc:docMk/>
-              <pc:sldMasterMk cId="2640799190" sldId="2147483660"/>
-              <pc:sldLayoutMk cId="1363397331" sldId="2147483661"/>
-              <ac:spMk id="43" creationId="{CDBAF79C-1ECD-4077-B693-FAA616F38BB3}"/>
-            </ac:spMkLst>
-          </pc:spChg>
-          <pc:spChg chg="mod">
-            <ac:chgData name="Gillett, Richard" userId="f751afb3-89ee-4adb-bf46-b352b62550b4" providerId="ADAL" clId="{A5BB3A64-C60C-45E9-BAE7-11B96E1E2D18}" dt="2026-01-20T23:46:31.115" v="434" actId="1037"/>
-            <ac:spMkLst>
-              <pc:docMk/>
-              <pc:sldMasterMk cId="2640799190" sldId="2147483660"/>
-              <pc:sldLayoutMk cId="1363397331" sldId="2147483661"/>
-              <ac:spMk id="44" creationId="{0E14B21D-632D-7EFD-12FE-450DCBD0C24C}"/>
-            </ac:spMkLst>
-          </pc:spChg>
-          <pc:spChg chg="mod">
-            <ac:chgData name="Gillett, Richard" userId="f751afb3-89ee-4adb-bf46-b352b62550b4" providerId="ADAL" clId="{A5BB3A64-C60C-45E9-BAE7-11B96E1E2D18}" dt="2026-01-14T08:58:47.802" v="210" actId="114"/>
-            <ac:spMkLst>
-              <pc:docMk/>
-              <pc:sldMasterMk cId="2640799190" sldId="2147483660"/>
-              <pc:sldLayoutMk cId="1363397331" sldId="2147483661"/>
-              <ac:spMk id="45" creationId="{CFA66B11-7F54-5482-663D-8B6227A02FBD}"/>
-            </ac:spMkLst>
-          </pc:spChg>
-          <pc:spChg chg="mod">
-            <ac:chgData name="Gillett, Richard" userId="f751afb3-89ee-4adb-bf46-b352b62550b4" providerId="ADAL" clId="{A5BB3A64-C60C-45E9-BAE7-11B96E1E2D18}" dt="2026-01-20T23:50:00.509" v="479" actId="6549"/>
-            <ac:spMkLst>
-              <pc:docMk/>
-              <pc:sldMasterMk cId="2640799190" sldId="2147483660"/>
-              <pc:sldLayoutMk cId="1363397331" sldId="2147483661"/>
-              <ac:spMk id="46" creationId="{6C6C5E27-B920-6468-D3D0-CF1BF1645A0B}"/>
-            </ac:spMkLst>
-          </pc:spChg>
-          <pc:spChg chg="mod">
-            <ac:chgData name="Gillett, Richard" userId="f751afb3-89ee-4adb-bf46-b352b62550b4" providerId="ADAL" clId="{A5BB3A64-C60C-45E9-BAE7-11B96E1E2D18}" dt="2026-01-14T04:44:57.124" v="46" actId="1076"/>
-            <ac:spMkLst>
-              <pc:docMk/>
-              <pc:sldMasterMk cId="2640799190" sldId="2147483660"/>
-              <pc:sldLayoutMk cId="1363397331" sldId="2147483661"/>
-              <ac:spMk id="47" creationId="{B1F62D07-2195-698B-2714-154E4501E4EB}"/>
-            </ac:spMkLst>
-          </pc:spChg>
-          <pc:spChg chg="mod">
-            <ac:chgData name="Gillett, Richard" userId="f751afb3-89ee-4adb-bf46-b352b62550b4" providerId="ADAL" clId="{A5BB3A64-C60C-45E9-BAE7-11B96E1E2D18}" dt="2026-01-20T23:50:49.283" v="512" actId="1037"/>
-            <ac:spMkLst>
-              <pc:docMk/>
-              <pc:sldMasterMk cId="2640799190" sldId="2147483660"/>
-              <pc:sldLayoutMk cId="1363397331" sldId="2147483661"/>
-              <ac:spMk id="49" creationId="{1FE6F18A-7157-4F0B-5E13-82B5E30007F4}"/>
-            </ac:spMkLst>
-          </pc:spChg>
-          <pc:spChg chg="mod">
-            <ac:chgData name="Gillett, Richard" userId="f751afb3-89ee-4adb-bf46-b352b62550b4" providerId="ADAL" clId="{A5BB3A64-C60C-45E9-BAE7-11B96E1E2D18}" dt="2026-01-20T23:50:54.556" v="524" actId="1038"/>
-            <ac:spMkLst>
-              <pc:docMk/>
-              <pc:sldMasterMk cId="2640799190" sldId="2147483660"/>
-              <pc:sldLayoutMk cId="1363397331" sldId="2147483661"/>
-              <ac:spMk id="50" creationId="{A8C0D454-B653-61F4-5751-F6813F0ADF7C}"/>
-            </ac:spMkLst>
-          </pc:spChg>
-          <pc:picChg chg="add mod modCrop">
-            <ac:chgData name="Gillett, Richard" userId="f751afb3-89ee-4adb-bf46-b352b62550b4" providerId="ADAL" clId="{A5BB3A64-C60C-45E9-BAE7-11B96E1E2D18}" dt="2026-01-14T08:57:56.993" v="155" actId="1076"/>
-            <ac:picMkLst>
-              <pc:docMk/>
-              <pc:sldMasterMk cId="2640799190" sldId="2147483660"/>
-              <pc:sldLayoutMk cId="1363397331" sldId="2147483661"/>
-              <ac:picMk id="3" creationId="{9498E89D-FFFB-BD02-CB4A-C6AF63419FA9}"/>
-            </ac:picMkLst>
-          </pc:picChg>
-          <pc:picChg chg="add mod ord">
-            <ac:chgData name="Gillett, Richard" userId="f751afb3-89ee-4adb-bf46-b352b62550b4" providerId="ADAL" clId="{A5BB3A64-C60C-45E9-BAE7-11B96E1E2D18}" dt="2026-01-20T23:50:43.648" v="502" actId="14100"/>
-            <ac:picMkLst>
-              <pc:docMk/>
-              <pc:sldMasterMk cId="2640799190" sldId="2147483660"/>
-              <pc:sldLayoutMk cId="1363397331" sldId="2147483661"/>
-              <ac:picMk id="6" creationId="{5F294ACB-2AAB-53EB-3D12-B7F8668F3ED8}"/>
-            </ac:picMkLst>
-          </pc:picChg>
-          <pc:picChg chg="mod">
-            <ac:chgData name="Gillett, Richard" userId="f751afb3-89ee-4adb-bf46-b352b62550b4" providerId="ADAL" clId="{A5BB3A64-C60C-45E9-BAE7-11B96E1E2D18}" dt="2026-01-20T23:50:54.556" v="524" actId="1038"/>
-            <ac:picMkLst>
-              <pc:docMk/>
-              <pc:sldMasterMk cId="2640799190" sldId="2147483660"/>
-              <pc:sldLayoutMk cId="1363397331" sldId="2147483661"/>
-              <ac:picMk id="96" creationId="{45022D99-4D6F-EC4D-B596-181CE3D268A0}"/>
-            </ac:picMkLst>
-          </pc:picChg>
-          <pc:picChg chg="mod">
-            <ac:chgData name="Gillett, Richard" userId="f751afb3-89ee-4adb-bf46-b352b62550b4" providerId="ADAL" clId="{A5BB3A64-C60C-45E9-BAE7-11B96E1E2D18}" dt="2026-01-20T23:50:49.283" v="512" actId="1037"/>
-            <ac:picMkLst>
-              <pc:docMk/>
-              <pc:sldMasterMk cId="2640799190" sldId="2147483660"/>
-              <pc:sldLayoutMk cId="1363397331" sldId="2147483661"/>
-              <ac:picMk id="2075" creationId="{541A6AC7-D175-3548-67FC-DC5600EFAB59}"/>
-            </ac:picMkLst>
-          </pc:picChg>
         </pc:sldLayoutChg>
       </pc:sldMasterChg>
     </pc:docChg>
@@ -537,14 +394,6 @@
           <pc:docMk/>
           <pc:sldMk cId="4050248657" sldId="258"/>
         </pc:sldMkLst>
-        <pc:spChg chg="mod">
-          <ac:chgData name="Gillett, Richard" userId="f751afb3-89ee-4adb-bf46-b352b62550b4" providerId="ADAL" clId="{DEA488FC-94AF-4063-9B1C-28C28240276E}" dt="2025-12-15T12:39:28.813" v="689" actId="1076"/>
-          <ac:spMkLst>
-            <pc:docMk/>
-            <pc:sldMk cId="4050248657" sldId="258"/>
-            <ac:spMk id="4" creationId="{363DA828-FFB0-A7BA-2F8B-AF0D49FEE4F3}"/>
-          </ac:spMkLst>
-        </pc:spChg>
       </pc:sldChg>
       <pc:sldMasterChg chg="addSp delSp modSp mod modSldLayout">
         <pc:chgData name="Gillett, Richard" userId="f751afb3-89ee-4adb-bf46-b352b62550b4" providerId="ADAL" clId="{DEA488FC-94AF-4063-9B1C-28C28240276E}" dt="2025-12-29T12:30:10.729" v="2709" actId="6549"/>
@@ -552,14 +401,6 @@
           <pc:docMk/>
           <pc:sldMasterMk cId="2640799190" sldId="2147483660"/>
         </pc:sldMasterMkLst>
-        <pc:spChg chg="add mod">
-          <ac:chgData name="Gillett, Richard" userId="f751afb3-89ee-4adb-bf46-b352b62550b4" providerId="ADAL" clId="{DEA488FC-94AF-4063-9B1C-28C28240276E}" dt="2025-12-29T12:30:10.729" v="2709" actId="6549"/>
-          <ac:spMkLst>
-            <pc:docMk/>
-            <pc:sldMasterMk cId="2640799190" sldId="2147483660"/>
-            <ac:spMk id="14" creationId="{465D00C7-B8A6-3024-4A5D-41B448AA8CD8}"/>
-          </ac:spMkLst>
-        </pc:spChg>
         <pc:sldLayoutChg chg="addSp delSp modSp mod">
           <pc:chgData name="Gillett, Richard" userId="f751afb3-89ee-4adb-bf46-b352b62550b4" providerId="ADAL" clId="{DEA488FC-94AF-4063-9B1C-28C28240276E}" dt="2025-12-29T12:11:39.590" v="2678" actId="1036"/>
           <pc:sldLayoutMkLst>
@@ -771,669 +612,6 @@
             <pc:docMk/>
             <pc:sldMasterMk cId="3317877594" sldId="2147483662"/>
             <pc:sldLayoutMk cId="2071558585" sldId="2147483663"/>
-          </pc:sldLayoutMkLst>
-        </pc:sldLayoutChg>
-      </pc:sldMasterChg>
-    </pc:docChg>
-  </pc:docChgLst>
-  <pc:docChgLst>
-    <pc:chgData name="Gillett, Richard" userId="f751afb3-89ee-4adb-bf46-b352b62550b4" providerId="ADAL" clId="{E1DC7D8A-5337-4AAE-9935-D0A80B248513}"/>
-    <pc:docChg chg="undo redo custSel modSld addMainMaster delMainMaster modMainMaster">
-      <pc:chgData name="Gillett, Richard" userId="f751afb3-89ee-4adb-bf46-b352b62550b4" providerId="ADAL" clId="{E1DC7D8A-5337-4AAE-9935-D0A80B248513}" dt="2026-01-13T09:39:19.990" v="1024" actId="14100"/>
-      <pc:docMkLst>
-        <pc:docMk/>
-      </pc:docMkLst>
-      <pc:sldChg chg="modSp mod">
-        <pc:chgData name="Gillett, Richard" userId="f751afb3-89ee-4adb-bf46-b352b62550b4" providerId="ADAL" clId="{E1DC7D8A-5337-4AAE-9935-D0A80B248513}" dt="2026-01-13T09:39:19.990" v="1024" actId="14100"/>
-        <pc:sldMkLst>
-          <pc:docMk/>
-          <pc:sldMk cId="4050248657" sldId="258"/>
-        </pc:sldMkLst>
-        <pc:spChg chg="mod">
-          <ac:chgData name="Gillett, Richard" userId="f751afb3-89ee-4adb-bf46-b352b62550b4" providerId="ADAL" clId="{E1DC7D8A-5337-4AAE-9935-D0A80B248513}" dt="2026-01-08T00:11:26.816" v="310" actId="478"/>
-          <ac:spMkLst>
-            <pc:docMk/>
-            <pc:sldMk cId="4050248657" sldId="258"/>
-            <ac:spMk id="2" creationId="{F4F36A85-40C1-99E5-A3BA-3666774AE73E}"/>
-          </ac:spMkLst>
-        </pc:spChg>
-        <pc:spChg chg="mod">
-          <ac:chgData name="Gillett, Richard" userId="f751afb3-89ee-4adb-bf46-b352b62550b4" providerId="ADAL" clId="{E1DC7D8A-5337-4AAE-9935-D0A80B248513}" dt="2026-01-08T00:11:26.816" v="310" actId="478"/>
-          <ac:spMkLst>
-            <pc:docMk/>
-            <pc:sldMk cId="4050248657" sldId="258"/>
-            <ac:spMk id="5" creationId="{6CF5C07D-A98D-DF62-0C9B-BAA4238D66ED}"/>
-          </ac:spMkLst>
-        </pc:spChg>
-        <pc:spChg chg="mod">
-          <ac:chgData name="Gillett, Richard" userId="f751afb3-89ee-4adb-bf46-b352b62550b4" providerId="ADAL" clId="{E1DC7D8A-5337-4AAE-9935-D0A80B248513}" dt="2026-01-08T00:11:26.816" v="310" actId="478"/>
-          <ac:spMkLst>
-            <pc:docMk/>
-            <pc:sldMk cId="4050248657" sldId="258"/>
-            <ac:spMk id="6" creationId="{4D0EF5F5-7D75-0122-641F-0ACF5C0197B5}"/>
-          </ac:spMkLst>
-        </pc:spChg>
-        <pc:spChg chg="mod">
-          <ac:chgData name="Gillett, Richard" userId="f751afb3-89ee-4adb-bf46-b352b62550b4" providerId="ADAL" clId="{E1DC7D8A-5337-4AAE-9935-D0A80B248513}" dt="2026-01-08T00:11:26.816" v="310" actId="478"/>
-          <ac:spMkLst>
-            <pc:docMk/>
-            <pc:sldMk cId="4050248657" sldId="258"/>
-            <ac:spMk id="7" creationId="{62D50CFE-DF50-09A4-5E58-2ABFD4312156}"/>
-          </ac:spMkLst>
-        </pc:spChg>
-        <pc:spChg chg="mod">
-          <ac:chgData name="Gillett, Richard" userId="f751afb3-89ee-4adb-bf46-b352b62550b4" providerId="ADAL" clId="{E1DC7D8A-5337-4AAE-9935-D0A80B248513}" dt="2026-01-08T00:11:26.816" v="310" actId="478"/>
-          <ac:spMkLst>
-            <pc:docMk/>
-            <pc:sldMk cId="4050248657" sldId="258"/>
-            <ac:spMk id="8" creationId="{9C6C04CB-0A51-4268-896C-ADCF3E056A71}"/>
-          </ac:spMkLst>
-        </pc:spChg>
-        <pc:spChg chg="mod">
-          <ac:chgData name="Gillett, Richard" userId="f751afb3-89ee-4adb-bf46-b352b62550b4" providerId="ADAL" clId="{E1DC7D8A-5337-4AAE-9935-D0A80B248513}" dt="2026-01-13T09:39:19.990" v="1024" actId="14100"/>
-          <ac:spMkLst>
-            <pc:docMk/>
-            <pc:sldMk cId="4050248657" sldId="258"/>
-            <ac:spMk id="9" creationId="{F98833C7-4F68-7FFA-40F5-A320C257F350}"/>
-          </ac:spMkLst>
-        </pc:spChg>
-      </pc:sldChg>
-      <pc:sldMasterChg chg="addSp delSp modSp mod modSldLayout">
-        <pc:chgData name="Gillett, Richard" userId="f751afb3-89ee-4adb-bf46-b352b62550b4" providerId="ADAL" clId="{E1DC7D8A-5337-4AAE-9935-D0A80B248513}" dt="2026-01-13T09:38:14.758" v="1023" actId="1036"/>
-        <pc:sldMasterMkLst>
-          <pc:docMk/>
-          <pc:sldMasterMk cId="2640799190" sldId="2147483660"/>
-        </pc:sldMasterMkLst>
-        <pc:spChg chg="mod">
-          <ac:chgData name="Gillett, Richard" userId="f751afb3-89ee-4adb-bf46-b352b62550b4" providerId="ADAL" clId="{E1DC7D8A-5337-4AAE-9935-D0A80B248513}" dt="2026-01-10T12:08:58.603" v="738" actId="20577"/>
-          <ac:spMkLst>
-            <pc:docMk/>
-            <pc:sldMasterMk cId="2640799190" sldId="2147483660"/>
-            <ac:spMk id="14" creationId="{465D00C7-B8A6-3024-4A5D-41B448AA8CD8}"/>
-          </ac:spMkLst>
-        </pc:spChg>
-        <pc:sldLayoutChg chg="addSp delSp modSp mod">
-          <pc:chgData name="Gillett, Richard" userId="f751afb3-89ee-4adb-bf46-b352b62550b4" providerId="ADAL" clId="{E1DC7D8A-5337-4AAE-9935-D0A80B248513}" dt="2026-01-13T09:37:49.877" v="1013" actId="1035"/>
-          <pc:sldLayoutMkLst>
-            <pc:docMk/>
-            <pc:sldMasterMk cId="2640799190" sldId="2147483660"/>
-            <pc:sldLayoutMk cId="1363397331" sldId="2147483661"/>
-          </pc:sldLayoutMkLst>
-          <pc:spChg chg="add mod">
-            <ac:chgData name="Gillett, Richard" userId="f751afb3-89ee-4adb-bf46-b352b62550b4" providerId="ADAL" clId="{E1DC7D8A-5337-4AAE-9935-D0A80B248513}" dt="2026-01-11T11:57:37.586" v="905" actId="1076"/>
-            <ac:spMkLst>
-              <pc:docMk/>
-              <pc:sldMasterMk cId="2640799190" sldId="2147483660"/>
-              <pc:sldLayoutMk cId="1363397331" sldId="2147483661"/>
-              <ac:spMk id="15" creationId="{0CFD3C25-6057-A68F-D7E4-8752A2F67E93}"/>
-            </ac:spMkLst>
-          </pc:spChg>
-          <pc:spChg chg="mod">
-            <ac:chgData name="Gillett, Richard" userId="f751afb3-89ee-4adb-bf46-b352b62550b4" providerId="ADAL" clId="{E1DC7D8A-5337-4AAE-9935-D0A80B248513}" dt="2026-01-10T11:49:48.696" v="648" actId="1038"/>
-            <ac:spMkLst>
-              <pc:docMk/>
-              <pc:sldMasterMk cId="2640799190" sldId="2147483660"/>
-              <pc:sldLayoutMk cId="1363397331" sldId="2147483661"/>
-              <ac:spMk id="17" creationId="{E153B05D-1487-8051-2ADA-5CCDC9A62160}"/>
-            </ac:spMkLst>
-          </pc:spChg>
-          <pc:spChg chg="add mod">
-            <ac:chgData name="Gillett, Richard" userId="f751afb3-89ee-4adb-bf46-b352b62550b4" providerId="ADAL" clId="{E1DC7D8A-5337-4AAE-9935-D0A80B248513}" dt="2026-01-11T11:56:31.392" v="896" actId="1076"/>
-            <ac:spMkLst>
-              <pc:docMk/>
-              <pc:sldMasterMk cId="2640799190" sldId="2147483660"/>
-              <pc:sldLayoutMk cId="1363397331" sldId="2147483661"/>
-              <ac:spMk id="18" creationId="{F398ED92-E238-6D9E-B3F0-984D6E2E8650}"/>
-            </ac:spMkLst>
-          </pc:spChg>
-          <pc:spChg chg="mod">
-            <ac:chgData name="Gillett, Richard" userId="f751afb3-89ee-4adb-bf46-b352b62550b4" providerId="ADAL" clId="{E1DC7D8A-5337-4AAE-9935-D0A80B248513}" dt="2026-01-10T14:21:05.082" v="891" actId="207"/>
-            <ac:spMkLst>
-              <pc:docMk/>
-              <pc:sldMasterMk cId="2640799190" sldId="2147483660"/>
-              <pc:sldLayoutMk cId="1363397331" sldId="2147483661"/>
-              <ac:spMk id="20" creationId="{4AAEA4BB-C109-28FA-B6A2-6EF5B68D1217}"/>
-            </ac:spMkLst>
-          </pc:spChg>
-          <pc:spChg chg="mod">
-            <ac:chgData name="Gillett, Richard" userId="f751afb3-89ee-4adb-bf46-b352b62550b4" providerId="ADAL" clId="{E1DC7D8A-5337-4AAE-9935-D0A80B248513}" dt="2026-01-11T11:56:38.634" v="897" actId="1076"/>
-            <ac:spMkLst>
-              <pc:docMk/>
-              <pc:sldMasterMk cId="2640799190" sldId="2147483660"/>
-              <pc:sldLayoutMk cId="1363397331" sldId="2147483661"/>
-              <ac:spMk id="21" creationId="{8E7B100D-340E-CDEA-8F6B-7FDE741C252A}"/>
-            </ac:spMkLst>
-          </pc:spChg>
-          <pc:spChg chg="mod">
-            <ac:chgData name="Gillett, Richard" userId="f751afb3-89ee-4adb-bf46-b352b62550b4" providerId="ADAL" clId="{E1DC7D8A-5337-4AAE-9935-D0A80B248513}" dt="2026-01-11T11:57:10.271" v="901" actId="1076"/>
-            <ac:spMkLst>
-              <pc:docMk/>
-              <pc:sldMasterMk cId="2640799190" sldId="2147483660"/>
-              <pc:sldLayoutMk cId="1363397331" sldId="2147483661"/>
-              <ac:spMk id="22" creationId="{A79E2BBB-6172-9A7B-B7D2-88173061667A}"/>
-            </ac:spMkLst>
-          </pc:spChg>
-          <pc:spChg chg="mod">
-            <ac:chgData name="Gillett, Richard" userId="f751afb3-89ee-4adb-bf46-b352b62550b4" providerId="ADAL" clId="{E1DC7D8A-5337-4AAE-9935-D0A80B248513}" dt="2026-01-11T11:56:53.889" v="900" actId="14100"/>
-            <ac:spMkLst>
-              <pc:docMk/>
-              <pc:sldMasterMk cId="2640799190" sldId="2147483660"/>
-              <pc:sldLayoutMk cId="1363397331" sldId="2147483661"/>
-              <ac:spMk id="37" creationId="{814A0012-CF31-67AE-4E97-AA42CBE2A6AE}"/>
-            </ac:spMkLst>
-          </pc:spChg>
-          <pc:spChg chg="add mod">
-            <ac:chgData name="Gillett, Richard" userId="f751afb3-89ee-4adb-bf46-b352b62550b4" providerId="ADAL" clId="{E1DC7D8A-5337-4AAE-9935-D0A80B248513}" dt="2026-01-11T11:56:38.634" v="897" actId="1076"/>
-            <ac:spMkLst>
-              <pc:docMk/>
-              <pc:sldMasterMk cId="2640799190" sldId="2147483660"/>
-              <pc:sldLayoutMk cId="1363397331" sldId="2147483661"/>
-              <ac:spMk id="38" creationId="{D56FA25C-826C-AEF5-957C-F09DBE615CC2}"/>
-            </ac:spMkLst>
-          </pc:spChg>
-          <pc:spChg chg="mod">
-            <ac:chgData name="Gillett, Richard" userId="f751afb3-89ee-4adb-bf46-b352b62550b4" providerId="ADAL" clId="{E1DC7D8A-5337-4AAE-9935-D0A80B248513}" dt="2026-01-10T11:23:37.984" v="633" actId="14100"/>
-            <ac:spMkLst>
-              <pc:docMk/>
-              <pc:sldMasterMk cId="2640799190" sldId="2147483660"/>
-              <pc:sldLayoutMk cId="1363397331" sldId="2147483661"/>
-              <ac:spMk id="39" creationId="{2BD6D79E-3784-39A1-5BE0-598EDD61CF3D}"/>
-            </ac:spMkLst>
-          </pc:spChg>
-          <pc:spChg chg="add mod">
-            <ac:chgData name="Gillett, Richard" userId="f751afb3-89ee-4adb-bf46-b352b62550b4" providerId="ADAL" clId="{E1DC7D8A-5337-4AAE-9935-D0A80B248513}" dt="2026-01-10T11:21:39.576" v="625" actId="1076"/>
-            <ac:spMkLst>
-              <pc:docMk/>
-              <pc:sldMasterMk cId="2640799190" sldId="2147483660"/>
-              <pc:sldLayoutMk cId="1363397331" sldId="2147483661"/>
-              <ac:spMk id="40" creationId="{3AAC2047-1448-EBFC-6433-602F17048C37}"/>
-            </ac:spMkLst>
-          </pc:spChg>
-          <pc:spChg chg="mod">
-            <ac:chgData name="Gillett, Richard" userId="f751afb3-89ee-4adb-bf46-b352b62550b4" providerId="ADAL" clId="{E1DC7D8A-5337-4AAE-9935-D0A80B248513}" dt="2026-01-11T11:57:10.271" v="901" actId="1076"/>
-            <ac:spMkLst>
-              <pc:docMk/>
-              <pc:sldMasterMk cId="2640799190" sldId="2147483660"/>
-              <pc:sldLayoutMk cId="1363397331" sldId="2147483661"/>
-              <ac:spMk id="41" creationId="{D4F00C51-9060-7169-179B-F541DAFC0C7E}"/>
-            </ac:spMkLst>
-          </pc:spChg>
-          <pc:spChg chg="add mod">
-            <ac:chgData name="Gillett, Richard" userId="f751afb3-89ee-4adb-bf46-b352b62550b4" providerId="ADAL" clId="{E1DC7D8A-5337-4AAE-9935-D0A80B248513}" dt="2026-01-11T11:57:37.586" v="905" actId="1076"/>
-            <ac:spMkLst>
-              <pc:docMk/>
-              <pc:sldMasterMk cId="2640799190" sldId="2147483660"/>
-              <pc:sldLayoutMk cId="1363397331" sldId="2147483661"/>
-              <ac:spMk id="42" creationId="{EF9CBF36-A38B-ED1E-AFAF-CEAD51735C04}"/>
-            </ac:spMkLst>
-          </pc:spChg>
-          <pc:spChg chg="add mod">
-            <ac:chgData name="Gillett, Richard" userId="f751afb3-89ee-4adb-bf46-b352b62550b4" providerId="ADAL" clId="{E1DC7D8A-5337-4AAE-9935-D0A80B248513}" dt="2026-01-13T09:37:43.132" v="1008" actId="1076"/>
-            <ac:spMkLst>
-              <pc:docMk/>
-              <pc:sldMasterMk cId="2640799190" sldId="2147483660"/>
-              <pc:sldLayoutMk cId="1363397331" sldId="2147483661"/>
-              <ac:spMk id="43" creationId="{CDBAF79C-1ECD-4077-B693-FAA616F38BB3}"/>
-            </ac:spMkLst>
-          </pc:spChg>
-          <pc:spChg chg="add mod">
-            <ac:chgData name="Gillett, Richard" userId="f751afb3-89ee-4adb-bf46-b352b62550b4" providerId="ADAL" clId="{E1DC7D8A-5337-4AAE-9935-D0A80B248513}" dt="2026-01-08T00:11:36.732" v="312"/>
-            <ac:spMkLst>
-              <pc:docMk/>
-              <pc:sldMasterMk cId="2640799190" sldId="2147483660"/>
-              <pc:sldLayoutMk cId="1363397331" sldId="2147483661"/>
-              <ac:spMk id="45" creationId="{CFA66B11-7F54-5482-663D-8B6227A02FBD}"/>
-            </ac:spMkLst>
-          </pc:spChg>
-          <pc:spChg chg="mod">
-            <ac:chgData name="Gillett, Richard" userId="f751afb3-89ee-4adb-bf46-b352b62550b4" providerId="ADAL" clId="{E1DC7D8A-5337-4AAE-9935-D0A80B248513}" dt="2026-01-10T11:49:59.285" v="653" actId="14100"/>
-            <ac:spMkLst>
-              <pc:docMk/>
-              <pc:sldMasterMk cId="2640799190" sldId="2147483660"/>
-              <pc:sldLayoutMk cId="1363397331" sldId="2147483661"/>
-              <ac:spMk id="46" creationId="{6C6C5E27-B920-6468-D3D0-CF1BF1645A0B}"/>
-            </ac:spMkLst>
-          </pc:spChg>
-          <pc:spChg chg="mod">
-            <ac:chgData name="Gillett, Richard" userId="f751afb3-89ee-4adb-bf46-b352b62550b4" providerId="ADAL" clId="{E1DC7D8A-5337-4AAE-9935-D0A80B248513}" dt="2026-01-11T11:57:10.271" v="901" actId="1076"/>
-            <ac:spMkLst>
-              <pc:docMk/>
-              <pc:sldMasterMk cId="2640799190" sldId="2147483660"/>
-              <pc:sldLayoutMk cId="1363397331" sldId="2147483661"/>
-              <ac:spMk id="47" creationId="{B1F62D07-2195-698B-2714-154E4501E4EB}"/>
-            </ac:spMkLst>
-          </pc:spChg>
-          <pc:spChg chg="add mod">
-            <ac:chgData name="Gillett, Richard" userId="f751afb3-89ee-4adb-bf46-b352b62550b4" providerId="ADAL" clId="{E1DC7D8A-5337-4AAE-9935-D0A80B248513}" dt="2026-01-11T11:57:21.551" v="902" actId="1076"/>
-            <ac:spMkLst>
-              <pc:docMk/>
-              <pc:sldMasterMk cId="2640799190" sldId="2147483660"/>
-              <pc:sldLayoutMk cId="1363397331" sldId="2147483661"/>
-              <ac:spMk id="48" creationId="{7BD5F46B-2231-6D01-C514-F696C7DDE546}"/>
-            </ac:spMkLst>
-          </pc:spChg>
-          <pc:spChg chg="mod">
-            <ac:chgData name="Gillett, Richard" userId="f751afb3-89ee-4adb-bf46-b352b62550b4" providerId="ADAL" clId="{E1DC7D8A-5337-4AAE-9935-D0A80B248513}" dt="2026-01-11T11:56:38.634" v="897" actId="1076"/>
-            <ac:spMkLst>
-              <pc:docMk/>
-              <pc:sldMasterMk cId="2640799190" sldId="2147483660"/>
-              <pc:sldLayoutMk cId="1363397331" sldId="2147483661"/>
-              <ac:spMk id="49" creationId="{1FE6F18A-7157-4F0B-5E13-82B5E30007F4}"/>
-            </ac:spMkLst>
-          </pc:spChg>
-          <pc:spChg chg="add mod">
-            <ac:chgData name="Gillett, Richard" userId="f751afb3-89ee-4adb-bf46-b352b62550b4" providerId="ADAL" clId="{E1DC7D8A-5337-4AAE-9935-D0A80B248513}" dt="2026-01-11T11:57:37.586" v="905" actId="1076"/>
-            <ac:spMkLst>
-              <pc:docMk/>
-              <pc:sldMasterMk cId="2640799190" sldId="2147483660"/>
-              <pc:sldLayoutMk cId="1363397331" sldId="2147483661"/>
-              <ac:spMk id="50" creationId="{A8C0D454-B653-61F4-5751-F6813F0ADF7C}"/>
-            </ac:spMkLst>
-          </pc:spChg>
-          <pc:spChg chg="add mod">
-            <ac:chgData name="Gillett, Richard" userId="f751afb3-89ee-4adb-bf46-b352b62550b4" providerId="ADAL" clId="{E1DC7D8A-5337-4AAE-9935-D0A80B248513}" dt="2026-01-10T14:21:25.302" v="893" actId="207"/>
-            <ac:spMkLst>
-              <pc:docMk/>
-              <pc:sldMasterMk cId="2640799190" sldId="2147483660"/>
-              <pc:sldLayoutMk cId="1363397331" sldId="2147483661"/>
-              <ac:spMk id="51" creationId="{BD10F3DD-814C-87B1-F3BC-B6770621C718}"/>
-            </ac:spMkLst>
-          </pc:spChg>
-          <pc:picChg chg="add mod ord">
-            <ac:chgData name="Gillett, Richard" userId="f751afb3-89ee-4adb-bf46-b352b62550b4" providerId="ADAL" clId="{E1DC7D8A-5337-4AAE-9935-D0A80B248513}" dt="2026-01-10T14:21:10.907" v="892" actId="1076"/>
-            <ac:picMkLst>
-              <pc:docMk/>
-              <pc:sldMasterMk cId="2640799190" sldId="2147483660"/>
-              <pc:sldLayoutMk cId="1363397331" sldId="2147483661"/>
-              <ac:picMk id="14" creationId="{E8591D62-F0EC-DF4B-55A0-003CBCE760CC}"/>
-            </ac:picMkLst>
-          </pc:picChg>
-          <pc:picChg chg="mod">
-            <ac:chgData name="Gillett, Richard" userId="f751afb3-89ee-4adb-bf46-b352b62550b4" providerId="ADAL" clId="{E1DC7D8A-5337-4AAE-9935-D0A80B248513}" dt="2026-01-10T11:49:48.696" v="648" actId="1038"/>
-            <ac:picMkLst>
-              <pc:docMk/>
-              <pc:sldMasterMk cId="2640799190" sldId="2147483660"/>
-              <pc:sldLayoutMk cId="1363397331" sldId="2147483661"/>
-              <ac:picMk id="30" creationId="{11D4B853-1ADD-0145-DAD2-521BC0A43308}"/>
-            </ac:picMkLst>
-          </pc:picChg>
-          <pc:picChg chg="add mod ord modCrop">
-            <ac:chgData name="Gillett, Richard" userId="f751afb3-89ee-4adb-bf46-b352b62550b4" providerId="ADAL" clId="{E1DC7D8A-5337-4AAE-9935-D0A80B248513}" dt="2026-01-11T11:57:37.586" v="905" actId="1076"/>
-            <ac:picMkLst>
-              <pc:docMk/>
-              <pc:sldMasterMk cId="2640799190" sldId="2147483660"/>
-              <pc:sldLayoutMk cId="1363397331" sldId="2147483661"/>
-              <ac:picMk id="96" creationId="{45022D99-4D6F-EC4D-B596-181CE3D268A0}"/>
-            </ac:picMkLst>
-          </pc:picChg>
-          <pc:picChg chg="add mod">
-            <ac:chgData name="Gillett, Richard" userId="f751afb3-89ee-4adb-bf46-b352b62550b4" providerId="ADAL" clId="{E1DC7D8A-5337-4AAE-9935-D0A80B248513}" dt="2026-01-13T09:37:49.877" v="1013" actId="1035"/>
-            <ac:picMkLst>
-              <pc:docMk/>
-              <pc:sldMasterMk cId="2640799190" sldId="2147483660"/>
-              <pc:sldLayoutMk cId="1363397331" sldId="2147483661"/>
-              <ac:picMk id="2075" creationId="{541A6AC7-D175-3548-67FC-DC5600EFAB59}"/>
-            </ac:picMkLst>
-          </pc:picChg>
-          <pc:cxnChg chg="mod">
-            <ac:chgData name="Gillett, Richard" userId="f751afb3-89ee-4adb-bf46-b352b62550b4" providerId="ADAL" clId="{E1DC7D8A-5337-4AAE-9935-D0A80B248513}" dt="2026-01-11T11:57:10.271" v="901" actId="1076"/>
-            <ac:cxnSpMkLst>
-              <pc:docMk/>
-              <pc:sldMasterMk cId="2640799190" sldId="2147483660"/>
-              <pc:sldLayoutMk cId="1363397331" sldId="2147483661"/>
-              <ac:cxnSpMk id="4" creationId="{5BB082F5-DE58-9BB3-E67C-CBAE81B32259}"/>
-            </ac:cxnSpMkLst>
-          </pc:cxnChg>
-        </pc:sldLayoutChg>
-        <pc:sldLayoutChg chg="addSp delSp modSp mod">
-          <pc:chgData name="Gillett, Richard" userId="f751afb3-89ee-4adb-bf46-b352b62550b4" providerId="ADAL" clId="{E1DC7D8A-5337-4AAE-9935-D0A80B248513}" dt="2026-01-08T00:11:34.439" v="311" actId="21"/>
-          <pc:sldLayoutMkLst>
-            <pc:docMk/>
-            <pc:sldMasterMk cId="2640799190" sldId="2147483660"/>
-            <pc:sldLayoutMk cId="413489094" sldId="2147483662"/>
-          </pc:sldLayoutMkLst>
-        </pc:sldLayoutChg>
-      </pc:sldMasterChg>
-      <pc:sldMasterChg chg="new del mod addSldLayout delSldLayout">
-        <pc:chgData name="Gillett, Richard" userId="f751afb3-89ee-4adb-bf46-b352b62550b4" providerId="ADAL" clId="{E1DC7D8A-5337-4AAE-9935-D0A80B248513}" dt="2026-01-08T00:07:10.675" v="277" actId="6938"/>
-        <pc:sldMasterMkLst>
-          <pc:docMk/>
-          <pc:sldMasterMk cId="3088122613" sldId="2147483662"/>
-        </pc:sldMasterMkLst>
-        <pc:sldLayoutChg chg="new del replId">
-          <pc:chgData name="Gillett, Richard" userId="f751afb3-89ee-4adb-bf46-b352b62550b4" providerId="ADAL" clId="{E1DC7D8A-5337-4AAE-9935-D0A80B248513}" dt="2026-01-08T00:07:10.675" v="277" actId="6938"/>
-          <pc:sldLayoutMkLst>
-            <pc:docMk/>
-            <pc:sldMasterMk cId="3088122613" sldId="2147483662"/>
-            <pc:sldLayoutMk cId="1635335690" sldId="2147483663"/>
-          </pc:sldLayoutMkLst>
-        </pc:sldLayoutChg>
-        <pc:sldLayoutChg chg="new del replId">
-          <pc:chgData name="Gillett, Richard" userId="f751afb3-89ee-4adb-bf46-b352b62550b4" providerId="ADAL" clId="{E1DC7D8A-5337-4AAE-9935-D0A80B248513}" dt="2026-01-08T00:07:10.675" v="277" actId="6938"/>
-          <pc:sldLayoutMkLst>
-            <pc:docMk/>
-            <pc:sldMasterMk cId="3088122613" sldId="2147483662"/>
-            <pc:sldLayoutMk cId="2302690302" sldId="2147483664"/>
-          </pc:sldLayoutMkLst>
-        </pc:sldLayoutChg>
-        <pc:sldLayoutChg chg="new del replId">
-          <pc:chgData name="Gillett, Richard" userId="f751afb3-89ee-4adb-bf46-b352b62550b4" providerId="ADAL" clId="{E1DC7D8A-5337-4AAE-9935-D0A80B248513}" dt="2026-01-08T00:07:10.675" v="277" actId="6938"/>
-          <pc:sldLayoutMkLst>
-            <pc:docMk/>
-            <pc:sldMasterMk cId="3088122613" sldId="2147483662"/>
-            <pc:sldLayoutMk cId="992193309" sldId="2147483665"/>
-          </pc:sldLayoutMkLst>
-        </pc:sldLayoutChg>
-        <pc:sldLayoutChg chg="new del replId">
-          <pc:chgData name="Gillett, Richard" userId="f751afb3-89ee-4adb-bf46-b352b62550b4" providerId="ADAL" clId="{E1DC7D8A-5337-4AAE-9935-D0A80B248513}" dt="2026-01-08T00:07:10.675" v="277" actId="6938"/>
-          <pc:sldLayoutMkLst>
-            <pc:docMk/>
-            <pc:sldMasterMk cId="3088122613" sldId="2147483662"/>
-            <pc:sldLayoutMk cId="2016394156" sldId="2147483666"/>
-          </pc:sldLayoutMkLst>
-        </pc:sldLayoutChg>
-        <pc:sldLayoutChg chg="new del replId">
-          <pc:chgData name="Gillett, Richard" userId="f751afb3-89ee-4adb-bf46-b352b62550b4" providerId="ADAL" clId="{E1DC7D8A-5337-4AAE-9935-D0A80B248513}" dt="2026-01-08T00:07:10.675" v="277" actId="6938"/>
-          <pc:sldLayoutMkLst>
-            <pc:docMk/>
-            <pc:sldMasterMk cId="3088122613" sldId="2147483662"/>
-            <pc:sldLayoutMk cId="1766713548" sldId="2147483667"/>
-          </pc:sldLayoutMkLst>
-        </pc:sldLayoutChg>
-        <pc:sldLayoutChg chg="new del replId">
-          <pc:chgData name="Gillett, Richard" userId="f751afb3-89ee-4adb-bf46-b352b62550b4" providerId="ADAL" clId="{E1DC7D8A-5337-4AAE-9935-D0A80B248513}" dt="2026-01-08T00:07:10.675" v="277" actId="6938"/>
-          <pc:sldLayoutMkLst>
-            <pc:docMk/>
-            <pc:sldMasterMk cId="3088122613" sldId="2147483662"/>
-            <pc:sldLayoutMk cId="4074602279" sldId="2147483668"/>
-          </pc:sldLayoutMkLst>
-        </pc:sldLayoutChg>
-        <pc:sldLayoutChg chg="new del replId">
-          <pc:chgData name="Gillett, Richard" userId="f751afb3-89ee-4adb-bf46-b352b62550b4" providerId="ADAL" clId="{E1DC7D8A-5337-4AAE-9935-D0A80B248513}" dt="2026-01-08T00:07:10.675" v="277" actId="6938"/>
-          <pc:sldLayoutMkLst>
-            <pc:docMk/>
-            <pc:sldMasterMk cId="3088122613" sldId="2147483662"/>
-            <pc:sldLayoutMk cId="3305373079" sldId="2147483669"/>
-          </pc:sldLayoutMkLst>
-        </pc:sldLayoutChg>
-        <pc:sldLayoutChg chg="new del replId">
-          <pc:chgData name="Gillett, Richard" userId="f751afb3-89ee-4adb-bf46-b352b62550b4" providerId="ADAL" clId="{E1DC7D8A-5337-4AAE-9935-D0A80B248513}" dt="2026-01-08T00:07:10.675" v="277" actId="6938"/>
-          <pc:sldLayoutMkLst>
-            <pc:docMk/>
-            <pc:sldMasterMk cId="3088122613" sldId="2147483662"/>
-            <pc:sldLayoutMk cId="1089218544" sldId="2147483670"/>
-          </pc:sldLayoutMkLst>
-        </pc:sldLayoutChg>
-        <pc:sldLayoutChg chg="new del replId">
-          <pc:chgData name="Gillett, Richard" userId="f751afb3-89ee-4adb-bf46-b352b62550b4" providerId="ADAL" clId="{E1DC7D8A-5337-4AAE-9935-D0A80B248513}" dt="2026-01-08T00:07:10.675" v="277" actId="6938"/>
-          <pc:sldLayoutMkLst>
-            <pc:docMk/>
-            <pc:sldMasterMk cId="3088122613" sldId="2147483662"/>
-            <pc:sldLayoutMk cId="1346707861" sldId="2147483671"/>
-          </pc:sldLayoutMkLst>
-        </pc:sldLayoutChg>
-        <pc:sldLayoutChg chg="new del replId">
-          <pc:chgData name="Gillett, Richard" userId="f751afb3-89ee-4adb-bf46-b352b62550b4" providerId="ADAL" clId="{E1DC7D8A-5337-4AAE-9935-D0A80B248513}" dt="2026-01-08T00:07:10.675" v="277" actId="6938"/>
-          <pc:sldLayoutMkLst>
-            <pc:docMk/>
-            <pc:sldMasterMk cId="3088122613" sldId="2147483662"/>
-            <pc:sldLayoutMk cId="2010221458" sldId="2147483672"/>
-          </pc:sldLayoutMkLst>
-        </pc:sldLayoutChg>
-        <pc:sldLayoutChg chg="new del replId">
-          <pc:chgData name="Gillett, Richard" userId="f751afb3-89ee-4adb-bf46-b352b62550b4" providerId="ADAL" clId="{E1DC7D8A-5337-4AAE-9935-D0A80B248513}" dt="2026-01-08T00:07:10.675" v="277" actId="6938"/>
-          <pc:sldLayoutMkLst>
-            <pc:docMk/>
-            <pc:sldMasterMk cId="3088122613" sldId="2147483662"/>
-            <pc:sldLayoutMk cId="1232889983" sldId="2147483673"/>
-          </pc:sldLayoutMkLst>
-        </pc:sldLayoutChg>
-      </pc:sldMasterChg>
-    </pc:docChg>
-  </pc:docChgLst>
-  <pc:docChgLst>
-    <pc:chgData name="Gillett, Richard" userId="f751afb3-89ee-4adb-bf46-b352b62550b4" providerId="ADAL" clId="{63D0502C-E45B-42C2-8995-A2AEF517A4FA}"/>
-    <pc:docChg chg="undo custSel modMainMaster">
-      <pc:chgData name="Gillett, Richard" userId="f751afb3-89ee-4adb-bf46-b352b62550b4" providerId="ADAL" clId="{63D0502C-E45B-42C2-8995-A2AEF517A4FA}" dt="2026-03-04T04:53:56.357" v="273" actId="962"/>
-      <pc:docMkLst>
-        <pc:docMk/>
-      </pc:docMkLst>
-      <pc:sldMasterChg chg="modSp mod modSldLayout">
-        <pc:chgData name="Gillett, Richard" userId="f751afb3-89ee-4adb-bf46-b352b62550b4" providerId="ADAL" clId="{63D0502C-E45B-42C2-8995-A2AEF517A4FA}" dt="2026-03-04T04:53:56.357" v="273" actId="962"/>
-        <pc:sldMasterMkLst>
-          <pc:docMk/>
-          <pc:sldMasterMk cId="2640799190" sldId="2147483660"/>
-        </pc:sldMasterMkLst>
-        <pc:spChg chg="mod">
-          <ac:chgData name="Gillett, Richard" userId="f751afb3-89ee-4adb-bf46-b352b62550b4" providerId="ADAL" clId="{63D0502C-E45B-42C2-8995-A2AEF517A4FA}" dt="2026-03-04T03:20:57.542" v="121" actId="962"/>
-          <ac:spMkLst>
-            <pc:docMk/>
-            <pc:sldMasterMk cId="2640799190" sldId="2147483660"/>
-            <ac:spMk id="2" creationId="{90655420-6EA9-5F63-7C35-D9F4AC476BF3}"/>
-          </ac:spMkLst>
-        </pc:spChg>
-        <pc:spChg chg="mod">
-          <ac:chgData name="Gillett, Richard" userId="f751afb3-89ee-4adb-bf46-b352b62550b4" providerId="ADAL" clId="{63D0502C-E45B-42C2-8995-A2AEF517A4FA}" dt="2026-03-04T03:21:42.268" v="250" actId="1036"/>
-          <ac:spMkLst>
-            <pc:docMk/>
-            <pc:sldMasterMk cId="2640799190" sldId="2147483660"/>
-            <ac:spMk id="10" creationId="{095A6460-B1AA-2316-FDA5-EA70CFCA2BCE}"/>
-          </ac:spMkLst>
-        </pc:spChg>
-        <pc:spChg chg="mod ord">
-          <ac:chgData name="Gillett, Richard" userId="f751afb3-89ee-4adb-bf46-b352b62550b4" providerId="ADAL" clId="{63D0502C-E45B-42C2-8995-A2AEF517A4FA}" dt="2026-03-04T03:20:27.390" v="119" actId="13244"/>
-          <ac:spMkLst>
-            <pc:docMk/>
-            <pc:sldMasterMk cId="2640799190" sldId="2147483660"/>
-            <ac:spMk id="15" creationId="{0A8B2BEF-EC4A-AACD-7AC0-27A940353D18}"/>
-          </ac:spMkLst>
-        </pc:spChg>
-        <pc:spChg chg="mod">
-          <ac:chgData name="Gillett, Richard" userId="f751afb3-89ee-4adb-bf46-b352b62550b4" providerId="ADAL" clId="{63D0502C-E45B-42C2-8995-A2AEF517A4FA}" dt="2026-03-04T03:20:25.021" v="118" actId="962"/>
-          <ac:spMkLst>
-            <pc:docMk/>
-            <pc:sldMasterMk cId="2640799190" sldId="2147483660"/>
-            <ac:spMk id="16" creationId="{2AB87B99-53BD-A3E1-EC73-2148133BEA33}"/>
-          </ac:spMkLst>
-        </pc:spChg>
-        <pc:grpChg chg="mod">
-          <ac:chgData name="Gillett, Richard" userId="f751afb3-89ee-4adb-bf46-b352b62550b4" providerId="ADAL" clId="{63D0502C-E45B-42C2-8995-A2AEF517A4FA}" dt="2026-03-04T03:21:07.524" v="122" actId="962"/>
-          <ac:grpSpMkLst>
-            <pc:docMk/>
-            <pc:sldMasterMk cId="2640799190" sldId="2147483660"/>
-            <ac:grpSpMk id="3" creationId="{8DD6D3AA-4BA7-8A63-733C-C14EAA9FDEB7}"/>
-          </ac:grpSpMkLst>
-        </pc:grpChg>
-        <pc:picChg chg="mod">
-          <ac:chgData name="Gillett, Richard" userId="f751afb3-89ee-4adb-bf46-b352b62550b4" providerId="ADAL" clId="{63D0502C-E45B-42C2-8995-A2AEF517A4FA}" dt="2026-03-04T03:19:52.360" v="115" actId="962"/>
-          <ac:picMkLst>
-            <pc:docMk/>
-            <pc:sldMasterMk cId="2640799190" sldId="2147483660"/>
-            <ac:picMk id="18" creationId="{CA3877DB-6975-A75F-DBFC-236D4FEC401C}"/>
-          </ac:picMkLst>
-        </pc:picChg>
-        <pc:sldLayoutChg chg="addSp delSp modSp mod">
-          <pc:chgData name="Gillett, Richard" userId="f751afb3-89ee-4adb-bf46-b352b62550b4" providerId="ADAL" clId="{63D0502C-E45B-42C2-8995-A2AEF517A4FA}" dt="2026-03-04T04:53:56.357" v="273" actId="962"/>
-          <pc:sldLayoutMkLst>
-            <pc:docMk/>
-            <pc:sldMasterMk cId="2640799190" sldId="2147483660"/>
-            <pc:sldLayoutMk cId="1363397331" sldId="2147483661"/>
-          </pc:sldLayoutMkLst>
-          <pc:spChg chg="mod">
-            <ac:chgData name="Gillett, Richard" userId="f751afb3-89ee-4adb-bf46-b352b62550b4" providerId="ADAL" clId="{63D0502C-E45B-42C2-8995-A2AEF517A4FA}" dt="2026-03-04T03:19:16.793" v="113" actId="962"/>
-            <ac:spMkLst>
-              <pc:docMk/>
-              <pc:sldMasterMk cId="2640799190" sldId="2147483660"/>
-              <pc:sldLayoutMk cId="1363397331" sldId="2147483661"/>
-              <ac:spMk id="2" creationId="{4EA715C1-D099-5522-9B8D-6FE225FA3DB4}"/>
-            </ac:spMkLst>
-          </pc:spChg>
-          <pc:spChg chg="mod">
-            <ac:chgData name="Gillett, Richard" userId="f751afb3-89ee-4adb-bf46-b352b62550b4" providerId="ADAL" clId="{63D0502C-E45B-42C2-8995-A2AEF517A4FA}" dt="2026-03-04T03:09:32.219" v="97" actId="962"/>
-            <ac:spMkLst>
-              <pc:docMk/>
-              <pc:sldMasterMk cId="2640799190" sldId="2147483660"/>
-              <pc:sldLayoutMk cId="1363397331" sldId="2147483661"/>
-              <ac:spMk id="37" creationId="{814A0012-CF31-67AE-4E97-AA42CBE2A6AE}"/>
-            </ac:spMkLst>
-          </pc:spChg>
-          <pc:spChg chg="mod">
-            <ac:chgData name="Gillett, Richard" userId="f751afb3-89ee-4adb-bf46-b352b62550b4" providerId="ADAL" clId="{63D0502C-E45B-42C2-8995-A2AEF517A4FA}" dt="2026-03-04T03:52:28.904" v="255" actId="962"/>
-            <ac:spMkLst>
-              <pc:docMk/>
-              <pc:sldMasterMk cId="2640799190" sldId="2147483660"/>
-              <pc:sldLayoutMk cId="1363397331" sldId="2147483661"/>
-              <ac:spMk id="41" creationId="{D4F00C51-9060-7169-179B-F541DAFC0C7E}"/>
-            </ac:spMkLst>
-          </pc:spChg>
-          <pc:spChg chg="mod">
-            <ac:chgData name="Gillett, Richard" userId="f751afb3-89ee-4adb-bf46-b352b62550b4" providerId="ADAL" clId="{63D0502C-E45B-42C2-8995-A2AEF517A4FA}" dt="2026-03-04T03:52:21.319" v="254" actId="962"/>
-            <ac:spMkLst>
-              <pc:docMk/>
-              <pc:sldMasterMk cId="2640799190" sldId="2147483660"/>
-              <pc:sldLayoutMk cId="1363397331" sldId="2147483661"/>
-              <ac:spMk id="47" creationId="{B1F62D07-2195-698B-2714-154E4501E4EB}"/>
-            </ac:spMkLst>
-          </pc:spChg>
-          <pc:spChg chg="mod">
-            <ac:chgData name="Gillett, Richard" userId="f751afb3-89ee-4adb-bf46-b352b62550b4" providerId="ADAL" clId="{63D0502C-E45B-42C2-8995-A2AEF517A4FA}" dt="2026-03-04T03:09:22.840" v="96" actId="962"/>
-            <ac:spMkLst>
-              <pc:docMk/>
-              <pc:sldMasterMk cId="2640799190" sldId="2147483660"/>
-              <pc:sldLayoutMk cId="1363397331" sldId="2147483661"/>
-              <ac:spMk id="48" creationId="{7BD5F46B-2231-6D01-C514-F696C7DDE546}"/>
-            </ac:spMkLst>
-          </pc:spChg>
-          <pc:spChg chg="del">
-            <ac:chgData name="Gillett, Richard" userId="f751afb3-89ee-4adb-bf46-b352b62550b4" providerId="ADAL" clId="{63D0502C-E45B-42C2-8995-A2AEF517A4FA}" dt="2026-03-04T04:53:43.033" v="272" actId="478"/>
-            <ac:spMkLst>
-              <pc:docMk/>
-              <pc:sldMasterMk cId="2640799190" sldId="2147483660"/>
-              <pc:sldLayoutMk cId="1363397331" sldId="2147483661"/>
-              <ac:spMk id="54" creationId="{72162AC7-06C3-FF5B-97D1-CAC55BA97C08}"/>
-            </ac:spMkLst>
-          </pc:spChg>
-          <pc:spChg chg="del">
-            <ac:chgData name="Gillett, Richard" userId="f751afb3-89ee-4adb-bf46-b352b62550b4" providerId="ADAL" clId="{63D0502C-E45B-42C2-8995-A2AEF517A4FA}" dt="2026-03-04T04:53:40.646" v="271" actId="478"/>
-            <ac:spMkLst>
-              <pc:docMk/>
-              <pc:sldMasterMk cId="2640799190" sldId="2147483660"/>
-              <pc:sldLayoutMk cId="1363397331" sldId="2147483661"/>
-              <ac:spMk id="70" creationId="{80E4E7D2-CED9-89CE-285F-E8D7729CB3D0}"/>
-            </ac:spMkLst>
-          </pc:spChg>
-          <pc:picChg chg="mod">
-            <ac:chgData name="Gillett, Richard" userId="f751afb3-89ee-4adb-bf46-b352b62550b4" providerId="ADAL" clId="{63D0502C-E45B-42C2-8995-A2AEF517A4FA}" dt="2026-03-04T03:19:03.923" v="112" actId="962"/>
-            <ac:picMkLst>
-              <pc:docMk/>
-              <pc:sldMasterMk cId="2640799190" sldId="2147483660"/>
-              <pc:sldLayoutMk cId="1363397331" sldId="2147483661"/>
-              <ac:picMk id="3" creationId="{9498E89D-FFFB-BD02-CB4A-C6AF63419FA9}"/>
-            </ac:picMkLst>
-          </pc:picChg>
-          <pc:picChg chg="mod">
-            <ac:chgData name="Gillett, Richard" userId="f751afb3-89ee-4adb-bf46-b352b62550b4" providerId="ADAL" clId="{63D0502C-E45B-42C2-8995-A2AEF517A4FA}" dt="2026-03-04T03:23:09.982" v="252" actId="962"/>
-            <ac:picMkLst>
-              <pc:docMk/>
-              <pc:sldMasterMk cId="2640799190" sldId="2147483660"/>
-              <pc:sldLayoutMk cId="1363397331" sldId="2147483661"/>
-              <ac:picMk id="6" creationId="{5F294ACB-2AAB-53EB-3D12-B7F8668F3ED8}"/>
-            </ac:picMkLst>
-          </pc:picChg>
-          <pc:picChg chg="add del mod">
-            <ac:chgData name="Gillett, Richard" userId="f751afb3-89ee-4adb-bf46-b352b62550b4" providerId="ADAL" clId="{63D0502C-E45B-42C2-8995-A2AEF517A4FA}" dt="2026-03-04T02:21:29.476" v="14" actId="478"/>
-            <ac:picMkLst>
-              <pc:docMk/>
-              <pc:sldMasterMk cId="2640799190" sldId="2147483660"/>
-              <pc:sldLayoutMk cId="1363397331" sldId="2147483661"/>
-              <ac:picMk id="8" creationId="{592DBDCA-0729-9238-8961-07C5B705BEC2}"/>
-            </ac:picMkLst>
-          </pc:picChg>
-          <pc:picChg chg="add del mod modCrop">
-            <ac:chgData name="Gillett, Richard" userId="f751afb3-89ee-4adb-bf46-b352b62550b4" providerId="ADAL" clId="{63D0502C-E45B-42C2-8995-A2AEF517A4FA}" dt="2026-03-04T02:30:50.208" v="81" actId="478"/>
-            <ac:picMkLst>
-              <pc:docMk/>
-              <pc:sldMasterMk cId="2640799190" sldId="2147483660"/>
-              <pc:sldLayoutMk cId="1363397331" sldId="2147483661"/>
-              <ac:picMk id="10" creationId="{2C6CCDBB-E1C2-F740-E4F1-B2732535C087}"/>
-            </ac:picMkLst>
-          </pc:picChg>
-          <pc:picChg chg="add mod modCrop">
-            <ac:chgData name="Gillett, Richard" userId="f751afb3-89ee-4adb-bf46-b352b62550b4" providerId="ADAL" clId="{63D0502C-E45B-42C2-8995-A2AEF517A4FA}" dt="2026-03-04T03:10:20.087" v="111" actId="1037"/>
-            <ac:picMkLst>
-              <pc:docMk/>
-              <pc:sldMasterMk cId="2640799190" sldId="2147483660"/>
-              <pc:sldLayoutMk cId="1363397331" sldId="2147483661"/>
-              <ac:picMk id="12" creationId="{4A335C9F-C929-90C4-EE54-C3B0862F27AB}"/>
-            </ac:picMkLst>
-          </pc:picChg>
-          <pc:picChg chg="add del mod">
-            <ac:chgData name="Gillett, Richard" userId="f751afb3-89ee-4adb-bf46-b352b62550b4" providerId="ADAL" clId="{63D0502C-E45B-42C2-8995-A2AEF517A4FA}" dt="2026-03-04T04:07:16.859" v="267" actId="478"/>
-            <ac:picMkLst>
-              <pc:docMk/>
-              <pc:sldMasterMk cId="2640799190" sldId="2147483660"/>
-              <pc:sldLayoutMk cId="1363397331" sldId="2147483661"/>
-              <ac:picMk id="16" creationId="{B17E2BAD-47C6-B58F-7C8E-FC9836A8BC8B}"/>
-            </ac:picMkLst>
-          </pc:picChg>
-          <pc:picChg chg="del mod">
-            <ac:chgData name="Gillett, Richard" userId="f751afb3-89ee-4adb-bf46-b352b62550b4" providerId="ADAL" clId="{63D0502C-E45B-42C2-8995-A2AEF517A4FA}" dt="2026-03-04T03:09:45.426" v="98" actId="478"/>
-            <ac:picMkLst>
-              <pc:docMk/>
-              <pc:sldMasterMk cId="2640799190" sldId="2147483660"/>
-              <pc:sldLayoutMk cId="1363397331" sldId="2147483661"/>
-              <ac:picMk id="23" creationId="{86633DA3-0DB3-C6C5-5A10-0975EDA3FCAF}"/>
-            </ac:picMkLst>
-          </pc:picChg>
-          <pc:picChg chg="add mod">
-            <ac:chgData name="Gillett, Richard" userId="f751afb3-89ee-4adb-bf46-b352b62550b4" providerId="ADAL" clId="{63D0502C-E45B-42C2-8995-A2AEF517A4FA}" dt="2026-03-04T04:53:56.357" v="273" actId="962"/>
-            <ac:picMkLst>
-              <pc:docMk/>
-              <pc:sldMasterMk cId="2640799190" sldId="2147483660"/>
-              <pc:sldLayoutMk cId="1363397331" sldId="2147483661"/>
-              <ac:picMk id="24" creationId="{C4803C3E-DE7F-2182-D796-F9D9BADE5615}"/>
-            </ac:picMkLst>
-          </pc:picChg>
-          <pc:picChg chg="del mod">
-            <ac:chgData name="Gillett, Richard" userId="f751afb3-89ee-4adb-bf46-b352b62550b4" providerId="ADAL" clId="{63D0502C-E45B-42C2-8995-A2AEF517A4FA}" dt="2026-03-04T03:52:05.641" v="253" actId="478"/>
-            <ac:picMkLst>
-              <pc:docMk/>
-              <pc:sldMasterMk cId="2640799190" sldId="2147483660"/>
-              <pc:sldLayoutMk cId="1363397331" sldId="2147483661"/>
-              <ac:picMk id="94" creationId="{6C1D9F35-E879-69FC-7F97-6A6DA195BB72}"/>
-            </ac:picMkLst>
-          </pc:picChg>
-        </pc:sldLayoutChg>
-      </pc:sldMasterChg>
-    </pc:docChg>
-  </pc:docChgLst>
-  <pc:docChgLst>
-    <pc:chgData name="Gillett, Richard" userId="f751afb3-89ee-4adb-bf46-b352b62550b4" providerId="ADAL" clId="{947C8103-4DC6-4827-8B43-5C2E904880F7}"/>
-    <pc:docChg chg="undo custSel modMainMaster">
-      <pc:chgData name="Gillett, Richard" userId="f751afb3-89ee-4adb-bf46-b352b62550b4" providerId="ADAL" clId="{947C8103-4DC6-4827-8B43-5C2E904880F7}" dt="2026-01-06T08:14:35.035" v="119" actId="1035"/>
-      <pc:docMkLst>
-        <pc:docMk/>
-      </pc:docMkLst>
-      <pc:sldMasterChg chg="modSp mod modSldLayout">
-        <pc:chgData name="Gillett, Richard" userId="f751afb3-89ee-4adb-bf46-b352b62550b4" providerId="ADAL" clId="{947C8103-4DC6-4827-8B43-5C2E904880F7}" dt="2026-01-06T08:14:35.035" v="119" actId="1035"/>
-        <pc:sldMasterMkLst>
-          <pc:docMk/>
-          <pc:sldMasterMk cId="2640799190" sldId="2147483660"/>
-        </pc:sldMasterMkLst>
-        <pc:spChg chg="mod">
-          <ac:chgData name="Gillett, Richard" userId="f751afb3-89ee-4adb-bf46-b352b62550b4" providerId="ADAL" clId="{947C8103-4DC6-4827-8B43-5C2E904880F7}" dt="2026-01-01T07:47:58.823" v="20" actId="1035"/>
-          <ac:spMkLst>
-            <pc:docMk/>
-            <pc:sldMasterMk cId="2640799190" sldId="2147483660"/>
-            <ac:spMk id="14" creationId="{465D00C7-B8A6-3024-4A5D-41B448AA8CD8}"/>
-          </ac:spMkLst>
-        </pc:spChg>
-        <pc:sldLayoutChg chg="modSp mod">
-          <pc:chgData name="Gillett, Richard" userId="f751afb3-89ee-4adb-bf46-b352b62550b4" providerId="ADAL" clId="{947C8103-4DC6-4827-8B43-5C2E904880F7}" dt="2026-01-06T08:14:35.035" v="119" actId="1035"/>
-          <pc:sldLayoutMkLst>
-            <pc:docMk/>
-            <pc:sldMasterMk cId="2640799190" sldId="2147483660"/>
-            <pc:sldLayoutMk cId="1363397331" sldId="2147483661"/>
           </pc:sldLayoutMkLst>
         </pc:sldLayoutChg>
       </pc:sldMasterChg>

--- a/pci_poster/poster_template.pptx
+++ b/pci_poster/poster_template.pptx
@@ -250,19 +250,19 @@
   </pc:docChgLst>
   <pc:docChgLst>
     <pc:chgData name="Gillett, Richard" userId="f751afb3-89ee-4adb-bf46-b352b62550b4" providerId="ADAL" clId="{4E0FD693-728A-4417-BDB5-6E29955B45D4}"/>
-    <pc:docChg chg="modMainMaster">
-      <pc:chgData name="Gillett, Richard" userId="f751afb3-89ee-4adb-bf46-b352b62550b4" providerId="ADAL" clId="{4E0FD693-728A-4417-BDB5-6E29955B45D4}" dt="2026-06-10T05:52:21.966" v="1" actId="20577"/>
+    <pc:docChg chg="custSel modMainMaster">
+      <pc:chgData name="Gillett, Richard" userId="f751afb3-89ee-4adb-bf46-b352b62550b4" providerId="ADAL" clId="{4E0FD693-728A-4417-BDB5-6E29955B45D4}" dt="2026-06-10T08:00:51.893" v="2" actId="478"/>
       <pc:docMkLst>
         <pc:docMk/>
       </pc:docMkLst>
       <pc:sldMasterChg chg="modSldLayout">
-        <pc:chgData name="Gillett, Richard" userId="f751afb3-89ee-4adb-bf46-b352b62550b4" providerId="ADAL" clId="{4E0FD693-728A-4417-BDB5-6E29955B45D4}" dt="2026-06-10T05:52:21.966" v="1" actId="20577"/>
+        <pc:chgData name="Gillett, Richard" userId="f751afb3-89ee-4adb-bf46-b352b62550b4" providerId="ADAL" clId="{4E0FD693-728A-4417-BDB5-6E29955B45D4}" dt="2026-06-10T08:00:51.893" v="2" actId="478"/>
         <pc:sldMasterMkLst>
           <pc:docMk/>
           <pc:sldMasterMk cId="2640799190" sldId="2147483660"/>
         </pc:sldMasterMkLst>
-        <pc:sldLayoutChg chg="modSp mod">
-          <pc:chgData name="Gillett, Richard" userId="f751afb3-89ee-4adb-bf46-b352b62550b4" providerId="ADAL" clId="{4E0FD693-728A-4417-BDB5-6E29955B45D4}" dt="2026-06-10T05:52:21.966" v="1" actId="20577"/>
+        <pc:sldLayoutChg chg="delSp modSp mod">
+          <pc:chgData name="Gillett, Richard" userId="f751afb3-89ee-4adb-bf46-b352b62550b4" providerId="ADAL" clId="{4E0FD693-728A-4417-BDB5-6E29955B45D4}" dt="2026-06-10T08:00:51.893" v="2" actId="478"/>
           <pc:sldLayoutMkLst>
             <pc:docMk/>
             <pc:sldMasterMk cId="2640799190" sldId="2147483660"/>
@@ -277,6 +277,15 @@
               <ac:spMk id="43" creationId="{CDBAF79C-1ECD-4077-B693-FAA616F38BB3}"/>
             </ac:spMkLst>
           </pc:spChg>
+          <pc:cxnChg chg="del">
+            <ac:chgData name="Gillett, Richard" userId="f751afb3-89ee-4adb-bf46-b352b62550b4" providerId="ADAL" clId="{4E0FD693-728A-4417-BDB5-6E29955B45D4}" dt="2026-06-10T08:00:51.893" v="2" actId="478"/>
+            <ac:cxnSpMkLst>
+              <pc:docMk/>
+              <pc:sldMasterMk cId="2640799190" sldId="2147483660"/>
+              <pc:sldLayoutMk cId="1363397331" sldId="2147483661"/>
+              <ac:cxnSpMk id="4" creationId="{5BB082F5-DE58-9BB3-E67C-CBAE81B32259}"/>
+            </ac:cxnSpMkLst>
+          </pc:cxnChg>
         </pc:sldLayoutChg>
       </pc:sldMasterChg>
     </pc:docChg>
@@ -667,51 +676,6 @@
           </a:prstGeom>
         </p:spPr>
       </p:pic>
-      <p:cxnSp>
-        <p:nvCxnSpPr>
-          <p:cNvPr id="4" name="steth_stem">
-            <a:extLst>
-              <a:ext uri="{FF2B5EF4-FFF2-40B4-BE49-F238E27FC236}">
-                <a16:creationId xmlns:a16="http://schemas.microsoft.com/office/drawing/2014/main" id="{5BB082F5-DE58-9BB3-E67C-CBAE81B32259}"/>
-              </a:ext>
-            </a:extLst>
-          </p:cNvPr>
-          <p:cNvCxnSpPr>
-            <a:cxnSpLocks/>
-          </p:cNvCxnSpPr>
-          <p:nvPr userDrawn="1"/>
-        </p:nvCxnSpPr>
-        <p:spPr>
-          <a:xfrm>
-            <a:off x="65965" y="8691366"/>
-            <a:ext cx="1852" cy="330402"/>
-          </a:xfrm>
-          <a:prstGeom prst="line">
-            <a:avLst/>
-          </a:prstGeom>
-          <a:ln w="76200">
-            <a:solidFill>
-              <a:schemeClr val="bg1">
-                <a:lumMod val="65000"/>
-              </a:schemeClr>
-            </a:solidFill>
-          </a:ln>
-        </p:spPr>
-        <p:style>
-          <a:lnRef idx="1">
-            <a:schemeClr val="accent1"/>
-          </a:lnRef>
-          <a:fillRef idx="0">
-            <a:schemeClr val="accent1"/>
-          </a:fillRef>
-          <a:effectRef idx="0">
-            <a:schemeClr val="accent1"/>
-          </a:effectRef>
-          <a:fontRef idx="minor">
-            <a:schemeClr val="tx1"/>
-          </a:fontRef>
-        </p:style>
-      </p:cxnSp>
       <p:sp>
         <p:nvSpPr>
           <p:cNvPr id="15" name="shp_circle_yellow">

--- a/pci_poster/poster_template.pptx
+++ b/pci_poster/poster_template.pptx
@@ -114,6 +114,30 @@
 
 <file path=ppt/changesInfos/changesInfo1.xml><?xml version="1.0" encoding="utf-8"?>
 <pc:chgInfo xmlns:a="http://schemas.openxmlformats.org/drawingml/2006/main" xmlns:r="http://schemas.openxmlformats.org/officeDocument/2006/relationships" xmlns:ac="http://schemas.microsoft.com/office/drawing/2013/main/command" xmlns:pc="http://schemas.microsoft.com/office/powerpoint/2013/main/command">
+  <pc:docChgLst>
+    <pc:chgData name="Gillett, Richard" userId="f751afb3-89ee-4adb-bf46-b352b62550b4" providerId="ADAL" clId="{947C8103-4DC6-4827-8B43-5C2E904880F7}"/>
+    <pc:docChg chg="undo custSel modMainMaster">
+      <pc:chgData name="Gillett, Richard" userId="f751afb3-89ee-4adb-bf46-b352b62550b4" providerId="ADAL" clId="{947C8103-4DC6-4827-8B43-5C2E904880F7}" dt="2026-01-06T08:14:35.035" v="119" actId="1035"/>
+      <pc:docMkLst>
+        <pc:docMk/>
+      </pc:docMkLst>
+      <pc:sldMasterChg chg="modSp mod modSldLayout">
+        <pc:chgData name="Gillett, Richard" userId="f751afb3-89ee-4adb-bf46-b352b62550b4" providerId="ADAL" clId="{947C8103-4DC6-4827-8B43-5C2E904880F7}" dt="2026-01-06T08:14:35.035" v="119" actId="1035"/>
+        <pc:sldMasterMkLst>
+          <pc:docMk/>
+          <pc:sldMasterMk cId="2640799190" sldId="2147483660"/>
+        </pc:sldMasterMkLst>
+        <pc:sldLayoutChg chg="modSp mod">
+          <pc:chgData name="Gillett, Richard" userId="f751afb3-89ee-4adb-bf46-b352b62550b4" providerId="ADAL" clId="{947C8103-4DC6-4827-8B43-5C2E904880F7}" dt="2026-01-06T08:14:35.035" v="119" actId="1035"/>
+          <pc:sldLayoutMkLst>
+            <pc:docMk/>
+            <pc:sldMasterMk cId="2640799190" sldId="2147483660"/>
+            <pc:sldLayoutMk cId="1363397331" sldId="2147483661"/>
+          </pc:sldLayoutMkLst>
+        </pc:sldLayoutChg>
+      </pc:sldMasterChg>
+    </pc:docChg>
+  </pc:docChgLst>
   <pc:docChgLst>
     <pc:chgData name="Gillett, Richard" userId="f751afb3-89ee-4adb-bf46-b352b62550b4" providerId="ADAL" clId="{E1DC7D8A-5337-4AAE-9935-D0A80B248513}"/>
     <pc:docChg chg="undo redo custSel modSld addMainMaster delMainMaster modMainMaster">
@@ -249,6 +273,37 @@
     </pc:docChg>
   </pc:docChgLst>
   <pc:docChgLst>
+    <pc:chgData name="Gillett, Richard" userId="f751afb3-89ee-4adb-bf46-b352b62550b4" providerId="ADAL" clId="{A5BB3A64-C60C-45E9-BAE7-11B96E1E2D18}"/>
+    <pc:docChg chg="undo custSel modSld modMainMaster">
+      <pc:chgData name="Gillett, Richard" userId="f751afb3-89ee-4adb-bf46-b352b62550b4" providerId="ADAL" clId="{A5BB3A64-C60C-45E9-BAE7-11B96E1E2D18}" dt="2026-02-05T07:26:13.627" v="547" actId="20577"/>
+      <pc:docMkLst>
+        <pc:docMk/>
+      </pc:docMkLst>
+      <pc:sldChg chg="modSp mod">
+        <pc:chgData name="Gillett, Richard" userId="f751afb3-89ee-4adb-bf46-b352b62550b4" providerId="ADAL" clId="{A5BB3A64-C60C-45E9-BAE7-11B96E1E2D18}" dt="2026-01-14T09:55:55.459" v="251" actId="14100"/>
+        <pc:sldMkLst>
+          <pc:docMk/>
+          <pc:sldMk cId="4050248657" sldId="258"/>
+        </pc:sldMkLst>
+      </pc:sldChg>
+      <pc:sldMasterChg chg="addSp delSp modSp mod modSldLayout">
+        <pc:chgData name="Gillett, Richard" userId="f751afb3-89ee-4adb-bf46-b352b62550b4" providerId="ADAL" clId="{A5BB3A64-C60C-45E9-BAE7-11B96E1E2D18}" dt="2026-02-05T07:26:13.627" v="547" actId="20577"/>
+        <pc:sldMasterMkLst>
+          <pc:docMk/>
+          <pc:sldMasterMk cId="2640799190" sldId="2147483660"/>
+        </pc:sldMasterMkLst>
+        <pc:sldLayoutChg chg="addSp delSp modSp mod">
+          <pc:chgData name="Gillett, Richard" userId="f751afb3-89ee-4adb-bf46-b352b62550b4" providerId="ADAL" clId="{A5BB3A64-C60C-45E9-BAE7-11B96E1E2D18}" dt="2026-01-20T23:56:46.184" v="545" actId="962"/>
+          <pc:sldLayoutMkLst>
+            <pc:docMk/>
+            <pc:sldMasterMk cId="2640799190" sldId="2147483660"/>
+            <pc:sldLayoutMk cId="1363397331" sldId="2147483661"/>
+          </pc:sldLayoutMkLst>
+        </pc:sldLayoutChg>
+      </pc:sldMasterChg>
+    </pc:docChg>
+  </pc:docChgLst>
+  <pc:docChgLst>
     <pc:chgData name="Gillett, Richard" userId="f751afb3-89ee-4adb-bf46-b352b62550b4" providerId="ADAL" clId="{4E0FD693-728A-4417-BDB5-6E29955B45D4}"/>
     <pc:docChg chg="custSel modMainMaster">
       <pc:chgData name="Gillett, Richard" userId="f751afb3-89ee-4adb-bf46-b352b62550b4" providerId="ADAL" clId="{4E0FD693-728A-4417-BDB5-6E29955B45D4}" dt="2026-06-10T08:00:51.893" v="2" actId="478"/>
@@ -291,30 +346,6 @@
     </pc:docChg>
   </pc:docChgLst>
   <pc:docChgLst>
-    <pc:chgData name="Gillett, Richard" userId="f751afb3-89ee-4adb-bf46-b352b62550b4" providerId="ADAL" clId="{947C8103-4DC6-4827-8B43-5C2E904880F7}"/>
-    <pc:docChg chg="undo custSel modMainMaster">
-      <pc:chgData name="Gillett, Richard" userId="f751afb3-89ee-4adb-bf46-b352b62550b4" providerId="ADAL" clId="{947C8103-4DC6-4827-8B43-5C2E904880F7}" dt="2026-01-06T08:14:35.035" v="119" actId="1035"/>
-      <pc:docMkLst>
-        <pc:docMk/>
-      </pc:docMkLst>
-      <pc:sldMasterChg chg="modSp mod modSldLayout">
-        <pc:chgData name="Gillett, Richard" userId="f751afb3-89ee-4adb-bf46-b352b62550b4" providerId="ADAL" clId="{947C8103-4DC6-4827-8B43-5C2E904880F7}" dt="2026-01-06T08:14:35.035" v="119" actId="1035"/>
-        <pc:sldMasterMkLst>
-          <pc:docMk/>
-          <pc:sldMasterMk cId="2640799190" sldId="2147483660"/>
-        </pc:sldMasterMkLst>
-        <pc:sldLayoutChg chg="modSp mod">
-          <pc:chgData name="Gillett, Richard" userId="f751afb3-89ee-4adb-bf46-b352b62550b4" providerId="ADAL" clId="{947C8103-4DC6-4827-8B43-5C2E904880F7}" dt="2026-01-06T08:14:35.035" v="119" actId="1035"/>
-          <pc:sldLayoutMkLst>
-            <pc:docMk/>
-            <pc:sldMasterMk cId="2640799190" sldId="2147483660"/>
-            <pc:sldLayoutMk cId="1363397331" sldId="2147483661"/>
-          </pc:sldLayoutMkLst>
-        </pc:sldLayoutChg>
-      </pc:sldMasterChg>
-    </pc:docChg>
-  </pc:docChgLst>
-  <pc:docChgLst>
     <pc:chgData name="Gillett, Richard" userId="f751afb3-89ee-4adb-bf46-b352b62550b4" providerId="ADAL" clId="{63D0502C-E45B-42C2-8995-A2AEF517A4FA}"/>
     <pc:docChg chg="undo custSel modMainMaster">
       <pc:chgData name="Gillett, Richard" userId="f751afb3-89ee-4adb-bf46-b352b62550b4" providerId="ADAL" clId="{63D0502C-E45B-42C2-8995-A2AEF517A4FA}" dt="2026-03-04T04:53:56.357" v="273" actId="962"/>
@@ -329,37 +360,6 @@
         </pc:sldMasterMkLst>
         <pc:sldLayoutChg chg="addSp delSp modSp mod">
           <pc:chgData name="Gillett, Richard" userId="f751afb3-89ee-4adb-bf46-b352b62550b4" providerId="ADAL" clId="{63D0502C-E45B-42C2-8995-A2AEF517A4FA}" dt="2026-03-04T04:53:56.357" v="273" actId="962"/>
-          <pc:sldLayoutMkLst>
-            <pc:docMk/>
-            <pc:sldMasterMk cId="2640799190" sldId="2147483660"/>
-            <pc:sldLayoutMk cId="1363397331" sldId="2147483661"/>
-          </pc:sldLayoutMkLst>
-        </pc:sldLayoutChg>
-      </pc:sldMasterChg>
-    </pc:docChg>
-  </pc:docChgLst>
-  <pc:docChgLst>
-    <pc:chgData name="Gillett, Richard" userId="f751afb3-89ee-4adb-bf46-b352b62550b4" providerId="ADAL" clId="{A5BB3A64-C60C-45E9-BAE7-11B96E1E2D18}"/>
-    <pc:docChg chg="undo custSel modSld modMainMaster">
-      <pc:chgData name="Gillett, Richard" userId="f751afb3-89ee-4adb-bf46-b352b62550b4" providerId="ADAL" clId="{A5BB3A64-C60C-45E9-BAE7-11B96E1E2D18}" dt="2026-02-05T07:26:13.627" v="547" actId="20577"/>
-      <pc:docMkLst>
-        <pc:docMk/>
-      </pc:docMkLst>
-      <pc:sldChg chg="modSp mod">
-        <pc:chgData name="Gillett, Richard" userId="f751afb3-89ee-4adb-bf46-b352b62550b4" providerId="ADAL" clId="{A5BB3A64-C60C-45E9-BAE7-11B96E1E2D18}" dt="2026-01-14T09:55:55.459" v="251" actId="14100"/>
-        <pc:sldMkLst>
-          <pc:docMk/>
-          <pc:sldMk cId="4050248657" sldId="258"/>
-        </pc:sldMkLst>
-      </pc:sldChg>
-      <pc:sldMasterChg chg="addSp delSp modSp mod modSldLayout">
-        <pc:chgData name="Gillett, Richard" userId="f751afb3-89ee-4adb-bf46-b352b62550b4" providerId="ADAL" clId="{A5BB3A64-C60C-45E9-BAE7-11B96E1E2D18}" dt="2026-02-05T07:26:13.627" v="547" actId="20577"/>
-        <pc:sldMasterMkLst>
-          <pc:docMk/>
-          <pc:sldMasterMk cId="2640799190" sldId="2147483660"/>
-        </pc:sldMasterMkLst>
-        <pc:sldLayoutChg chg="addSp delSp modSp mod">
-          <pc:chgData name="Gillett, Richard" userId="f751afb3-89ee-4adb-bf46-b352b62550b4" providerId="ADAL" clId="{A5BB3A64-C60C-45E9-BAE7-11B96E1E2D18}" dt="2026-01-20T23:56:46.184" v="545" actId="962"/>
           <pc:sldLayoutMkLst>
             <pc:docMk/>
             <pc:sldMasterMk cId="2640799190" sldId="2147483660"/>
@@ -2029,109 +2029,6 @@
           </a:p>
         </p:txBody>
       </p:sp>
-      <p:pic>
-        <p:nvPicPr>
-          <p:cNvPr id="3" name="sample" descr="A red stamp with text&#10;&#10;AI-generated content may be incorrect.">
-            <a:extLst>
-              <a:ext uri="{FF2B5EF4-FFF2-40B4-BE49-F238E27FC236}">
-                <a16:creationId xmlns:a16="http://schemas.microsoft.com/office/drawing/2014/main" id="{9498E89D-FFFB-BD02-CB4A-C6AF63419FA9}"/>
-              </a:ext>
-            </a:extLst>
-          </p:cNvPr>
-          <p:cNvPicPr>
-            <a:picLocks noChangeAspect="1"/>
-          </p:cNvPicPr>
-          <p:nvPr userDrawn="1"/>
-        </p:nvPicPr>
-        <p:blipFill>
-          <a:blip r:embed="rId9" cstate="screen">
-            <a:clrChange>
-              <a:clrFrom>
-                <a:srgbClr val="FFFFFF"/>
-              </a:clrFrom>
-              <a:clrTo>
-                <a:srgbClr val="FFFFFF">
-                  <a:alpha val="0"/>
-                </a:srgbClr>
-              </a:clrTo>
-            </a:clrChange>
-            <a:extLst>
-              <a:ext uri="{28A0092B-C50C-407E-A947-70E740481C1C}">
-                <a14:useLocalDpi xmlns:a14="http://schemas.microsoft.com/office/drawing/2010/main"/>
-              </a:ext>
-              <a:ext uri="{837473B0-CC2E-450A-ABE3-18F120FF3D39}">
-                <a1611:picAttrSrcUrl xmlns:a1611="http://schemas.microsoft.com/office/drawing/2016/11/main" r:id="rId10"/>
-              </a:ext>
-            </a:extLst>
-          </a:blip>
-          <a:srcRect/>
-          <a:stretch/>
-        </p:blipFill>
-        <p:spPr>
-          <a:xfrm>
-            <a:off x="2134689" y="1391252"/>
-            <a:ext cx="2464252" cy="1215059"/>
-          </a:xfrm>
-          <a:prstGeom prst="rect">
-            <a:avLst/>
-          </a:prstGeom>
-        </p:spPr>
-      </p:pic>
-      <p:sp>
-        <p:nvSpPr>
-          <p:cNvPr id="2" name="fake_data">
-            <a:extLst>
-              <a:ext uri="{FF2B5EF4-FFF2-40B4-BE49-F238E27FC236}">
-                <a16:creationId xmlns:a16="http://schemas.microsoft.com/office/drawing/2014/main" id="{4EA715C1-D099-5522-9B8D-6FE225FA3DB4}"/>
-              </a:ext>
-            </a:extLst>
-          </p:cNvPr>
-          <p:cNvSpPr/>
-          <p:nvPr userDrawn="1"/>
-        </p:nvSpPr>
-        <p:spPr>
-          <a:xfrm rot="20997267">
-            <a:off x="2782260" y="2371528"/>
-            <a:ext cx="1431931" cy="407786"/>
-          </a:xfrm>
-          <a:prstGeom prst="rect">
-            <a:avLst/>
-          </a:prstGeom>
-          <a:solidFill>
-            <a:srgbClr val="FF0000"/>
-          </a:solidFill>
-          <a:ln>
-            <a:noFill/>
-          </a:ln>
-        </p:spPr>
-        <p:style>
-          <a:lnRef idx="2">
-            <a:schemeClr val="accent1">
-              <a:shade val="15000"/>
-            </a:schemeClr>
-          </a:lnRef>
-          <a:fillRef idx="1">
-            <a:schemeClr val="accent1"/>
-          </a:fillRef>
-          <a:effectRef idx="0">
-            <a:schemeClr val="accent1"/>
-          </a:effectRef>
-          <a:fontRef idx="minor">
-            <a:schemeClr val="lt1"/>
-          </a:fontRef>
-        </p:style>
-        <p:txBody>
-          <a:bodyPr rtlCol="0" anchor="ctr"/>
-          <a:lstStyle/>
-          <a:p>
-            <a:pPr lvl="0" algn="ctr"/>
-            <a:r>
-              <a:rPr lang="en-AU" sz="1100" dirty="0"/>
-              <a:t>All data is artificially generated!</a:t>
-            </a:r>
-          </a:p>
-        </p:txBody>
-      </p:sp>
       <p:sp>
         <p:nvSpPr>
           <p:cNvPr id="5" name="mins">
@@ -2222,7 +2119,7 @@
           <p:nvPr userDrawn="1"/>
         </p:nvPicPr>
         <p:blipFill>
-          <a:blip r:embed="rId11">
+          <a:blip r:embed="rId9">
             <a:clrChange>
               <a:clrFrom>
                 <a:srgbClr val="000000"/>
@@ -2236,7 +2133,7 @@
             <a:extLst>
               <a:ext uri="{BEBA8EAE-BF5A-486C-A8C5-ECC9F3942E4B}">
                 <a14:imgProps xmlns:a14="http://schemas.microsoft.com/office/drawing/2010/main">
-                  <a14:imgLayer r:embed="rId12">
+                  <a14:imgLayer r:embed="rId10">
                     <a14:imgEffect>
                       <a14:backgroundRemoval t="10000" b="90000" l="10000" r="90000">
                         <a14:foregroundMark x1="42383" y1="45117" x2="42383" y2="45117"/>
@@ -2291,7 +2188,7 @@
           <p:nvPr userDrawn="1"/>
         </p:nvPicPr>
         <p:blipFill>
-          <a:blip r:embed="rId13"/>
+          <a:blip r:embed="rId11"/>
           <a:stretch>
             <a:fillRect/>
           </a:stretch>

--- a/pci_poster/poster_template.pptx
+++ b/pci_poster/poster_template.pptx
@@ -732,7 +732,7 @@
           <a:p>
             <a:fld id="{71C53CA5-41C7-4923-8C6F-B3E91010339F}" type="datetimeFigureOut">
               <a:rPr lang="en-AU" smtClean="0"/>
-              <a:t>14/08/2026</a:t>
+              <a:t>18/08/2026</a:t>
             </a:fld>
             <a:endParaRPr lang="en-AU"/>
           </a:p>
@@ -909,7 +909,7 @@
           <a:p>
             <a:fld id="{C000ED89-5811-46A2-AFCA-7C8C83CE9906}" type="datetimeFigureOut">
               <a:rPr lang="en-AU" smtClean="0"/>
-              <a:t>14/08/2026</a:t>
+              <a:t>18/08/2026</a:t>
             </a:fld>
             <a:endParaRPr lang="en-AU"/>
           </a:p>
@@ -1781,8 +1781,13 @@
             <a:pPr lvl="0"/>
             <a:r>
               <a:rPr lang="en-AU" dirty="0"/>
-              <a:t>X out of Y patients had Radial Access</a:t>
+              <a:t>X of Y </a:t>
             </a:r>
+            <a:r>
+              <a:rPr lang="en-GB" dirty="0"/>
+              <a:t>PCI were performed via Radial Access</a:t>
+            </a:r>
+            <a:endParaRPr lang="en-AU" dirty="0"/>
           </a:p>
         </p:txBody>
       </p:sp>
@@ -1804,8 +1809,8 @@
         </p:nvSpPr>
         <p:spPr>
           <a:xfrm>
-            <a:off x="3615721" y="8142019"/>
-            <a:ext cx="2820036" cy="641977"/>
+            <a:off x="3804989" y="8142019"/>
+            <a:ext cx="2630768" cy="641977"/>
           </a:xfrm>
           <a:prstGeom prst="rect">
             <a:avLst/>
@@ -1823,7 +1828,7 @@
             <a:pPr lvl="0"/>
             <a:r>
               <a:rPr lang="en-AU" dirty="0"/>
-              <a:t>X out of Y patients were discharged on Dual Anti-Platelet Therapy</a:t>
+              <a:t>X of Y patients were discharged on DAPT</a:t>
             </a:r>
           </a:p>
         </p:txBody>
@@ -1864,12 +1869,8 @@
           <a:p>
             <a:pPr lvl="0"/>
             <a:r>
-              <a:rPr lang="en-AU" dirty="0" err="1"/>
-              <a:t>Xm</a:t>
-            </a:r>
-            <a:r>
               <a:rPr lang="en-AU" dirty="0"/>
-              <a:t> (Median) Door to PCI time</a:t>
+              <a:t>Median Door to Device time was X min</a:t>
             </a:r>
           </a:p>
         </p:txBody>
@@ -1915,7 +1916,7 @@
             </a:r>
             <a:r>
               <a:rPr lang="en-AU" dirty="0"/>
-              <a:t> PCI performed</a:t>
+              <a:t> PCI performed.                      Y (Z%) were entered into the PCI Database.</a:t>
             </a:r>
           </a:p>
         </p:txBody>
@@ -1957,7 +1958,7 @@
             <a:pPr lvl="0"/>
             <a:r>
               <a:rPr lang="en-AU" dirty="0"/>
-              <a:t>X out of Y PCI performed for STEMI</a:t>
+              <a:t>X of Y PCI were emergencies for STEMI</a:t>
             </a:r>
           </a:p>
         </p:txBody>
@@ -1980,8 +1981,8 @@
         </p:nvSpPr>
         <p:spPr>
           <a:xfrm>
-            <a:off x="484767" y="8149544"/>
-            <a:ext cx="2587573" cy="497504"/>
+            <a:off x="345057" y="8149544"/>
+            <a:ext cx="2589127" cy="497504"/>
           </a:xfrm>
           <a:prstGeom prst="rect">
             <a:avLst/>
@@ -1998,8 +1999,12 @@
           <a:p>
             <a:pPr lvl="0"/>
             <a:r>
+              <a:rPr lang="en-GB" dirty="0"/>
+              <a:t>Evidence of referral to Cardiac Rehab was available in </a:t>
+            </a:r>
+            <a:r>
               <a:rPr lang="en-AU" dirty="0"/>
-              <a:t>X out of Y had evidence of referral to Cardiac Rehab</a:t>
+              <a:t>X out of Y patients</a:t>
             </a:r>
           </a:p>
         </p:txBody>
@@ -2023,7 +2028,7 @@
         <p:spPr>
           <a:xfrm>
             <a:off x="216695" y="1562072"/>
-            <a:ext cx="4405789" cy="344012"/>
+            <a:ext cx="4958583" cy="344012"/>
           </a:xfrm>
           <a:prstGeom prst="roundRect">
             <a:avLst/>

--- a/pci_poster/poster_template.pptx
+++ b/pci_poster/poster_template.pptx
@@ -732,7 +732,7 @@
           <a:p>
             <a:fld id="{71C53CA5-41C7-4923-8C6F-B3E91010339F}" type="datetimeFigureOut">
               <a:rPr lang="en-AU" smtClean="0"/>
-              <a:t>18/08/2026</a:t>
+              <a:t>21/08/2026</a:t>
             </a:fld>
             <a:endParaRPr lang="en-AU"/>
           </a:p>
@@ -909,7 +909,7 @@
           <a:p>
             <a:fld id="{C000ED89-5811-46A2-AFCA-7C8C83CE9906}" type="datetimeFigureOut">
               <a:rPr lang="en-AU" smtClean="0"/>
-              <a:t>18/08/2026</a:t>
+              <a:t>21/08/2026</a:t>
             </a:fld>
             <a:endParaRPr lang="en-AU"/>
           </a:p>
@@ -1216,7 +1216,7 @@
         </p:blipFill>
         <p:spPr>
           <a:xfrm>
-            <a:off x="1863278" y="3332219"/>
+            <a:off x="1863278" y="3109793"/>
             <a:ext cx="3312000" cy="4968001"/>
           </a:xfrm>
           <a:prstGeom prst="rect">
@@ -1226,524 +1226,358 @@
       </p:pic>
       <p:sp>
         <p:nvSpPr>
-          <p:cNvPr id="15" name="shp_circle_yellow">
+          <p:cNvPr id="45" name="ph_poster_production_date">
             <a:extLst>
               <a:ext uri="{FF2B5EF4-FFF2-40B4-BE49-F238E27FC236}">
-                <a16:creationId xmlns:a16="http://schemas.microsoft.com/office/drawing/2014/main" id="{0CFD3C25-6057-A68F-D7E4-8752A2F67E93}"/>
+                <a16:creationId xmlns:a16="http://schemas.microsoft.com/office/drawing/2014/main" id="{CFA66B11-7F54-5482-663D-8B6227A02FBD}"/>
               </a:ext>
             </a:extLst>
           </p:cNvPr>
-          <p:cNvSpPr/>
-          <p:nvPr userDrawn="1"/>
+          <p:cNvSpPr>
+            <a:spLocks noGrp="1"/>
+          </p:cNvSpPr>
+          <p:nvPr>
+            <p:ph type="body" sz="quarter" idx="19"/>
+          </p:nvPr>
         </p:nvSpPr>
         <p:spPr>
           <a:xfrm>
-            <a:off x="2034184" y="7049420"/>
-            <a:ext cx="900000" cy="900000"/>
+            <a:off x="2732832" y="9555735"/>
+            <a:ext cx="3823915" cy="222079"/>
           </a:xfrm>
-          <a:prstGeom prst="ellipse">
+          <a:prstGeom prst="rect">
             <a:avLst/>
           </a:prstGeom>
-          <a:solidFill>
-            <a:srgbClr val="FFC000"/>
-          </a:solidFill>
-          <a:ln>
-            <a:noFill/>
-          </a:ln>
         </p:spPr>
-        <p:style>
-          <a:lnRef idx="2">
-            <a:schemeClr val="accent1">
-              <a:shade val="50000"/>
-            </a:schemeClr>
-          </a:lnRef>
-          <a:fillRef idx="1">
-            <a:schemeClr val="accent1"/>
-          </a:fillRef>
-          <a:effectRef idx="0">
-            <a:schemeClr val="accent1"/>
-          </a:effectRef>
-          <a:fontRef idx="minor">
-            <a:schemeClr val="lt1"/>
-          </a:fontRef>
-        </p:style>
         <p:txBody>
-          <a:bodyPr rtlCol="0" anchor="ctr"/>
-          <a:lstStyle/>
+          <a:bodyPr/>
+          <a:lstStyle>
+            <a:lvl1pPr marL="0" indent="0" algn="r">
+              <a:buNone/>
+              <a:defRPr sz="1200" i="1"/>
+            </a:lvl1pPr>
+          </a:lstStyle>
           <a:p>
-            <a:pPr algn="ctr"/>
-            <a:endParaRPr lang="en-AU" sz="1801" dirty="0">
-              <a:solidFill>
-                <a:schemeClr val="accent1"/>
-              </a:solidFill>
-            </a:endParaRPr>
+            <a:pPr lvl="0"/>
+            <a:endParaRPr lang="en-US" dirty="0"/>
           </a:p>
         </p:txBody>
       </p:sp>
       <p:sp>
         <p:nvSpPr>
-          <p:cNvPr id="17" name="shp_urg">
+          <p:cNvPr id="38" name="ph_disch_meds_dapt">
             <a:extLst>
               <a:ext uri="{FF2B5EF4-FFF2-40B4-BE49-F238E27FC236}">
-                <a16:creationId xmlns:a16="http://schemas.microsoft.com/office/drawing/2014/main" id="{E153B05D-1487-8051-2ADA-5CCDC9A62160}"/>
+                <a16:creationId xmlns:a16="http://schemas.microsoft.com/office/drawing/2014/main" id="{D56FA25C-826C-AEF5-957C-F09DBE615CC2}"/>
               </a:ext>
             </a:extLst>
           </p:cNvPr>
-          <p:cNvSpPr/>
-          <p:nvPr userDrawn="1"/>
+          <p:cNvSpPr>
+            <a:spLocks noGrp="1"/>
+          </p:cNvSpPr>
+          <p:nvPr>
+            <p:ph type="body" sz="quarter" idx="13" hasCustomPrompt="1"/>
+          </p:nvPr>
         </p:nvSpPr>
         <p:spPr>
           <a:xfrm>
-            <a:off x="1220330" y="4660088"/>
-            <a:ext cx="900000" cy="900000"/>
+            <a:off x="3804989" y="8018449"/>
+            <a:ext cx="2630768" cy="641977"/>
           </a:xfrm>
-          <a:prstGeom prst="ellipse">
+          <a:prstGeom prst="rect">
             <a:avLst/>
           </a:prstGeom>
-          <a:solidFill>
-            <a:srgbClr val="00B050"/>
-          </a:solidFill>
-          <a:ln>
-            <a:noFill/>
-          </a:ln>
         </p:spPr>
-        <p:style>
-          <a:lnRef idx="2">
-            <a:schemeClr val="accent1">
-              <a:shade val="50000"/>
-            </a:schemeClr>
-          </a:lnRef>
-          <a:fillRef idx="1">
-            <a:schemeClr val="accent1"/>
-          </a:fillRef>
-          <a:effectRef idx="0">
-            <a:schemeClr val="accent1"/>
-          </a:effectRef>
-          <a:fontRef idx="minor">
-            <a:schemeClr val="lt1"/>
-          </a:fontRef>
-        </p:style>
         <p:txBody>
-          <a:bodyPr rtlCol="0" anchor="ctr"/>
-          <a:lstStyle/>
+          <a:bodyPr lIns="0" tIns="0" rIns="0" bIns="0"/>
+          <a:lstStyle>
+            <a:lvl1pPr marL="0" indent="0">
+              <a:buNone/>
+              <a:defRPr sz="1600"/>
+            </a:lvl1pPr>
+          </a:lstStyle>
           <a:p>
-            <a:pPr algn="ctr"/>
-            <a:endParaRPr lang="en-AU" sz="1801" dirty="0">
-              <a:solidFill>
-                <a:schemeClr val="accent1"/>
-              </a:solidFill>
-            </a:endParaRPr>
+            <a:pPr lvl="0"/>
+            <a:r>
+              <a:rPr lang="en-AU" dirty="0"/>
+              <a:t>X of Y patients were discharged on DAPT</a:t>
+            </a:r>
           </a:p>
         </p:txBody>
       </p:sp>
       <p:sp>
         <p:nvSpPr>
-          <p:cNvPr id="18" name="shp_mort">
+          <p:cNvPr id="49" name="ph_disch_meds_dapt_pct">
             <a:extLst>
               <a:ext uri="{FF2B5EF4-FFF2-40B4-BE49-F238E27FC236}">
-                <a16:creationId xmlns:a16="http://schemas.microsoft.com/office/drawing/2014/main" id="{F398ED92-E238-6D9E-B3F0-984D6E2E8650}"/>
+                <a16:creationId xmlns:a16="http://schemas.microsoft.com/office/drawing/2014/main" id="{1FE6F18A-7157-4F0B-5E13-82B5E30007F4}"/>
               </a:ext>
             </a:extLst>
           </p:cNvPr>
-          <p:cNvSpPr/>
-          <p:nvPr userDrawn="1"/>
+          <p:cNvSpPr>
+            <a:spLocks noGrp="1"/>
+          </p:cNvSpPr>
+          <p:nvPr>
+            <p:ph type="body" sz="quarter" idx="29" hasCustomPrompt="1"/>
+          </p:nvPr>
         </p:nvSpPr>
         <p:spPr>
           <a:xfrm>
-            <a:off x="4622484" y="4969171"/>
-            <a:ext cx="900000" cy="900000"/>
-          </a:xfrm>
-          <a:prstGeom prst="ellipse">
-            <a:avLst/>
-          </a:prstGeom>
-          <a:solidFill>
-            <a:schemeClr val="accent5">
-              <a:lumMod val="60000"/>
-              <a:lumOff val="40000"/>
-            </a:schemeClr>
-          </a:solidFill>
-          <a:ln>
-            <a:noFill/>
-          </a:ln>
-        </p:spPr>
-        <p:style>
-          <a:lnRef idx="2">
-            <a:schemeClr val="accent1">
-              <a:shade val="50000"/>
-            </a:schemeClr>
-          </a:lnRef>
-          <a:fillRef idx="1">
-            <a:schemeClr val="accent1"/>
-          </a:fillRef>
-          <a:effectRef idx="0">
-            <a:schemeClr val="accent1"/>
-          </a:effectRef>
-          <a:fontRef idx="minor">
-            <a:schemeClr val="lt1"/>
-          </a:fontRef>
-        </p:style>
-        <p:txBody>
-          <a:bodyPr rtlCol="0" anchor="ctr"/>
-          <a:lstStyle/>
-          <a:p>
-            <a:pPr algn="ctr"/>
-            <a:endParaRPr lang="en-AU" sz="1801" dirty="0">
-              <a:solidFill>
-                <a:schemeClr val="accent1"/>
-              </a:solidFill>
-            </a:endParaRPr>
-          </a:p>
-        </p:txBody>
-      </p:sp>
-      <p:sp>
-        <p:nvSpPr>
-          <p:cNvPr id="20" name="shp_pci">
-            <a:extLst>
-              <a:ext uri="{FF2B5EF4-FFF2-40B4-BE49-F238E27FC236}">
-                <a16:creationId xmlns:a16="http://schemas.microsoft.com/office/drawing/2014/main" id="{4AAEA4BB-C109-28FA-B6A2-6EF5B68D1217}"/>
-              </a:ext>
-            </a:extLst>
-          </p:cNvPr>
-          <p:cNvSpPr/>
-          <p:nvPr userDrawn="1"/>
-        </p:nvSpPr>
-        <p:spPr>
-          <a:xfrm>
-            <a:off x="1832832" y="2814771"/>
-            <a:ext cx="900000" cy="900000"/>
-          </a:xfrm>
-          <a:prstGeom prst="ellipse">
-            <a:avLst/>
-          </a:prstGeom>
-          <a:solidFill>
-            <a:srgbClr val="89B8DB"/>
-          </a:solidFill>
-          <a:ln>
-            <a:noFill/>
-          </a:ln>
-        </p:spPr>
-        <p:style>
-          <a:lnRef idx="2">
-            <a:schemeClr val="accent1">
-              <a:shade val="50000"/>
-            </a:schemeClr>
-          </a:lnRef>
-          <a:fillRef idx="1">
-            <a:schemeClr val="accent1"/>
-          </a:fillRef>
-          <a:effectRef idx="0">
-            <a:schemeClr val="accent1"/>
-          </a:effectRef>
-          <a:fontRef idx="minor">
-            <a:schemeClr val="lt1"/>
-          </a:fontRef>
-        </p:style>
-        <p:txBody>
-          <a:bodyPr rtlCol="0" anchor="ctr"/>
-          <a:lstStyle/>
-          <a:p>
-            <a:pPr algn="ctr"/>
-            <a:endParaRPr lang="en-AU" sz="1801" dirty="0">
-              <a:solidFill>
-                <a:schemeClr val="accent1"/>
-              </a:solidFill>
-            </a:endParaRPr>
-          </a:p>
-        </p:txBody>
-      </p:sp>
-      <p:sp>
-        <p:nvSpPr>
-          <p:cNvPr id="21" name="shp_ccu">
-            <a:extLst>
-              <a:ext uri="{FF2B5EF4-FFF2-40B4-BE49-F238E27FC236}">
-                <a16:creationId xmlns:a16="http://schemas.microsoft.com/office/drawing/2014/main" id="{8E7B100D-340E-CDEA-8F6B-7FDE741C252A}"/>
-              </a:ext>
-            </a:extLst>
-          </p:cNvPr>
-          <p:cNvSpPr/>
-          <p:nvPr userDrawn="1"/>
-        </p:nvSpPr>
-        <p:spPr>
-          <a:xfrm>
-            <a:off x="3767974" y="7156664"/>
-            <a:ext cx="900000" cy="900000"/>
-          </a:xfrm>
-          <a:prstGeom prst="ellipse">
-            <a:avLst/>
-          </a:prstGeom>
-          <a:solidFill>
-            <a:srgbClr val="E75B2B"/>
-          </a:solidFill>
-          <a:ln>
-            <a:noFill/>
-          </a:ln>
-        </p:spPr>
-        <p:style>
-          <a:lnRef idx="2">
-            <a:schemeClr val="accent1">
-              <a:shade val="50000"/>
-            </a:schemeClr>
-          </a:lnRef>
-          <a:fillRef idx="1">
-            <a:schemeClr val="accent1"/>
-          </a:fillRef>
-          <a:effectRef idx="0">
-            <a:schemeClr val="accent1"/>
-          </a:effectRef>
-          <a:fontRef idx="minor">
-            <a:schemeClr val="lt1"/>
-          </a:fontRef>
-        </p:style>
-        <p:txBody>
-          <a:bodyPr rtlCol="0" anchor="ctr"/>
-          <a:lstStyle/>
-          <a:p>
-            <a:pPr algn="ctr"/>
-            <a:endParaRPr lang="en-AU" sz="1801" dirty="0">
-              <a:solidFill>
-                <a:schemeClr val="accent1"/>
-              </a:solidFill>
-            </a:endParaRPr>
-          </a:p>
-        </p:txBody>
-      </p:sp>
-      <p:sp>
-        <p:nvSpPr>
-          <p:cNvPr id="22" name="shp_frailty">
-            <a:extLst>
-              <a:ext uri="{FF2B5EF4-FFF2-40B4-BE49-F238E27FC236}">
-                <a16:creationId xmlns:a16="http://schemas.microsoft.com/office/drawing/2014/main" id="{A79E2BBB-6172-9A7B-B7D2-88173061667A}"/>
-              </a:ext>
-            </a:extLst>
-          </p:cNvPr>
-          <p:cNvSpPr/>
-          <p:nvPr userDrawn="1"/>
-        </p:nvSpPr>
-        <p:spPr>
-          <a:xfrm>
-            <a:off x="3911092" y="2786713"/>
-            <a:ext cx="900000" cy="900000"/>
-          </a:xfrm>
-          <a:prstGeom prst="ellipse">
-            <a:avLst/>
-          </a:prstGeom>
-          <a:solidFill>
-            <a:schemeClr val="accent1"/>
-          </a:solidFill>
-          <a:ln>
-            <a:noFill/>
-          </a:ln>
-        </p:spPr>
-        <p:style>
-          <a:lnRef idx="2">
-            <a:schemeClr val="accent1">
-              <a:shade val="50000"/>
-            </a:schemeClr>
-          </a:lnRef>
-          <a:fillRef idx="1">
-            <a:schemeClr val="accent1"/>
-          </a:fillRef>
-          <a:effectRef idx="0">
-            <a:schemeClr val="accent1"/>
-          </a:effectRef>
-          <a:fontRef idx="minor">
-            <a:schemeClr val="lt1"/>
-          </a:fontRef>
-        </p:style>
-        <p:txBody>
-          <a:bodyPr rtlCol="0" anchor="ctr"/>
-          <a:lstStyle/>
-          <a:p>
-            <a:pPr algn="ctr"/>
-            <a:endParaRPr lang="en-AU" sz="1801" dirty="0">
-              <a:solidFill>
-                <a:schemeClr val="accent1"/>
-              </a:solidFill>
-            </a:endParaRPr>
-          </a:p>
-        </p:txBody>
-      </p:sp>
-      <p:pic>
-        <p:nvPicPr>
-          <p:cNvPr id="14" name="pic_pci">
-            <a:extLst>
-              <a:ext uri="{FF2B5EF4-FFF2-40B4-BE49-F238E27FC236}">
-                <a16:creationId xmlns:a16="http://schemas.microsoft.com/office/drawing/2014/main" id="{E8591D62-F0EC-DF4B-55A0-003CBCE760CC}"/>
-              </a:ext>
-            </a:extLst>
-          </p:cNvPr>
-          <p:cNvPicPr>
-            <a:picLocks noChangeAspect="1"/>
-          </p:cNvPicPr>
-          <p:nvPr userDrawn="1"/>
-        </p:nvPicPr>
-        <p:blipFill>
-          <a:blip r:embed="rId3" cstate="screen">
-            <a:extLst>
-              <a:ext uri="{BEBA8EAE-BF5A-486C-A8C5-ECC9F3942E4B}">
-                <a14:imgProps xmlns:a14="http://schemas.microsoft.com/office/drawing/2010/main">
-                  <a14:imgLayer r:embed="rId4">
-                    <a14:imgEffect>
-                      <a14:backgroundRemoval t="10000" b="90000" l="10000" r="90000"/>
-                    </a14:imgEffect>
-                  </a14:imgLayer>
-                </a14:imgProps>
-              </a:ext>
-              <a:ext uri="{28A0092B-C50C-407E-A947-70E740481C1C}">
-                <a14:useLocalDpi xmlns:a14="http://schemas.microsoft.com/office/drawing/2010/main"/>
-              </a:ext>
-            </a:extLst>
-          </a:blip>
-          <a:stretch>
-            <a:fillRect/>
-          </a:stretch>
-        </p:blipFill>
-        <p:spPr>
-          <a:xfrm rot="19302838">
-            <a:off x="1784692" y="2725966"/>
-            <a:ext cx="996280" cy="996280"/>
+            <a:off x="4785214" y="7247812"/>
+            <a:ext cx="1512079" cy="504000"/>
           </a:xfrm>
           <a:prstGeom prst="rect">
             <a:avLst/>
           </a:prstGeom>
         </p:spPr>
-      </p:pic>
-      <p:pic>
-        <p:nvPicPr>
-          <p:cNvPr id="30" name="pic_urgency">
+        <p:txBody>
+          <a:bodyPr lIns="0" tIns="0" rIns="0" bIns="0" anchor="ctr" anchorCtr="0"/>
+          <a:lstStyle>
+            <a:lvl1pPr marL="0" indent="0">
+              <a:buNone/>
+              <a:defRPr sz="4800">
+                <a:solidFill>
+                  <a:srgbClr val="E75B2B"/>
+                </a:solidFill>
+              </a:defRPr>
+            </a:lvl1pPr>
+            <a:lvl2pPr>
+              <a:defRPr>
+                <a:solidFill>
+                  <a:srgbClr val="E75B2B"/>
+                </a:solidFill>
+              </a:defRPr>
+            </a:lvl2pPr>
+            <a:lvl3pPr>
+              <a:defRPr>
+                <a:solidFill>
+                  <a:srgbClr val="E75B2B"/>
+                </a:solidFill>
+              </a:defRPr>
+            </a:lvl3pPr>
+            <a:lvl4pPr>
+              <a:defRPr>
+                <a:solidFill>
+                  <a:srgbClr val="E75B2B"/>
+                </a:solidFill>
+              </a:defRPr>
+            </a:lvl4pPr>
+            <a:lvl5pPr>
+              <a:defRPr>
+                <a:solidFill>
+                  <a:srgbClr val="E75B2B"/>
+                </a:solidFill>
+              </a:defRPr>
+            </a:lvl5pPr>
+          </a:lstStyle>
+          <a:p>
+            <a:pPr lvl="0"/>
+            <a:r>
+              <a:rPr lang="en-US" dirty="0"/>
+              <a:t>X%</a:t>
+            </a:r>
+            <a:endParaRPr lang="en-AU" dirty="0"/>
+          </a:p>
+        </p:txBody>
+      </p:sp>
+      <p:grpSp>
+        <p:nvGrpSpPr>
+          <p:cNvPr id="4" name="meds">
             <a:extLst>
               <a:ext uri="{FF2B5EF4-FFF2-40B4-BE49-F238E27FC236}">
-                <a16:creationId xmlns:a16="http://schemas.microsoft.com/office/drawing/2014/main" id="{11D4B853-1ADD-0145-DAD2-521BC0A43308}"/>
+                <a16:creationId xmlns:a16="http://schemas.microsoft.com/office/drawing/2014/main" id="{99DC304C-9316-ACD0-00ED-67563F615699}"/>
               </a:ext>
             </a:extLst>
           </p:cNvPr>
-          <p:cNvPicPr>
-            <a:picLocks noChangeAspect="1"/>
-          </p:cNvPicPr>
+          <p:cNvGrpSpPr/>
           <p:nvPr userDrawn="1"/>
-        </p:nvPicPr>
-        <p:blipFill>
-          <a:blip r:embed="rId5" cstate="screen">
+        </p:nvGrpSpPr>
+        <p:grpSpPr>
+          <a:xfrm>
+            <a:off x="3767974" y="7033094"/>
+            <a:ext cx="900000" cy="900000"/>
+            <a:chOff x="3767974" y="7255520"/>
+            <a:chExt cx="900000" cy="900000"/>
+          </a:xfrm>
+        </p:grpSpPr>
+        <p:sp>
+          <p:nvSpPr>
+            <p:cNvPr id="21" name="shp_meds">
+              <a:extLst>
+                <a:ext uri="{FF2B5EF4-FFF2-40B4-BE49-F238E27FC236}">
+                  <a16:creationId xmlns:a16="http://schemas.microsoft.com/office/drawing/2014/main" id="{8E7B100D-340E-CDEA-8F6B-7FDE741C252A}"/>
+                </a:ext>
+              </a:extLst>
+            </p:cNvPr>
+            <p:cNvSpPr/>
+            <p:nvPr userDrawn="1"/>
+          </p:nvSpPr>
+          <p:spPr>
+            <a:xfrm>
+              <a:off x="3767974" y="7255520"/>
+              <a:ext cx="900000" cy="900000"/>
+            </a:xfrm>
+            <a:prstGeom prst="ellipse">
+              <a:avLst/>
+            </a:prstGeom>
+            <a:solidFill>
+              <a:srgbClr val="E75B2B"/>
+            </a:solidFill>
+            <a:ln>
+              <a:noFill/>
+            </a:ln>
+          </p:spPr>
+          <p:style>
+            <a:lnRef idx="2">
+              <a:schemeClr val="accent1">
+                <a:shade val="50000"/>
+              </a:schemeClr>
+            </a:lnRef>
+            <a:fillRef idx="1">
+              <a:schemeClr val="accent1"/>
+            </a:fillRef>
+            <a:effectRef idx="0">
+              <a:schemeClr val="accent1"/>
+            </a:effectRef>
+            <a:fontRef idx="minor">
+              <a:schemeClr val="lt1"/>
+            </a:fontRef>
+          </p:style>
+          <p:txBody>
+            <a:bodyPr rtlCol="0" anchor="ctr"/>
+            <a:lstStyle/>
+            <a:p>
+              <a:pPr algn="ctr"/>
+              <a:endParaRPr lang="en-AU" sz="1801" dirty="0">
+                <a:solidFill>
+                  <a:schemeClr val="accent1"/>
+                </a:solidFill>
+              </a:endParaRPr>
+            </a:p>
+          </p:txBody>
+        </p:sp>
+        <p:pic>
+          <p:nvPicPr>
+            <p:cNvPr id="2075" name="pic_meds" descr="Pill - Free healthcare and medical icons">
+              <a:extLst>
+                <a:ext uri="{FF2B5EF4-FFF2-40B4-BE49-F238E27FC236}">
+                  <a16:creationId xmlns:a16="http://schemas.microsoft.com/office/drawing/2014/main" id="{541A6AC7-D175-3548-67FC-DC5600EFAB59}"/>
+                </a:ext>
+              </a:extLst>
+            </p:cNvPr>
+            <p:cNvPicPr>
+              <a:picLocks noChangeAspect="1" noChangeArrowheads="1"/>
+            </p:cNvPicPr>
+            <p:nvPr userDrawn="1"/>
+          </p:nvPicPr>
+          <p:blipFill>
+            <a:blip r:embed="rId3" cstate="screen">
+              <a:extLst>
+                <a:ext uri="{28A0092B-C50C-407E-A947-70E740481C1C}">
+                  <a14:useLocalDpi xmlns:a14="http://schemas.microsoft.com/office/drawing/2010/main"/>
+                </a:ext>
+              </a:extLst>
+            </a:blip>
+            <a:srcRect/>
+            <a:stretch>
+              <a:fillRect/>
+            </a:stretch>
+          </p:blipFill>
+          <p:spPr bwMode="auto">
+            <a:xfrm>
+              <a:off x="3926466" y="7362489"/>
+              <a:ext cx="602800" cy="602800"/>
+            </a:xfrm>
+            <a:prstGeom prst="rect">
+              <a:avLst/>
+            </a:prstGeom>
+            <a:noFill/>
             <a:extLst>
-              <a:ext uri="{28A0092B-C50C-407E-A947-70E740481C1C}">
-                <a14:useLocalDpi xmlns:a14="http://schemas.microsoft.com/office/drawing/2010/main"/>
+              <a:ext uri="{909E8E84-426E-40DD-AFC4-6F175D3DCCD1}">
+                <a14:hiddenFill xmlns:a14="http://schemas.microsoft.com/office/drawing/2010/main">
+                  <a:solidFill>
+                    <a:srgbClr val="FFFFFF"/>
+                  </a:solidFill>
+                </a14:hiddenFill>
               </a:ext>
             </a:extLst>
-          </a:blip>
-          <a:stretch>
-            <a:fillRect/>
-          </a:stretch>
-        </p:blipFill>
+          </p:spPr>
+        </p:pic>
+      </p:grpSp>
+      <p:sp>
+        <p:nvSpPr>
+          <p:cNvPr id="48" name="ph_radial_pct">
+            <a:extLst>
+              <a:ext uri="{FF2B5EF4-FFF2-40B4-BE49-F238E27FC236}">
+                <a16:creationId xmlns:a16="http://schemas.microsoft.com/office/drawing/2014/main" id="{7BD5F46B-2231-6D01-C514-F696C7DDE546}"/>
+              </a:ext>
+            </a:extLst>
+          </p:cNvPr>
+          <p:cNvSpPr>
+            <a:spLocks noGrp="1"/>
+          </p:cNvSpPr>
+          <p:nvPr>
+            <p:ph type="body" sz="quarter" idx="28" hasCustomPrompt="1"/>
+          </p:nvPr>
+        </p:nvSpPr>
         <p:spPr>
           <a:xfrm>
-            <a:off x="1275196" y="4676265"/>
-            <a:ext cx="793105" cy="793105"/>
+            <a:off x="4979949" y="5231626"/>
+            <a:ext cx="1335516" cy="504000"/>
           </a:xfrm>
           <a:prstGeom prst="rect">
             <a:avLst/>
           </a:prstGeom>
         </p:spPr>
-      </p:pic>
-      <p:pic>
-        <p:nvPicPr>
-          <p:cNvPr id="2075" name="pic_meds" descr="Pill - Free healthcare and medical icons">
-            <a:extLst>
-              <a:ext uri="{FF2B5EF4-FFF2-40B4-BE49-F238E27FC236}">
-                <a16:creationId xmlns:a16="http://schemas.microsoft.com/office/drawing/2014/main" id="{541A6AC7-D175-3548-67FC-DC5600EFAB59}"/>
-              </a:ext>
-            </a:extLst>
-          </p:cNvPr>
-          <p:cNvPicPr>
-            <a:picLocks noChangeAspect="1" noChangeArrowheads="1"/>
-          </p:cNvPicPr>
-          <p:nvPr userDrawn="1"/>
-        </p:nvPicPr>
-        <p:blipFill>
-          <a:blip r:embed="rId6" cstate="screen">
-            <a:extLst>
-              <a:ext uri="{28A0092B-C50C-407E-A947-70E740481C1C}">
-                <a14:useLocalDpi xmlns:a14="http://schemas.microsoft.com/office/drawing/2010/main"/>
-              </a:ext>
-            </a:extLst>
-          </a:blip>
-          <a:srcRect/>
-          <a:stretch>
-            <a:fillRect/>
-          </a:stretch>
-        </p:blipFill>
-        <p:spPr bwMode="auto">
-          <a:xfrm>
-            <a:off x="3926466" y="7263633"/>
-            <a:ext cx="602800" cy="602800"/>
-          </a:xfrm>
-          <a:prstGeom prst="rect">
-            <a:avLst/>
-          </a:prstGeom>
-          <a:noFill/>
-          <a:extLst>
-            <a:ext uri="{909E8E84-426E-40DD-AFC4-6F175D3DCCD1}">
-              <a14:hiddenFill xmlns:a14="http://schemas.microsoft.com/office/drawing/2010/main">
+        <p:txBody>
+          <a:bodyPr lIns="0" tIns="0" rIns="0" bIns="0" anchor="ctr" anchorCtr="0"/>
+          <a:lstStyle>
+            <a:lvl1pPr marL="0" indent="0">
+              <a:buNone/>
+              <a:defRPr sz="4800">
                 <a:solidFill>
-                  <a:srgbClr val="FFFFFF"/>
+                  <a:srgbClr val="D86ECC"/>
                 </a:solidFill>
-              </a14:hiddenFill>
-            </a:ext>
-          </a:extLst>
-        </p:spPr>
-      </p:pic>
-      <p:pic>
-        <p:nvPicPr>
-          <p:cNvPr id="96" name="pic_crehab">
-            <a:extLst>
-              <a:ext uri="{FF2B5EF4-FFF2-40B4-BE49-F238E27FC236}">
-                <a16:creationId xmlns:a16="http://schemas.microsoft.com/office/drawing/2014/main" id="{45022D99-4D6F-EC4D-B596-181CE3D268A0}"/>
-              </a:ext>
-            </a:extLst>
-          </p:cNvPr>
-          <p:cNvPicPr>
-            <a:picLocks noChangeAspect="1"/>
-          </p:cNvPicPr>
-          <p:nvPr userDrawn="1"/>
-        </p:nvPicPr>
-        <p:blipFill>
-          <a:blip r:embed="rId7" cstate="screen">
-            <a:extLst>
-              <a:ext uri="{BEBA8EAE-BF5A-486C-A8C5-ECC9F3942E4B}">
-                <a14:imgProps xmlns:a14="http://schemas.microsoft.com/office/drawing/2010/main">
-                  <a14:imgLayer r:embed="rId8">
-                    <a14:imgEffect>
-                      <a14:backgroundRemoval t="9020" b="95686" l="10000" r="89767">
-                        <a14:foregroundMark x1="28837" y1="9804" x2="44651" y2="9804"/>
-                        <a14:foregroundMark x1="55581" y1="9020" x2="69767" y2="9020"/>
-                        <a14:foregroundMark x1="31628" y1="52941" x2="37442" y2="63922"/>
-                        <a14:foregroundMark x1="55116" y1="27059" x2="66279" y2="43137"/>
-                        <a14:foregroundMark x1="66279" y1="19608" x2="65814" y2="34902"/>
-                        <a14:foregroundMark x1="30233" y1="17255" x2="30698" y2="23137"/>
-                        <a14:foregroundMark x1="30930" y1="90588" x2="47907" y2="96078"/>
-                        <a14:foregroundMark x1="47907" y1="96078" x2="71163" y2="90196"/>
-                      </a14:backgroundRemoval>
-                    </a14:imgEffect>
-                  </a14:imgLayer>
-                </a14:imgProps>
-              </a:ext>
-              <a:ext uri="{28A0092B-C50C-407E-A947-70E740481C1C}">
-                <a14:useLocalDpi xmlns:a14="http://schemas.microsoft.com/office/drawing/2010/main"/>
-              </a:ext>
-            </a:extLst>
-          </a:blip>
-          <a:srcRect/>
-          <a:stretch/>
-        </p:blipFill>
-        <p:spPr>
-          <a:xfrm>
-            <a:off x="1887992" y="7156664"/>
-            <a:ext cx="1193545" cy="710398"/>
-          </a:xfrm>
-          <a:prstGeom prst="rect">
-            <a:avLst/>
-          </a:prstGeom>
-        </p:spPr>
-      </p:pic>
+              </a:defRPr>
+            </a:lvl1pPr>
+            <a:lvl2pPr>
+              <a:defRPr>
+                <a:solidFill>
+                  <a:srgbClr val="D86ECC"/>
+                </a:solidFill>
+              </a:defRPr>
+            </a:lvl2pPr>
+            <a:lvl3pPr>
+              <a:defRPr>
+                <a:solidFill>
+                  <a:srgbClr val="D86ECC"/>
+                </a:solidFill>
+              </a:defRPr>
+            </a:lvl3pPr>
+            <a:lvl4pPr>
+              <a:defRPr>
+                <a:solidFill>
+                  <a:srgbClr val="D86ECC"/>
+                </a:solidFill>
+              </a:defRPr>
+            </a:lvl4pPr>
+            <a:lvl5pPr>
+              <a:defRPr>
+                <a:solidFill>
+                  <a:srgbClr val="D86ECC"/>
+                </a:solidFill>
+              </a:defRPr>
+            </a:lvl5pPr>
+          </a:lstStyle>
+          <a:p>
+            <a:pPr lvl="0"/>
+            <a:r>
+              <a:rPr lang="en-AU" dirty="0"/>
+              <a:t>X%</a:t>
+            </a:r>
+          </a:p>
+        </p:txBody>
+      </p:sp>
       <p:sp>
         <p:nvSpPr>
           <p:cNvPr id="37" name="ph_radial">
@@ -1762,7 +1596,7 @@
         </p:nvSpPr>
         <p:spPr>
           <a:xfrm>
-            <a:off x="4986852" y="5997264"/>
+            <a:off x="4986852" y="5774838"/>
             <a:ext cx="1839649" cy="620712"/>
           </a:xfrm>
           <a:prstGeom prst="rect">
@@ -1793,10 +1627,10 @@
       </p:sp>
       <p:sp>
         <p:nvSpPr>
-          <p:cNvPr id="38" name="ph_disch_meds_dapt">
+          <p:cNvPr id="5" name="mins">
             <a:extLst>
               <a:ext uri="{FF2B5EF4-FFF2-40B4-BE49-F238E27FC236}">
-                <a16:creationId xmlns:a16="http://schemas.microsoft.com/office/drawing/2014/main" id="{D56FA25C-826C-AEF5-957C-F09DBE615CC2}"/>
+                <a16:creationId xmlns:a16="http://schemas.microsoft.com/office/drawing/2014/main" id="{C71ECDB7-514B-3457-61EC-0EDD81FFB2F9}"/>
               </a:ext>
             </a:extLst>
           </p:cNvPr>
@@ -1804,13 +1638,312 @@
             <a:spLocks noGrp="1"/>
           </p:cNvSpPr>
           <p:nvPr>
-            <p:ph type="body" sz="quarter" idx="13" hasCustomPrompt="1"/>
+            <p:ph type="body" sz="quarter" idx="32" hasCustomPrompt="1"/>
           </p:nvPr>
         </p:nvSpPr>
         <p:spPr>
           <a:xfrm>
-            <a:off x="3804989" y="8142019"/>
-            <a:ext cx="2630768" cy="641977"/>
+            <a:off x="115329" y="4990048"/>
+            <a:ext cx="1231345" cy="504000"/>
+          </a:xfrm>
+          <a:prstGeom prst="rect">
+            <a:avLst/>
+          </a:prstGeom>
+        </p:spPr>
+        <p:txBody>
+          <a:bodyPr lIns="0" tIns="0" rIns="0" bIns="0" anchor="ctr" anchorCtr="0"/>
+          <a:lstStyle>
+            <a:lvl1pPr marL="0" indent="0" algn="ctr">
+              <a:buNone/>
+              <a:defRPr sz="2000">
+                <a:solidFill>
+                  <a:srgbClr val="00B050"/>
+                </a:solidFill>
+              </a:defRPr>
+            </a:lvl1pPr>
+            <a:lvl2pPr>
+              <a:defRPr>
+                <a:solidFill>
+                  <a:srgbClr val="00B050"/>
+                </a:solidFill>
+              </a:defRPr>
+            </a:lvl2pPr>
+            <a:lvl3pPr>
+              <a:defRPr>
+                <a:solidFill>
+                  <a:srgbClr val="00B050"/>
+                </a:solidFill>
+              </a:defRPr>
+            </a:lvl3pPr>
+            <a:lvl4pPr>
+              <a:defRPr>
+                <a:solidFill>
+                  <a:srgbClr val="00B050"/>
+                </a:solidFill>
+              </a:defRPr>
+            </a:lvl4pPr>
+            <a:lvl5pPr>
+              <a:defRPr>
+                <a:solidFill>
+                  <a:srgbClr val="00B050"/>
+                </a:solidFill>
+              </a:defRPr>
+            </a:lvl5pPr>
+          </a:lstStyle>
+          <a:p>
+            <a:pPr lvl="0"/>
+            <a:r>
+              <a:rPr lang="en-US" dirty="0"/>
+              <a:t>mins</a:t>
+            </a:r>
+            <a:endParaRPr lang="en-AU" dirty="0"/>
+          </a:p>
+        </p:txBody>
+      </p:sp>
+      <p:grpSp>
+        <p:nvGrpSpPr>
+          <p:cNvPr id="2" name="radial">
+            <a:extLst>
+              <a:ext uri="{FF2B5EF4-FFF2-40B4-BE49-F238E27FC236}">
+                <a16:creationId xmlns:a16="http://schemas.microsoft.com/office/drawing/2014/main" id="{B5E3AA50-0418-452B-C37C-6A5EE4384741}"/>
+              </a:ext>
+            </a:extLst>
+          </p:cNvPr>
+          <p:cNvGrpSpPr/>
+          <p:nvPr userDrawn="1"/>
+        </p:nvGrpSpPr>
+        <p:grpSpPr>
+          <a:xfrm>
+            <a:off x="4721340" y="4301898"/>
+            <a:ext cx="900000" cy="900000"/>
+            <a:chOff x="4622484" y="4969171"/>
+            <a:chExt cx="900000" cy="900000"/>
+          </a:xfrm>
+        </p:grpSpPr>
+        <p:sp>
+          <p:nvSpPr>
+            <p:cNvPr id="18" name="shp_radial">
+              <a:extLst>
+                <a:ext uri="{FF2B5EF4-FFF2-40B4-BE49-F238E27FC236}">
+                  <a16:creationId xmlns:a16="http://schemas.microsoft.com/office/drawing/2014/main" id="{F398ED92-E238-6D9E-B3F0-984D6E2E8650}"/>
+                </a:ext>
+              </a:extLst>
+            </p:cNvPr>
+            <p:cNvSpPr/>
+            <p:nvPr userDrawn="1"/>
+          </p:nvSpPr>
+          <p:spPr>
+            <a:xfrm>
+              <a:off x="4622484" y="4969171"/>
+              <a:ext cx="900000" cy="900000"/>
+            </a:xfrm>
+            <a:prstGeom prst="ellipse">
+              <a:avLst/>
+            </a:prstGeom>
+            <a:solidFill>
+              <a:schemeClr val="accent5">
+                <a:lumMod val="60000"/>
+                <a:lumOff val="40000"/>
+              </a:schemeClr>
+            </a:solidFill>
+            <a:ln>
+              <a:noFill/>
+            </a:ln>
+          </p:spPr>
+          <p:style>
+            <a:lnRef idx="2">
+              <a:schemeClr val="accent1">
+                <a:shade val="50000"/>
+              </a:schemeClr>
+            </a:lnRef>
+            <a:fillRef idx="1">
+              <a:schemeClr val="accent1"/>
+            </a:fillRef>
+            <a:effectRef idx="0">
+              <a:schemeClr val="accent1"/>
+            </a:effectRef>
+            <a:fontRef idx="minor">
+              <a:schemeClr val="lt1"/>
+            </a:fontRef>
+          </p:style>
+          <p:txBody>
+            <a:bodyPr rtlCol="0" anchor="ctr"/>
+            <a:lstStyle/>
+            <a:p>
+              <a:pPr algn="ctr"/>
+              <a:endParaRPr lang="en-AU" sz="1801" dirty="0">
+                <a:solidFill>
+                  <a:schemeClr val="accent1"/>
+                </a:solidFill>
+              </a:endParaRPr>
+            </a:p>
+          </p:txBody>
+        </p:sp>
+        <p:pic>
+          <p:nvPicPr>
+            <p:cNvPr id="12" name="icon_radial">
+              <a:extLst>
+                <a:ext uri="{FF2B5EF4-FFF2-40B4-BE49-F238E27FC236}">
+                  <a16:creationId xmlns:a16="http://schemas.microsoft.com/office/drawing/2014/main" id="{4A335C9F-C929-90C4-EE54-C3B0862F27AB}"/>
+                </a:ext>
+              </a:extLst>
+            </p:cNvPr>
+            <p:cNvPicPr>
+              <a:picLocks noChangeAspect="1"/>
+            </p:cNvPicPr>
+            <p:nvPr userDrawn="1"/>
+          </p:nvPicPr>
+          <p:blipFill>
+            <a:blip r:embed="rId4">
+              <a:clrChange>
+                <a:clrFrom>
+                  <a:srgbClr val="000000"/>
+                </a:clrFrom>
+                <a:clrTo>
+                  <a:srgbClr val="000000">
+                    <a:alpha val="0"/>
+                  </a:srgbClr>
+                </a:clrTo>
+              </a:clrChange>
+              <a:extLst>
+                <a:ext uri="{BEBA8EAE-BF5A-486C-A8C5-ECC9F3942E4B}">
+                  <a14:imgProps xmlns:a14="http://schemas.microsoft.com/office/drawing/2010/main">
+                    <a14:imgLayer r:embed="rId5">
+                      <a14:imgEffect>
+                        <a14:backgroundRemoval t="10000" b="90000" l="10000" r="90000">
+                          <a14:foregroundMark x1="42383" y1="45117" x2="42383" y2="45117"/>
+                          <a14:foregroundMark x1="44141" y1="45605" x2="44141" y2="45605"/>
+                          <a14:foregroundMark x1="46777" y1="45703" x2="46777" y2="45703"/>
+                          <a14:foregroundMark x1="52734" y1="45996" x2="52734" y2="45996"/>
+                          <a14:foregroundMark x1="54492" y1="45996" x2="54492" y2="45996"/>
+                          <a14:foregroundMark x1="49805" y1="49121" x2="49805" y2="49121"/>
+                          <a14:foregroundMark x1="56738" y1="45605" x2="56738" y2="45605"/>
+                          <a14:foregroundMark x1="58887" y1="45996" x2="58887" y2="45996"/>
+                          <a14:foregroundMark x1="60547" y1="45801" x2="60547" y2="45801"/>
+                          <a14:foregroundMark x1="62988" y1="45996" x2="62988" y2="45996"/>
+                          <a14:foregroundMark x1="65723" y1="46191" x2="65723" y2="46191"/>
+                          <a14:foregroundMark x1="67188" y1="46191" x2="67188" y2="46191"/>
+                          <a14:foregroundMark x1="69336" y1="46094" x2="69336" y2="46094"/>
+                          <a14:foregroundMark x1="71875" y1="45996" x2="71875" y2="45996"/>
+                          <a14:foregroundMark x1="73730" y1="46582" x2="73730" y2="46582"/>
+                          <a14:foregroundMark x1="75684" y1="46777" x2="75684" y2="46777"/>
+                          <a14:foregroundMark x1="77637" y1="47656" x2="77637" y2="47656"/>
+                        </a14:backgroundRemoval>
+                      </a14:imgEffect>
+                    </a14:imgLayer>
+                  </a14:imgProps>
+                </a:ext>
+              </a:extLst>
+            </a:blip>
+            <a:srcRect l="9320" t="28301" r="45829" b="33282"/>
+            <a:stretch/>
+          </p:blipFill>
+          <p:spPr>
+            <a:xfrm rot="1623292">
+              <a:off x="4663014" y="5011030"/>
+              <a:ext cx="848642" cy="726915"/>
+            </a:xfrm>
+            <a:prstGeom prst="rect">
+              <a:avLst/>
+            </a:prstGeom>
+          </p:spPr>
+        </p:pic>
+      </p:grpSp>
+      <p:sp>
+        <p:nvSpPr>
+          <p:cNvPr id="47" name="ph_stemi_pct">
+            <a:extLst>
+              <a:ext uri="{FF2B5EF4-FFF2-40B4-BE49-F238E27FC236}">
+                <a16:creationId xmlns:a16="http://schemas.microsoft.com/office/drawing/2014/main" id="{B1F62D07-2195-698B-2714-154E4501E4EB}"/>
+              </a:ext>
+            </a:extLst>
+          </p:cNvPr>
+          <p:cNvSpPr>
+            <a:spLocks noGrp="1"/>
+          </p:cNvSpPr>
+          <p:nvPr>
+            <p:ph type="body" sz="quarter" idx="27" hasCustomPrompt="1"/>
+          </p:nvPr>
+        </p:nvSpPr>
+        <p:spPr>
+          <a:xfrm>
+            <a:off x="5019163" y="2792147"/>
+            <a:ext cx="1516977" cy="504000"/>
+          </a:xfrm>
+          <a:prstGeom prst="rect">
+            <a:avLst/>
+          </a:prstGeom>
+        </p:spPr>
+        <p:txBody>
+          <a:bodyPr lIns="0" tIns="0" rIns="0" bIns="0" anchor="ctr" anchorCtr="0"/>
+          <a:lstStyle>
+            <a:lvl1pPr marL="0" indent="0" algn="l">
+              <a:buNone/>
+              <a:defRPr sz="4800">
+                <a:solidFill>
+                  <a:srgbClr val="133F6D"/>
+                </a:solidFill>
+              </a:defRPr>
+            </a:lvl1pPr>
+            <a:lvl2pPr>
+              <a:defRPr>
+                <a:solidFill>
+                  <a:srgbClr val="133F6D"/>
+                </a:solidFill>
+              </a:defRPr>
+            </a:lvl2pPr>
+            <a:lvl3pPr>
+              <a:defRPr>
+                <a:solidFill>
+                  <a:srgbClr val="133F6D"/>
+                </a:solidFill>
+              </a:defRPr>
+            </a:lvl3pPr>
+            <a:lvl4pPr>
+              <a:defRPr>
+                <a:solidFill>
+                  <a:srgbClr val="133F6D"/>
+                </a:solidFill>
+              </a:defRPr>
+            </a:lvl4pPr>
+            <a:lvl5pPr>
+              <a:defRPr>
+                <a:solidFill>
+                  <a:srgbClr val="133F6D"/>
+                </a:solidFill>
+              </a:defRPr>
+            </a:lvl5pPr>
+          </a:lstStyle>
+          <a:p>
+            <a:pPr lvl="0"/>
+            <a:r>
+              <a:rPr lang="en-US" dirty="0"/>
+              <a:t>X%</a:t>
+            </a:r>
+            <a:endParaRPr lang="en-AU" dirty="0"/>
+          </a:p>
+        </p:txBody>
+      </p:sp>
+      <p:sp>
+        <p:nvSpPr>
+          <p:cNvPr id="41" name="ph_stemi">
+            <a:extLst>
+              <a:ext uri="{FF2B5EF4-FFF2-40B4-BE49-F238E27FC236}">
+                <a16:creationId xmlns:a16="http://schemas.microsoft.com/office/drawing/2014/main" id="{D4F00C51-9060-7169-179B-F541DAFC0C7E}"/>
+              </a:ext>
+            </a:extLst>
+          </p:cNvPr>
+          <p:cNvSpPr>
+            <a:spLocks noGrp="1"/>
+          </p:cNvSpPr>
+          <p:nvPr>
+            <p:ph type="body" sz="quarter" idx="15" hasCustomPrompt="1"/>
+          </p:nvPr>
+        </p:nvSpPr>
+        <p:spPr>
+          <a:xfrm>
+            <a:off x="4266801" y="3585199"/>
+            <a:ext cx="2500255" cy="610343"/>
           </a:xfrm>
           <a:prstGeom prst="rect">
             <a:avLst/>
@@ -1819,7 +1952,7 @@
         <p:txBody>
           <a:bodyPr lIns="0" tIns="0" rIns="0" bIns="0"/>
           <a:lstStyle>
-            <a:lvl1pPr marL="0" indent="0">
+            <a:lvl1pPr marL="0" indent="0" algn="l">
               <a:buNone/>
               <a:defRPr sz="1600"/>
             </a:lvl1pPr>
@@ -1828,8 +1961,476 @@
             <a:pPr lvl="0"/>
             <a:r>
               <a:rPr lang="en-AU" dirty="0"/>
-              <a:t>X of Y patients were discharged on DAPT</a:t>
+              <a:t>X of Y PCI were emergencies for STEMI</a:t>
             </a:r>
+          </a:p>
+        </p:txBody>
+      </p:sp>
+      <p:grpSp>
+        <p:nvGrpSpPr>
+          <p:cNvPr id="8" name="stemi">
+            <a:extLst>
+              <a:ext uri="{FF2B5EF4-FFF2-40B4-BE49-F238E27FC236}">
+                <a16:creationId xmlns:a16="http://schemas.microsoft.com/office/drawing/2014/main" id="{48F6A469-26C0-EA12-0433-BAE178F0D17F}"/>
+              </a:ext>
+            </a:extLst>
+          </p:cNvPr>
+          <p:cNvGrpSpPr/>
+          <p:nvPr userDrawn="1"/>
+        </p:nvGrpSpPr>
+        <p:grpSpPr>
+          <a:xfrm>
+            <a:off x="3804989" y="2399161"/>
+            <a:ext cx="1138003" cy="1138003"/>
+            <a:chOff x="3804989" y="2621587"/>
+            <a:chExt cx="1138003" cy="1138003"/>
+          </a:xfrm>
+        </p:grpSpPr>
+        <p:sp>
+          <p:nvSpPr>
+            <p:cNvPr id="22" name="shp_stemi">
+              <a:extLst>
+                <a:ext uri="{FF2B5EF4-FFF2-40B4-BE49-F238E27FC236}">
+                  <a16:creationId xmlns:a16="http://schemas.microsoft.com/office/drawing/2014/main" id="{A79E2BBB-6172-9A7B-B7D2-88173061667A}"/>
+                </a:ext>
+              </a:extLst>
+            </p:cNvPr>
+            <p:cNvSpPr/>
+            <p:nvPr userDrawn="1"/>
+          </p:nvSpPr>
+          <p:spPr>
+            <a:xfrm>
+              <a:off x="3911092" y="2786713"/>
+              <a:ext cx="900000" cy="900000"/>
+            </a:xfrm>
+            <a:prstGeom prst="ellipse">
+              <a:avLst/>
+            </a:prstGeom>
+            <a:solidFill>
+              <a:schemeClr val="accent1"/>
+            </a:solidFill>
+            <a:ln>
+              <a:noFill/>
+            </a:ln>
+          </p:spPr>
+          <p:style>
+            <a:lnRef idx="2">
+              <a:schemeClr val="accent1">
+                <a:shade val="50000"/>
+              </a:schemeClr>
+            </a:lnRef>
+            <a:fillRef idx="1">
+              <a:schemeClr val="accent1"/>
+            </a:fillRef>
+            <a:effectRef idx="0">
+              <a:schemeClr val="accent1"/>
+            </a:effectRef>
+            <a:fontRef idx="minor">
+              <a:schemeClr val="lt1"/>
+            </a:fontRef>
+          </p:style>
+          <p:txBody>
+            <a:bodyPr rtlCol="0" anchor="ctr"/>
+            <a:lstStyle/>
+            <a:p>
+              <a:pPr algn="ctr"/>
+              <a:endParaRPr lang="en-AU" sz="1801" dirty="0">
+                <a:solidFill>
+                  <a:schemeClr val="accent1"/>
+                </a:solidFill>
+              </a:endParaRPr>
+            </a:p>
+          </p:txBody>
+        </p:sp>
+        <p:pic>
+          <p:nvPicPr>
+            <p:cNvPr id="24" name="pic_stemi">
+              <a:extLst>
+                <a:ext uri="{FF2B5EF4-FFF2-40B4-BE49-F238E27FC236}">
+                  <a16:creationId xmlns:a16="http://schemas.microsoft.com/office/drawing/2014/main" id="{C4803C3E-DE7F-2182-D796-F9D9BADE5615}"/>
+                </a:ext>
+              </a:extLst>
+            </p:cNvPr>
+            <p:cNvPicPr>
+              <a:picLocks noChangeAspect="1"/>
+            </p:cNvPicPr>
+            <p:nvPr userDrawn="1"/>
+          </p:nvPicPr>
+          <p:blipFill>
+            <a:blip r:embed="rId6"/>
+            <a:stretch>
+              <a:fillRect/>
+            </a:stretch>
+          </p:blipFill>
+          <p:spPr>
+            <a:xfrm>
+              <a:off x="3804989" y="2621587"/>
+              <a:ext cx="1138003" cy="1138003"/>
+            </a:xfrm>
+            <a:prstGeom prst="rect">
+              <a:avLst/>
+            </a:prstGeom>
+          </p:spPr>
+        </p:pic>
+      </p:grpSp>
+      <p:sp>
+        <p:nvSpPr>
+          <p:cNvPr id="50" name="ph_crehab_pct">
+            <a:extLst>
+              <a:ext uri="{FF2B5EF4-FFF2-40B4-BE49-F238E27FC236}">
+                <a16:creationId xmlns:a16="http://schemas.microsoft.com/office/drawing/2014/main" id="{A8C0D454-B653-61F4-5751-F6813F0ADF7C}"/>
+              </a:ext>
+            </a:extLst>
+          </p:cNvPr>
+          <p:cNvSpPr>
+            <a:spLocks noGrp="1"/>
+          </p:cNvSpPr>
+          <p:nvPr>
+            <p:ph type="body" sz="quarter" idx="30" hasCustomPrompt="1"/>
+          </p:nvPr>
+        </p:nvSpPr>
+        <p:spPr>
+          <a:xfrm>
+            <a:off x="461442" y="6935565"/>
+            <a:ext cx="1548000" cy="504000"/>
+          </a:xfrm>
+          <a:prstGeom prst="rect">
+            <a:avLst/>
+          </a:prstGeom>
+        </p:spPr>
+        <p:txBody>
+          <a:bodyPr lIns="0" tIns="0" rIns="0" bIns="0" anchor="ctr" anchorCtr="0"/>
+          <a:lstStyle>
+            <a:lvl1pPr marL="0" indent="0" algn="r">
+              <a:buNone/>
+              <a:defRPr sz="4800">
+                <a:solidFill>
+                  <a:srgbClr val="FFC000"/>
+                </a:solidFill>
+              </a:defRPr>
+            </a:lvl1pPr>
+            <a:lvl2pPr>
+              <a:defRPr>
+                <a:solidFill>
+                  <a:srgbClr val="FFC000"/>
+                </a:solidFill>
+              </a:defRPr>
+            </a:lvl2pPr>
+            <a:lvl3pPr>
+              <a:defRPr>
+                <a:solidFill>
+                  <a:srgbClr val="FFC000"/>
+                </a:solidFill>
+              </a:defRPr>
+            </a:lvl3pPr>
+            <a:lvl4pPr>
+              <a:defRPr>
+                <a:solidFill>
+                  <a:srgbClr val="FFC000"/>
+                </a:solidFill>
+              </a:defRPr>
+            </a:lvl4pPr>
+            <a:lvl5pPr>
+              <a:defRPr>
+                <a:solidFill>
+                  <a:srgbClr val="FFC000"/>
+                </a:solidFill>
+              </a:defRPr>
+            </a:lvl5pPr>
+          </a:lstStyle>
+          <a:p>
+            <a:pPr lvl="0"/>
+            <a:r>
+              <a:rPr lang="en-US" dirty="0"/>
+              <a:t>X%</a:t>
+            </a:r>
+            <a:endParaRPr lang="en-AU" dirty="0"/>
+          </a:p>
+        </p:txBody>
+      </p:sp>
+      <p:sp>
+        <p:nvSpPr>
+          <p:cNvPr id="42" name="ph_crehab">
+            <a:extLst>
+              <a:ext uri="{FF2B5EF4-FFF2-40B4-BE49-F238E27FC236}">
+                <a16:creationId xmlns:a16="http://schemas.microsoft.com/office/drawing/2014/main" id="{EF9CBF36-A38B-ED1E-AFAF-CEAD51735C04}"/>
+              </a:ext>
+            </a:extLst>
+          </p:cNvPr>
+          <p:cNvSpPr>
+            <a:spLocks noGrp="1"/>
+          </p:cNvSpPr>
+          <p:nvPr>
+            <p:ph type="body" sz="quarter" idx="14" hasCustomPrompt="1"/>
+          </p:nvPr>
+        </p:nvSpPr>
+        <p:spPr>
+          <a:xfrm>
+            <a:off x="369771" y="7791190"/>
+            <a:ext cx="2630768" cy="823559"/>
+          </a:xfrm>
+          <a:prstGeom prst="rect">
+            <a:avLst/>
+          </a:prstGeom>
+        </p:spPr>
+        <p:txBody>
+          <a:bodyPr lIns="0" tIns="0" rIns="0" bIns="0"/>
+          <a:lstStyle>
+            <a:lvl1pPr marL="0" indent="0" algn="r">
+              <a:buNone/>
+              <a:defRPr sz="1600"/>
+            </a:lvl1pPr>
+          </a:lstStyle>
+          <a:p>
+            <a:pPr lvl="0"/>
+            <a:r>
+              <a:rPr lang="en-GB" dirty="0"/>
+              <a:t>Evidence of referral to Cardiac Rehab was available in </a:t>
+            </a:r>
+            <a:r>
+              <a:rPr lang="en-AU" dirty="0"/>
+              <a:t>X out of Y patients</a:t>
+            </a:r>
+          </a:p>
+        </p:txBody>
+      </p:sp>
+      <p:grpSp>
+        <p:nvGrpSpPr>
+          <p:cNvPr id="7" name="crehab">
+            <a:extLst>
+              <a:ext uri="{FF2B5EF4-FFF2-40B4-BE49-F238E27FC236}">
+                <a16:creationId xmlns:a16="http://schemas.microsoft.com/office/drawing/2014/main" id="{EED5867F-A84D-6E58-FB95-56F2A0386961}"/>
+              </a:ext>
+            </a:extLst>
+          </p:cNvPr>
+          <p:cNvGrpSpPr/>
+          <p:nvPr userDrawn="1"/>
+        </p:nvGrpSpPr>
+        <p:grpSpPr>
+          <a:xfrm>
+            <a:off x="1912706" y="6691067"/>
+            <a:ext cx="1193545" cy="900000"/>
+            <a:chOff x="1887992" y="7049420"/>
+            <a:chExt cx="1193545" cy="900000"/>
+          </a:xfrm>
+        </p:grpSpPr>
+        <p:sp>
+          <p:nvSpPr>
+            <p:cNvPr id="15" name="shp_circle_yellow">
+              <a:extLst>
+                <a:ext uri="{FF2B5EF4-FFF2-40B4-BE49-F238E27FC236}">
+                  <a16:creationId xmlns:a16="http://schemas.microsoft.com/office/drawing/2014/main" id="{0CFD3C25-6057-A68F-D7E4-8752A2F67E93}"/>
+                </a:ext>
+              </a:extLst>
+            </p:cNvPr>
+            <p:cNvSpPr/>
+            <p:nvPr userDrawn="1"/>
+          </p:nvSpPr>
+          <p:spPr>
+            <a:xfrm>
+              <a:off x="2034184" y="7049420"/>
+              <a:ext cx="900000" cy="900000"/>
+            </a:xfrm>
+            <a:prstGeom prst="ellipse">
+              <a:avLst/>
+            </a:prstGeom>
+            <a:solidFill>
+              <a:srgbClr val="FFC000"/>
+            </a:solidFill>
+            <a:ln>
+              <a:noFill/>
+            </a:ln>
+          </p:spPr>
+          <p:style>
+            <a:lnRef idx="2">
+              <a:schemeClr val="accent1">
+                <a:shade val="50000"/>
+              </a:schemeClr>
+            </a:lnRef>
+            <a:fillRef idx="1">
+              <a:schemeClr val="accent1"/>
+            </a:fillRef>
+            <a:effectRef idx="0">
+              <a:schemeClr val="accent1"/>
+            </a:effectRef>
+            <a:fontRef idx="minor">
+              <a:schemeClr val="lt1"/>
+            </a:fontRef>
+          </p:style>
+          <p:txBody>
+            <a:bodyPr rtlCol="0" anchor="ctr"/>
+            <a:lstStyle/>
+            <a:p>
+              <a:pPr algn="ctr"/>
+              <a:endParaRPr lang="en-AU" sz="1801" dirty="0">
+                <a:solidFill>
+                  <a:schemeClr val="accent1"/>
+                </a:solidFill>
+              </a:endParaRPr>
+            </a:p>
+          </p:txBody>
+        </p:sp>
+        <p:pic>
+          <p:nvPicPr>
+            <p:cNvPr id="96" name="pic_crehab">
+              <a:extLst>
+                <a:ext uri="{FF2B5EF4-FFF2-40B4-BE49-F238E27FC236}">
+                  <a16:creationId xmlns:a16="http://schemas.microsoft.com/office/drawing/2014/main" id="{45022D99-4D6F-EC4D-B596-181CE3D268A0}"/>
+                </a:ext>
+              </a:extLst>
+            </p:cNvPr>
+            <p:cNvPicPr>
+              <a:picLocks noChangeAspect="1"/>
+            </p:cNvPicPr>
+            <p:nvPr userDrawn="1"/>
+          </p:nvPicPr>
+          <p:blipFill>
+            <a:blip r:embed="rId7" cstate="screen">
+              <a:extLst>
+                <a:ext uri="{BEBA8EAE-BF5A-486C-A8C5-ECC9F3942E4B}">
+                  <a14:imgProps xmlns:a14="http://schemas.microsoft.com/office/drawing/2010/main">
+                    <a14:imgLayer r:embed="rId8">
+                      <a14:imgEffect>
+                        <a14:backgroundRemoval t="9020" b="95686" l="10000" r="89767">
+                          <a14:foregroundMark x1="28837" y1="9804" x2="44651" y2="9804"/>
+                          <a14:foregroundMark x1="55581" y1="9020" x2="69767" y2="9020"/>
+                          <a14:foregroundMark x1="31628" y1="52941" x2="37442" y2="63922"/>
+                          <a14:foregroundMark x1="55116" y1="27059" x2="66279" y2="43137"/>
+                          <a14:foregroundMark x1="66279" y1="19608" x2="65814" y2="34902"/>
+                          <a14:foregroundMark x1="30233" y1="17255" x2="30698" y2="23137"/>
+                          <a14:foregroundMark x1="30930" y1="90588" x2="47907" y2="96078"/>
+                          <a14:foregroundMark x1="47907" y1="96078" x2="71163" y2="90196"/>
+                        </a14:backgroundRemoval>
+                      </a14:imgEffect>
+                    </a14:imgLayer>
+                  </a14:imgProps>
+                </a:ext>
+                <a:ext uri="{28A0092B-C50C-407E-A947-70E740481C1C}">
+                  <a14:useLocalDpi xmlns:a14="http://schemas.microsoft.com/office/drawing/2010/main"/>
+                </a:ext>
+              </a:extLst>
+            </a:blip>
+            <a:srcRect/>
+            <a:stretch/>
+          </p:blipFill>
+          <p:spPr>
+            <a:xfrm>
+              <a:off x="1887992" y="7156664"/>
+              <a:ext cx="1193545" cy="710398"/>
+            </a:xfrm>
+            <a:prstGeom prst="rect">
+              <a:avLst/>
+            </a:prstGeom>
+          </p:spPr>
+        </p:pic>
+      </p:grpSp>
+      <p:sp>
+        <p:nvSpPr>
+          <p:cNvPr id="3" name="ph_door_to_reperfusion_additional_text">
+            <a:extLst>
+              <a:ext uri="{FF2B5EF4-FFF2-40B4-BE49-F238E27FC236}">
+                <a16:creationId xmlns:a16="http://schemas.microsoft.com/office/drawing/2014/main" id="{10F35289-C14E-D8DC-E6F0-74A1CC6A06E4}"/>
+              </a:ext>
+            </a:extLst>
+          </p:cNvPr>
+          <p:cNvSpPr txBox="1"/>
+          <p:nvPr userDrawn="1"/>
+        </p:nvSpPr>
+        <p:spPr>
+          <a:xfrm>
+            <a:off x="27015" y="5937773"/>
+            <a:ext cx="2051342" cy="338554"/>
+          </a:xfrm>
+          <a:prstGeom prst="rect">
+            <a:avLst/>
+          </a:prstGeom>
+          <a:noFill/>
+        </p:spPr>
+        <p:txBody>
+          <a:bodyPr wrap="square" lIns="72000" tIns="0" rIns="0" bIns="0" rtlCol="0">
+            <a:spAutoFit/>
+          </a:bodyPr>
+          <a:lstStyle/>
+          <a:p>
+            <a:r>
+              <a:rPr lang="en-AU" sz="1100" dirty="0"/>
+              <a:t>* direct or pre-hospital activated STEMI with chest pain &lt;12 hours</a:t>
+            </a:r>
+          </a:p>
+        </p:txBody>
+      </p:sp>
+      <p:sp>
+        <p:nvSpPr>
+          <p:cNvPr id="46" name="ph_door_to_reperfusion_pct">
+            <a:extLst>
+              <a:ext uri="{FF2B5EF4-FFF2-40B4-BE49-F238E27FC236}">
+                <a16:creationId xmlns:a16="http://schemas.microsoft.com/office/drawing/2014/main" id="{6C6C5E27-B920-6468-D3D0-CF1BF1645A0B}"/>
+              </a:ext>
+            </a:extLst>
+          </p:cNvPr>
+          <p:cNvSpPr>
+            <a:spLocks noGrp="1"/>
+          </p:cNvSpPr>
+          <p:nvPr>
+            <p:ph type="body" sz="quarter" idx="26" hasCustomPrompt="1"/>
+          </p:nvPr>
+        </p:nvSpPr>
+        <p:spPr>
+          <a:xfrm>
+            <a:off x="0" y="4652293"/>
+            <a:ext cx="1231345" cy="504000"/>
+          </a:xfrm>
+          <a:prstGeom prst="rect">
+            <a:avLst/>
+          </a:prstGeom>
+        </p:spPr>
+        <p:txBody>
+          <a:bodyPr lIns="0" tIns="0" rIns="0" bIns="0" anchor="ctr" anchorCtr="0"/>
+          <a:lstStyle>
+            <a:lvl1pPr marL="0" indent="0" algn="r">
+              <a:buNone/>
+              <a:defRPr sz="4800">
+                <a:solidFill>
+                  <a:srgbClr val="00B050"/>
+                </a:solidFill>
+              </a:defRPr>
+            </a:lvl1pPr>
+            <a:lvl2pPr>
+              <a:defRPr>
+                <a:solidFill>
+                  <a:srgbClr val="00B050"/>
+                </a:solidFill>
+              </a:defRPr>
+            </a:lvl2pPr>
+            <a:lvl3pPr>
+              <a:defRPr>
+                <a:solidFill>
+                  <a:srgbClr val="00B050"/>
+                </a:solidFill>
+              </a:defRPr>
+            </a:lvl3pPr>
+            <a:lvl4pPr>
+              <a:defRPr>
+                <a:solidFill>
+                  <a:srgbClr val="00B050"/>
+                </a:solidFill>
+              </a:defRPr>
+            </a:lvl4pPr>
+            <a:lvl5pPr>
+              <a:defRPr>
+                <a:solidFill>
+                  <a:srgbClr val="00B050"/>
+                </a:solidFill>
+              </a:defRPr>
+            </a:lvl5pPr>
+          </a:lstStyle>
+          <a:p>
+            <a:pPr lvl="0"/>
+            <a:r>
+              <a:rPr lang="en-US"/>
+              <a:t>X</a:t>
+            </a:r>
+            <a:endParaRPr lang="en-AU" dirty="0"/>
           </a:p>
         </p:txBody>
       </p:sp>
@@ -1851,7 +2452,7 @@
         </p:nvSpPr>
         <p:spPr>
           <a:xfrm>
-            <a:off x="27015" y="5699295"/>
+            <a:off x="27015" y="5476869"/>
             <a:ext cx="2051342" cy="438403"/>
           </a:xfrm>
           <a:prstGeom prst="rect">
@@ -1875,6 +2476,119 @@
           </a:p>
         </p:txBody>
       </p:sp>
+      <p:grpSp>
+        <p:nvGrpSpPr>
+          <p:cNvPr id="10" name="ph_door_to_reperfusion">
+            <a:extLst>
+              <a:ext uri="{FF2B5EF4-FFF2-40B4-BE49-F238E27FC236}">
+                <a16:creationId xmlns:a16="http://schemas.microsoft.com/office/drawing/2014/main" id="{A1CBE341-2177-8914-E409-ABE64EB1445D}"/>
+              </a:ext>
+            </a:extLst>
+          </p:cNvPr>
+          <p:cNvGrpSpPr/>
+          <p:nvPr userDrawn="1"/>
+        </p:nvGrpSpPr>
+        <p:grpSpPr>
+          <a:xfrm>
+            <a:off x="1220330" y="4462376"/>
+            <a:ext cx="900000" cy="900000"/>
+            <a:chOff x="1220330" y="4660088"/>
+            <a:chExt cx="900000" cy="900000"/>
+          </a:xfrm>
+        </p:grpSpPr>
+        <p:sp>
+          <p:nvSpPr>
+            <p:cNvPr id="17" name="shp_urg">
+              <a:extLst>
+                <a:ext uri="{FF2B5EF4-FFF2-40B4-BE49-F238E27FC236}">
+                  <a16:creationId xmlns:a16="http://schemas.microsoft.com/office/drawing/2014/main" id="{E153B05D-1487-8051-2ADA-5CCDC9A62160}"/>
+                </a:ext>
+              </a:extLst>
+            </p:cNvPr>
+            <p:cNvSpPr/>
+            <p:nvPr userDrawn="1"/>
+          </p:nvSpPr>
+          <p:spPr>
+            <a:xfrm>
+              <a:off x="1220330" y="4660088"/>
+              <a:ext cx="900000" cy="900000"/>
+            </a:xfrm>
+            <a:prstGeom prst="ellipse">
+              <a:avLst/>
+            </a:prstGeom>
+            <a:solidFill>
+              <a:srgbClr val="00B050"/>
+            </a:solidFill>
+            <a:ln>
+              <a:noFill/>
+            </a:ln>
+          </p:spPr>
+          <p:style>
+            <a:lnRef idx="2">
+              <a:schemeClr val="accent1">
+                <a:shade val="50000"/>
+              </a:schemeClr>
+            </a:lnRef>
+            <a:fillRef idx="1">
+              <a:schemeClr val="accent1"/>
+            </a:fillRef>
+            <a:effectRef idx="0">
+              <a:schemeClr val="accent1"/>
+            </a:effectRef>
+            <a:fontRef idx="minor">
+              <a:schemeClr val="lt1"/>
+            </a:fontRef>
+          </p:style>
+          <p:txBody>
+            <a:bodyPr rtlCol="0" anchor="ctr"/>
+            <a:lstStyle/>
+            <a:p>
+              <a:pPr algn="ctr"/>
+              <a:endParaRPr lang="en-AU" sz="1801" dirty="0">
+                <a:solidFill>
+                  <a:schemeClr val="accent1"/>
+                </a:solidFill>
+              </a:endParaRPr>
+            </a:p>
+          </p:txBody>
+        </p:sp>
+        <p:pic>
+          <p:nvPicPr>
+            <p:cNvPr id="30" name="pic_urgency">
+              <a:extLst>
+                <a:ext uri="{FF2B5EF4-FFF2-40B4-BE49-F238E27FC236}">
+                  <a16:creationId xmlns:a16="http://schemas.microsoft.com/office/drawing/2014/main" id="{11D4B853-1ADD-0145-DAD2-521BC0A43308}"/>
+                </a:ext>
+              </a:extLst>
+            </p:cNvPr>
+            <p:cNvPicPr>
+              <a:picLocks noChangeAspect="1"/>
+            </p:cNvPicPr>
+            <p:nvPr userDrawn="1"/>
+          </p:nvPicPr>
+          <p:blipFill>
+            <a:blip r:embed="rId9" cstate="screen">
+              <a:extLst>
+                <a:ext uri="{28A0092B-C50C-407E-A947-70E740481C1C}">
+                  <a14:useLocalDpi xmlns:a14="http://schemas.microsoft.com/office/drawing/2010/main"/>
+                </a:ext>
+              </a:extLst>
+            </a:blip>
+            <a:stretch>
+              <a:fillRect/>
+            </a:stretch>
+          </p:blipFill>
+          <p:spPr>
+            <a:xfrm>
+              <a:off x="1275196" y="4676265"/>
+              <a:ext cx="793105" cy="793105"/>
+            </a:xfrm>
+            <a:prstGeom prst="rect">
+              <a:avLst/>
+            </a:prstGeom>
+          </p:spPr>
+        </p:pic>
+      </p:grpSp>
       <p:sp>
         <p:nvSpPr>
           <p:cNvPr id="40" name="ph_pci">
@@ -1893,7 +2607,7 @@
         </p:nvSpPr>
         <p:spPr>
           <a:xfrm>
-            <a:off x="242766" y="3797910"/>
+            <a:off x="242766" y="3575484"/>
             <a:ext cx="2188139" cy="610343"/>
           </a:xfrm>
           <a:prstGeom prst="rect">
@@ -1923,10 +2637,10 @@
       </p:sp>
       <p:sp>
         <p:nvSpPr>
-          <p:cNvPr id="41" name="ph_stemi">
+          <p:cNvPr id="51" name="ph_pci_count">
             <a:extLst>
               <a:ext uri="{FF2B5EF4-FFF2-40B4-BE49-F238E27FC236}">
-                <a16:creationId xmlns:a16="http://schemas.microsoft.com/office/drawing/2014/main" id="{D4F00C51-9060-7169-179B-F541DAFC0C7E}"/>
+                <a16:creationId xmlns:a16="http://schemas.microsoft.com/office/drawing/2014/main" id="{BD10F3DD-814C-87B1-F3BC-B6770621C718}"/>
               </a:ext>
             </a:extLst>
           </p:cNvPr>
@@ -1934,81 +2648,190 @@
             <a:spLocks noGrp="1"/>
           </p:cNvSpPr>
           <p:nvPr>
-            <p:ph type="body" sz="quarter" idx="15" hasCustomPrompt="1"/>
+            <p:ph type="body" sz="quarter" idx="31" hasCustomPrompt="1"/>
           </p:nvPr>
         </p:nvSpPr>
         <p:spPr>
           <a:xfrm>
-            <a:off x="4266801" y="3807625"/>
-            <a:ext cx="2500255" cy="610343"/>
+            <a:off x="253138" y="2823199"/>
+            <a:ext cx="1548000" cy="504000"/>
           </a:xfrm>
           <a:prstGeom prst="rect">
             <a:avLst/>
           </a:prstGeom>
         </p:spPr>
         <p:txBody>
-          <a:bodyPr lIns="0" tIns="0" rIns="0" bIns="0"/>
+          <a:bodyPr lIns="0" tIns="0" rIns="0" bIns="0" anchor="ctr" anchorCtr="0"/>
           <a:lstStyle>
-            <a:lvl1pPr marL="0" indent="0" algn="l">
+            <a:lvl1pPr marL="0" indent="0" algn="r">
               <a:buNone/>
-              <a:defRPr sz="1600"/>
+              <a:defRPr sz="4800">
+                <a:solidFill>
+                  <a:srgbClr val="89B8DB"/>
+                </a:solidFill>
+              </a:defRPr>
             </a:lvl1pPr>
+            <a:lvl2pPr>
+              <a:defRPr>
+                <a:solidFill>
+                  <a:srgbClr val="FF0000"/>
+                </a:solidFill>
+              </a:defRPr>
+            </a:lvl2pPr>
+            <a:lvl3pPr>
+              <a:defRPr>
+                <a:solidFill>
+                  <a:srgbClr val="FF0000"/>
+                </a:solidFill>
+              </a:defRPr>
+            </a:lvl3pPr>
+            <a:lvl4pPr>
+              <a:defRPr>
+                <a:solidFill>
+                  <a:srgbClr val="FF0000"/>
+                </a:solidFill>
+              </a:defRPr>
+            </a:lvl4pPr>
+            <a:lvl5pPr>
+              <a:defRPr>
+                <a:solidFill>
+                  <a:srgbClr val="FF0000"/>
+                </a:solidFill>
+              </a:defRPr>
+            </a:lvl5pPr>
           </a:lstStyle>
           <a:p>
             <a:pPr lvl="0"/>
             <a:r>
-              <a:rPr lang="en-AU" dirty="0"/>
-              <a:t>X of Y PCI were emergencies for STEMI</a:t>
+              <a:rPr lang="en-US" dirty="0"/>
+              <a:t>X,XXX</a:t>
             </a:r>
+            <a:endParaRPr lang="en-AU" dirty="0"/>
           </a:p>
         </p:txBody>
       </p:sp>
-      <p:sp>
-        <p:nvSpPr>
-          <p:cNvPr id="42" name="ph_crehab">
+      <p:grpSp>
+        <p:nvGrpSpPr>
+          <p:cNvPr id="9" name="pci">
             <a:extLst>
               <a:ext uri="{FF2B5EF4-FFF2-40B4-BE49-F238E27FC236}">
-                <a16:creationId xmlns:a16="http://schemas.microsoft.com/office/drawing/2014/main" id="{EF9CBF36-A38B-ED1E-AFAF-CEAD51735C04}"/>
+                <a16:creationId xmlns:a16="http://schemas.microsoft.com/office/drawing/2014/main" id="{36EB1C80-C89F-6BA4-E43C-FD80AE153602}"/>
               </a:ext>
             </a:extLst>
           </p:cNvPr>
-          <p:cNvSpPr>
-            <a:spLocks noGrp="1"/>
-          </p:cNvSpPr>
-          <p:nvPr>
-            <p:ph type="body" sz="quarter" idx="14" hasCustomPrompt="1"/>
-          </p:nvPr>
-        </p:nvSpPr>
-        <p:spPr>
+          <p:cNvGrpSpPr/>
+          <p:nvPr userDrawn="1"/>
+        </p:nvGrpSpPr>
+        <p:grpSpPr>
           <a:xfrm>
-            <a:off x="345057" y="8149544"/>
-            <a:ext cx="2589127" cy="497504"/>
+            <a:off x="1784692" y="2503540"/>
+            <a:ext cx="996280" cy="996280"/>
+            <a:chOff x="1784692" y="2725966"/>
+            <a:chExt cx="996280" cy="996280"/>
           </a:xfrm>
-          <a:prstGeom prst="rect">
-            <a:avLst/>
-          </a:prstGeom>
-        </p:spPr>
-        <p:txBody>
-          <a:bodyPr lIns="0" tIns="0" rIns="0" bIns="0"/>
-          <a:lstStyle>
-            <a:lvl1pPr marL="0" indent="0" algn="r">
-              <a:buNone/>
-              <a:defRPr sz="1600"/>
-            </a:lvl1pPr>
-          </a:lstStyle>
-          <a:p>
-            <a:pPr lvl="0"/>
-            <a:r>
-              <a:rPr lang="en-GB" dirty="0"/>
-              <a:t>Evidence of referral to Cardiac Rehab was available in </a:t>
-            </a:r>
-            <a:r>
-              <a:rPr lang="en-AU" dirty="0"/>
-              <a:t>X out of Y patients</a:t>
-            </a:r>
-          </a:p>
-        </p:txBody>
-      </p:sp>
+        </p:grpSpPr>
+        <p:sp>
+          <p:nvSpPr>
+            <p:cNvPr id="20" name="shp_pci">
+              <a:extLst>
+                <a:ext uri="{FF2B5EF4-FFF2-40B4-BE49-F238E27FC236}">
+                  <a16:creationId xmlns:a16="http://schemas.microsoft.com/office/drawing/2014/main" id="{4AAEA4BB-C109-28FA-B6A2-6EF5B68D1217}"/>
+                </a:ext>
+              </a:extLst>
+            </p:cNvPr>
+            <p:cNvSpPr/>
+            <p:nvPr userDrawn="1"/>
+          </p:nvSpPr>
+          <p:spPr>
+            <a:xfrm>
+              <a:off x="1832832" y="2814771"/>
+              <a:ext cx="900000" cy="900000"/>
+            </a:xfrm>
+            <a:prstGeom prst="ellipse">
+              <a:avLst/>
+            </a:prstGeom>
+            <a:solidFill>
+              <a:srgbClr val="89B8DB"/>
+            </a:solidFill>
+            <a:ln>
+              <a:noFill/>
+            </a:ln>
+          </p:spPr>
+          <p:style>
+            <a:lnRef idx="2">
+              <a:schemeClr val="accent1">
+                <a:shade val="50000"/>
+              </a:schemeClr>
+            </a:lnRef>
+            <a:fillRef idx="1">
+              <a:schemeClr val="accent1"/>
+            </a:fillRef>
+            <a:effectRef idx="0">
+              <a:schemeClr val="accent1"/>
+            </a:effectRef>
+            <a:fontRef idx="minor">
+              <a:schemeClr val="lt1"/>
+            </a:fontRef>
+          </p:style>
+          <p:txBody>
+            <a:bodyPr rtlCol="0" anchor="ctr"/>
+            <a:lstStyle/>
+            <a:p>
+              <a:pPr algn="ctr"/>
+              <a:endParaRPr lang="en-AU" sz="1801" dirty="0">
+                <a:solidFill>
+                  <a:schemeClr val="accent1"/>
+                </a:solidFill>
+              </a:endParaRPr>
+            </a:p>
+          </p:txBody>
+        </p:sp>
+        <p:pic>
+          <p:nvPicPr>
+            <p:cNvPr id="14" name="pic_pci">
+              <a:extLst>
+                <a:ext uri="{FF2B5EF4-FFF2-40B4-BE49-F238E27FC236}">
+                  <a16:creationId xmlns:a16="http://schemas.microsoft.com/office/drawing/2014/main" id="{E8591D62-F0EC-DF4B-55A0-003CBCE760CC}"/>
+                </a:ext>
+              </a:extLst>
+            </p:cNvPr>
+            <p:cNvPicPr>
+              <a:picLocks noChangeAspect="1"/>
+            </p:cNvPicPr>
+            <p:nvPr userDrawn="1"/>
+          </p:nvPicPr>
+          <p:blipFill>
+            <a:blip r:embed="rId10" cstate="screen">
+              <a:extLst>
+                <a:ext uri="{BEBA8EAE-BF5A-486C-A8C5-ECC9F3942E4B}">
+                  <a14:imgProps xmlns:a14="http://schemas.microsoft.com/office/drawing/2010/main">
+                    <a14:imgLayer r:embed="rId11">
+                      <a14:imgEffect>
+                        <a14:backgroundRemoval t="10000" b="90000" l="10000" r="90000"/>
+                      </a14:imgEffect>
+                    </a14:imgLayer>
+                  </a14:imgProps>
+                </a:ext>
+                <a:ext uri="{28A0092B-C50C-407E-A947-70E740481C1C}">
+                  <a14:useLocalDpi xmlns:a14="http://schemas.microsoft.com/office/drawing/2010/main"/>
+                </a:ext>
+              </a:extLst>
+            </a:blip>
+            <a:stretch>
+              <a:fillRect/>
+            </a:stretch>
+          </p:blipFill>
+          <p:spPr>
+            <a:xfrm rot="19302838">
+              <a:off x="1784692" y="2725966"/>
+              <a:ext cx="996280" cy="996280"/>
+            </a:xfrm>
+            <a:prstGeom prst="rect">
+              <a:avLst/>
+            </a:prstGeom>
+          </p:spPr>
+        </p:pic>
+      </p:grpSp>
       <p:sp>
         <p:nvSpPr>
           <p:cNvPr id="43" name="ph_hosp_date_range">
@@ -2028,7 +2851,7 @@
         <p:spPr>
           <a:xfrm>
             <a:off x="216695" y="1562072"/>
-            <a:ext cx="4958583" cy="344012"/>
+            <a:ext cx="4594397" cy="606792"/>
           </a:xfrm>
           <a:prstGeom prst="roundRect">
             <a:avLst/>
@@ -2102,703 +2925,6 @@
           </a:lstStyle>
           <a:p>
             <a:endParaRPr lang="en-AU" dirty="0"/>
-          </a:p>
-        </p:txBody>
-      </p:sp>
-      <p:sp>
-        <p:nvSpPr>
-          <p:cNvPr id="45" name="ph_poster_production_date">
-            <a:extLst>
-              <a:ext uri="{FF2B5EF4-FFF2-40B4-BE49-F238E27FC236}">
-                <a16:creationId xmlns:a16="http://schemas.microsoft.com/office/drawing/2014/main" id="{CFA66B11-7F54-5482-663D-8B6227A02FBD}"/>
-              </a:ext>
-            </a:extLst>
-          </p:cNvPr>
-          <p:cNvSpPr>
-            <a:spLocks noGrp="1"/>
-          </p:cNvSpPr>
-          <p:nvPr>
-            <p:ph type="body" sz="quarter" idx="19"/>
-          </p:nvPr>
-        </p:nvSpPr>
-        <p:spPr>
-          <a:xfrm>
-            <a:off x="2732832" y="9555735"/>
-            <a:ext cx="3823915" cy="222079"/>
-          </a:xfrm>
-          <a:prstGeom prst="rect">
-            <a:avLst/>
-          </a:prstGeom>
-        </p:spPr>
-        <p:txBody>
-          <a:bodyPr/>
-          <a:lstStyle>
-            <a:lvl1pPr marL="0" indent="0" algn="r">
-              <a:buNone/>
-              <a:defRPr sz="1200" i="1"/>
-            </a:lvl1pPr>
-          </a:lstStyle>
-          <a:p>
-            <a:pPr lvl="0"/>
-            <a:endParaRPr lang="en-US" dirty="0"/>
-          </a:p>
-        </p:txBody>
-      </p:sp>
-      <p:sp>
-        <p:nvSpPr>
-          <p:cNvPr id="46" name="ph_door_to_reperfusion_pct">
-            <a:extLst>
-              <a:ext uri="{FF2B5EF4-FFF2-40B4-BE49-F238E27FC236}">
-                <a16:creationId xmlns:a16="http://schemas.microsoft.com/office/drawing/2014/main" id="{6C6C5E27-B920-6468-D3D0-CF1BF1645A0B}"/>
-              </a:ext>
-            </a:extLst>
-          </p:cNvPr>
-          <p:cNvSpPr>
-            <a:spLocks noGrp="1"/>
-          </p:cNvSpPr>
-          <p:nvPr>
-            <p:ph type="body" sz="quarter" idx="26" hasCustomPrompt="1"/>
-          </p:nvPr>
-        </p:nvSpPr>
-        <p:spPr>
-          <a:xfrm>
-            <a:off x="0" y="4874719"/>
-            <a:ext cx="1231345" cy="504000"/>
-          </a:xfrm>
-          <a:prstGeom prst="rect">
-            <a:avLst/>
-          </a:prstGeom>
-        </p:spPr>
-        <p:txBody>
-          <a:bodyPr lIns="0" tIns="0" rIns="0" bIns="0" anchor="ctr" anchorCtr="0"/>
-          <a:lstStyle>
-            <a:lvl1pPr marL="0" indent="0" algn="r">
-              <a:buNone/>
-              <a:defRPr sz="4800">
-                <a:solidFill>
-                  <a:srgbClr val="00B050"/>
-                </a:solidFill>
-              </a:defRPr>
-            </a:lvl1pPr>
-            <a:lvl2pPr>
-              <a:defRPr>
-                <a:solidFill>
-                  <a:srgbClr val="00B050"/>
-                </a:solidFill>
-              </a:defRPr>
-            </a:lvl2pPr>
-            <a:lvl3pPr>
-              <a:defRPr>
-                <a:solidFill>
-                  <a:srgbClr val="00B050"/>
-                </a:solidFill>
-              </a:defRPr>
-            </a:lvl3pPr>
-            <a:lvl4pPr>
-              <a:defRPr>
-                <a:solidFill>
-                  <a:srgbClr val="00B050"/>
-                </a:solidFill>
-              </a:defRPr>
-            </a:lvl4pPr>
-            <a:lvl5pPr>
-              <a:defRPr>
-                <a:solidFill>
-                  <a:srgbClr val="00B050"/>
-                </a:solidFill>
-              </a:defRPr>
-            </a:lvl5pPr>
-          </a:lstStyle>
-          <a:p>
-            <a:pPr lvl="0"/>
-            <a:r>
-              <a:rPr lang="en-US"/>
-              <a:t>X</a:t>
-            </a:r>
-            <a:endParaRPr lang="en-AU" dirty="0"/>
-          </a:p>
-        </p:txBody>
-      </p:sp>
-      <p:sp>
-        <p:nvSpPr>
-          <p:cNvPr id="47" name="ph_stemi_pct">
-            <a:extLst>
-              <a:ext uri="{FF2B5EF4-FFF2-40B4-BE49-F238E27FC236}">
-                <a16:creationId xmlns:a16="http://schemas.microsoft.com/office/drawing/2014/main" id="{B1F62D07-2195-698B-2714-154E4501E4EB}"/>
-              </a:ext>
-            </a:extLst>
-          </p:cNvPr>
-          <p:cNvSpPr>
-            <a:spLocks noGrp="1"/>
-          </p:cNvSpPr>
-          <p:nvPr>
-            <p:ph type="body" sz="quarter" idx="27" hasCustomPrompt="1"/>
-          </p:nvPr>
-        </p:nvSpPr>
-        <p:spPr>
-          <a:xfrm>
-            <a:off x="5019163" y="3014573"/>
-            <a:ext cx="1516977" cy="504000"/>
-          </a:xfrm>
-          <a:prstGeom prst="rect">
-            <a:avLst/>
-          </a:prstGeom>
-        </p:spPr>
-        <p:txBody>
-          <a:bodyPr lIns="0" tIns="0" rIns="0" bIns="0" anchor="ctr" anchorCtr="0"/>
-          <a:lstStyle>
-            <a:lvl1pPr marL="0" indent="0" algn="l">
-              <a:buNone/>
-              <a:defRPr sz="4800">
-                <a:solidFill>
-                  <a:srgbClr val="133F6D"/>
-                </a:solidFill>
-              </a:defRPr>
-            </a:lvl1pPr>
-            <a:lvl2pPr>
-              <a:defRPr>
-                <a:solidFill>
-                  <a:srgbClr val="133F6D"/>
-                </a:solidFill>
-              </a:defRPr>
-            </a:lvl2pPr>
-            <a:lvl3pPr>
-              <a:defRPr>
-                <a:solidFill>
-                  <a:srgbClr val="133F6D"/>
-                </a:solidFill>
-              </a:defRPr>
-            </a:lvl3pPr>
-            <a:lvl4pPr>
-              <a:defRPr>
-                <a:solidFill>
-                  <a:srgbClr val="133F6D"/>
-                </a:solidFill>
-              </a:defRPr>
-            </a:lvl4pPr>
-            <a:lvl5pPr>
-              <a:defRPr>
-                <a:solidFill>
-                  <a:srgbClr val="133F6D"/>
-                </a:solidFill>
-              </a:defRPr>
-            </a:lvl5pPr>
-          </a:lstStyle>
-          <a:p>
-            <a:pPr lvl="0"/>
-            <a:r>
-              <a:rPr lang="en-US" dirty="0"/>
-              <a:t>X%</a:t>
-            </a:r>
-            <a:endParaRPr lang="en-AU" dirty="0"/>
-          </a:p>
-        </p:txBody>
-      </p:sp>
-      <p:sp>
-        <p:nvSpPr>
-          <p:cNvPr id="48" name="ph_radial_pct">
-            <a:extLst>
-              <a:ext uri="{FF2B5EF4-FFF2-40B4-BE49-F238E27FC236}">
-                <a16:creationId xmlns:a16="http://schemas.microsoft.com/office/drawing/2014/main" id="{7BD5F46B-2231-6D01-C514-F696C7DDE546}"/>
-              </a:ext>
-            </a:extLst>
-          </p:cNvPr>
-          <p:cNvSpPr>
-            <a:spLocks noGrp="1"/>
-          </p:cNvSpPr>
-          <p:nvPr>
-            <p:ph type="body" sz="quarter" idx="28" hasCustomPrompt="1"/>
-          </p:nvPr>
-        </p:nvSpPr>
-        <p:spPr>
-          <a:xfrm>
-            <a:off x="5548362" y="5169844"/>
-            <a:ext cx="1335516" cy="504000"/>
-          </a:xfrm>
-          <a:prstGeom prst="rect">
-            <a:avLst/>
-          </a:prstGeom>
-        </p:spPr>
-        <p:txBody>
-          <a:bodyPr lIns="0" tIns="0" rIns="0" bIns="0" anchor="ctr" anchorCtr="0"/>
-          <a:lstStyle>
-            <a:lvl1pPr marL="0" indent="0">
-              <a:buNone/>
-              <a:defRPr sz="4800">
-                <a:solidFill>
-                  <a:srgbClr val="D86ECC"/>
-                </a:solidFill>
-              </a:defRPr>
-            </a:lvl1pPr>
-            <a:lvl2pPr>
-              <a:defRPr>
-                <a:solidFill>
-                  <a:srgbClr val="D86ECC"/>
-                </a:solidFill>
-              </a:defRPr>
-            </a:lvl2pPr>
-            <a:lvl3pPr>
-              <a:defRPr>
-                <a:solidFill>
-                  <a:srgbClr val="D86ECC"/>
-                </a:solidFill>
-              </a:defRPr>
-            </a:lvl3pPr>
-            <a:lvl4pPr>
-              <a:defRPr>
-                <a:solidFill>
-                  <a:srgbClr val="D86ECC"/>
-                </a:solidFill>
-              </a:defRPr>
-            </a:lvl4pPr>
-            <a:lvl5pPr>
-              <a:defRPr>
-                <a:solidFill>
-                  <a:srgbClr val="D86ECC"/>
-                </a:solidFill>
-              </a:defRPr>
-            </a:lvl5pPr>
-          </a:lstStyle>
-          <a:p>
-            <a:pPr lvl="0"/>
-            <a:r>
-              <a:rPr lang="en-AU" dirty="0"/>
-              <a:t>X%</a:t>
-            </a:r>
-          </a:p>
-        </p:txBody>
-      </p:sp>
-      <p:sp>
-        <p:nvSpPr>
-          <p:cNvPr id="49" name="ph_disch_meds_dapt_pct">
-            <a:extLst>
-              <a:ext uri="{FF2B5EF4-FFF2-40B4-BE49-F238E27FC236}">
-                <a16:creationId xmlns:a16="http://schemas.microsoft.com/office/drawing/2014/main" id="{1FE6F18A-7157-4F0B-5E13-82B5E30007F4}"/>
-              </a:ext>
-            </a:extLst>
-          </p:cNvPr>
-          <p:cNvSpPr>
-            <a:spLocks noGrp="1"/>
-          </p:cNvSpPr>
-          <p:nvPr>
-            <p:ph type="body" sz="quarter" idx="29" hasCustomPrompt="1"/>
-          </p:nvPr>
-        </p:nvSpPr>
-        <p:spPr>
-          <a:xfrm>
-            <a:off x="4785214" y="7371382"/>
-            <a:ext cx="1512079" cy="504000"/>
-          </a:xfrm>
-          <a:prstGeom prst="rect">
-            <a:avLst/>
-          </a:prstGeom>
-        </p:spPr>
-        <p:txBody>
-          <a:bodyPr lIns="0" tIns="0" rIns="0" bIns="0" anchor="ctr" anchorCtr="0"/>
-          <a:lstStyle>
-            <a:lvl1pPr marL="0" indent="0">
-              <a:buNone/>
-              <a:defRPr sz="4800">
-                <a:solidFill>
-                  <a:srgbClr val="E75B2B"/>
-                </a:solidFill>
-              </a:defRPr>
-            </a:lvl1pPr>
-            <a:lvl2pPr>
-              <a:defRPr>
-                <a:solidFill>
-                  <a:srgbClr val="E75B2B"/>
-                </a:solidFill>
-              </a:defRPr>
-            </a:lvl2pPr>
-            <a:lvl3pPr>
-              <a:defRPr>
-                <a:solidFill>
-                  <a:srgbClr val="E75B2B"/>
-                </a:solidFill>
-              </a:defRPr>
-            </a:lvl3pPr>
-            <a:lvl4pPr>
-              <a:defRPr>
-                <a:solidFill>
-                  <a:srgbClr val="E75B2B"/>
-                </a:solidFill>
-              </a:defRPr>
-            </a:lvl4pPr>
-            <a:lvl5pPr>
-              <a:defRPr>
-                <a:solidFill>
-                  <a:srgbClr val="E75B2B"/>
-                </a:solidFill>
-              </a:defRPr>
-            </a:lvl5pPr>
-          </a:lstStyle>
-          <a:p>
-            <a:pPr lvl="0"/>
-            <a:r>
-              <a:rPr lang="en-US" dirty="0"/>
-              <a:t>X%</a:t>
-            </a:r>
-            <a:endParaRPr lang="en-AU" dirty="0"/>
-          </a:p>
-        </p:txBody>
-      </p:sp>
-      <p:sp>
-        <p:nvSpPr>
-          <p:cNvPr id="50" name="ph_crehab_pct">
-            <a:extLst>
-              <a:ext uri="{FF2B5EF4-FFF2-40B4-BE49-F238E27FC236}">
-                <a16:creationId xmlns:a16="http://schemas.microsoft.com/office/drawing/2014/main" id="{A8C0D454-B653-61F4-5751-F6813F0ADF7C}"/>
-              </a:ext>
-            </a:extLst>
-          </p:cNvPr>
-          <p:cNvSpPr>
-            <a:spLocks noGrp="1"/>
-          </p:cNvSpPr>
-          <p:nvPr>
-            <p:ph type="body" sz="quarter" idx="30" hasCustomPrompt="1"/>
-          </p:nvPr>
-        </p:nvSpPr>
-        <p:spPr>
-          <a:xfrm>
-            <a:off x="436728" y="7293918"/>
-            <a:ext cx="1548000" cy="504000"/>
-          </a:xfrm>
-          <a:prstGeom prst="rect">
-            <a:avLst/>
-          </a:prstGeom>
-        </p:spPr>
-        <p:txBody>
-          <a:bodyPr lIns="0" tIns="0" rIns="0" bIns="0" anchor="ctr" anchorCtr="0"/>
-          <a:lstStyle>
-            <a:lvl1pPr marL="0" indent="0" algn="r">
-              <a:buNone/>
-              <a:defRPr sz="4800">
-                <a:solidFill>
-                  <a:srgbClr val="FFC000"/>
-                </a:solidFill>
-              </a:defRPr>
-            </a:lvl1pPr>
-            <a:lvl2pPr>
-              <a:defRPr>
-                <a:solidFill>
-                  <a:srgbClr val="FFC000"/>
-                </a:solidFill>
-              </a:defRPr>
-            </a:lvl2pPr>
-            <a:lvl3pPr>
-              <a:defRPr>
-                <a:solidFill>
-                  <a:srgbClr val="FFC000"/>
-                </a:solidFill>
-              </a:defRPr>
-            </a:lvl3pPr>
-            <a:lvl4pPr>
-              <a:defRPr>
-                <a:solidFill>
-                  <a:srgbClr val="FFC000"/>
-                </a:solidFill>
-              </a:defRPr>
-            </a:lvl4pPr>
-            <a:lvl5pPr>
-              <a:defRPr>
-                <a:solidFill>
-                  <a:srgbClr val="FFC000"/>
-                </a:solidFill>
-              </a:defRPr>
-            </a:lvl5pPr>
-          </a:lstStyle>
-          <a:p>
-            <a:pPr lvl="0"/>
-            <a:r>
-              <a:rPr lang="en-US" dirty="0"/>
-              <a:t>X%</a:t>
-            </a:r>
-            <a:endParaRPr lang="en-AU" dirty="0"/>
-          </a:p>
-        </p:txBody>
-      </p:sp>
-      <p:sp>
-        <p:nvSpPr>
-          <p:cNvPr id="51" name="ph_pci_count">
-            <a:extLst>
-              <a:ext uri="{FF2B5EF4-FFF2-40B4-BE49-F238E27FC236}">
-                <a16:creationId xmlns:a16="http://schemas.microsoft.com/office/drawing/2014/main" id="{BD10F3DD-814C-87B1-F3BC-B6770621C718}"/>
-              </a:ext>
-            </a:extLst>
-          </p:cNvPr>
-          <p:cNvSpPr>
-            <a:spLocks noGrp="1"/>
-          </p:cNvSpPr>
-          <p:nvPr>
-            <p:ph type="body" sz="quarter" idx="31" hasCustomPrompt="1"/>
-          </p:nvPr>
-        </p:nvSpPr>
-        <p:spPr>
-          <a:xfrm>
-            <a:off x="253138" y="3045625"/>
-            <a:ext cx="1548000" cy="504000"/>
-          </a:xfrm>
-          <a:prstGeom prst="rect">
-            <a:avLst/>
-          </a:prstGeom>
-        </p:spPr>
-        <p:txBody>
-          <a:bodyPr lIns="0" tIns="0" rIns="0" bIns="0" anchor="ctr" anchorCtr="0"/>
-          <a:lstStyle>
-            <a:lvl1pPr marL="0" indent="0" algn="r">
-              <a:buNone/>
-              <a:defRPr sz="4800">
-                <a:solidFill>
-                  <a:srgbClr val="89B8DB"/>
-                </a:solidFill>
-              </a:defRPr>
-            </a:lvl1pPr>
-            <a:lvl2pPr>
-              <a:defRPr>
-                <a:solidFill>
-                  <a:srgbClr val="FF0000"/>
-                </a:solidFill>
-              </a:defRPr>
-            </a:lvl2pPr>
-            <a:lvl3pPr>
-              <a:defRPr>
-                <a:solidFill>
-                  <a:srgbClr val="FF0000"/>
-                </a:solidFill>
-              </a:defRPr>
-            </a:lvl3pPr>
-            <a:lvl4pPr>
-              <a:defRPr>
-                <a:solidFill>
-                  <a:srgbClr val="FF0000"/>
-                </a:solidFill>
-              </a:defRPr>
-            </a:lvl4pPr>
-            <a:lvl5pPr>
-              <a:defRPr>
-                <a:solidFill>
-                  <a:srgbClr val="FF0000"/>
-                </a:solidFill>
-              </a:defRPr>
-            </a:lvl5pPr>
-          </a:lstStyle>
-          <a:p>
-            <a:pPr lvl="0"/>
-            <a:r>
-              <a:rPr lang="en-US" dirty="0"/>
-              <a:t>X,XXX</a:t>
-            </a:r>
-            <a:endParaRPr lang="en-AU" dirty="0"/>
-          </a:p>
-        </p:txBody>
-      </p:sp>
-      <p:sp>
-        <p:nvSpPr>
-          <p:cNvPr id="5" name="mins">
-            <a:extLst>
-              <a:ext uri="{FF2B5EF4-FFF2-40B4-BE49-F238E27FC236}">
-                <a16:creationId xmlns:a16="http://schemas.microsoft.com/office/drawing/2014/main" id="{C71ECDB7-514B-3457-61EC-0EDD81FFB2F9}"/>
-              </a:ext>
-            </a:extLst>
-          </p:cNvPr>
-          <p:cNvSpPr>
-            <a:spLocks noGrp="1"/>
-          </p:cNvSpPr>
-          <p:nvPr>
-            <p:ph type="body" sz="quarter" idx="32" hasCustomPrompt="1"/>
-          </p:nvPr>
-        </p:nvSpPr>
-        <p:spPr>
-          <a:xfrm>
-            <a:off x="115329" y="5212474"/>
-            <a:ext cx="1231345" cy="504000"/>
-          </a:xfrm>
-          <a:prstGeom prst="rect">
-            <a:avLst/>
-          </a:prstGeom>
-        </p:spPr>
-        <p:txBody>
-          <a:bodyPr lIns="0" tIns="0" rIns="0" bIns="0" anchor="ctr" anchorCtr="0"/>
-          <a:lstStyle>
-            <a:lvl1pPr marL="0" indent="0" algn="ctr">
-              <a:buNone/>
-              <a:defRPr sz="2000">
-                <a:solidFill>
-                  <a:srgbClr val="00B050"/>
-                </a:solidFill>
-              </a:defRPr>
-            </a:lvl1pPr>
-            <a:lvl2pPr>
-              <a:defRPr>
-                <a:solidFill>
-                  <a:srgbClr val="00B050"/>
-                </a:solidFill>
-              </a:defRPr>
-            </a:lvl2pPr>
-            <a:lvl3pPr>
-              <a:defRPr>
-                <a:solidFill>
-                  <a:srgbClr val="00B050"/>
-                </a:solidFill>
-              </a:defRPr>
-            </a:lvl3pPr>
-            <a:lvl4pPr>
-              <a:defRPr>
-                <a:solidFill>
-                  <a:srgbClr val="00B050"/>
-                </a:solidFill>
-              </a:defRPr>
-            </a:lvl4pPr>
-            <a:lvl5pPr>
-              <a:defRPr>
-                <a:solidFill>
-                  <a:srgbClr val="00B050"/>
-                </a:solidFill>
-              </a:defRPr>
-            </a:lvl5pPr>
-          </a:lstStyle>
-          <a:p>
-            <a:pPr lvl="0"/>
-            <a:r>
-              <a:rPr lang="en-US" dirty="0"/>
-              <a:t>mins</a:t>
-            </a:r>
-            <a:endParaRPr lang="en-AU" dirty="0"/>
-          </a:p>
-        </p:txBody>
-      </p:sp>
-      <p:pic>
-        <p:nvPicPr>
-          <p:cNvPr id="12" name="icon_radial">
-            <a:extLst>
-              <a:ext uri="{FF2B5EF4-FFF2-40B4-BE49-F238E27FC236}">
-                <a16:creationId xmlns:a16="http://schemas.microsoft.com/office/drawing/2014/main" id="{4A335C9F-C929-90C4-EE54-C3B0862F27AB}"/>
-              </a:ext>
-            </a:extLst>
-          </p:cNvPr>
-          <p:cNvPicPr>
-            <a:picLocks noChangeAspect="1"/>
-          </p:cNvPicPr>
-          <p:nvPr userDrawn="1"/>
-        </p:nvPicPr>
-        <p:blipFill>
-          <a:blip r:embed="rId9">
-            <a:clrChange>
-              <a:clrFrom>
-                <a:srgbClr val="000000"/>
-              </a:clrFrom>
-              <a:clrTo>
-                <a:srgbClr val="000000">
-                  <a:alpha val="0"/>
-                </a:srgbClr>
-              </a:clrTo>
-            </a:clrChange>
-            <a:extLst>
-              <a:ext uri="{BEBA8EAE-BF5A-486C-A8C5-ECC9F3942E4B}">
-                <a14:imgProps xmlns:a14="http://schemas.microsoft.com/office/drawing/2010/main">
-                  <a14:imgLayer r:embed="rId10">
-                    <a14:imgEffect>
-                      <a14:backgroundRemoval t="10000" b="90000" l="10000" r="90000">
-                        <a14:foregroundMark x1="42383" y1="45117" x2="42383" y2="45117"/>
-                        <a14:foregroundMark x1="44141" y1="45605" x2="44141" y2="45605"/>
-                        <a14:foregroundMark x1="46777" y1="45703" x2="46777" y2="45703"/>
-                        <a14:foregroundMark x1="52734" y1="45996" x2="52734" y2="45996"/>
-                        <a14:foregroundMark x1="54492" y1="45996" x2="54492" y2="45996"/>
-                        <a14:foregroundMark x1="49805" y1="49121" x2="49805" y2="49121"/>
-                        <a14:foregroundMark x1="56738" y1="45605" x2="56738" y2="45605"/>
-                        <a14:foregroundMark x1="58887" y1="45996" x2="58887" y2="45996"/>
-                        <a14:foregroundMark x1="60547" y1="45801" x2="60547" y2="45801"/>
-                        <a14:foregroundMark x1="62988" y1="45996" x2="62988" y2="45996"/>
-                        <a14:foregroundMark x1="65723" y1="46191" x2="65723" y2="46191"/>
-                        <a14:foregroundMark x1="67188" y1="46191" x2="67188" y2="46191"/>
-                        <a14:foregroundMark x1="69336" y1="46094" x2="69336" y2="46094"/>
-                        <a14:foregroundMark x1="71875" y1="45996" x2="71875" y2="45996"/>
-                        <a14:foregroundMark x1="73730" y1="46582" x2="73730" y2="46582"/>
-                        <a14:foregroundMark x1="75684" y1="46777" x2="75684" y2="46777"/>
-                        <a14:foregroundMark x1="77637" y1="47656" x2="77637" y2="47656"/>
-                      </a14:backgroundRemoval>
-                    </a14:imgEffect>
-                  </a14:imgLayer>
-                </a14:imgProps>
-              </a:ext>
-            </a:extLst>
-          </a:blip>
-          <a:srcRect l="9320" t="28301" r="45829" b="33282"/>
-          <a:stretch/>
-        </p:blipFill>
-        <p:spPr>
-          <a:xfrm rot="1623292">
-            <a:off x="4663014" y="5011030"/>
-            <a:ext cx="848642" cy="726915"/>
-          </a:xfrm>
-          <a:prstGeom prst="rect">
-            <a:avLst/>
-          </a:prstGeom>
-        </p:spPr>
-      </p:pic>
-      <p:pic>
-        <p:nvPicPr>
-          <p:cNvPr id="24" name="pic_stemi">
-            <a:extLst>
-              <a:ext uri="{FF2B5EF4-FFF2-40B4-BE49-F238E27FC236}">
-                <a16:creationId xmlns:a16="http://schemas.microsoft.com/office/drawing/2014/main" id="{C4803C3E-DE7F-2182-D796-F9D9BADE5615}"/>
-              </a:ext>
-            </a:extLst>
-          </p:cNvPr>
-          <p:cNvPicPr>
-            <a:picLocks noChangeAspect="1"/>
-          </p:cNvPicPr>
-          <p:nvPr userDrawn="1"/>
-        </p:nvPicPr>
-        <p:blipFill>
-          <a:blip r:embed="rId11"/>
-          <a:stretch>
-            <a:fillRect/>
-          </a:stretch>
-        </p:blipFill>
-        <p:spPr>
-          <a:xfrm>
-            <a:off x="3804989" y="2621587"/>
-            <a:ext cx="1138003" cy="1138003"/>
-          </a:xfrm>
-          <a:prstGeom prst="rect">
-            <a:avLst/>
-          </a:prstGeom>
-        </p:spPr>
-      </p:pic>
-      <p:sp>
-        <p:nvSpPr>
-          <p:cNvPr id="3" name="ph_door_to_reperfusion_additional_text">
-            <a:extLst>
-              <a:ext uri="{FF2B5EF4-FFF2-40B4-BE49-F238E27FC236}">
-                <a16:creationId xmlns:a16="http://schemas.microsoft.com/office/drawing/2014/main" id="{10F35289-C14E-D8DC-E6F0-74A1CC6A06E4}"/>
-              </a:ext>
-            </a:extLst>
-          </p:cNvPr>
-          <p:cNvSpPr txBox="1"/>
-          <p:nvPr userDrawn="1"/>
-        </p:nvSpPr>
-        <p:spPr>
-          <a:xfrm>
-            <a:off x="27015" y="6160199"/>
-            <a:ext cx="2051342" cy="338554"/>
-          </a:xfrm>
-          <a:prstGeom prst="rect">
-            <a:avLst/>
-          </a:prstGeom>
-          <a:noFill/>
-        </p:spPr>
-        <p:txBody>
-          <a:bodyPr wrap="square" lIns="72000" tIns="0" rIns="0" bIns="0" rtlCol="0">
-            <a:spAutoFit/>
-          </a:bodyPr>
-          <a:lstStyle/>
-          <a:p>
-            <a:r>
-              <a:rPr lang="en-AU" sz="1100" dirty="0"/>
-              <a:t>* direct or pre-hospital activated STEMI with chest pain &lt;12 hours</a:t>
-            </a:r>
           </a:p>
         </p:txBody>
       </p:sp>
@@ -3157,42 +3283,3266 @@
           </a:prstGeom>
         </p:spPr>
       </p:pic>
-      <p:pic>
-        <p:nvPicPr>
-          <p:cNvPr id="4" name="Picture 3" descr="A logo of a company&#10;&#10;AI-generated content may be incorrect.">
+      <p:sp>
+        <p:nvSpPr>
+          <p:cNvPr id="2" name="Graphic 4926">
             <a:extLst>
               <a:ext uri="{FF2B5EF4-FFF2-40B4-BE49-F238E27FC236}">
-                <a16:creationId xmlns:a16="http://schemas.microsoft.com/office/drawing/2014/main" id="{DAE3C987-7108-DA66-8847-CED4928A91DD}"/>
+                <a16:creationId xmlns:a16="http://schemas.microsoft.com/office/drawing/2014/main" id="{A6466FB8-E1C0-0956-4E26-35B5DA388D27}"/>
               </a:ext>
             </a:extLst>
           </p:cNvPr>
-          <p:cNvPicPr>
-            <a:picLocks noChangeAspect="1"/>
-          </p:cNvPicPr>
+          <p:cNvSpPr>
+            <a:spLocks/>
+          </p:cNvSpPr>
           <p:nvPr userDrawn="1"/>
-        </p:nvPicPr>
-        <p:blipFill>
-          <a:blip r:embed="rId4">
+        </p:nvSpPr>
+        <p:spPr>
+          <a:xfrm>
+            <a:off x="3215379" y="239758"/>
+            <a:ext cx="1132840" cy="457200"/>
+          </a:xfrm>
+          <a:custGeom>
+            <a:avLst/>
+            <a:gdLst/>
+            <a:ahLst/>
+            <a:cxnLst/>
+            <a:rect l="l" t="t" r="r" b="b"/>
+            <a:pathLst>
+              <a:path w="1132840" h="457834">
+                <a:moveTo>
+                  <a:pt x="102666" y="455041"/>
+                </a:moveTo>
+                <a:lnTo>
+                  <a:pt x="73660" y="401408"/>
+                </a:lnTo>
+                <a:lnTo>
+                  <a:pt x="72428" y="399122"/>
+                </a:lnTo>
+                <a:lnTo>
+                  <a:pt x="83439" y="393954"/>
+                </a:lnTo>
+                <a:lnTo>
+                  <a:pt x="89039" y="388848"/>
+                </a:lnTo>
+                <a:lnTo>
+                  <a:pt x="91897" y="386257"/>
+                </a:lnTo>
+                <a:lnTo>
+                  <a:pt x="97332" y="376262"/>
+                </a:lnTo>
+                <a:lnTo>
+                  <a:pt x="99250" y="364121"/>
+                </a:lnTo>
+                <a:lnTo>
+                  <a:pt x="96304" y="349313"/>
+                </a:lnTo>
+                <a:lnTo>
+                  <a:pt x="90131" y="340906"/>
+                </a:lnTo>
+                <a:lnTo>
+                  <a:pt x="88023" y="338035"/>
+                </a:lnTo>
+                <a:lnTo>
+                  <a:pt x="85166" y="336448"/>
+                </a:lnTo>
+                <a:lnTo>
+                  <a:pt x="85166" y="365061"/>
+                </a:lnTo>
+                <a:lnTo>
+                  <a:pt x="83362" y="374726"/>
+                </a:lnTo>
+                <a:lnTo>
+                  <a:pt x="78143" y="382244"/>
+                </a:lnTo>
+                <a:lnTo>
+                  <a:pt x="69837" y="387121"/>
+                </a:lnTo>
+                <a:lnTo>
+                  <a:pt x="58724" y="388848"/>
+                </a:lnTo>
+                <a:lnTo>
+                  <a:pt x="17830" y="388848"/>
+                </a:lnTo>
+                <a:lnTo>
+                  <a:pt x="17830" y="340906"/>
+                </a:lnTo>
+                <a:lnTo>
+                  <a:pt x="58153" y="340906"/>
+                </a:lnTo>
+                <a:lnTo>
+                  <a:pt x="69265" y="342633"/>
+                </a:lnTo>
+                <a:lnTo>
+                  <a:pt x="77787" y="347497"/>
+                </a:lnTo>
+                <a:lnTo>
+                  <a:pt x="83235" y="355117"/>
+                </a:lnTo>
+                <a:lnTo>
+                  <a:pt x="85166" y="365061"/>
+                </a:lnTo>
+                <a:lnTo>
+                  <a:pt x="85166" y="336448"/>
+                </a:lnTo>
+                <a:lnTo>
+                  <a:pt x="75158" y="330873"/>
+                </a:lnTo>
+                <a:lnTo>
+                  <a:pt x="58534" y="328358"/>
+                </a:lnTo>
+                <a:lnTo>
+                  <a:pt x="4521" y="328358"/>
+                </a:lnTo>
+                <a:lnTo>
+                  <a:pt x="4521" y="455041"/>
+                </a:lnTo>
+                <a:lnTo>
+                  <a:pt x="17830" y="455041"/>
+                </a:lnTo>
+                <a:lnTo>
+                  <a:pt x="17830" y="401408"/>
+                </a:lnTo>
+                <a:lnTo>
+                  <a:pt x="58724" y="401408"/>
+                </a:lnTo>
+                <a:lnTo>
+                  <a:pt x="87452" y="455041"/>
+                </a:lnTo>
+                <a:lnTo>
+                  <a:pt x="102666" y="455041"/>
+                </a:lnTo>
+                <a:close/>
+              </a:path>
+              <a:path w="1132840" h="457834">
+                <a:moveTo>
+                  <a:pt x="120370" y="2286"/>
+                </a:moveTo>
+                <a:lnTo>
+                  <a:pt x="85940" y="2286"/>
+                </a:lnTo>
+                <a:lnTo>
+                  <a:pt x="85940" y="78562"/>
+                </a:lnTo>
+                <a:lnTo>
+                  <a:pt x="72466" y="50977"/>
+                </a:lnTo>
+                <a:lnTo>
+                  <a:pt x="48666" y="2286"/>
+                </a:lnTo>
+                <a:lnTo>
+                  <a:pt x="3200" y="2286"/>
+                </a:lnTo>
+                <a:lnTo>
+                  <a:pt x="3200" y="128968"/>
+                </a:lnTo>
+                <a:lnTo>
+                  <a:pt x="37820" y="128968"/>
+                </a:lnTo>
+                <a:lnTo>
+                  <a:pt x="37820" y="50977"/>
+                </a:lnTo>
+                <a:lnTo>
+                  <a:pt x="76428" y="128968"/>
+                </a:lnTo>
+                <a:lnTo>
+                  <a:pt x="120370" y="128968"/>
+                </a:lnTo>
+                <a:lnTo>
+                  <a:pt x="120370" y="78562"/>
+                </a:lnTo>
+                <a:lnTo>
+                  <a:pt x="120370" y="2286"/>
+                </a:lnTo>
+                <a:close/>
+              </a:path>
+              <a:path w="1132840" h="457834">
+                <a:moveTo>
+                  <a:pt x="123825" y="256806"/>
+                </a:moveTo>
+                <a:lnTo>
+                  <a:pt x="93383" y="242735"/>
+                </a:lnTo>
+                <a:lnTo>
+                  <a:pt x="88315" y="251510"/>
+                </a:lnTo>
+                <a:lnTo>
+                  <a:pt x="82283" y="258025"/>
+                </a:lnTo>
+                <a:lnTo>
+                  <a:pt x="74841" y="262089"/>
+                </a:lnTo>
+                <a:lnTo>
+                  <a:pt x="65620" y="263474"/>
+                </a:lnTo>
+                <a:lnTo>
+                  <a:pt x="53505" y="260705"/>
+                </a:lnTo>
+                <a:lnTo>
+                  <a:pt x="44475" y="253161"/>
+                </a:lnTo>
+                <a:lnTo>
+                  <a:pt x="38836" y="241973"/>
+                </a:lnTo>
+                <a:lnTo>
+                  <a:pt x="36893" y="228282"/>
+                </a:lnTo>
+                <a:lnTo>
+                  <a:pt x="38836" y="214884"/>
+                </a:lnTo>
+                <a:lnTo>
+                  <a:pt x="44475" y="203936"/>
+                </a:lnTo>
+                <a:lnTo>
+                  <a:pt x="53505" y="196557"/>
+                </a:lnTo>
+                <a:lnTo>
+                  <a:pt x="65620" y="193852"/>
+                </a:lnTo>
+                <a:lnTo>
+                  <a:pt x="74142" y="194906"/>
+                </a:lnTo>
+                <a:lnTo>
+                  <a:pt x="81775" y="198259"/>
+                </a:lnTo>
+                <a:lnTo>
+                  <a:pt x="88557" y="204216"/>
+                </a:lnTo>
+                <a:lnTo>
+                  <a:pt x="94526" y="213067"/>
+                </a:lnTo>
+                <a:lnTo>
+                  <a:pt x="123063" y="197269"/>
+                </a:lnTo>
+                <a:lnTo>
+                  <a:pt x="120510" y="193852"/>
+                </a:lnTo>
+                <a:lnTo>
+                  <a:pt x="111175" y="181330"/>
+                </a:lnTo>
+                <a:lnTo>
+                  <a:pt x="97066" y="170738"/>
+                </a:lnTo>
+                <a:lnTo>
+                  <a:pt x="81356" y="164858"/>
+                </a:lnTo>
+                <a:lnTo>
+                  <a:pt x="64668" y="163029"/>
+                </a:lnTo>
+                <a:lnTo>
+                  <a:pt x="38582" y="167640"/>
+                </a:lnTo>
+                <a:lnTo>
+                  <a:pt x="18135" y="180746"/>
+                </a:lnTo>
+                <a:lnTo>
+                  <a:pt x="4775" y="201320"/>
+                </a:lnTo>
+                <a:lnTo>
+                  <a:pt x="0" y="228282"/>
+                </a:lnTo>
+                <a:lnTo>
+                  <a:pt x="4775" y="255536"/>
+                </a:lnTo>
+                <a:lnTo>
+                  <a:pt x="18135" y="276339"/>
+                </a:lnTo>
+                <a:lnTo>
+                  <a:pt x="38582" y="289623"/>
+                </a:lnTo>
+                <a:lnTo>
+                  <a:pt x="64668" y="294284"/>
+                </a:lnTo>
+                <a:lnTo>
+                  <a:pt x="84035" y="291731"/>
+                </a:lnTo>
+                <a:lnTo>
+                  <a:pt x="100304" y="284327"/>
+                </a:lnTo>
+                <a:lnTo>
+                  <a:pt x="113525" y="272542"/>
+                </a:lnTo>
+                <a:lnTo>
+                  <a:pt x="119456" y="263474"/>
+                </a:lnTo>
+                <a:lnTo>
+                  <a:pt x="123825" y="256806"/>
+                </a:lnTo>
+                <a:close/>
+              </a:path>
+              <a:path w="1132840" h="457834">
+                <a:moveTo>
+                  <a:pt x="233146" y="442493"/>
+                </a:moveTo>
+                <a:lnTo>
+                  <a:pt x="157441" y="442493"/>
+                </a:lnTo>
+                <a:lnTo>
+                  <a:pt x="157441" y="393979"/>
+                </a:lnTo>
+                <a:lnTo>
+                  <a:pt x="221742" y="393979"/>
+                </a:lnTo>
+                <a:lnTo>
+                  <a:pt x="221742" y="381622"/>
+                </a:lnTo>
+                <a:lnTo>
+                  <a:pt x="157441" y="381622"/>
+                </a:lnTo>
+                <a:lnTo>
+                  <a:pt x="157441" y="340906"/>
+                </a:lnTo>
+                <a:lnTo>
+                  <a:pt x="231254" y="340906"/>
+                </a:lnTo>
+                <a:lnTo>
+                  <a:pt x="231254" y="328358"/>
+                </a:lnTo>
+                <a:lnTo>
+                  <a:pt x="143941" y="328358"/>
+                </a:lnTo>
+                <a:lnTo>
+                  <a:pt x="143941" y="455041"/>
+                </a:lnTo>
+                <a:lnTo>
+                  <a:pt x="233146" y="455041"/>
+                </a:lnTo>
+                <a:lnTo>
+                  <a:pt x="233146" y="442493"/>
+                </a:lnTo>
+                <a:close/>
+              </a:path>
+              <a:path w="1132840" h="457834">
+                <a:moveTo>
+                  <a:pt x="283984" y="291998"/>
+                </a:moveTo>
+                <a:lnTo>
+                  <a:pt x="275691" y="268605"/>
+                </a:lnTo>
+                <a:lnTo>
+                  <a:pt x="265709" y="240449"/>
+                </a:lnTo>
+                <a:lnTo>
+                  <a:pt x="249466" y="194614"/>
+                </a:lnTo>
+                <a:lnTo>
+                  <a:pt x="239090" y="165315"/>
+                </a:lnTo>
+                <a:lnTo>
+                  <a:pt x="229577" y="165315"/>
+                </a:lnTo>
+                <a:lnTo>
+                  <a:pt x="229577" y="240449"/>
+                </a:lnTo>
+                <a:lnTo>
+                  <a:pt x="204089" y="240449"/>
+                </a:lnTo>
+                <a:lnTo>
+                  <a:pt x="216827" y="194614"/>
+                </a:lnTo>
+                <a:lnTo>
+                  <a:pt x="229577" y="240449"/>
+                </a:lnTo>
+                <a:lnTo>
+                  <a:pt x="229577" y="165315"/>
+                </a:lnTo>
+                <a:lnTo>
+                  <a:pt x="195719" y="165315"/>
+                </a:lnTo>
+                <a:lnTo>
+                  <a:pt x="150634" y="291998"/>
+                </a:lnTo>
+                <a:lnTo>
+                  <a:pt x="190017" y="291998"/>
+                </a:lnTo>
+                <a:lnTo>
+                  <a:pt x="196481" y="268605"/>
+                </a:lnTo>
+                <a:lnTo>
+                  <a:pt x="237375" y="268605"/>
+                </a:lnTo>
+                <a:lnTo>
+                  <a:pt x="243840" y="291998"/>
+                </a:lnTo>
+                <a:lnTo>
+                  <a:pt x="283984" y="291998"/>
+                </a:lnTo>
+                <a:close/>
+              </a:path>
+              <a:path w="1132840" h="457834">
+                <a:moveTo>
+                  <a:pt x="289852" y="128968"/>
+                </a:moveTo>
+                <a:lnTo>
+                  <a:pt x="281559" y="105575"/>
+                </a:lnTo>
+                <a:lnTo>
+                  <a:pt x="271589" y="77419"/>
+                </a:lnTo>
+                <a:lnTo>
+                  <a:pt x="255346" y="31584"/>
+                </a:lnTo>
+                <a:lnTo>
+                  <a:pt x="244957" y="2286"/>
+                </a:lnTo>
+                <a:lnTo>
+                  <a:pt x="235458" y="2286"/>
+                </a:lnTo>
+                <a:lnTo>
+                  <a:pt x="235458" y="77419"/>
+                </a:lnTo>
+                <a:lnTo>
+                  <a:pt x="209969" y="77419"/>
+                </a:lnTo>
+                <a:lnTo>
+                  <a:pt x="222707" y="31584"/>
+                </a:lnTo>
+                <a:lnTo>
+                  <a:pt x="235458" y="77419"/>
+                </a:lnTo>
+                <a:lnTo>
+                  <a:pt x="235458" y="2286"/>
+                </a:lnTo>
+                <a:lnTo>
+                  <a:pt x="201599" y="2286"/>
+                </a:lnTo>
+                <a:lnTo>
+                  <a:pt x="156514" y="128968"/>
+                </a:lnTo>
+                <a:lnTo>
+                  <a:pt x="195884" y="128968"/>
+                </a:lnTo>
+                <a:lnTo>
+                  <a:pt x="202361" y="105575"/>
+                </a:lnTo>
+                <a:lnTo>
+                  <a:pt x="243255" y="105575"/>
+                </a:lnTo>
+                <a:lnTo>
+                  <a:pt x="249720" y="128968"/>
+                </a:lnTo>
+                <a:lnTo>
+                  <a:pt x="289852" y="128968"/>
+                </a:lnTo>
+                <a:close/>
+              </a:path>
+              <a:path w="1132840" h="457834">
+                <a:moveTo>
+                  <a:pt x="385508" y="396455"/>
+                </a:moveTo>
+                <a:lnTo>
+                  <a:pt x="385330" y="393788"/>
+                </a:lnTo>
+                <a:lnTo>
+                  <a:pt x="384949" y="391502"/>
+                </a:lnTo>
+                <a:lnTo>
+                  <a:pt x="332257" y="391502"/>
+                </a:lnTo>
+                <a:lnTo>
+                  <a:pt x="332257" y="404063"/>
+                </a:lnTo>
+                <a:lnTo>
+                  <a:pt x="371436" y="404063"/>
+                </a:lnTo>
+                <a:lnTo>
+                  <a:pt x="367411" y="420916"/>
+                </a:lnTo>
+                <a:lnTo>
+                  <a:pt x="358216" y="433666"/>
+                </a:lnTo>
+                <a:lnTo>
+                  <a:pt x="344728" y="441756"/>
+                </a:lnTo>
+                <a:lnTo>
+                  <a:pt x="327875" y="444576"/>
+                </a:lnTo>
+                <a:lnTo>
+                  <a:pt x="308394" y="440702"/>
+                </a:lnTo>
+                <a:lnTo>
+                  <a:pt x="293738" y="429818"/>
+                </a:lnTo>
+                <a:lnTo>
+                  <a:pt x="284492" y="413042"/>
+                </a:lnTo>
+                <a:lnTo>
+                  <a:pt x="281279" y="391502"/>
+                </a:lnTo>
+                <a:lnTo>
+                  <a:pt x="284480" y="370039"/>
+                </a:lnTo>
+                <a:lnTo>
+                  <a:pt x="293687" y="353402"/>
+                </a:lnTo>
+                <a:lnTo>
+                  <a:pt x="308241" y="342646"/>
+                </a:lnTo>
+                <a:lnTo>
+                  <a:pt x="327494" y="338823"/>
+                </a:lnTo>
+                <a:lnTo>
+                  <a:pt x="339090" y="340106"/>
+                </a:lnTo>
+                <a:lnTo>
+                  <a:pt x="349275" y="343801"/>
+                </a:lnTo>
+                <a:lnTo>
+                  <a:pt x="357886" y="349669"/>
+                </a:lnTo>
+                <a:lnTo>
+                  <a:pt x="364782" y="357466"/>
+                </a:lnTo>
+                <a:lnTo>
+                  <a:pt x="375437" y="349465"/>
+                </a:lnTo>
+                <a:lnTo>
+                  <a:pt x="342557" y="327698"/>
+                </a:lnTo>
+                <a:lnTo>
+                  <a:pt x="327875" y="326072"/>
+                </a:lnTo>
+                <a:lnTo>
+                  <a:pt x="302793" y="331012"/>
+                </a:lnTo>
+                <a:lnTo>
+                  <a:pt x="283603" y="344678"/>
+                </a:lnTo>
+                <a:lnTo>
+                  <a:pt x="271335" y="365404"/>
+                </a:lnTo>
+                <a:lnTo>
+                  <a:pt x="267017" y="391502"/>
+                </a:lnTo>
+                <a:lnTo>
+                  <a:pt x="271310" y="417601"/>
+                </a:lnTo>
+                <a:lnTo>
+                  <a:pt x="283565" y="438480"/>
+                </a:lnTo>
+                <a:lnTo>
+                  <a:pt x="302793" y="452323"/>
+                </a:lnTo>
+                <a:lnTo>
+                  <a:pt x="328066" y="457327"/>
+                </a:lnTo>
+                <a:lnTo>
+                  <a:pt x="352361" y="452653"/>
+                </a:lnTo>
+                <a:lnTo>
+                  <a:pt x="363918" y="444576"/>
+                </a:lnTo>
+                <a:lnTo>
+                  <a:pt x="370408" y="440042"/>
+                </a:lnTo>
+                <a:lnTo>
+                  <a:pt x="381635" y="421627"/>
+                </a:lnTo>
+                <a:lnTo>
+                  <a:pt x="385508" y="399503"/>
+                </a:lnTo>
+                <a:lnTo>
+                  <a:pt x="385508" y="396455"/>
+                </a:lnTo>
+                <a:close/>
+              </a:path>
+              <a:path w="1132840" h="457834">
+                <a:moveTo>
+                  <a:pt x="418236" y="2286"/>
+                </a:moveTo>
+                <a:lnTo>
+                  <a:pt x="307162" y="2286"/>
+                </a:lnTo>
+                <a:lnTo>
+                  <a:pt x="307162" y="34239"/>
+                </a:lnTo>
+                <a:lnTo>
+                  <a:pt x="344639" y="34239"/>
+                </a:lnTo>
+                <a:lnTo>
+                  <a:pt x="344639" y="128968"/>
+                </a:lnTo>
+                <a:lnTo>
+                  <a:pt x="380580" y="128968"/>
+                </a:lnTo>
+                <a:lnTo>
+                  <a:pt x="380580" y="34239"/>
+                </a:lnTo>
+                <a:lnTo>
+                  <a:pt x="418236" y="34239"/>
+                </a:lnTo>
+                <a:lnTo>
+                  <a:pt x="418236" y="2286"/>
+                </a:lnTo>
+                <a:close/>
+              </a:path>
+              <a:path w="1132840" h="457834">
+                <a:moveTo>
+                  <a:pt x="435190" y="291998"/>
+                </a:moveTo>
+                <a:lnTo>
+                  <a:pt x="412889" y="251294"/>
+                </a:lnTo>
+                <a:lnTo>
+                  <a:pt x="408940" y="244068"/>
+                </a:lnTo>
+                <a:lnTo>
+                  <a:pt x="416890" y="238683"/>
+                </a:lnTo>
+                <a:lnTo>
+                  <a:pt x="424180" y="230759"/>
+                </a:lnTo>
+                <a:lnTo>
+                  <a:pt x="428053" y="223139"/>
+                </a:lnTo>
+                <a:lnTo>
+                  <a:pt x="429514" y="220268"/>
+                </a:lnTo>
+                <a:lnTo>
+                  <a:pt x="431584" y="207162"/>
+                </a:lnTo>
+                <a:lnTo>
+                  <a:pt x="429768" y="197269"/>
+                </a:lnTo>
+                <a:lnTo>
+                  <a:pt x="428523" y="190436"/>
+                </a:lnTo>
+                <a:lnTo>
+                  <a:pt x="419277" y="177190"/>
+                </a:lnTo>
+                <a:lnTo>
+                  <a:pt x="403733" y="168465"/>
+                </a:lnTo>
+                <a:lnTo>
+                  <a:pt x="395058" y="167233"/>
+                </a:lnTo>
+                <a:lnTo>
+                  <a:pt x="395058" y="201460"/>
+                </a:lnTo>
+                <a:lnTo>
+                  <a:pt x="395058" y="218579"/>
+                </a:lnTo>
+                <a:lnTo>
+                  <a:pt x="388594" y="223139"/>
+                </a:lnTo>
+                <a:lnTo>
+                  <a:pt x="356450" y="223139"/>
+                </a:lnTo>
+                <a:lnTo>
+                  <a:pt x="356450" y="197269"/>
+                </a:lnTo>
+                <a:lnTo>
+                  <a:pt x="388594" y="197269"/>
+                </a:lnTo>
+                <a:lnTo>
+                  <a:pt x="395058" y="201460"/>
+                </a:lnTo>
+                <a:lnTo>
+                  <a:pt x="395058" y="167233"/>
+                </a:lnTo>
+                <a:lnTo>
+                  <a:pt x="381749" y="165315"/>
+                </a:lnTo>
+                <a:lnTo>
+                  <a:pt x="320306" y="165315"/>
+                </a:lnTo>
+                <a:lnTo>
+                  <a:pt x="320306" y="291998"/>
+                </a:lnTo>
+                <a:lnTo>
+                  <a:pt x="356450" y="291998"/>
+                </a:lnTo>
+                <a:lnTo>
+                  <a:pt x="356450" y="251294"/>
+                </a:lnTo>
+                <a:lnTo>
+                  <a:pt x="374332" y="251294"/>
+                </a:lnTo>
+                <a:lnTo>
+                  <a:pt x="395249" y="291998"/>
+                </a:lnTo>
+                <a:lnTo>
+                  <a:pt x="435190" y="291998"/>
+                </a:lnTo>
+                <a:close/>
+              </a:path>
+              <a:path w="1132840" h="457834">
+                <a:moveTo>
+                  <a:pt x="440486" y="328358"/>
+                </a:moveTo>
+                <a:lnTo>
+                  <a:pt x="427164" y="328358"/>
+                </a:lnTo>
+                <a:lnTo>
+                  <a:pt x="427164" y="455041"/>
+                </a:lnTo>
+                <a:lnTo>
+                  <a:pt x="440486" y="455041"/>
+                </a:lnTo>
+                <a:lnTo>
+                  <a:pt x="440486" y="328358"/>
+                </a:lnTo>
+                <a:close/>
+              </a:path>
+              <a:path w="1132840" h="457834">
+                <a:moveTo>
+                  <a:pt x="496036" y="2286"/>
+                </a:moveTo>
+                <a:lnTo>
+                  <a:pt x="460082" y="2286"/>
+                </a:lnTo>
+                <a:lnTo>
+                  <a:pt x="460082" y="128968"/>
+                </a:lnTo>
+                <a:lnTo>
+                  <a:pt x="496036" y="128968"/>
+                </a:lnTo>
+                <a:lnTo>
+                  <a:pt x="496036" y="2286"/>
+                </a:lnTo>
+                <a:close/>
+              </a:path>
+              <a:path w="1132840" h="457834">
+                <a:moveTo>
+                  <a:pt x="576668" y="419658"/>
+                </a:moveTo>
+                <a:lnTo>
+                  <a:pt x="572757" y="403974"/>
+                </a:lnTo>
+                <a:lnTo>
+                  <a:pt x="562419" y="393661"/>
+                </a:lnTo>
+                <a:lnTo>
+                  <a:pt x="547700" y="386981"/>
+                </a:lnTo>
+                <a:lnTo>
+                  <a:pt x="518668" y="378904"/>
+                </a:lnTo>
+                <a:lnTo>
+                  <a:pt x="509003" y="374777"/>
+                </a:lnTo>
+                <a:lnTo>
+                  <a:pt x="502564" y="368668"/>
+                </a:lnTo>
+                <a:lnTo>
+                  <a:pt x="500214" y="359371"/>
+                </a:lnTo>
+                <a:lnTo>
+                  <a:pt x="502577" y="349719"/>
+                </a:lnTo>
+                <a:lnTo>
+                  <a:pt x="508838" y="343293"/>
+                </a:lnTo>
+                <a:lnTo>
+                  <a:pt x="517779" y="339737"/>
+                </a:lnTo>
+                <a:lnTo>
+                  <a:pt x="528167" y="338632"/>
+                </a:lnTo>
+                <a:lnTo>
+                  <a:pt x="539051" y="339788"/>
+                </a:lnTo>
+                <a:lnTo>
+                  <a:pt x="548779" y="343077"/>
+                </a:lnTo>
+                <a:lnTo>
+                  <a:pt x="557187" y="348348"/>
+                </a:lnTo>
+                <a:lnTo>
+                  <a:pt x="564121" y="355358"/>
+                </a:lnTo>
+                <a:lnTo>
+                  <a:pt x="574586" y="347383"/>
+                </a:lnTo>
+                <a:lnTo>
+                  <a:pt x="529120" y="326072"/>
+                </a:lnTo>
+                <a:lnTo>
+                  <a:pt x="512343" y="328383"/>
+                </a:lnTo>
+                <a:lnTo>
+                  <a:pt x="498830" y="335140"/>
+                </a:lnTo>
+                <a:lnTo>
+                  <a:pt x="489800" y="346062"/>
+                </a:lnTo>
+                <a:lnTo>
+                  <a:pt x="486511" y="360883"/>
+                </a:lnTo>
+                <a:lnTo>
+                  <a:pt x="489940" y="375450"/>
+                </a:lnTo>
+                <a:lnTo>
+                  <a:pt x="498970" y="385191"/>
+                </a:lnTo>
+                <a:lnTo>
+                  <a:pt x="511708" y="391439"/>
+                </a:lnTo>
+                <a:lnTo>
+                  <a:pt x="526262" y="395516"/>
+                </a:lnTo>
+                <a:lnTo>
+                  <a:pt x="540956" y="399110"/>
+                </a:lnTo>
+                <a:lnTo>
+                  <a:pt x="552513" y="403453"/>
+                </a:lnTo>
+                <a:lnTo>
+                  <a:pt x="560070" y="410006"/>
+                </a:lnTo>
+                <a:lnTo>
+                  <a:pt x="562787" y="420230"/>
+                </a:lnTo>
+                <a:lnTo>
+                  <a:pt x="560501" y="430644"/>
+                </a:lnTo>
+                <a:lnTo>
+                  <a:pt x="554113" y="438353"/>
+                </a:lnTo>
+                <a:lnTo>
+                  <a:pt x="544245" y="443128"/>
+                </a:lnTo>
+                <a:lnTo>
+                  <a:pt x="531596" y="444766"/>
+                </a:lnTo>
+                <a:lnTo>
+                  <a:pt x="520344" y="443611"/>
+                </a:lnTo>
+                <a:lnTo>
+                  <a:pt x="509765" y="440016"/>
+                </a:lnTo>
+                <a:lnTo>
+                  <a:pt x="500405" y="433870"/>
+                </a:lnTo>
+                <a:lnTo>
+                  <a:pt x="492798" y="424992"/>
+                </a:lnTo>
+                <a:lnTo>
+                  <a:pt x="481190" y="433158"/>
+                </a:lnTo>
+                <a:lnTo>
+                  <a:pt x="489686" y="442963"/>
+                </a:lnTo>
+                <a:lnTo>
+                  <a:pt x="500799" y="450596"/>
+                </a:lnTo>
+                <a:lnTo>
+                  <a:pt x="514375" y="455561"/>
+                </a:lnTo>
+                <a:lnTo>
+                  <a:pt x="530263" y="457327"/>
+                </a:lnTo>
+                <a:lnTo>
+                  <a:pt x="549224" y="454660"/>
+                </a:lnTo>
+                <a:lnTo>
+                  <a:pt x="563880" y="447065"/>
+                </a:lnTo>
+                <a:lnTo>
+                  <a:pt x="565696" y="444766"/>
+                </a:lnTo>
+                <a:lnTo>
+                  <a:pt x="573316" y="435178"/>
+                </a:lnTo>
+                <a:lnTo>
+                  <a:pt x="576668" y="419658"/>
+                </a:lnTo>
+                <a:close/>
+              </a:path>
+              <a:path w="1132840" h="457834">
+                <a:moveTo>
+                  <a:pt x="596493" y="228650"/>
+                </a:moveTo>
+                <a:lnTo>
+                  <a:pt x="592213" y="203682"/>
+                </a:lnTo>
+                <a:lnTo>
+                  <a:pt x="588175" y="197269"/>
+                </a:lnTo>
+                <a:lnTo>
+                  <a:pt x="579539" y="183578"/>
+                </a:lnTo>
+                <a:lnTo>
+                  <a:pt x="559396" y="170649"/>
+                </a:lnTo>
+                <a:lnTo>
+                  <a:pt x="559396" y="228650"/>
+                </a:lnTo>
+                <a:lnTo>
+                  <a:pt x="557517" y="241833"/>
+                </a:lnTo>
+                <a:lnTo>
+                  <a:pt x="551929" y="251701"/>
+                </a:lnTo>
+                <a:lnTo>
+                  <a:pt x="542709" y="257898"/>
+                </a:lnTo>
+                <a:lnTo>
+                  <a:pt x="529920" y="260045"/>
+                </a:lnTo>
+                <a:lnTo>
+                  <a:pt x="511848" y="260045"/>
+                </a:lnTo>
+                <a:lnTo>
+                  <a:pt x="511848" y="197269"/>
+                </a:lnTo>
+                <a:lnTo>
+                  <a:pt x="529920" y="197269"/>
+                </a:lnTo>
+                <a:lnTo>
+                  <a:pt x="542709" y="199453"/>
+                </a:lnTo>
+                <a:lnTo>
+                  <a:pt x="551929" y="205689"/>
+                </a:lnTo>
+                <a:lnTo>
+                  <a:pt x="557517" y="215569"/>
+                </a:lnTo>
+                <a:lnTo>
+                  <a:pt x="559396" y="228650"/>
+                </a:lnTo>
+                <a:lnTo>
+                  <a:pt x="559396" y="170649"/>
+                </a:lnTo>
+                <a:lnTo>
+                  <a:pt x="558698" y="170192"/>
+                </a:lnTo>
+                <a:lnTo>
+                  <a:pt x="529920" y="165315"/>
+                </a:lnTo>
+                <a:lnTo>
+                  <a:pt x="475703" y="165315"/>
+                </a:lnTo>
+                <a:lnTo>
+                  <a:pt x="475703" y="291998"/>
+                </a:lnTo>
+                <a:lnTo>
+                  <a:pt x="529920" y="291998"/>
+                </a:lnTo>
+                <a:lnTo>
+                  <a:pt x="558698" y="287134"/>
+                </a:lnTo>
+                <a:lnTo>
+                  <a:pt x="579539" y="273748"/>
+                </a:lnTo>
+                <a:lnTo>
+                  <a:pt x="588175" y="260045"/>
+                </a:lnTo>
+                <a:lnTo>
+                  <a:pt x="592213" y="253644"/>
+                </a:lnTo>
+                <a:lnTo>
+                  <a:pt x="596493" y="228650"/>
+                </a:lnTo>
+                <a:close/>
+              </a:path>
+              <a:path w="1132840" h="457834">
+                <a:moveTo>
+                  <a:pt x="670458" y="65633"/>
+                </a:moveTo>
+                <a:lnTo>
+                  <a:pt x="665949" y="40132"/>
+                </a:lnTo>
+                <a:lnTo>
+                  <a:pt x="661301" y="32715"/>
+                </a:lnTo>
+                <a:lnTo>
+                  <a:pt x="652894" y="19265"/>
+                </a:lnTo>
+                <a:lnTo>
+                  <a:pt x="633183" y="5969"/>
+                </a:lnTo>
+                <a:lnTo>
+                  <a:pt x="633183" y="65633"/>
+                </a:lnTo>
+                <a:lnTo>
+                  <a:pt x="631367" y="78232"/>
+                </a:lnTo>
+                <a:lnTo>
+                  <a:pt x="625906" y="88709"/>
+                </a:lnTo>
+                <a:lnTo>
+                  <a:pt x="616813" y="95885"/>
+                </a:lnTo>
+                <a:lnTo>
+                  <a:pt x="604075" y="98539"/>
+                </a:lnTo>
+                <a:lnTo>
+                  <a:pt x="591489" y="95885"/>
+                </a:lnTo>
+                <a:lnTo>
+                  <a:pt x="582523" y="88709"/>
+                </a:lnTo>
+                <a:lnTo>
+                  <a:pt x="577151" y="78232"/>
+                </a:lnTo>
+                <a:lnTo>
+                  <a:pt x="575360" y="65633"/>
+                </a:lnTo>
+                <a:lnTo>
+                  <a:pt x="577151" y="53187"/>
+                </a:lnTo>
+                <a:lnTo>
+                  <a:pt x="582523" y="42684"/>
+                </a:lnTo>
+                <a:lnTo>
+                  <a:pt x="591489" y="35420"/>
+                </a:lnTo>
+                <a:lnTo>
+                  <a:pt x="604075" y="32715"/>
+                </a:lnTo>
+                <a:lnTo>
+                  <a:pt x="616813" y="35420"/>
+                </a:lnTo>
+                <a:lnTo>
+                  <a:pt x="625906" y="42684"/>
+                </a:lnTo>
+                <a:lnTo>
+                  <a:pt x="631367" y="53187"/>
+                </a:lnTo>
+                <a:lnTo>
+                  <a:pt x="633183" y="65633"/>
+                </a:lnTo>
+                <a:lnTo>
+                  <a:pt x="633183" y="5969"/>
+                </a:lnTo>
+                <a:lnTo>
+                  <a:pt x="632015" y="5168"/>
+                </a:lnTo>
+                <a:lnTo>
+                  <a:pt x="604075" y="0"/>
+                </a:lnTo>
+                <a:lnTo>
+                  <a:pt x="576186" y="5168"/>
+                </a:lnTo>
+                <a:lnTo>
+                  <a:pt x="555459" y="19265"/>
+                </a:lnTo>
+                <a:lnTo>
+                  <a:pt x="542531" y="40132"/>
+                </a:lnTo>
+                <a:lnTo>
+                  <a:pt x="538073" y="65633"/>
+                </a:lnTo>
+                <a:lnTo>
+                  <a:pt x="542531" y="91287"/>
+                </a:lnTo>
+                <a:lnTo>
+                  <a:pt x="555459" y="112141"/>
+                </a:lnTo>
+                <a:lnTo>
+                  <a:pt x="576186" y="126136"/>
+                </a:lnTo>
+                <a:lnTo>
+                  <a:pt x="604075" y="131254"/>
+                </a:lnTo>
+                <a:lnTo>
+                  <a:pt x="632015" y="126136"/>
+                </a:lnTo>
+                <a:lnTo>
+                  <a:pt x="652894" y="112141"/>
+                </a:lnTo>
+                <a:lnTo>
+                  <a:pt x="661403" y="98539"/>
+                </a:lnTo>
+                <a:lnTo>
+                  <a:pt x="665949" y="91287"/>
+                </a:lnTo>
+                <a:lnTo>
+                  <a:pt x="670458" y="65633"/>
+                </a:lnTo>
+                <a:close/>
+              </a:path>
+              <a:path w="1132840" h="457834">
+                <a:moveTo>
+                  <a:pt x="674865" y="165315"/>
+                </a:moveTo>
+                <a:lnTo>
+                  <a:pt x="638911" y="165315"/>
+                </a:lnTo>
+                <a:lnTo>
+                  <a:pt x="638911" y="291998"/>
+                </a:lnTo>
+                <a:lnTo>
+                  <a:pt x="674865" y="291998"/>
+                </a:lnTo>
+                <a:lnTo>
+                  <a:pt x="674865" y="165315"/>
+                </a:lnTo>
+                <a:close/>
+              </a:path>
+              <a:path w="1132840" h="457834">
+                <a:moveTo>
+                  <a:pt x="708304" y="328358"/>
+                </a:moveTo>
+                <a:lnTo>
+                  <a:pt x="605967" y="328358"/>
+                </a:lnTo>
+                <a:lnTo>
+                  <a:pt x="605967" y="340906"/>
+                </a:lnTo>
+                <a:lnTo>
+                  <a:pt x="650290" y="340906"/>
+                </a:lnTo>
+                <a:lnTo>
+                  <a:pt x="650290" y="455041"/>
+                </a:lnTo>
+                <a:lnTo>
+                  <a:pt x="663790" y="455041"/>
+                </a:lnTo>
+                <a:lnTo>
+                  <a:pt x="663790" y="340906"/>
+                </a:lnTo>
+                <a:lnTo>
+                  <a:pt x="708304" y="340906"/>
+                </a:lnTo>
+                <a:lnTo>
+                  <a:pt x="708304" y="328358"/>
+                </a:lnTo>
+                <a:close/>
+              </a:path>
+              <a:path w="1132840" h="457834">
+                <a:moveTo>
+                  <a:pt x="829678" y="2286"/>
+                </a:moveTo>
+                <a:lnTo>
+                  <a:pt x="795248" y="2286"/>
+                </a:lnTo>
+                <a:lnTo>
+                  <a:pt x="795248" y="78562"/>
+                </a:lnTo>
+                <a:lnTo>
+                  <a:pt x="781761" y="50977"/>
+                </a:lnTo>
+                <a:lnTo>
+                  <a:pt x="757961" y="2286"/>
+                </a:lnTo>
+                <a:lnTo>
+                  <a:pt x="712495" y="2286"/>
+                </a:lnTo>
+                <a:lnTo>
+                  <a:pt x="712495" y="128968"/>
+                </a:lnTo>
+                <a:lnTo>
+                  <a:pt x="747115" y="128968"/>
+                </a:lnTo>
+                <a:lnTo>
+                  <a:pt x="747115" y="50977"/>
+                </a:lnTo>
+                <a:lnTo>
+                  <a:pt x="785736" y="128968"/>
+                </a:lnTo>
+                <a:lnTo>
+                  <a:pt x="829678" y="128968"/>
+                </a:lnTo>
+                <a:lnTo>
+                  <a:pt x="829678" y="78562"/>
+                </a:lnTo>
+                <a:lnTo>
+                  <a:pt x="829678" y="2286"/>
+                </a:lnTo>
+                <a:close/>
+              </a:path>
+              <a:path w="1132840" h="457834">
+                <a:moveTo>
+                  <a:pt x="844308" y="455041"/>
+                </a:moveTo>
+                <a:lnTo>
+                  <a:pt x="815289" y="401408"/>
+                </a:lnTo>
+                <a:lnTo>
+                  <a:pt x="814057" y="399122"/>
+                </a:lnTo>
+                <a:lnTo>
+                  <a:pt x="825068" y="393954"/>
+                </a:lnTo>
+                <a:lnTo>
+                  <a:pt x="830681" y="388848"/>
+                </a:lnTo>
+                <a:lnTo>
+                  <a:pt x="833526" y="386257"/>
+                </a:lnTo>
+                <a:lnTo>
+                  <a:pt x="838962" y="376262"/>
+                </a:lnTo>
+                <a:lnTo>
+                  <a:pt x="840879" y="364121"/>
+                </a:lnTo>
+                <a:lnTo>
+                  <a:pt x="837933" y="349313"/>
+                </a:lnTo>
+                <a:lnTo>
+                  <a:pt x="831761" y="340906"/>
+                </a:lnTo>
+                <a:lnTo>
+                  <a:pt x="829652" y="338035"/>
+                </a:lnTo>
+                <a:lnTo>
+                  <a:pt x="826808" y="336461"/>
+                </a:lnTo>
+                <a:lnTo>
+                  <a:pt x="826808" y="365061"/>
+                </a:lnTo>
+                <a:lnTo>
+                  <a:pt x="825004" y="374726"/>
+                </a:lnTo>
+                <a:lnTo>
+                  <a:pt x="819785" y="382244"/>
+                </a:lnTo>
+                <a:lnTo>
+                  <a:pt x="811479" y="387121"/>
+                </a:lnTo>
+                <a:lnTo>
+                  <a:pt x="800366" y="388848"/>
+                </a:lnTo>
+                <a:lnTo>
+                  <a:pt x="759472" y="388848"/>
+                </a:lnTo>
+                <a:lnTo>
+                  <a:pt x="759472" y="340906"/>
+                </a:lnTo>
+                <a:lnTo>
+                  <a:pt x="799795" y="340906"/>
+                </a:lnTo>
+                <a:lnTo>
+                  <a:pt x="810907" y="342633"/>
+                </a:lnTo>
+                <a:lnTo>
+                  <a:pt x="819429" y="347497"/>
+                </a:lnTo>
+                <a:lnTo>
+                  <a:pt x="824877" y="355117"/>
+                </a:lnTo>
+                <a:lnTo>
+                  <a:pt x="826808" y="365061"/>
+                </a:lnTo>
+                <a:lnTo>
+                  <a:pt x="826808" y="336461"/>
+                </a:lnTo>
+                <a:lnTo>
+                  <a:pt x="816800" y="330873"/>
+                </a:lnTo>
+                <a:lnTo>
+                  <a:pt x="800176" y="328358"/>
+                </a:lnTo>
+                <a:lnTo>
+                  <a:pt x="746163" y="328358"/>
+                </a:lnTo>
+                <a:lnTo>
+                  <a:pt x="746163" y="455041"/>
+                </a:lnTo>
+                <a:lnTo>
+                  <a:pt x="759472" y="455041"/>
+                </a:lnTo>
+                <a:lnTo>
+                  <a:pt x="759472" y="401408"/>
+                </a:lnTo>
+                <a:lnTo>
+                  <a:pt x="800366" y="401408"/>
+                </a:lnTo>
+                <a:lnTo>
+                  <a:pt x="829094" y="455041"/>
+                </a:lnTo>
+                <a:lnTo>
+                  <a:pt x="844308" y="455041"/>
+                </a:lnTo>
+                <a:close/>
+              </a:path>
+              <a:path w="1132840" h="457834">
+                <a:moveTo>
+                  <a:pt x="844346" y="291998"/>
+                </a:moveTo>
+                <a:lnTo>
+                  <a:pt x="836053" y="268605"/>
+                </a:lnTo>
+                <a:lnTo>
+                  <a:pt x="826071" y="240449"/>
+                </a:lnTo>
+                <a:lnTo>
+                  <a:pt x="809828" y="194614"/>
+                </a:lnTo>
+                <a:lnTo>
+                  <a:pt x="799452" y="165315"/>
+                </a:lnTo>
+                <a:lnTo>
+                  <a:pt x="789940" y="165315"/>
+                </a:lnTo>
+                <a:lnTo>
+                  <a:pt x="789940" y="240449"/>
+                </a:lnTo>
+                <a:lnTo>
+                  <a:pt x="764451" y="240449"/>
+                </a:lnTo>
+                <a:lnTo>
+                  <a:pt x="777189" y="194614"/>
+                </a:lnTo>
+                <a:lnTo>
+                  <a:pt x="789940" y="240449"/>
+                </a:lnTo>
+                <a:lnTo>
+                  <a:pt x="789940" y="165315"/>
+                </a:lnTo>
+                <a:lnTo>
+                  <a:pt x="756081" y="165315"/>
+                </a:lnTo>
+                <a:lnTo>
+                  <a:pt x="710996" y="291998"/>
+                </a:lnTo>
+                <a:lnTo>
+                  <a:pt x="750379" y="291998"/>
+                </a:lnTo>
+                <a:lnTo>
+                  <a:pt x="756843" y="268605"/>
+                </a:lnTo>
+                <a:lnTo>
+                  <a:pt x="797737" y="268605"/>
+                </a:lnTo>
+                <a:lnTo>
+                  <a:pt x="804202" y="291998"/>
+                </a:lnTo>
+                <a:lnTo>
+                  <a:pt x="844346" y="291998"/>
+                </a:lnTo>
+                <a:close/>
+              </a:path>
+              <a:path w="1132840" h="457834">
+                <a:moveTo>
+                  <a:pt x="978027" y="328358"/>
+                </a:moveTo>
+                <a:lnTo>
+                  <a:pt x="962812" y="328358"/>
+                </a:lnTo>
+                <a:lnTo>
+                  <a:pt x="923048" y="390182"/>
+                </a:lnTo>
+                <a:lnTo>
+                  <a:pt x="883488" y="328358"/>
+                </a:lnTo>
+                <a:lnTo>
+                  <a:pt x="867702" y="328358"/>
+                </a:lnTo>
+                <a:lnTo>
+                  <a:pt x="915822" y="402348"/>
+                </a:lnTo>
+                <a:lnTo>
+                  <a:pt x="915822" y="455041"/>
+                </a:lnTo>
+                <a:lnTo>
+                  <a:pt x="929525" y="455041"/>
+                </a:lnTo>
+                <a:lnTo>
+                  <a:pt x="929525" y="402348"/>
+                </a:lnTo>
+                <a:lnTo>
+                  <a:pt x="937501" y="390182"/>
+                </a:lnTo>
+                <a:lnTo>
+                  <a:pt x="978027" y="328358"/>
+                </a:lnTo>
+                <a:close/>
+              </a:path>
+              <a:path w="1132840" h="457834">
+                <a:moveTo>
+                  <a:pt x="994994" y="256806"/>
+                </a:moveTo>
+                <a:lnTo>
+                  <a:pt x="964552" y="242735"/>
+                </a:lnTo>
+                <a:lnTo>
+                  <a:pt x="959485" y="251510"/>
+                </a:lnTo>
+                <a:lnTo>
+                  <a:pt x="953439" y="258025"/>
+                </a:lnTo>
+                <a:lnTo>
+                  <a:pt x="946010" y="262089"/>
+                </a:lnTo>
+                <a:lnTo>
+                  <a:pt x="936777" y="263474"/>
+                </a:lnTo>
+                <a:lnTo>
+                  <a:pt x="924661" y="260705"/>
+                </a:lnTo>
+                <a:lnTo>
+                  <a:pt x="915631" y="253161"/>
+                </a:lnTo>
+                <a:lnTo>
+                  <a:pt x="910005" y="241973"/>
+                </a:lnTo>
+                <a:lnTo>
+                  <a:pt x="908062" y="228282"/>
+                </a:lnTo>
+                <a:lnTo>
+                  <a:pt x="910005" y="214884"/>
+                </a:lnTo>
+                <a:lnTo>
+                  <a:pt x="915631" y="203936"/>
+                </a:lnTo>
+                <a:lnTo>
+                  <a:pt x="924661" y="196557"/>
+                </a:lnTo>
+                <a:lnTo>
+                  <a:pt x="936777" y="193852"/>
+                </a:lnTo>
+                <a:lnTo>
+                  <a:pt x="945311" y="194906"/>
+                </a:lnTo>
+                <a:lnTo>
+                  <a:pt x="952944" y="198259"/>
+                </a:lnTo>
+                <a:lnTo>
+                  <a:pt x="959726" y="204216"/>
+                </a:lnTo>
+                <a:lnTo>
+                  <a:pt x="965695" y="213067"/>
+                </a:lnTo>
+                <a:lnTo>
+                  <a:pt x="994232" y="197269"/>
+                </a:lnTo>
+                <a:lnTo>
+                  <a:pt x="991679" y="193852"/>
+                </a:lnTo>
+                <a:lnTo>
+                  <a:pt x="982345" y="181330"/>
+                </a:lnTo>
+                <a:lnTo>
+                  <a:pt x="968235" y="170738"/>
+                </a:lnTo>
+                <a:lnTo>
+                  <a:pt x="952525" y="164858"/>
+                </a:lnTo>
+                <a:lnTo>
+                  <a:pt x="935837" y="163029"/>
+                </a:lnTo>
+                <a:lnTo>
+                  <a:pt x="909751" y="167640"/>
+                </a:lnTo>
+                <a:lnTo>
+                  <a:pt x="889292" y="180746"/>
+                </a:lnTo>
+                <a:lnTo>
+                  <a:pt x="875931" y="201320"/>
+                </a:lnTo>
+                <a:lnTo>
+                  <a:pt x="871156" y="228282"/>
+                </a:lnTo>
+                <a:lnTo>
+                  <a:pt x="875931" y="255536"/>
+                </a:lnTo>
+                <a:lnTo>
+                  <a:pt x="889292" y="276339"/>
+                </a:lnTo>
+                <a:lnTo>
+                  <a:pt x="909751" y="289623"/>
+                </a:lnTo>
+                <a:lnTo>
+                  <a:pt x="935837" y="294284"/>
+                </a:lnTo>
+                <a:lnTo>
+                  <a:pt x="955205" y="291731"/>
+                </a:lnTo>
+                <a:lnTo>
+                  <a:pt x="971473" y="284327"/>
+                </a:lnTo>
+                <a:lnTo>
+                  <a:pt x="984694" y="272542"/>
+                </a:lnTo>
+                <a:lnTo>
+                  <a:pt x="990625" y="263474"/>
+                </a:lnTo>
+                <a:lnTo>
+                  <a:pt x="994994" y="256806"/>
+                </a:lnTo>
+                <a:close/>
+              </a:path>
+              <a:path w="1132840" h="457834">
+                <a:moveTo>
+                  <a:pt x="999147" y="128968"/>
+                </a:moveTo>
+                <a:lnTo>
+                  <a:pt x="990854" y="105575"/>
+                </a:lnTo>
+                <a:lnTo>
+                  <a:pt x="980884" y="77419"/>
+                </a:lnTo>
+                <a:lnTo>
+                  <a:pt x="964641" y="31584"/>
+                </a:lnTo>
+                <a:lnTo>
+                  <a:pt x="954265" y="2286"/>
+                </a:lnTo>
+                <a:lnTo>
+                  <a:pt x="944753" y="2286"/>
+                </a:lnTo>
+                <a:lnTo>
+                  <a:pt x="944753" y="77419"/>
+                </a:lnTo>
+                <a:lnTo>
+                  <a:pt x="919264" y="77419"/>
+                </a:lnTo>
+                <a:lnTo>
+                  <a:pt x="932002" y="31584"/>
+                </a:lnTo>
+                <a:lnTo>
+                  <a:pt x="944753" y="77419"/>
+                </a:lnTo>
+                <a:lnTo>
+                  <a:pt x="944753" y="2286"/>
+                </a:lnTo>
+                <a:lnTo>
+                  <a:pt x="910894" y="2286"/>
+                </a:lnTo>
+                <a:lnTo>
+                  <a:pt x="865809" y="128968"/>
+                </a:lnTo>
+                <a:lnTo>
+                  <a:pt x="905179" y="128968"/>
+                </a:lnTo>
+                <a:lnTo>
+                  <a:pt x="911656" y="105575"/>
+                </a:lnTo>
+                <a:lnTo>
+                  <a:pt x="952550" y="105575"/>
+                </a:lnTo>
+                <a:lnTo>
+                  <a:pt x="959015" y="128968"/>
+                </a:lnTo>
+                <a:lnTo>
+                  <a:pt x="999147" y="128968"/>
+                </a:lnTo>
+                <a:close/>
+              </a:path>
+              <a:path w="1132840" h="457834">
+                <a:moveTo>
+                  <a:pt x="1132674" y="97015"/>
+                </a:moveTo>
+                <a:lnTo>
+                  <a:pt x="1071422" y="97015"/>
+                </a:lnTo>
+                <a:lnTo>
+                  <a:pt x="1071422" y="2286"/>
+                </a:lnTo>
+                <a:lnTo>
+                  <a:pt x="1035481" y="2286"/>
+                </a:lnTo>
+                <a:lnTo>
+                  <a:pt x="1035481" y="128968"/>
+                </a:lnTo>
+                <a:lnTo>
+                  <a:pt x="1132674" y="128968"/>
+                </a:lnTo>
+                <a:lnTo>
+                  <a:pt x="1132674" y="97015"/>
+                </a:lnTo>
+                <a:close/>
+              </a:path>
+            </a:pathLst>
+          </a:custGeom>
+          <a:solidFill>
+            <a:srgbClr val="696C68"/>
+          </a:solidFill>
+        </p:spPr>
+        <p:txBody>
+          <a:bodyPr wrap="square" lIns="0" tIns="0" rIns="0" bIns="0" rtlCol="0">
+            <a:prstTxWarp prst="textNoShape">
+              <a:avLst/>
+            </a:prstTxWarp>
+            <a:noAutofit/>
+          </a:bodyPr>
+          <a:lstStyle/>
+          <a:p>
+            <a:pPr algn="ctr"/>
+            <a:endParaRPr lang="en-AU" dirty="0"/>
+          </a:p>
+        </p:txBody>
+      </p:sp>
+      <p:grpSp>
+        <p:nvGrpSpPr>
+          <p:cNvPr id="3" name="ncr_logo_svg">
             <a:extLst>
-              <a:ext uri="{28A0092B-C50C-407E-A947-70E740481C1C}">
-                <a14:useLocalDpi xmlns:a14="http://schemas.microsoft.com/office/drawing/2010/main" val="0"/>
+              <a:ext uri="{FF2B5EF4-FFF2-40B4-BE49-F238E27FC236}">
+                <a16:creationId xmlns:a16="http://schemas.microsoft.com/office/drawing/2014/main" id="{850B20FB-CAA4-FA8F-731F-93442C45412A}"/>
               </a:ext>
             </a:extLst>
-          </a:blip>
-          <a:stretch>
-            <a:fillRect/>
-          </a:stretch>
-        </p:blipFill>
+          </p:cNvPr>
+          <p:cNvGrpSpPr>
+            <a:grpSpLocks/>
+          </p:cNvGrpSpPr>
+          <p:nvPr userDrawn="1"/>
+        </p:nvGrpSpPr>
+        <p:grpSpPr>
+          <a:xfrm>
+            <a:off x="2582171" y="169781"/>
+            <a:ext cx="540712" cy="569253"/>
+            <a:chOff x="0" y="0"/>
+            <a:chExt cx="852169" cy="1004569"/>
+          </a:xfrm>
+        </p:grpSpPr>
+        <p:sp>
+          <p:nvSpPr>
+            <p:cNvPr id="5" name="Graphic 4928">
+              <a:extLst>
+                <a:ext uri="{FF2B5EF4-FFF2-40B4-BE49-F238E27FC236}">
+                  <a16:creationId xmlns:a16="http://schemas.microsoft.com/office/drawing/2014/main" id="{388C7FDF-61F7-6A97-4654-628403927EA5}"/>
+                </a:ext>
+              </a:extLst>
+            </p:cNvPr>
+            <p:cNvSpPr/>
+            <p:nvPr userDrawn="1"/>
+          </p:nvSpPr>
+          <p:spPr>
+            <a:xfrm>
+              <a:off x="0" y="0"/>
+              <a:ext cx="852169" cy="1004569"/>
+            </a:xfrm>
+            <a:custGeom>
+              <a:avLst/>
+              <a:gdLst/>
+              <a:ahLst/>
+              <a:cxnLst/>
+              <a:rect l="l" t="t" r="r" b="b"/>
+              <a:pathLst>
+                <a:path w="852169" h="1004569">
+                  <a:moveTo>
+                    <a:pt x="852170" y="497217"/>
+                  </a:moveTo>
+                  <a:lnTo>
+                    <a:pt x="850493" y="449491"/>
+                  </a:lnTo>
+                  <a:lnTo>
+                    <a:pt x="845210" y="404609"/>
+                  </a:lnTo>
+                  <a:lnTo>
+                    <a:pt x="835939" y="362813"/>
+                  </a:lnTo>
+                  <a:lnTo>
+                    <a:pt x="822286" y="324345"/>
+                  </a:lnTo>
+                  <a:lnTo>
+                    <a:pt x="803871" y="289445"/>
+                  </a:lnTo>
+                  <a:lnTo>
+                    <a:pt x="780300" y="258381"/>
+                  </a:lnTo>
+                  <a:lnTo>
+                    <a:pt x="751192" y="231368"/>
+                  </a:lnTo>
+                  <a:lnTo>
+                    <a:pt x="716165" y="208661"/>
+                  </a:lnTo>
+                  <a:lnTo>
+                    <a:pt x="674814" y="190512"/>
+                  </a:lnTo>
+                  <a:lnTo>
+                    <a:pt x="626783" y="177165"/>
+                  </a:lnTo>
+                  <a:lnTo>
+                    <a:pt x="571665" y="168859"/>
+                  </a:lnTo>
+                  <a:lnTo>
+                    <a:pt x="516699" y="166192"/>
+                  </a:lnTo>
+                  <a:lnTo>
+                    <a:pt x="502246" y="165798"/>
+                  </a:lnTo>
+                  <a:lnTo>
+                    <a:pt x="489800" y="166192"/>
+                  </a:lnTo>
+                  <a:lnTo>
+                    <a:pt x="489800" y="28448"/>
+                  </a:lnTo>
+                  <a:lnTo>
+                    <a:pt x="485355" y="12014"/>
+                  </a:lnTo>
+                  <a:lnTo>
+                    <a:pt x="475564" y="3568"/>
+                  </a:lnTo>
+                  <a:lnTo>
+                    <a:pt x="465785" y="457"/>
+                  </a:lnTo>
+                  <a:lnTo>
+                    <a:pt x="461352" y="0"/>
+                  </a:lnTo>
+                  <a:lnTo>
+                    <a:pt x="399199" y="0"/>
+                  </a:lnTo>
+                  <a:lnTo>
+                    <a:pt x="382752" y="4457"/>
+                  </a:lnTo>
+                  <a:lnTo>
+                    <a:pt x="374307" y="14224"/>
+                  </a:lnTo>
+                  <a:lnTo>
+                    <a:pt x="371182" y="24003"/>
+                  </a:lnTo>
+                  <a:lnTo>
+                    <a:pt x="370751" y="28448"/>
+                  </a:lnTo>
+                  <a:lnTo>
+                    <a:pt x="370840" y="165798"/>
+                  </a:lnTo>
+                  <a:lnTo>
+                    <a:pt x="370954" y="177165"/>
+                  </a:lnTo>
+                  <a:lnTo>
+                    <a:pt x="371360" y="207924"/>
+                  </a:lnTo>
+                  <a:lnTo>
+                    <a:pt x="371360" y="282752"/>
+                  </a:lnTo>
+                  <a:lnTo>
+                    <a:pt x="376085" y="305841"/>
+                  </a:lnTo>
+                  <a:lnTo>
+                    <a:pt x="388848" y="324675"/>
+                  </a:lnTo>
+                  <a:lnTo>
+                    <a:pt x="407733" y="337375"/>
+                  </a:lnTo>
+                  <a:lnTo>
+                    <a:pt x="430860" y="342023"/>
+                  </a:lnTo>
+                  <a:lnTo>
+                    <a:pt x="565518" y="342023"/>
+                  </a:lnTo>
+                  <a:lnTo>
+                    <a:pt x="577176" y="344385"/>
+                  </a:lnTo>
+                  <a:lnTo>
+                    <a:pt x="586701" y="350812"/>
+                  </a:lnTo>
+                  <a:lnTo>
+                    <a:pt x="593115" y="360337"/>
+                  </a:lnTo>
+                  <a:lnTo>
+                    <a:pt x="595477" y="371995"/>
+                  </a:lnTo>
+                  <a:lnTo>
+                    <a:pt x="595452" y="531710"/>
+                  </a:lnTo>
+                  <a:lnTo>
+                    <a:pt x="596061" y="540207"/>
+                  </a:lnTo>
+                  <a:lnTo>
+                    <a:pt x="603199" y="546976"/>
+                  </a:lnTo>
+                  <a:lnTo>
+                    <a:pt x="611898" y="547357"/>
+                  </a:lnTo>
+                  <a:lnTo>
+                    <a:pt x="679335" y="547458"/>
+                  </a:lnTo>
+                  <a:lnTo>
+                    <a:pt x="698728" y="552704"/>
+                  </a:lnTo>
+                  <a:lnTo>
+                    <a:pt x="708685" y="564235"/>
+                  </a:lnTo>
+                  <a:lnTo>
+                    <a:pt x="712355" y="575779"/>
+                  </a:lnTo>
+                  <a:lnTo>
+                    <a:pt x="712889" y="581012"/>
+                  </a:lnTo>
+                  <a:lnTo>
+                    <a:pt x="712889" y="637362"/>
+                  </a:lnTo>
+                  <a:lnTo>
+                    <a:pt x="707644" y="656767"/>
+                  </a:lnTo>
+                  <a:lnTo>
+                    <a:pt x="696112" y="666737"/>
+                  </a:lnTo>
+                  <a:lnTo>
+                    <a:pt x="684568" y="670407"/>
+                  </a:lnTo>
+                  <a:lnTo>
+                    <a:pt x="679335" y="670928"/>
+                  </a:lnTo>
+                  <a:lnTo>
+                    <a:pt x="622477" y="670928"/>
+                  </a:lnTo>
+                  <a:lnTo>
+                    <a:pt x="603072" y="665695"/>
+                  </a:lnTo>
+                  <a:lnTo>
+                    <a:pt x="593115" y="654151"/>
+                  </a:lnTo>
+                  <a:lnTo>
+                    <a:pt x="589445" y="642607"/>
+                  </a:lnTo>
+                  <a:lnTo>
+                    <a:pt x="588924" y="637362"/>
+                  </a:lnTo>
+                  <a:lnTo>
+                    <a:pt x="588924" y="562597"/>
+                  </a:lnTo>
+                  <a:lnTo>
+                    <a:pt x="582523" y="555510"/>
+                  </a:lnTo>
+                  <a:lnTo>
+                    <a:pt x="574357" y="554215"/>
+                  </a:lnTo>
+                  <a:lnTo>
+                    <a:pt x="573697" y="554177"/>
+                  </a:lnTo>
+                  <a:lnTo>
+                    <a:pt x="401294" y="554151"/>
+                  </a:lnTo>
+                  <a:lnTo>
+                    <a:pt x="389648" y="551802"/>
+                  </a:lnTo>
+                  <a:lnTo>
+                    <a:pt x="380136" y="545388"/>
+                  </a:lnTo>
+                  <a:lnTo>
+                    <a:pt x="373710" y="535863"/>
+                  </a:lnTo>
+                  <a:lnTo>
+                    <a:pt x="371360" y="524192"/>
+                  </a:lnTo>
+                  <a:lnTo>
+                    <a:pt x="371335" y="401561"/>
+                  </a:lnTo>
+                  <a:lnTo>
+                    <a:pt x="366649" y="380276"/>
+                  </a:lnTo>
+                  <a:lnTo>
+                    <a:pt x="353898" y="365480"/>
+                  </a:lnTo>
+                  <a:lnTo>
+                    <a:pt x="334975" y="356844"/>
+                  </a:lnTo>
+                  <a:lnTo>
+                    <a:pt x="311823" y="354037"/>
+                  </a:lnTo>
+                  <a:lnTo>
+                    <a:pt x="219900" y="354037"/>
+                  </a:lnTo>
+                  <a:lnTo>
+                    <a:pt x="208254" y="351688"/>
+                  </a:lnTo>
+                  <a:lnTo>
+                    <a:pt x="198742" y="345262"/>
+                  </a:lnTo>
+                  <a:lnTo>
+                    <a:pt x="192316" y="335737"/>
+                  </a:lnTo>
+                  <a:lnTo>
+                    <a:pt x="190080" y="324675"/>
+                  </a:lnTo>
+                  <a:lnTo>
+                    <a:pt x="189966" y="266065"/>
+                  </a:lnTo>
+                  <a:lnTo>
+                    <a:pt x="187604" y="254419"/>
+                  </a:lnTo>
+                  <a:lnTo>
+                    <a:pt x="181178" y="244894"/>
+                  </a:lnTo>
+                  <a:lnTo>
+                    <a:pt x="171640" y="238480"/>
+                  </a:lnTo>
+                  <a:lnTo>
+                    <a:pt x="159981" y="236118"/>
+                  </a:lnTo>
+                  <a:lnTo>
+                    <a:pt x="29959" y="236118"/>
+                  </a:lnTo>
+                  <a:lnTo>
+                    <a:pt x="18300" y="238480"/>
+                  </a:lnTo>
+                  <a:lnTo>
+                    <a:pt x="8775" y="244894"/>
+                  </a:lnTo>
+                  <a:lnTo>
+                    <a:pt x="2349" y="254419"/>
+                  </a:lnTo>
+                  <a:lnTo>
+                    <a:pt x="0" y="266065"/>
+                  </a:lnTo>
+                  <a:lnTo>
+                    <a:pt x="101" y="324675"/>
+                  </a:lnTo>
+                  <a:lnTo>
+                    <a:pt x="29959" y="354076"/>
+                  </a:lnTo>
+                  <a:lnTo>
+                    <a:pt x="165785" y="354190"/>
+                  </a:lnTo>
+                  <a:lnTo>
+                    <a:pt x="174942" y="357251"/>
+                  </a:lnTo>
+                  <a:lnTo>
+                    <a:pt x="180708" y="363474"/>
+                  </a:lnTo>
+                  <a:lnTo>
+                    <a:pt x="182575" y="373075"/>
+                  </a:lnTo>
+                  <a:lnTo>
+                    <a:pt x="182562" y="373761"/>
+                  </a:lnTo>
+                  <a:lnTo>
+                    <a:pt x="182219" y="375335"/>
+                  </a:lnTo>
+                  <a:lnTo>
+                    <a:pt x="182016" y="376008"/>
+                  </a:lnTo>
+                  <a:lnTo>
+                    <a:pt x="174993" y="404926"/>
+                  </a:lnTo>
+                  <a:lnTo>
+                    <a:pt x="169989" y="434835"/>
+                  </a:lnTo>
+                  <a:lnTo>
+                    <a:pt x="166992" y="465632"/>
+                  </a:lnTo>
+                  <a:lnTo>
+                    <a:pt x="166001" y="497217"/>
+                  </a:lnTo>
+                  <a:lnTo>
+                    <a:pt x="168770" y="551434"/>
+                  </a:lnTo>
+                  <a:lnTo>
+                    <a:pt x="176784" y="605091"/>
+                  </a:lnTo>
+                  <a:lnTo>
+                    <a:pt x="189547" y="657631"/>
+                  </a:lnTo>
+                  <a:lnTo>
+                    <a:pt x="206616" y="708520"/>
+                  </a:lnTo>
+                  <a:lnTo>
+                    <a:pt x="227482" y="757186"/>
+                  </a:lnTo>
+                  <a:lnTo>
+                    <a:pt x="251714" y="803084"/>
+                  </a:lnTo>
+                  <a:lnTo>
+                    <a:pt x="278803" y="845654"/>
+                  </a:lnTo>
+                  <a:lnTo>
+                    <a:pt x="308279" y="884351"/>
+                  </a:lnTo>
+                  <a:lnTo>
+                    <a:pt x="339699" y="918603"/>
+                  </a:lnTo>
+                  <a:lnTo>
+                    <a:pt x="372567" y="947877"/>
+                  </a:lnTo>
+                  <a:lnTo>
+                    <a:pt x="406400" y="971613"/>
+                  </a:lnTo>
+                  <a:lnTo>
+                    <a:pt x="440753" y="989253"/>
+                  </a:lnTo>
+                  <a:lnTo>
+                    <a:pt x="509079" y="1004023"/>
+                  </a:lnTo>
+                  <a:lnTo>
+                    <a:pt x="543013" y="1000239"/>
+                  </a:lnTo>
+                  <a:lnTo>
+                    <a:pt x="611746" y="971613"/>
+                  </a:lnTo>
+                  <a:lnTo>
+                    <a:pt x="645591" y="947877"/>
+                  </a:lnTo>
+                  <a:lnTo>
+                    <a:pt x="678446" y="918603"/>
+                  </a:lnTo>
+                  <a:lnTo>
+                    <a:pt x="709866" y="884351"/>
+                  </a:lnTo>
+                  <a:lnTo>
+                    <a:pt x="739355" y="845654"/>
+                  </a:lnTo>
+                  <a:lnTo>
+                    <a:pt x="766445" y="803084"/>
+                  </a:lnTo>
+                  <a:lnTo>
+                    <a:pt x="790663" y="757186"/>
+                  </a:lnTo>
+                  <a:lnTo>
+                    <a:pt x="811542" y="708520"/>
+                  </a:lnTo>
+                  <a:lnTo>
+                    <a:pt x="824141" y="670928"/>
+                  </a:lnTo>
+                  <a:lnTo>
+                    <a:pt x="828611" y="657631"/>
+                  </a:lnTo>
+                  <a:lnTo>
+                    <a:pt x="841375" y="605091"/>
+                  </a:lnTo>
+                  <a:lnTo>
+                    <a:pt x="849388" y="551434"/>
+                  </a:lnTo>
+                  <a:lnTo>
+                    <a:pt x="852170" y="497217"/>
+                  </a:lnTo>
+                  <a:close/>
+                </a:path>
+              </a:pathLst>
+            </a:custGeom>
+            <a:solidFill>
+              <a:srgbClr val="A02371"/>
+            </a:solidFill>
+          </p:spPr>
+          <p:txBody>
+            <a:bodyPr wrap="square" lIns="0" tIns="0" rIns="0" bIns="0" rtlCol="0">
+              <a:prstTxWarp prst="textNoShape">
+                <a:avLst/>
+              </a:prstTxWarp>
+              <a:noAutofit/>
+            </a:bodyPr>
+            <a:lstStyle/>
+            <a:p>
+              <a:pPr algn="ctr"/>
+              <a:endParaRPr lang="en-AU" dirty="0"/>
+            </a:p>
+          </p:txBody>
+        </p:sp>
+        <p:sp>
+          <p:nvSpPr>
+            <p:cNvPr id="6" name="Graphic 4929">
+              <a:extLst>
+                <a:ext uri="{FF2B5EF4-FFF2-40B4-BE49-F238E27FC236}">
+                  <a16:creationId xmlns:a16="http://schemas.microsoft.com/office/drawing/2014/main" id="{C3C3EDAA-6587-2C87-AED5-B35F98C4D5B4}"/>
+                </a:ext>
+              </a:extLst>
+            </p:cNvPr>
+            <p:cNvSpPr/>
+            <p:nvPr userDrawn="1"/>
+          </p:nvSpPr>
+          <p:spPr>
+            <a:xfrm>
+              <a:off x="409875" y="642872"/>
+              <a:ext cx="422909" cy="361315"/>
+            </a:xfrm>
+            <a:custGeom>
+              <a:avLst/>
+              <a:gdLst/>
+              <a:ahLst/>
+              <a:cxnLst/>
+              <a:rect l="l" t="t" r="r" b="b"/>
+              <a:pathLst>
+                <a:path w="422909" h="361315">
+                  <a:moveTo>
+                    <a:pt x="422323" y="0"/>
+                  </a:moveTo>
+                  <a:lnTo>
+                    <a:pt x="394297" y="39268"/>
+                  </a:lnTo>
+                  <a:lnTo>
+                    <a:pt x="363266" y="77881"/>
+                  </a:lnTo>
+                  <a:lnTo>
+                    <a:pt x="330116" y="114634"/>
+                  </a:lnTo>
+                  <a:lnTo>
+                    <a:pt x="294940" y="149435"/>
+                  </a:lnTo>
+                  <a:lnTo>
+                    <a:pt x="257830" y="182192"/>
+                  </a:lnTo>
+                  <a:lnTo>
+                    <a:pt x="218878" y="212812"/>
+                  </a:lnTo>
+                  <a:lnTo>
+                    <a:pt x="178175" y="241203"/>
+                  </a:lnTo>
+                  <a:lnTo>
+                    <a:pt x="135813" y="267273"/>
+                  </a:lnTo>
+                  <a:lnTo>
+                    <a:pt x="91886" y="290930"/>
+                  </a:lnTo>
+                  <a:lnTo>
+                    <a:pt x="46484" y="312082"/>
+                  </a:lnTo>
+                  <a:lnTo>
+                    <a:pt x="0" y="330517"/>
+                  </a:lnTo>
+                  <a:lnTo>
+                    <a:pt x="28358" y="345079"/>
+                  </a:lnTo>
+                  <a:lnTo>
+                    <a:pt x="36145" y="348058"/>
+                  </a:lnTo>
+                  <a:lnTo>
+                    <a:pt x="59979" y="355676"/>
+                  </a:lnTo>
+                  <a:lnTo>
+                    <a:pt x="68751" y="357754"/>
+                  </a:lnTo>
+                  <a:lnTo>
+                    <a:pt x="99204" y="361151"/>
+                  </a:lnTo>
+                  <a:lnTo>
+                    <a:pt x="133626" y="357211"/>
+                  </a:lnTo>
+                  <a:lnTo>
+                    <a:pt x="182789" y="338538"/>
+                  </a:lnTo>
+                  <a:lnTo>
+                    <a:pt x="218286" y="317229"/>
+                  </a:lnTo>
+                  <a:lnTo>
+                    <a:pt x="252573" y="289990"/>
+                  </a:lnTo>
+                  <a:lnTo>
+                    <a:pt x="285395" y="257394"/>
+                  </a:lnTo>
+                  <a:lnTo>
+                    <a:pt x="316351" y="220008"/>
+                  </a:lnTo>
+                  <a:lnTo>
+                    <a:pt x="344995" y="178401"/>
+                  </a:lnTo>
+                  <a:lnTo>
+                    <a:pt x="370858" y="133139"/>
+                  </a:lnTo>
+                  <a:lnTo>
+                    <a:pt x="393458" y="84793"/>
+                  </a:lnTo>
+                  <a:lnTo>
+                    <a:pt x="412305" y="33936"/>
+                  </a:lnTo>
+                  <a:lnTo>
+                    <a:pt x="420647" y="6894"/>
+                  </a:lnTo>
+                  <a:lnTo>
+                    <a:pt x="422323" y="0"/>
+                  </a:lnTo>
+                  <a:close/>
+                </a:path>
+              </a:pathLst>
+            </a:custGeom>
+            <a:solidFill>
+              <a:srgbClr val="5D1B42"/>
+            </a:solidFill>
+          </p:spPr>
+          <p:txBody>
+            <a:bodyPr wrap="square" lIns="0" tIns="0" rIns="0" bIns="0" rtlCol="0">
+              <a:prstTxWarp prst="textNoShape">
+                <a:avLst/>
+              </a:prstTxWarp>
+              <a:noAutofit/>
+            </a:bodyPr>
+            <a:lstStyle/>
+            <a:p>
+              <a:pPr algn="ctr"/>
+              <a:endParaRPr lang="en-AU" dirty="0"/>
+            </a:p>
+          </p:txBody>
+        </p:sp>
+        <p:sp>
+          <p:nvSpPr>
+            <p:cNvPr id="7" name="Graphic 4930">
+              <a:extLst>
+                <a:ext uri="{FF2B5EF4-FFF2-40B4-BE49-F238E27FC236}">
+                  <a16:creationId xmlns:a16="http://schemas.microsoft.com/office/drawing/2014/main" id="{ABB45637-CEE1-75FC-C0B5-911A9EF54B6B}"/>
+                </a:ext>
+              </a:extLst>
+            </p:cNvPr>
+            <p:cNvSpPr/>
+            <p:nvPr userDrawn="1"/>
+          </p:nvSpPr>
+          <p:spPr>
+            <a:xfrm>
+              <a:off x="836476" y="535192"/>
+              <a:ext cx="13970" cy="20955"/>
+            </a:xfrm>
+            <a:custGeom>
+              <a:avLst/>
+              <a:gdLst/>
+              <a:ahLst/>
+              <a:cxnLst/>
+              <a:rect l="l" t="t" r="r" b="b"/>
+              <a:pathLst>
+                <a:path w="13970" h="20955">
+                  <a:moveTo>
+                    <a:pt x="13749" y="0"/>
+                  </a:moveTo>
+                  <a:lnTo>
+                    <a:pt x="9664" y="3874"/>
+                  </a:lnTo>
+                  <a:lnTo>
+                    <a:pt x="4864" y="8269"/>
+                  </a:lnTo>
+                  <a:lnTo>
+                    <a:pt x="0" y="12548"/>
+                  </a:lnTo>
+                  <a:lnTo>
+                    <a:pt x="4178" y="15190"/>
+                  </a:lnTo>
+                  <a:lnTo>
+                    <a:pt x="12293" y="20421"/>
+                  </a:lnTo>
+                  <a:lnTo>
+                    <a:pt x="12918" y="16234"/>
+                  </a:lnTo>
+                  <a:lnTo>
+                    <a:pt x="13749" y="0"/>
+                  </a:lnTo>
+                  <a:close/>
+                </a:path>
+              </a:pathLst>
+            </a:custGeom>
+            <a:solidFill>
+              <a:srgbClr val="672149"/>
+            </a:solidFill>
+          </p:spPr>
+          <p:txBody>
+            <a:bodyPr wrap="square" lIns="0" tIns="0" rIns="0" bIns="0" rtlCol="0">
+              <a:prstTxWarp prst="textNoShape">
+                <a:avLst/>
+              </a:prstTxWarp>
+              <a:noAutofit/>
+            </a:bodyPr>
+            <a:lstStyle/>
+            <a:p>
+              <a:pPr algn="ctr"/>
+              <a:endParaRPr lang="en-AU" dirty="0"/>
+            </a:p>
+          </p:txBody>
+        </p:sp>
+        <p:pic>
+          <p:nvPicPr>
+            <p:cNvPr id="8" name="Image 4931">
+              <a:extLst>
+                <a:ext uri="{FF2B5EF4-FFF2-40B4-BE49-F238E27FC236}">
+                  <a16:creationId xmlns:a16="http://schemas.microsoft.com/office/drawing/2014/main" id="{28EF3D6B-F6EB-F0C8-F33A-7712541EB50C}"/>
+                </a:ext>
+              </a:extLst>
+            </p:cNvPr>
+            <p:cNvPicPr/>
+            <p:nvPr userDrawn="1"/>
+          </p:nvPicPr>
+          <p:blipFill>
+            <a:blip r:embed="rId4" cstate="screen">
+              <a:extLst>
+                <a:ext uri="{28A0092B-C50C-407E-A947-70E740481C1C}">
+                  <a14:useLocalDpi xmlns:a14="http://schemas.microsoft.com/office/drawing/2010/main"/>
+                </a:ext>
+              </a:extLst>
+            </a:blip>
+            <a:stretch>
+              <a:fillRect/>
+            </a:stretch>
+          </p:blipFill>
+          <p:spPr>
+            <a:xfrm>
+              <a:off x="174089" y="587015"/>
+              <a:ext cx="161206" cy="185116"/>
+            </a:xfrm>
+            <a:prstGeom prst="rect">
+              <a:avLst/>
+            </a:prstGeom>
+          </p:spPr>
+        </p:pic>
+        <p:sp>
+          <p:nvSpPr>
+            <p:cNvPr id="9" name="Graphic 4932">
+              <a:extLst>
+                <a:ext uri="{FF2B5EF4-FFF2-40B4-BE49-F238E27FC236}">
+                  <a16:creationId xmlns:a16="http://schemas.microsoft.com/office/drawing/2014/main" id="{4C8A6029-4475-5E1F-1256-8D563657FB24}"/>
+                </a:ext>
+              </a:extLst>
+            </p:cNvPr>
+            <p:cNvSpPr/>
+            <p:nvPr userDrawn="1"/>
+          </p:nvSpPr>
+          <p:spPr>
+            <a:xfrm>
+              <a:off x="235386" y="547742"/>
+              <a:ext cx="613410" cy="426084"/>
+            </a:xfrm>
+            <a:custGeom>
+              <a:avLst/>
+              <a:gdLst/>
+              <a:ahLst/>
+              <a:cxnLst/>
+              <a:rect l="l" t="t" r="r" b="b"/>
+              <a:pathLst>
+                <a:path w="613410" h="426084">
+                  <a:moveTo>
+                    <a:pt x="99907" y="114858"/>
+                  </a:moveTo>
+                  <a:lnTo>
+                    <a:pt x="73582" y="141145"/>
+                  </a:lnTo>
+                  <a:lnTo>
+                    <a:pt x="48092" y="168236"/>
+                  </a:lnTo>
+                  <a:lnTo>
+                    <a:pt x="23453" y="196118"/>
+                  </a:lnTo>
+                  <a:lnTo>
+                    <a:pt x="0" y="224390"/>
+                  </a:lnTo>
+                  <a:lnTo>
+                    <a:pt x="6763" y="237206"/>
+                  </a:lnTo>
+                  <a:lnTo>
+                    <a:pt x="35494" y="285452"/>
+                  </a:lnTo>
+                  <a:lnTo>
+                    <a:pt x="66958" y="328794"/>
+                  </a:lnTo>
+                  <a:lnTo>
+                    <a:pt x="100674" y="366886"/>
+                  </a:lnTo>
+                  <a:lnTo>
+                    <a:pt x="136114" y="399184"/>
+                  </a:lnTo>
+                  <a:lnTo>
+                    <a:pt x="172707" y="424732"/>
+                  </a:lnTo>
+                  <a:lnTo>
+                    <a:pt x="174490" y="425648"/>
+                  </a:lnTo>
+                  <a:lnTo>
+                    <a:pt x="220974" y="407213"/>
+                  </a:lnTo>
+                  <a:lnTo>
+                    <a:pt x="266376" y="386061"/>
+                  </a:lnTo>
+                  <a:lnTo>
+                    <a:pt x="310303" y="362404"/>
+                  </a:lnTo>
+                  <a:lnTo>
+                    <a:pt x="352664" y="336334"/>
+                  </a:lnTo>
+                  <a:lnTo>
+                    <a:pt x="393367" y="307943"/>
+                  </a:lnTo>
+                  <a:lnTo>
+                    <a:pt x="432320" y="277323"/>
+                  </a:lnTo>
+                  <a:lnTo>
+                    <a:pt x="469430" y="244567"/>
+                  </a:lnTo>
+                  <a:lnTo>
+                    <a:pt x="504606" y="209766"/>
+                  </a:lnTo>
+                  <a:lnTo>
+                    <a:pt x="537755" y="173012"/>
+                  </a:lnTo>
+                  <a:lnTo>
+                    <a:pt x="568681" y="134531"/>
+                  </a:lnTo>
+                  <a:lnTo>
+                    <a:pt x="243671" y="134531"/>
+                  </a:lnTo>
+                  <a:lnTo>
+                    <a:pt x="206640" y="133203"/>
+                  </a:lnTo>
+                  <a:lnTo>
+                    <a:pt x="170279" y="129428"/>
+                  </a:lnTo>
+                  <a:lnTo>
+                    <a:pt x="134673" y="123286"/>
+                  </a:lnTo>
+                  <a:lnTo>
+                    <a:pt x="99907" y="114858"/>
+                  </a:lnTo>
+                  <a:close/>
+                </a:path>
+                <a:path w="613410" h="426084">
+                  <a:moveTo>
+                    <a:pt x="370772" y="119722"/>
+                  </a:moveTo>
+                  <a:lnTo>
+                    <a:pt x="340384" y="126074"/>
+                  </a:lnTo>
+                  <a:lnTo>
+                    <a:pt x="309395" y="130694"/>
+                  </a:lnTo>
+                  <a:lnTo>
+                    <a:pt x="277855" y="133529"/>
+                  </a:lnTo>
+                  <a:lnTo>
+                    <a:pt x="245817" y="134531"/>
+                  </a:lnTo>
+                  <a:lnTo>
+                    <a:pt x="568681" y="134531"/>
+                  </a:lnTo>
+                  <a:lnTo>
+                    <a:pt x="576787" y="123189"/>
+                  </a:lnTo>
+                  <a:lnTo>
+                    <a:pt x="380396" y="123186"/>
+                  </a:lnTo>
+                  <a:lnTo>
+                    <a:pt x="375052" y="121856"/>
+                  </a:lnTo>
+                  <a:lnTo>
+                    <a:pt x="370772" y="119722"/>
+                  </a:lnTo>
+                  <a:close/>
+                </a:path>
+                <a:path w="613410" h="426084">
+                  <a:moveTo>
+                    <a:pt x="601087" y="0"/>
+                  </a:moveTo>
+                  <a:lnTo>
+                    <a:pt x="572485" y="23529"/>
+                  </a:lnTo>
+                  <a:lnTo>
+                    <a:pt x="542291" y="45077"/>
+                  </a:lnTo>
+                  <a:lnTo>
+                    <a:pt x="510599" y="64545"/>
+                  </a:lnTo>
+                  <a:lnTo>
+                    <a:pt x="477503" y="81838"/>
+                  </a:lnTo>
+                  <a:lnTo>
+                    <a:pt x="477503" y="89623"/>
+                  </a:lnTo>
+                  <a:lnTo>
+                    <a:pt x="444078" y="123186"/>
+                  </a:lnTo>
+                  <a:lnTo>
+                    <a:pt x="380412" y="123189"/>
+                  </a:lnTo>
+                  <a:lnTo>
+                    <a:pt x="576789" y="123186"/>
+                  </a:lnTo>
+                  <a:lnTo>
+                    <a:pt x="596810" y="95134"/>
+                  </a:lnTo>
+                  <a:lnTo>
+                    <a:pt x="605531" y="59256"/>
+                  </a:lnTo>
+                  <a:lnTo>
+                    <a:pt x="606193" y="56031"/>
+                  </a:lnTo>
+                  <a:lnTo>
+                    <a:pt x="613382" y="7873"/>
+                  </a:lnTo>
+                  <a:lnTo>
+                    <a:pt x="609418" y="5295"/>
+                  </a:lnTo>
+                  <a:lnTo>
+                    <a:pt x="601087" y="0"/>
+                  </a:lnTo>
+                  <a:close/>
+                </a:path>
+              </a:pathLst>
+            </a:custGeom>
+            <a:solidFill>
+              <a:srgbClr val="551C3C"/>
+            </a:solidFill>
+          </p:spPr>
+          <p:txBody>
+            <a:bodyPr wrap="square" lIns="0" tIns="0" rIns="0" bIns="0" rtlCol="0">
+              <a:prstTxWarp prst="textNoShape">
+                <a:avLst/>
+              </a:prstTxWarp>
+              <a:noAutofit/>
+            </a:bodyPr>
+            <a:lstStyle/>
+            <a:p>
+              <a:pPr algn="ctr"/>
+              <a:endParaRPr lang="en-AU" dirty="0"/>
+            </a:p>
+          </p:txBody>
+        </p:sp>
+        <p:sp>
+          <p:nvSpPr>
+            <p:cNvPr id="10" name="Graphic 4933">
+              <a:extLst>
+                <a:ext uri="{FF2B5EF4-FFF2-40B4-BE49-F238E27FC236}">
+                  <a16:creationId xmlns:a16="http://schemas.microsoft.com/office/drawing/2014/main" id="{6E145B8F-96B0-9B19-7590-C5F4BB6B7E85}"/>
+                </a:ext>
+              </a:extLst>
+            </p:cNvPr>
+            <p:cNvSpPr/>
+            <p:nvPr userDrawn="1"/>
+          </p:nvSpPr>
+          <p:spPr>
+            <a:xfrm>
+              <a:off x="0" y="0"/>
+              <a:ext cx="838200" cy="447675"/>
+            </a:xfrm>
+            <a:custGeom>
+              <a:avLst/>
+              <a:gdLst/>
+              <a:ahLst/>
+              <a:cxnLst/>
+              <a:rect l="l" t="t" r="r" b="b"/>
+              <a:pathLst>
+                <a:path w="838200" h="447675">
+                  <a:moveTo>
+                    <a:pt x="218586" y="353777"/>
+                  </a:moveTo>
+                  <a:lnTo>
+                    <a:pt x="162717" y="353777"/>
+                  </a:lnTo>
+                  <a:lnTo>
+                    <a:pt x="165698" y="354082"/>
+                  </a:lnTo>
+                  <a:lnTo>
+                    <a:pt x="168026" y="354590"/>
+                  </a:lnTo>
+                  <a:lnTo>
+                    <a:pt x="169334" y="354590"/>
+                  </a:lnTo>
+                  <a:lnTo>
+                    <a:pt x="217254" y="355549"/>
+                  </a:lnTo>
+                  <a:lnTo>
+                    <a:pt x="264728" y="358287"/>
+                  </a:lnTo>
+                  <a:lnTo>
+                    <a:pt x="311714" y="362771"/>
+                  </a:lnTo>
+                  <a:lnTo>
+                    <a:pt x="356756" y="368778"/>
+                  </a:lnTo>
+                  <a:lnTo>
+                    <a:pt x="354879" y="366600"/>
+                  </a:lnTo>
+                  <a:lnTo>
+                    <a:pt x="311948" y="354053"/>
+                  </a:lnTo>
+                  <a:lnTo>
+                    <a:pt x="219905" y="354044"/>
+                  </a:lnTo>
+                  <a:lnTo>
+                    <a:pt x="218586" y="353777"/>
+                  </a:lnTo>
+                  <a:close/>
+                </a:path>
+                <a:path w="838200" h="447675">
+                  <a:moveTo>
+                    <a:pt x="159981" y="236118"/>
+                  </a:moveTo>
+                  <a:lnTo>
+                    <a:pt x="29959" y="236118"/>
+                  </a:lnTo>
+                  <a:lnTo>
+                    <a:pt x="18302" y="238472"/>
+                  </a:lnTo>
+                  <a:lnTo>
+                    <a:pt x="8778" y="244890"/>
+                  </a:lnTo>
+                  <a:lnTo>
+                    <a:pt x="2355" y="254409"/>
+                  </a:lnTo>
+                  <a:lnTo>
+                    <a:pt x="0" y="266064"/>
+                  </a:lnTo>
+                  <a:lnTo>
+                    <a:pt x="111" y="324670"/>
+                  </a:lnTo>
+                  <a:lnTo>
+                    <a:pt x="2355" y="335779"/>
+                  </a:lnTo>
+                  <a:lnTo>
+                    <a:pt x="8778" y="345301"/>
+                  </a:lnTo>
+                  <a:lnTo>
+                    <a:pt x="18302" y="351721"/>
+                  </a:lnTo>
+                  <a:lnTo>
+                    <a:pt x="29959" y="354075"/>
+                  </a:lnTo>
+                  <a:lnTo>
+                    <a:pt x="153815" y="354075"/>
+                  </a:lnTo>
+                  <a:lnTo>
+                    <a:pt x="155821" y="353879"/>
+                  </a:lnTo>
+                  <a:lnTo>
+                    <a:pt x="157789" y="353777"/>
+                  </a:lnTo>
+                  <a:lnTo>
+                    <a:pt x="218586" y="353777"/>
+                  </a:lnTo>
+                  <a:lnTo>
+                    <a:pt x="208255" y="351688"/>
+                  </a:lnTo>
+                  <a:lnTo>
+                    <a:pt x="198736" y="345263"/>
+                  </a:lnTo>
+                  <a:lnTo>
+                    <a:pt x="192314" y="335736"/>
+                  </a:lnTo>
+                  <a:lnTo>
+                    <a:pt x="190079" y="324670"/>
+                  </a:lnTo>
+                  <a:lnTo>
+                    <a:pt x="189957" y="266064"/>
+                  </a:lnTo>
+                  <a:lnTo>
+                    <a:pt x="187601" y="254408"/>
+                  </a:lnTo>
+                  <a:lnTo>
+                    <a:pt x="181174" y="244887"/>
+                  </a:lnTo>
+                  <a:lnTo>
+                    <a:pt x="171648" y="238472"/>
+                  </a:lnTo>
+                  <a:lnTo>
+                    <a:pt x="159981" y="236118"/>
+                  </a:lnTo>
+                  <a:close/>
+                </a:path>
+                <a:path w="838200" h="447675">
+                  <a:moveTo>
+                    <a:pt x="461352" y="0"/>
+                  </a:moveTo>
+                  <a:lnTo>
+                    <a:pt x="399199" y="0"/>
+                  </a:lnTo>
+                  <a:lnTo>
+                    <a:pt x="382752" y="4445"/>
+                  </a:lnTo>
+                  <a:lnTo>
+                    <a:pt x="374307" y="14224"/>
+                  </a:lnTo>
+                  <a:lnTo>
+                    <a:pt x="371195" y="24002"/>
+                  </a:lnTo>
+                  <a:lnTo>
+                    <a:pt x="370757" y="28380"/>
+                  </a:lnTo>
+                  <a:lnTo>
+                    <a:pt x="370851" y="165830"/>
+                  </a:lnTo>
+                  <a:lnTo>
+                    <a:pt x="371247" y="199171"/>
+                  </a:lnTo>
+                  <a:lnTo>
+                    <a:pt x="371360" y="282752"/>
+                  </a:lnTo>
+                  <a:lnTo>
+                    <a:pt x="376092" y="305831"/>
+                  </a:lnTo>
+                  <a:lnTo>
+                    <a:pt x="388852" y="324671"/>
+                  </a:lnTo>
+                  <a:lnTo>
+                    <a:pt x="407740" y="337368"/>
+                  </a:lnTo>
+                  <a:lnTo>
+                    <a:pt x="430860" y="342023"/>
+                  </a:lnTo>
+                  <a:lnTo>
+                    <a:pt x="565518" y="342023"/>
+                  </a:lnTo>
+                  <a:lnTo>
+                    <a:pt x="577180" y="344381"/>
+                  </a:lnTo>
+                  <a:lnTo>
+                    <a:pt x="586703" y="350808"/>
+                  </a:lnTo>
+                  <a:lnTo>
+                    <a:pt x="593126" y="360337"/>
+                  </a:lnTo>
+                  <a:lnTo>
+                    <a:pt x="595482" y="372002"/>
+                  </a:lnTo>
+                  <a:lnTo>
+                    <a:pt x="595482" y="429494"/>
+                  </a:lnTo>
+                  <a:lnTo>
+                    <a:pt x="607195" y="433811"/>
+                  </a:lnTo>
+                  <a:lnTo>
+                    <a:pt x="618858" y="438245"/>
+                  </a:lnTo>
+                  <a:lnTo>
+                    <a:pt x="630467" y="442793"/>
+                  </a:lnTo>
+                  <a:lnTo>
+                    <a:pt x="642015" y="447452"/>
+                  </a:lnTo>
+                  <a:lnTo>
+                    <a:pt x="689550" y="425573"/>
+                  </a:lnTo>
+                  <a:lnTo>
+                    <a:pt x="738195" y="405750"/>
+                  </a:lnTo>
+                  <a:lnTo>
+                    <a:pt x="787883" y="388039"/>
+                  </a:lnTo>
+                  <a:lnTo>
+                    <a:pt x="838120" y="372628"/>
+                  </a:lnTo>
+                  <a:lnTo>
+                    <a:pt x="837080" y="367938"/>
+                  </a:lnTo>
+                  <a:lnTo>
+                    <a:pt x="823779" y="328536"/>
+                  </a:lnTo>
+                  <a:lnTo>
+                    <a:pt x="805632" y="292777"/>
+                  </a:lnTo>
+                  <a:lnTo>
+                    <a:pt x="782236" y="260917"/>
+                  </a:lnTo>
+                  <a:lnTo>
+                    <a:pt x="753189" y="233207"/>
+                  </a:lnTo>
+                  <a:lnTo>
+                    <a:pt x="718090" y="209903"/>
+                  </a:lnTo>
+                  <a:lnTo>
+                    <a:pt x="676537" y="191259"/>
+                  </a:lnTo>
+                  <a:lnTo>
+                    <a:pt x="628129" y="177529"/>
+                  </a:lnTo>
+                  <a:lnTo>
+                    <a:pt x="572468" y="168967"/>
+                  </a:lnTo>
+                  <a:lnTo>
+                    <a:pt x="516525" y="166198"/>
+                  </a:lnTo>
+                  <a:lnTo>
+                    <a:pt x="489793" y="166198"/>
+                  </a:lnTo>
+                  <a:lnTo>
+                    <a:pt x="489776" y="28380"/>
+                  </a:lnTo>
+                  <a:lnTo>
+                    <a:pt x="485355" y="12001"/>
+                  </a:lnTo>
+                  <a:lnTo>
+                    <a:pt x="475576" y="3556"/>
+                  </a:lnTo>
+                  <a:lnTo>
+                    <a:pt x="465797" y="444"/>
+                  </a:lnTo>
+                  <a:lnTo>
+                    <a:pt x="461352" y="0"/>
+                  </a:lnTo>
+                  <a:close/>
+                </a:path>
+                <a:path w="838200" h="447675">
+                  <a:moveTo>
+                    <a:pt x="509084" y="165830"/>
+                  </a:moveTo>
+                  <a:lnTo>
+                    <a:pt x="501375" y="165830"/>
+                  </a:lnTo>
+                  <a:lnTo>
+                    <a:pt x="489793" y="166198"/>
+                  </a:lnTo>
+                  <a:lnTo>
+                    <a:pt x="516525" y="166198"/>
+                  </a:lnTo>
+                  <a:lnTo>
+                    <a:pt x="509084" y="165830"/>
+                  </a:lnTo>
+                  <a:close/>
+                </a:path>
+              </a:pathLst>
+            </a:custGeom>
+            <a:solidFill>
+              <a:srgbClr val="A3246C"/>
+            </a:solidFill>
+          </p:spPr>
+          <p:txBody>
+            <a:bodyPr wrap="square" lIns="0" tIns="0" rIns="0" bIns="0" rtlCol="0">
+              <a:prstTxWarp prst="textNoShape">
+                <a:avLst/>
+              </a:prstTxWarp>
+              <a:noAutofit/>
+            </a:bodyPr>
+            <a:lstStyle/>
+            <a:p>
+              <a:pPr algn="ctr"/>
+              <a:endParaRPr lang="en-AU" dirty="0"/>
+            </a:p>
+          </p:txBody>
+        </p:sp>
+        <p:pic>
+          <p:nvPicPr>
+            <p:cNvPr id="11" name="Image 4934">
+              <a:extLst>
+                <a:ext uri="{FF2B5EF4-FFF2-40B4-BE49-F238E27FC236}">
+                  <a16:creationId xmlns:a16="http://schemas.microsoft.com/office/drawing/2014/main" id="{AF78BE22-D554-5411-A269-77A152AB7E75}"/>
+                </a:ext>
+              </a:extLst>
+            </p:cNvPr>
+            <p:cNvPicPr/>
+            <p:nvPr userDrawn="1"/>
+          </p:nvPicPr>
+          <p:blipFill>
+            <a:blip r:embed="rId5" cstate="screen">
+              <a:extLst>
+                <a:ext uri="{28A0092B-C50C-407E-A947-70E740481C1C}">
+                  <a14:useLocalDpi xmlns:a14="http://schemas.microsoft.com/office/drawing/2010/main"/>
+                </a:ext>
+              </a:extLst>
+            </a:blip>
+            <a:stretch>
+              <a:fillRect/>
+            </a:stretch>
+          </p:blipFill>
+          <p:spPr>
+            <a:xfrm>
+              <a:off x="642011" y="372627"/>
+              <a:ext cx="210158" cy="175117"/>
+            </a:xfrm>
+            <a:prstGeom prst="rect">
+              <a:avLst/>
+            </a:prstGeom>
+          </p:spPr>
+        </p:pic>
+        <p:sp>
+          <p:nvSpPr>
+            <p:cNvPr id="12" name="Graphic 4935">
+              <a:extLst>
+                <a:ext uri="{FF2B5EF4-FFF2-40B4-BE49-F238E27FC236}">
+                  <a16:creationId xmlns:a16="http://schemas.microsoft.com/office/drawing/2014/main" id="{D24DE77E-ACDB-B625-A197-2F4DF77ACD55}"/>
+                </a:ext>
+              </a:extLst>
+            </p:cNvPr>
+            <p:cNvSpPr/>
+            <p:nvPr userDrawn="1"/>
+          </p:nvSpPr>
+          <p:spPr>
+            <a:xfrm>
+              <a:off x="166001" y="351370"/>
+              <a:ext cx="476250" cy="311785"/>
+            </a:xfrm>
+            <a:custGeom>
+              <a:avLst/>
+              <a:gdLst/>
+              <a:ahLst/>
+              <a:cxnLst/>
+              <a:rect l="l" t="t" r="r" b="b"/>
+              <a:pathLst>
+                <a:path w="476250" h="311785">
+                  <a:moveTo>
+                    <a:pt x="41795" y="0"/>
+                  </a:moveTo>
+                  <a:lnTo>
+                    <a:pt x="3327" y="3219"/>
+                  </a:lnTo>
+                  <a:lnTo>
+                    <a:pt x="2032" y="3219"/>
+                  </a:lnTo>
+                  <a:lnTo>
+                    <a:pt x="11353" y="5238"/>
+                  </a:lnTo>
+                  <a:lnTo>
+                    <a:pt x="16802" y="11144"/>
+                  </a:lnTo>
+                  <a:lnTo>
+                    <a:pt x="16560" y="22396"/>
+                  </a:lnTo>
+                  <a:lnTo>
+                    <a:pt x="16217" y="23971"/>
+                  </a:lnTo>
+                  <a:lnTo>
+                    <a:pt x="16025" y="24638"/>
+                  </a:lnTo>
+                  <a:lnTo>
+                    <a:pt x="15203" y="28023"/>
+                  </a:lnTo>
+                  <a:lnTo>
+                    <a:pt x="6733" y="67100"/>
+                  </a:lnTo>
+                  <a:lnTo>
+                    <a:pt x="3997" y="83456"/>
+                  </a:lnTo>
+                  <a:lnTo>
+                    <a:pt x="998" y="114261"/>
+                  </a:lnTo>
+                  <a:lnTo>
+                    <a:pt x="0" y="145846"/>
+                  </a:lnTo>
+                  <a:lnTo>
+                    <a:pt x="2679" y="198195"/>
+                  </a:lnTo>
+                  <a:lnTo>
+                    <a:pt x="45048" y="259058"/>
+                  </a:lnTo>
+                  <a:lnTo>
+                    <a:pt x="84675" y="279776"/>
+                  </a:lnTo>
+                  <a:lnTo>
+                    <a:pt x="126148" y="297220"/>
+                  </a:lnTo>
+                  <a:lnTo>
+                    <a:pt x="169291" y="311220"/>
+                  </a:lnTo>
+                  <a:lnTo>
+                    <a:pt x="200082" y="282440"/>
+                  </a:lnTo>
+                  <a:lnTo>
+                    <a:pt x="231878" y="254755"/>
+                  </a:lnTo>
+                  <a:lnTo>
+                    <a:pt x="264647" y="228195"/>
+                  </a:lnTo>
+                  <a:lnTo>
+                    <a:pt x="298357" y="202790"/>
+                  </a:lnTo>
+                  <a:lnTo>
+                    <a:pt x="235292" y="202787"/>
+                  </a:lnTo>
+                  <a:lnTo>
+                    <a:pt x="205359" y="172821"/>
+                  </a:lnTo>
+                  <a:lnTo>
+                    <a:pt x="205333" y="50190"/>
+                  </a:lnTo>
+                  <a:lnTo>
+                    <a:pt x="201389" y="32228"/>
+                  </a:lnTo>
+                  <a:lnTo>
+                    <a:pt x="168986" y="5468"/>
+                  </a:lnTo>
+                  <a:lnTo>
+                    <a:pt x="145821" y="2667"/>
+                  </a:lnTo>
+                  <a:lnTo>
+                    <a:pt x="53898" y="2667"/>
+                  </a:lnTo>
+                  <a:lnTo>
+                    <a:pt x="42256" y="311"/>
+                  </a:lnTo>
+                  <a:lnTo>
+                    <a:pt x="41795" y="0"/>
+                  </a:lnTo>
+                  <a:close/>
+                </a:path>
+                <a:path w="476250" h="311785">
+                  <a:moveTo>
+                    <a:pt x="15289" y="27626"/>
+                  </a:moveTo>
+                  <a:lnTo>
+                    <a:pt x="9000" y="53545"/>
+                  </a:lnTo>
+                  <a:lnTo>
+                    <a:pt x="6733" y="67100"/>
+                  </a:lnTo>
+                  <a:lnTo>
+                    <a:pt x="9004" y="53544"/>
+                  </a:lnTo>
+                  <a:lnTo>
+                    <a:pt x="15289" y="27626"/>
+                  </a:lnTo>
+                  <a:close/>
+                </a:path>
+                <a:path w="476250" h="311785">
+                  <a:moveTo>
+                    <a:pt x="15203" y="28023"/>
+                  </a:moveTo>
+                  <a:lnTo>
+                    <a:pt x="9004" y="53545"/>
+                  </a:lnTo>
+                  <a:lnTo>
+                    <a:pt x="6733" y="67100"/>
+                  </a:lnTo>
+                  <a:lnTo>
+                    <a:pt x="15203" y="28023"/>
+                  </a:lnTo>
+                  <a:close/>
+                </a:path>
+                <a:path w="476250" h="311785">
+                  <a:moveTo>
+                    <a:pt x="16573" y="21703"/>
+                  </a:moveTo>
+                  <a:lnTo>
+                    <a:pt x="15289" y="27626"/>
+                  </a:lnTo>
+                  <a:lnTo>
+                    <a:pt x="16016" y="24631"/>
+                  </a:lnTo>
+                  <a:lnTo>
+                    <a:pt x="16217" y="23965"/>
+                  </a:lnTo>
+                  <a:lnTo>
+                    <a:pt x="16559" y="22396"/>
+                  </a:lnTo>
+                  <a:lnTo>
+                    <a:pt x="16573" y="21703"/>
+                  </a:lnTo>
+                  <a:close/>
+                </a:path>
+                <a:path w="476250" h="311785">
+                  <a:moveTo>
+                    <a:pt x="429475" y="78124"/>
+                  </a:moveTo>
+                  <a:lnTo>
+                    <a:pt x="429463" y="120059"/>
+                  </a:lnTo>
+                  <a:lnTo>
+                    <a:pt x="440991" y="113877"/>
+                  </a:lnTo>
+                  <a:lnTo>
+                    <a:pt x="452588" y="107823"/>
+                  </a:lnTo>
+                  <a:lnTo>
+                    <a:pt x="464258" y="101893"/>
+                  </a:lnTo>
+                  <a:lnTo>
+                    <a:pt x="476008" y="96082"/>
+                  </a:lnTo>
+                  <a:lnTo>
+                    <a:pt x="464462" y="91422"/>
+                  </a:lnTo>
+                  <a:lnTo>
+                    <a:pt x="452856" y="86874"/>
+                  </a:lnTo>
+                  <a:lnTo>
+                    <a:pt x="441193" y="82441"/>
+                  </a:lnTo>
+                  <a:lnTo>
+                    <a:pt x="429475" y="78124"/>
+                  </a:lnTo>
+                  <a:close/>
+                </a:path>
+              </a:pathLst>
+            </a:custGeom>
+            <a:solidFill>
+              <a:srgbClr val="932360"/>
+            </a:solidFill>
+          </p:spPr>
+          <p:txBody>
+            <a:bodyPr wrap="square" lIns="0" tIns="0" rIns="0" bIns="0" rtlCol="0">
+              <a:prstTxWarp prst="textNoShape">
+                <a:avLst/>
+              </a:prstTxWarp>
+              <a:noAutofit/>
+            </a:bodyPr>
+            <a:lstStyle/>
+            <a:p>
+              <a:pPr algn="ctr"/>
+              <a:endParaRPr lang="en-AU" dirty="0"/>
+            </a:p>
+          </p:txBody>
+        </p:sp>
+        <p:sp>
+          <p:nvSpPr>
+            <p:cNvPr id="13" name="Graphic 4936">
+              <a:extLst>
+                <a:ext uri="{FF2B5EF4-FFF2-40B4-BE49-F238E27FC236}">
+                  <a16:creationId xmlns:a16="http://schemas.microsoft.com/office/drawing/2014/main" id="{7DC62E9C-8968-B425-A140-13EB6E2992D9}"/>
+                </a:ext>
+              </a:extLst>
+            </p:cNvPr>
+            <p:cNvSpPr/>
+            <p:nvPr userDrawn="1"/>
+          </p:nvSpPr>
+          <p:spPr>
+            <a:xfrm>
+              <a:off x="335302" y="447449"/>
+              <a:ext cx="501650" cy="234950"/>
+            </a:xfrm>
+            <a:custGeom>
+              <a:avLst/>
+              <a:gdLst/>
+              <a:ahLst/>
+              <a:cxnLst/>
+              <a:rect l="l" t="t" r="r" b="b"/>
+              <a:pathLst>
+                <a:path w="501650" h="234950">
+                  <a:moveTo>
+                    <a:pt x="129061" y="106712"/>
+                  </a:moveTo>
+                  <a:lnTo>
+                    <a:pt x="95349" y="132118"/>
+                  </a:lnTo>
+                  <a:lnTo>
+                    <a:pt x="62577" y="158680"/>
+                  </a:lnTo>
+                  <a:lnTo>
+                    <a:pt x="30784" y="186365"/>
+                  </a:lnTo>
+                  <a:lnTo>
+                    <a:pt x="0" y="215150"/>
+                  </a:lnTo>
+                  <a:lnTo>
+                    <a:pt x="34764" y="223578"/>
+                  </a:lnTo>
+                  <a:lnTo>
+                    <a:pt x="70367" y="229720"/>
+                  </a:lnTo>
+                  <a:lnTo>
+                    <a:pt x="106727" y="233495"/>
+                  </a:lnTo>
+                  <a:lnTo>
+                    <a:pt x="143763" y="234823"/>
+                  </a:lnTo>
+                  <a:lnTo>
+                    <a:pt x="145910" y="234823"/>
+                  </a:lnTo>
+                  <a:lnTo>
+                    <a:pt x="177941" y="233821"/>
+                  </a:lnTo>
+                  <a:lnTo>
+                    <a:pt x="209476" y="230986"/>
+                  </a:lnTo>
+                  <a:lnTo>
+                    <a:pt x="240464" y="226366"/>
+                  </a:lnTo>
+                  <a:lnTo>
+                    <a:pt x="270852" y="220014"/>
+                  </a:lnTo>
+                  <a:lnTo>
+                    <a:pt x="260889" y="214722"/>
+                  </a:lnTo>
+                  <a:lnTo>
+                    <a:pt x="255773" y="209823"/>
+                  </a:lnTo>
+                  <a:lnTo>
+                    <a:pt x="253888" y="202494"/>
+                  </a:lnTo>
+                  <a:lnTo>
+                    <a:pt x="253619" y="189915"/>
+                  </a:lnTo>
+                  <a:lnTo>
+                    <a:pt x="253619" y="115145"/>
+                  </a:lnTo>
+                  <a:lnTo>
+                    <a:pt x="247218" y="108076"/>
+                  </a:lnTo>
+                  <a:lnTo>
+                    <a:pt x="239052" y="106768"/>
+                  </a:lnTo>
+                  <a:lnTo>
+                    <a:pt x="238404" y="106730"/>
+                  </a:lnTo>
+                  <a:lnTo>
+                    <a:pt x="129061" y="106712"/>
+                  </a:lnTo>
+                  <a:close/>
+                </a:path>
+                <a:path w="501650" h="234950">
+                  <a:moveTo>
+                    <a:pt x="306717" y="0"/>
+                  </a:moveTo>
+                  <a:lnTo>
+                    <a:pt x="271693" y="17795"/>
+                  </a:lnTo>
+                  <a:lnTo>
+                    <a:pt x="260149" y="84261"/>
+                  </a:lnTo>
+                  <a:lnTo>
+                    <a:pt x="260769" y="92760"/>
+                  </a:lnTo>
+                  <a:lnTo>
+                    <a:pt x="267896" y="99527"/>
+                  </a:lnTo>
+                  <a:lnTo>
+                    <a:pt x="276593" y="99898"/>
+                  </a:lnTo>
+                  <a:lnTo>
+                    <a:pt x="344032" y="100009"/>
+                  </a:lnTo>
+                  <a:lnTo>
+                    <a:pt x="363423" y="100536"/>
+                  </a:lnTo>
+                  <a:lnTo>
+                    <a:pt x="373387" y="104206"/>
+                  </a:lnTo>
+                  <a:lnTo>
+                    <a:pt x="377059" y="114167"/>
+                  </a:lnTo>
+                  <a:lnTo>
+                    <a:pt x="377544" y="132118"/>
+                  </a:lnTo>
+                  <a:lnTo>
+                    <a:pt x="377586" y="182129"/>
+                  </a:lnTo>
+                  <a:lnTo>
+                    <a:pt x="410679" y="164837"/>
+                  </a:lnTo>
+                  <a:lnTo>
+                    <a:pt x="442371" y="145368"/>
+                  </a:lnTo>
+                  <a:lnTo>
+                    <a:pt x="472565" y="123821"/>
+                  </a:lnTo>
+                  <a:lnTo>
+                    <a:pt x="501167" y="100291"/>
+                  </a:lnTo>
+                  <a:lnTo>
+                    <a:pt x="454441" y="72151"/>
+                  </a:lnTo>
+                  <a:lnTo>
+                    <a:pt x="406423" y="46021"/>
+                  </a:lnTo>
+                  <a:lnTo>
+                    <a:pt x="357165" y="21953"/>
+                  </a:lnTo>
+                  <a:lnTo>
+                    <a:pt x="306717" y="0"/>
+                  </a:lnTo>
+                  <a:close/>
+                </a:path>
+              </a:pathLst>
+            </a:custGeom>
+            <a:solidFill>
+              <a:srgbClr val="6F214D"/>
+            </a:solidFill>
+          </p:spPr>
+          <p:txBody>
+            <a:bodyPr wrap="square" lIns="0" tIns="0" rIns="0" bIns="0" rtlCol="0">
+              <a:prstTxWarp prst="textNoShape">
+                <a:avLst/>
+              </a:prstTxWarp>
+              <a:noAutofit/>
+            </a:bodyPr>
+            <a:lstStyle/>
+            <a:p>
+              <a:pPr algn="ctr"/>
+              <a:endParaRPr lang="en-AU" dirty="0"/>
+            </a:p>
+          </p:txBody>
+        </p:sp>
+      </p:grpSp>
+      <p:sp>
+        <p:nvSpPr>
+          <p:cNvPr id="17" name="pci_database_header">
+            <a:extLst>
+              <a:ext uri="{FF2B5EF4-FFF2-40B4-BE49-F238E27FC236}">
+                <a16:creationId xmlns:a16="http://schemas.microsoft.com/office/drawing/2014/main" id="{98FE341B-F63B-8D31-4B4B-7907138EC5B1}"/>
+              </a:ext>
+            </a:extLst>
+          </p:cNvPr>
+          <p:cNvSpPr txBox="1"/>
+          <p:nvPr userDrawn="1"/>
+        </p:nvSpPr>
         <p:spPr>
           <a:xfrm>
-            <a:off x="2344918" y="198351"/>
-            <a:ext cx="2160000" cy="1245000"/>
+            <a:off x="2246062" y="728786"/>
+            <a:ext cx="2360140" cy="769441"/>
           </a:xfrm>
           <a:prstGeom prst="rect">
             <a:avLst/>
           </a:prstGeom>
+          <a:noFill/>
         </p:spPr>
-      </p:pic>
+        <p:txBody>
+          <a:bodyPr wrap="square" rtlCol="0">
+            <a:spAutoFit/>
+          </a:bodyPr>
+          <a:lstStyle/>
+          <a:p>
+            <a:pPr algn="ctr"/>
+            <a:r>
+              <a:rPr lang="en-AU" sz="2200" b="1" dirty="0">
+                <a:latin typeface="Calibri" panose="020F0502020204030204" pitchFamily="34" charset="0"/>
+                <a:ea typeface="Calibri" panose="020F0502020204030204" pitchFamily="34" charset="0"/>
+                <a:cs typeface="Calibri" panose="020F0502020204030204" pitchFamily="34" charset="0"/>
+              </a:rPr>
+              <a:t>PCI Database of Western Australia</a:t>
+            </a:r>
+          </a:p>
+        </p:txBody>
+      </p:sp>
     </p:spTree>
     <p:extLst>
       <p:ext uri="{BB962C8B-B14F-4D97-AF65-F5344CB8AC3E}">
